--- a/multi_model_file_qa_routing_system_intro (1).pptx
+++ b/multi_model_file_qa_routing_system_intro (1).pptx
@@ -16,14 +16,15 @@
     <p:sldId id="261" r:id="rId9"/>
     <p:sldId id="262" r:id="rId10"/>
     <p:sldId id="263" r:id="rId11"/>
-    <p:sldId id="264" r:id="rId12"/>
-    <p:sldId id="265" r:id="rId13"/>
-    <p:sldId id="266" r:id="rId14"/>
-    <p:sldId id="267" r:id="rId15"/>
-    <p:sldId id="268" r:id="rId16"/>
-    <p:sldId id="269" r:id="rId17"/>
-    <p:sldId id="270" r:id="rId18"/>
-    <p:sldId id="271" r:id="rId19"/>
+    <p:sldId id="273" r:id="rId12"/>
+    <p:sldId id="264" r:id="rId13"/>
+    <p:sldId id="265" r:id="rId14"/>
+    <p:sldId id="266" r:id="rId15"/>
+    <p:sldId id="267" r:id="rId16"/>
+    <p:sldId id="268" r:id="rId17"/>
+    <p:sldId id="269" r:id="rId18"/>
+    <p:sldId id="270" r:id="rId19"/>
+    <p:sldId id="271" r:id="rId20"/>
   </p:sldIdLst>
   <p:sldSz cx="12191365" cy="6858000"/>
   <p:notesSz cx="6858000" cy="12191365"/>
@@ -1016,6 +1017,84 @@
 </file>
 
 <file path=ppt/notesSlides/notesSlide16.xml><?xml version="1.0" encoding="utf-8"?>
+<p:notes xmlns:a="http://schemas.openxmlformats.org/drawingml/2006/main" xmlns:r="http://schemas.openxmlformats.org/officeDocument/2006/relationships" xmlns:p="http://schemas.openxmlformats.org/presentationml/2006/main">
+  <p:cSld>
+    <p:spTree>
+      <p:nvGrpSpPr>
+        <p:cNvPr id="1" name=""/>
+        <p:cNvGrpSpPr/>
+        <p:nvPr/>
+      </p:nvGrpSpPr>
+      <p:grpSpPr>
+        <a:xfrm>
+          <a:off x="0" y="0"/>
+          <a:ext cx="0" cy="0"/>
+          <a:chOff x="0" y="0"/>
+          <a:chExt cx="0" cy="0"/>
+        </a:xfrm>
+      </p:grpSpPr>
+      <p:sp>
+        <p:nvSpPr>
+          <p:cNvPr id="2" name="Slide Image Placeholder 1"/>
+          <p:cNvSpPr>
+            <a:spLocks noGrp="1" noRot="1" noChangeAspect="1"/>
+          </p:cNvSpPr>
+          <p:nvPr>
+            <p:ph type="sldImg"/>
+          </p:nvPr>
+        </p:nvSpPr>
+        <p:spPr/>
+      </p:sp>
+      <p:sp>
+        <p:nvSpPr>
+          <p:cNvPr id="3" name="Notes Placeholder 2"/>
+          <p:cNvSpPr>
+            <a:spLocks noGrp="1"/>
+          </p:cNvSpPr>
+          <p:nvPr>
+            <p:ph type="body" idx="1"/>
+          </p:nvPr>
+        </p:nvSpPr>
+        <p:spPr/>
+        <p:txBody>
+          <a:bodyPr/>
+          <a:lstStyle/>
+          <a:p>
+            <a:endParaRPr lang="en-US" dirty="0"/>
+          </a:p>
+        </p:txBody>
+      </p:sp>
+      <p:sp>
+        <p:nvSpPr>
+          <p:cNvPr id="4" name="Slide Number Placeholder 3"/>
+          <p:cNvSpPr>
+            <a:spLocks noGrp="1"/>
+          </p:cNvSpPr>
+          <p:nvPr>
+            <p:ph type="sldNum" sz="quarter" idx="10"/>
+          </p:nvPr>
+        </p:nvSpPr>
+        <p:spPr/>
+        <p:txBody>
+          <a:bodyPr/>
+          <a:lstStyle/>
+          <a:p>
+            <a:fld id="{F7021451-1387-4CA6-816F-3879F97B5CBC}" type="slidenum">
+              <a:rPr lang="en-US"/>
+            </a:fld>
+            <a:endParaRPr lang="en-US"/>
+          </a:p>
+        </p:txBody>
+      </p:sp>
+    </p:spTree>
+  </p:cSld>
+  <p:clrMapOvr>
+    <a:masterClrMapping/>
+  </p:clrMapOvr>
+</p:notes>
+</file>
+
+<file path=ppt/notesSlides/notesSlide17.xml><?xml version="1.0" encoding="utf-8"?>
 <p:notes xmlns:a="http://schemas.openxmlformats.org/drawingml/2006/main" xmlns:r="http://schemas.openxmlformats.org/officeDocument/2006/relationships" xmlns:p="http://schemas.openxmlformats.org/presentationml/2006/main">
   <p:cSld>
     <p:spTree>
@@ -2634,7 +2713,7 @@
                 <a:ea typeface="Noto Sans CJK SC" pitchFamily="34" charset="-122"/>
                 <a:cs typeface="Noto Sans CJK SC" pitchFamily="34" charset="-120"/>
               </a:rPr>
-              <a:t>单问题测试页：一次问答完整观察路由、回答、引用与耗时</a:t>
+              <a:t>子模型管理：知识文本与回答约束同步维护</a:t>
             </a:r>
             <a:endParaRPr lang="en-US" sz="2500" dirty="0"/>
           </a:p>
@@ -2674,7 +2753,7 @@
                 <a:ea typeface="Noto Sans CJK SC" pitchFamily="34" charset="-122"/>
                 <a:cs typeface="Noto Sans CJK SC" pitchFamily="34" charset="-120"/>
               </a:rPr>
-              <a:t>页面用于快速验证一个问题是否命中正确 Agent，以及回答是否有原文支撑</a:t>
+              <a:t>子 Agent 页面可以编辑知识文件，同时维护该 Agent 的回答规则与引用规则</a:t>
             </a:r>
             <a:endParaRPr lang="en-US" sz="950" dirty="0"/>
           </a:p>
@@ -2720,7 +2799,7 @@
       </p:sp>
       <p:pic>
         <p:nvPicPr>
-          <p:cNvPr id="6" name="Image 0" descr="/mnt/data/ppt_assets/single_full.jpg"/>
+          <p:cNvPr id="6" name="Image 0" descr="/mnt/data/ppt_assets/agent_knowledge.jpg"/>
           <p:cNvPicPr>
             <a:picLocks noChangeAspect="1"/>
           </p:cNvPicPr>
@@ -2734,24 +2813,88 @@
         </p:blipFill>
         <p:spPr>
           <a:xfrm>
-            <a:off x="180340" y="1600200"/>
-            <a:ext cx="7714615" cy="3676015"/>
+            <a:off x="1176276" y="1143000"/>
+            <a:ext cx="3773929" cy="4251960"/>
           </a:xfrm>
           <a:prstGeom prst="rect">
             <a:avLst/>
           </a:prstGeom>
         </p:spPr>
       </p:pic>
-      <p:sp>
-        <p:nvSpPr>
-          <p:cNvPr id="7" name="Text 4"/>
-          <p:cNvSpPr/>
-          <p:nvPr/>
-        </p:nvSpPr>
-        <p:spPr>
-          <a:xfrm>
-            <a:off x="8229600" y="1143000"/>
-            <a:ext cx="1645920" cy="292608"/>
+      <p:pic>
+        <p:nvPicPr>
+          <p:cNvPr id="7" name="Image 1" descr="/mnt/data/ppt_assets/agent_prompt.jpg"/>
+          <p:cNvPicPr>
+            <a:picLocks noChangeAspect="1"/>
+          </p:cNvPicPr>
+          <p:nvPr/>
+        </p:nvPicPr>
+        <p:blipFill>
+          <a:blip r:embed="rId2"/>
+          <a:stretch>
+            <a:fillRect/>
+          </a:stretch>
+        </p:blipFill>
+        <p:spPr>
+          <a:xfrm>
+            <a:off x="6513369" y="1143000"/>
+            <a:ext cx="3889663" cy="4251960"/>
+          </a:xfrm>
+          <a:prstGeom prst="rect">
+            <a:avLst/>
+          </a:prstGeom>
+        </p:spPr>
+      </p:pic>
+      <p:sp>
+        <p:nvSpPr>
+          <p:cNvPr id="8" name="Text 4"/>
+          <p:cNvSpPr/>
+          <p:nvPr/>
+        </p:nvSpPr>
+        <p:spPr>
+          <a:xfrm>
+            <a:off x="640080" y="5532120"/>
+            <a:ext cx="10424160" cy="256032"/>
+          </a:xfrm>
+          <a:prstGeom prst="rect">
+            <a:avLst/>
+          </a:prstGeom>
+          <a:noFill/>
+        </p:spPr>
+        <p:txBody>
+          <a:bodyPr wrap="square" lIns="0" tIns="0" rIns="0" bIns="0" rtlCol="0" anchor="ctr">
+            <a:normAutofit/>
+          </a:bodyPr>
+          <a:lstStyle/>
+          <a:p>
+            <a:pPr marL="0" indent="0" algn="ctr">
+              <a:buNone/>
+            </a:pPr>
+            <a:r>
+              <a:rPr lang="en-US" sz="850" dirty="0">
+                <a:solidFill>
+                  <a:srgbClr val="AAB6D3"/>
+                </a:solidFill>
+                <a:latin typeface="Noto Sans CJK SC" pitchFamily="34" charset="0"/>
+                <a:ea typeface="Noto Sans CJK SC" pitchFamily="34" charset="-122"/>
+                <a:cs typeface="Noto Sans CJK SC" pitchFamily="34" charset="-120"/>
+              </a:rPr>
+              <a:t>左：knowledge.md；右：子 Agent 提示词</a:t>
+            </a:r>
+            <a:endParaRPr lang="en-US" sz="850" dirty="0"/>
+          </a:p>
+        </p:txBody>
+      </p:sp>
+      <p:sp>
+        <p:nvSpPr>
+          <p:cNvPr id="9" name="Text 5"/>
+          <p:cNvSpPr/>
+          <p:nvPr/>
+        </p:nvSpPr>
+        <p:spPr>
+          <a:xfrm>
+            <a:off x="822960" y="5870448"/>
+            <a:ext cx="10332720" cy="365760"/>
           </a:xfrm>
           <a:prstGeom prst="rect">
             <a:avLst/>
@@ -2768,366 +2911,23 @@
               <a:buNone/>
             </a:pPr>
             <a:r>
-              <a:rPr lang="en-US" sz="1600" b="1" dirty="0">
-                <a:solidFill>
-                  <a:srgbClr val="6EE7F9"/>
-                </a:solidFill>
-                <a:latin typeface="Noto Sans CJK SC" pitchFamily="34" charset="0"/>
-                <a:ea typeface="Noto Sans CJK SC" pitchFamily="34" charset="-122"/>
-                <a:cs typeface="Noto Sans CJK SC" pitchFamily="34" charset="-120"/>
-              </a:rPr>
-              <a:t>观察点</a:t>
-            </a:r>
-            <a:endParaRPr lang="en-US" sz="1600" b="1" dirty="0">
-              <a:solidFill>
-                <a:srgbClr val="6EE7F9"/>
-              </a:solidFill>
-              <a:latin typeface="Noto Sans CJK SC" pitchFamily="34" charset="0"/>
-              <a:ea typeface="Noto Sans CJK SC" pitchFamily="34" charset="-122"/>
-              <a:cs typeface="Noto Sans CJK SC" pitchFamily="34" charset="-120"/>
-            </a:endParaRPr>
-          </a:p>
-        </p:txBody>
-      </p:sp>
-      <p:sp>
-        <p:nvSpPr>
-          <p:cNvPr id="8" name="Text 5"/>
-          <p:cNvSpPr/>
-          <p:nvPr/>
-        </p:nvSpPr>
-        <p:spPr>
-          <a:xfrm>
-            <a:off x="8229600" y="1600200"/>
-            <a:ext cx="3154680" cy="2834640"/>
-          </a:xfrm>
-          <a:prstGeom prst="rect">
-            <a:avLst/>
-          </a:prstGeom>
-          <a:noFill/>
-        </p:spPr>
-        <p:txBody>
-          <a:bodyPr wrap="square" lIns="635" tIns="635" rIns="635" bIns="635" rtlCol="0" anchor="t">
-            <a:normAutofit/>
-          </a:bodyPr>
-          <a:lstStyle/>
-          <a:p>
-            <a:pPr marL="0" indent="0">
-              <a:buNone/>
-            </a:pPr>
-            <a:r>
-              <a:rPr lang="en-US" sz="1400" dirty="0">
-                <a:solidFill>
-                  <a:srgbClr val="F5F8FF"/>
-                </a:solidFill>
-                <a:latin typeface="Noto Sans CJK SC" pitchFamily="34" charset="0"/>
-                <a:ea typeface="Noto Sans CJK SC" pitchFamily="34" charset="-122"/>
-                <a:cs typeface="Noto Sans CJK SC" pitchFamily="34" charset="-120"/>
-              </a:rPr>
-              <a:t>• 输入问题：例如“怎么调光圈”。</a:t>
-            </a:r>
-            <a:endParaRPr lang="en-US" sz="1400" dirty="0"/>
-          </a:p>
-          <a:p>
-            <a:pPr marL="0" indent="0">
-              <a:buNone/>
-            </a:pPr>
-            <a:r>
-              <a:rPr lang="en-US" sz="1400" dirty="0">
-                <a:solidFill>
-                  <a:srgbClr val="F5F8FF"/>
-                </a:solidFill>
-                <a:latin typeface="Noto Sans CJK SC" pitchFamily="34" charset="0"/>
-                <a:ea typeface="Noto Sans CJK SC" pitchFamily="34" charset="-122"/>
-                <a:cs typeface="Noto Sans CJK SC" pitchFamily="34" charset="-120"/>
-              </a:rPr>
-              <a:t>• 选择路由：可指定总 Agent，也可观察自动路由结果。</a:t>
-            </a:r>
-            <a:endParaRPr lang="en-US" sz="1400" dirty="0"/>
-          </a:p>
-          <a:p>
-            <a:pPr marL="0" indent="0">
-              <a:buNone/>
-            </a:pPr>
-            <a:r>
-              <a:rPr lang="en-US" sz="1400" dirty="0">
-                <a:solidFill>
-                  <a:srgbClr val="F5F8FF"/>
-                </a:solidFill>
-                <a:latin typeface="Noto Sans CJK SC" pitchFamily="34" charset="0"/>
-                <a:ea typeface="Noto Sans CJK SC" pitchFamily="34" charset="-122"/>
-                <a:cs typeface="Noto Sans CJK SC" pitchFamily="34" charset="-120"/>
-              </a:rPr>
-              <a:t>• 回答区：展示最终答案，支持插图辅助说明。</a:t>
-            </a:r>
-            <a:endParaRPr lang="en-US" sz="1400" dirty="0"/>
-          </a:p>
-          <a:p>
-            <a:pPr marL="0" indent="0">
-              <a:buNone/>
-            </a:pPr>
-            <a:r>
-              <a:rPr lang="en-US" sz="1400" dirty="0">
-                <a:solidFill>
-                  <a:srgbClr val="F5F8FF"/>
-                </a:solidFill>
-                <a:latin typeface="Noto Sans CJK SC" pitchFamily="34" charset="0"/>
-                <a:ea typeface="Noto Sans CJK SC" pitchFamily="34" charset="-122"/>
-                <a:cs typeface="Noto Sans CJK SC" pitchFamily="34" charset="-120"/>
-              </a:rPr>
-              <a:t>• 资源区：列出引用行号与相关图片。</a:t>
-            </a:r>
-            <a:endParaRPr lang="en-US" sz="1400" dirty="0"/>
-          </a:p>
-          <a:p>
-            <a:pPr marL="0" indent="0">
-              <a:buNone/>
-            </a:pPr>
-            <a:r>
-              <a:rPr lang="en-US" sz="1400" dirty="0">
-                <a:solidFill>
-                  <a:srgbClr val="F5F8FF"/>
-                </a:solidFill>
-                <a:latin typeface="Noto Sans CJK SC" pitchFamily="34" charset="0"/>
-                <a:ea typeface="Noto Sans CJK SC" pitchFamily="34" charset="-122"/>
-                <a:cs typeface="Noto Sans CJK SC" pitchFamily="34" charset="-120"/>
-              </a:rPr>
-              <a:t>• 右侧日志：显示 route、source_pdf、页码范围与耗时。</a:t>
-            </a:r>
-            <a:endParaRPr lang="en-US" sz="1400" dirty="0">
-              <a:solidFill>
-                <a:srgbClr val="F5F8FF"/>
-              </a:solidFill>
-              <a:latin typeface="Noto Sans CJK SC" pitchFamily="34" charset="0"/>
-              <a:ea typeface="Noto Sans CJK SC" pitchFamily="34" charset="-122"/>
-              <a:cs typeface="Noto Sans CJK SC" pitchFamily="34" charset="-120"/>
-            </a:endParaRPr>
-          </a:p>
-        </p:txBody>
-      </p:sp>
-      <p:sp>
-        <p:nvSpPr>
-          <p:cNvPr id="9" name="Text 6"/>
-          <p:cNvSpPr/>
-          <p:nvPr/>
-        </p:nvSpPr>
-        <p:spPr>
-          <a:xfrm>
-            <a:off x="8275320" y="4800600"/>
-            <a:ext cx="1051560" cy="310896"/>
-          </a:xfrm>
-          <a:prstGeom prst="rect">
-            <a:avLst/>
-          </a:prstGeom>
-          <a:solidFill>
-            <a:srgbClr val="A78BFA">
-              <a:alpha val="85000"/>
-            </a:srgbClr>
-          </a:solidFill>
-          <a:ln>
-            <a:solidFill>
-              <a:srgbClr val="A78BFA">
-                <a:alpha val="70000"/>
-              </a:srgbClr>
-            </a:solidFill>
-          </a:ln>
-        </p:spPr>
-        <p:txBody>
-          <a:bodyPr wrap="square" lIns="381" tIns="381" rIns="381" bIns="381" rtlCol="0" anchor="ctr">
-            <a:normAutofit/>
-          </a:bodyPr>
-          <a:lstStyle/>
-          <a:p>
-            <a:pPr marL="0" indent="0" algn="ctr">
-              <a:buNone/>
-            </a:pPr>
-            <a:r>
-              <a:rPr lang="en-US" sz="1050" b="1" dirty="0">
-                <a:solidFill>
-                  <a:srgbClr val="F5F8FF"/>
-                </a:solidFill>
-                <a:latin typeface="Noto Sans CJK SC" pitchFamily="34" charset="0"/>
-                <a:ea typeface="Noto Sans CJK SC" pitchFamily="34" charset="-122"/>
-                <a:cs typeface="Noto Sans CJK SC" pitchFamily="34" charset="-120"/>
-              </a:rPr>
-              <a:t>问答调试</a:t>
-            </a:r>
-            <a:endParaRPr lang="en-US" sz="1050" b="1" dirty="0">
-              <a:solidFill>
-                <a:srgbClr val="F5F8FF"/>
-              </a:solidFill>
-              <a:latin typeface="Noto Sans CJK SC" pitchFamily="34" charset="0"/>
-              <a:ea typeface="Noto Sans CJK SC" pitchFamily="34" charset="-122"/>
-              <a:cs typeface="Noto Sans CJK SC" pitchFamily="34" charset="-120"/>
-            </a:endParaRPr>
-          </a:p>
-        </p:txBody>
-      </p:sp>
-      <p:sp>
-        <p:nvSpPr>
-          <p:cNvPr id="10" name="Text 7"/>
-          <p:cNvSpPr/>
-          <p:nvPr/>
-        </p:nvSpPr>
-        <p:spPr>
-          <a:xfrm>
-            <a:off x="9473184" y="4800600"/>
-            <a:ext cx="1051560" cy="310896"/>
-          </a:xfrm>
-          <a:prstGeom prst="rect">
-            <a:avLst/>
-          </a:prstGeom>
-          <a:solidFill>
-            <a:srgbClr val="6EE7F9">
-              <a:alpha val="85000"/>
-            </a:srgbClr>
-          </a:solidFill>
-          <a:ln>
-            <a:solidFill>
-              <a:srgbClr val="6EE7F9">
-                <a:alpha val="70000"/>
-              </a:srgbClr>
-            </a:solidFill>
-          </a:ln>
-        </p:spPr>
-        <p:txBody>
-          <a:bodyPr wrap="square" lIns="381" tIns="381" rIns="381" bIns="381" rtlCol="0" anchor="ctr">
-            <a:normAutofit/>
-          </a:bodyPr>
-          <a:lstStyle/>
-          <a:p>
-            <a:pPr marL="0" indent="0" algn="ctr">
-              <a:buNone/>
-            </a:pPr>
-            <a:r>
-              <a:rPr lang="en-US" sz="1050" b="1" dirty="0">
-                <a:solidFill>
-                  <a:srgbClr val="F5F8FF"/>
-                </a:solidFill>
-                <a:latin typeface="Noto Sans CJK SC" pitchFamily="34" charset="0"/>
-                <a:ea typeface="Noto Sans CJK SC" pitchFamily="34" charset="-122"/>
-                <a:cs typeface="Noto Sans CJK SC" pitchFamily="34" charset="-120"/>
-              </a:rPr>
-              <a:t>路由追踪</a:t>
-            </a:r>
-            <a:endParaRPr lang="en-US" sz="1050" b="1" dirty="0">
-              <a:solidFill>
-                <a:srgbClr val="F5F8FF"/>
-              </a:solidFill>
-              <a:latin typeface="Noto Sans CJK SC" pitchFamily="34" charset="0"/>
-              <a:ea typeface="Noto Sans CJK SC" pitchFamily="34" charset="-122"/>
-              <a:cs typeface="Noto Sans CJK SC" pitchFamily="34" charset="-120"/>
-            </a:endParaRPr>
-          </a:p>
-        </p:txBody>
-      </p:sp>
-      <p:sp>
-        <p:nvSpPr>
-          <p:cNvPr id="11" name="Text 8"/>
-          <p:cNvSpPr/>
-          <p:nvPr/>
-        </p:nvSpPr>
-        <p:spPr>
-          <a:xfrm>
-            <a:off x="10671048" y="4800600"/>
-            <a:ext cx="1051560" cy="310896"/>
-          </a:xfrm>
-          <a:prstGeom prst="rect">
-            <a:avLst/>
-          </a:prstGeom>
-          <a:solidFill>
-            <a:srgbClr val="3DDC97">
-              <a:alpha val="85000"/>
-            </a:srgbClr>
-          </a:solidFill>
-          <a:ln>
-            <a:solidFill>
-              <a:srgbClr val="3DDC97">
-                <a:alpha val="70000"/>
-              </a:srgbClr>
-            </a:solidFill>
-          </a:ln>
-        </p:spPr>
-        <p:txBody>
-          <a:bodyPr wrap="square" lIns="381" tIns="381" rIns="381" bIns="381" rtlCol="0" anchor="ctr">
-            <a:normAutofit/>
-          </a:bodyPr>
-          <a:lstStyle/>
-          <a:p>
-            <a:pPr marL="0" indent="0" algn="ctr">
-              <a:buNone/>
-            </a:pPr>
-            <a:r>
-              <a:rPr lang="en-US" sz="1050" b="1" dirty="0">
-                <a:solidFill>
-                  <a:srgbClr val="F5F8FF"/>
-                </a:solidFill>
-                <a:latin typeface="Noto Sans CJK SC" pitchFamily="34" charset="0"/>
-                <a:ea typeface="Noto Sans CJK SC" pitchFamily="34" charset="-122"/>
-                <a:cs typeface="Noto Sans CJK SC" pitchFamily="34" charset="-120"/>
-              </a:rPr>
-              <a:t>引用验证</a:t>
-            </a:r>
-            <a:endParaRPr lang="en-US" sz="1050" b="1" dirty="0">
-              <a:solidFill>
-                <a:srgbClr val="F5F8FF"/>
-              </a:solidFill>
-              <a:latin typeface="Noto Sans CJK SC" pitchFamily="34" charset="0"/>
-              <a:ea typeface="Noto Sans CJK SC" pitchFamily="34" charset="-122"/>
-              <a:cs typeface="Noto Sans CJK SC" pitchFamily="34" charset="-120"/>
-            </a:endParaRPr>
-          </a:p>
-        </p:txBody>
-      </p:sp>
-      <p:sp>
-        <p:nvSpPr>
-          <p:cNvPr id="12" name="Text 9"/>
-          <p:cNvSpPr/>
-          <p:nvPr/>
-        </p:nvSpPr>
-        <p:spPr>
-          <a:xfrm>
-            <a:off x="530225" y="5650865"/>
-            <a:ext cx="7223760" cy="256032"/>
-          </a:xfrm>
-          <a:prstGeom prst="rect">
-            <a:avLst/>
-          </a:prstGeom>
-          <a:noFill/>
-        </p:spPr>
-        <p:txBody>
-          <a:bodyPr wrap="square" lIns="0" tIns="0" rIns="0" bIns="0" rtlCol="0" anchor="ctr">
-            <a:normAutofit/>
-          </a:bodyPr>
-          <a:lstStyle/>
-          <a:p>
-            <a:pPr marL="0" indent="0" algn="ctr">
-              <a:buNone/>
-            </a:pPr>
-            <a:r>
-              <a:rPr lang="en-US" sz="1200" dirty="0">
-                <a:solidFill>
-                  <a:srgbClr val="AAB6D3"/>
-                </a:solidFill>
-                <a:latin typeface="Noto Sans CJK SC" pitchFamily="34" charset="0"/>
-                <a:ea typeface="Noto Sans CJK SC" pitchFamily="34" charset="-122"/>
-                <a:cs typeface="Noto Sans CJK SC" pitchFamily="34" charset="-120"/>
-              </a:rPr>
-              <a:t>单问题测试页：模型回答与右侧文件/日志面板</a:t>
-            </a:r>
-            <a:endParaRPr lang="en-US" sz="1200" dirty="0">
-              <a:solidFill>
-                <a:srgbClr val="AAB6D3"/>
-              </a:solidFill>
-              <a:latin typeface="Noto Sans CJK SC" pitchFamily="34" charset="0"/>
-              <a:ea typeface="Noto Sans CJK SC" pitchFamily="34" charset="-122"/>
-              <a:cs typeface="Noto Sans CJK SC" pitchFamily="34" charset="-120"/>
-            </a:endParaRPr>
-          </a:p>
-        </p:txBody>
-      </p:sp>
-      <p:sp>
-        <p:nvSpPr>
-          <p:cNvPr id="13" name="Text 10"/>
+              <a:rPr lang="en-US" sz="1080" dirty="0">
+                <a:solidFill>
+                  <a:srgbClr val="F5F8FF"/>
+                </a:solidFill>
+                <a:latin typeface="Noto Sans CJK SC" pitchFamily="34" charset="0"/>
+                <a:ea typeface="Noto Sans CJK SC" pitchFamily="34" charset="-122"/>
+                <a:cs typeface="Noto Sans CJK SC" pitchFamily="34" charset="-120"/>
+              </a:rPr>
+              <a:t>实现意义：通过“知识内容 + 回答规则”绑定到同一个子 Agent，既保证模型有依据，又限制其必须按原文、行号和图片引用回答，避免凭空扩展。</a:t>
+            </a:r>
+            <a:endParaRPr lang="en-US" sz="1080" dirty="0"/>
+          </a:p>
+        </p:txBody>
+      </p:sp>
+      <p:sp>
+        <p:nvSpPr>
+          <p:cNvPr id="10" name="Text 6"/>
           <p:cNvSpPr/>
           <p:nvPr/>
         </p:nvSpPr>
@@ -3157,7 +2957,7 @@
                 <a:ea typeface="Noto Sans CJK SC" pitchFamily="34" charset="-122"/>
                 <a:cs typeface="Noto Sans CJK SC" pitchFamily="34" charset="-120"/>
               </a:rPr>
-              <a:t>10</a:t>
+              <a:t>09</a:t>
             </a:r>
             <a:endParaRPr lang="en-US" sz="800" dirty="0"/>
           </a:p>
@@ -3257,7 +3057,7 @@
                 <a:ea typeface="Noto Sans CJK SC" pitchFamily="34" charset="-122"/>
                 <a:cs typeface="Noto Sans CJK SC" pitchFamily="34" charset="-120"/>
               </a:rPr>
-              <a:t>回答展示：从“说得像”走向“可核验”</a:t>
+              <a:t>单问题测试页：一次问答完整观察路由、回答、引用与耗时</a:t>
             </a:r>
             <a:endParaRPr lang="en-US" sz="2500" dirty="0"/>
           </a:p>
@@ -3297,7 +3097,7 @@
                 <a:ea typeface="Noto Sans CJK SC" pitchFamily="34" charset="-122"/>
                 <a:cs typeface="Noto Sans CJK SC" pitchFamily="34" charset="-120"/>
               </a:rPr>
-              <a:t>项目把回答、引用行、相关图片和原始文件信息放在同一界面，便于检查来源</a:t>
+              <a:t>页面用于快速验证一个问题是否命中正确 Agent，以及回答是否有原文支撑</a:t>
             </a:r>
             <a:endParaRPr lang="en-US" sz="950" dirty="0"/>
           </a:p>
@@ -3343,7 +3143,7 @@
       </p:sp>
       <p:pic>
         <p:nvPicPr>
-          <p:cNvPr id="6" name="Image 0" descr="/mnt/data/ppt_assets/single_answer.jpg"/>
+          <p:cNvPr id="6" name="Image 0" descr="/mnt/data/ppt_assets/single_full.jpg"/>
           <p:cNvPicPr>
             <a:picLocks noChangeAspect="1"/>
           </p:cNvPicPr>
@@ -3357,72 +3157,360 @@
         </p:blipFill>
         <p:spPr>
           <a:xfrm>
-            <a:off x="594360" y="1382707"/>
-            <a:ext cx="5440680" cy="3772547"/>
+            <a:off x="180340" y="1600200"/>
+            <a:ext cx="7714615" cy="3676015"/>
           </a:xfrm>
           <a:prstGeom prst="rect">
             <a:avLst/>
           </a:prstGeom>
         </p:spPr>
       </p:pic>
-      <p:pic>
-        <p:nvPicPr>
-          <p:cNvPr id="7" name="Image 1" descr="/mnt/data/ppt_assets/single_resources.jpg"/>
-          <p:cNvPicPr>
-            <a:picLocks noChangeAspect="1"/>
-          </p:cNvPicPr>
-          <p:nvPr/>
-        </p:nvPicPr>
-        <p:blipFill>
-          <a:blip r:embed="rId2"/>
-          <a:stretch>
-            <a:fillRect/>
-          </a:stretch>
-        </p:blipFill>
-        <p:spPr>
-          <a:xfrm>
-            <a:off x="6540773" y="1325880"/>
-            <a:ext cx="1868894" cy="3886200"/>
-          </a:xfrm>
-          <a:prstGeom prst="rect">
-            <a:avLst/>
-          </a:prstGeom>
-        </p:spPr>
-      </p:pic>
-      <p:pic>
-        <p:nvPicPr>
-          <p:cNvPr id="8" name="Image 2" descr="/mnt/data/ppt_assets/single_sidebar.jpg"/>
-          <p:cNvPicPr>
-            <a:picLocks noChangeAspect="1"/>
-          </p:cNvPicPr>
-          <p:nvPr/>
-        </p:nvPicPr>
-        <p:blipFill>
-          <a:blip r:embed="rId3"/>
-          <a:stretch>
-            <a:fillRect/>
-          </a:stretch>
-        </p:blipFill>
-        <p:spPr>
-          <a:xfrm>
-            <a:off x="9245541" y="1325880"/>
-            <a:ext cx="1717158" cy="3886200"/>
-          </a:xfrm>
-          <a:prstGeom prst="rect">
-            <a:avLst/>
-          </a:prstGeom>
-        </p:spPr>
-      </p:pic>
-      <p:sp>
-        <p:nvSpPr>
-          <p:cNvPr id="9" name="Text 4"/>
-          <p:cNvSpPr/>
-          <p:nvPr/>
-        </p:nvSpPr>
-        <p:spPr>
-          <a:xfrm>
-            <a:off x="685800" y="5340096"/>
-            <a:ext cx="10424160" cy="256032"/>
+      <p:sp>
+        <p:nvSpPr>
+          <p:cNvPr id="7" name="Text 4"/>
+          <p:cNvSpPr/>
+          <p:nvPr/>
+        </p:nvSpPr>
+        <p:spPr>
+          <a:xfrm>
+            <a:off x="8229600" y="1143000"/>
+            <a:ext cx="1645920" cy="292608"/>
+          </a:xfrm>
+          <a:prstGeom prst="rect">
+            <a:avLst/>
+          </a:prstGeom>
+          <a:noFill/>
+        </p:spPr>
+        <p:txBody>
+          <a:bodyPr wrap="square" lIns="635" tIns="635" rIns="635" bIns="635" rtlCol="0" anchor="t">
+            <a:normAutofit/>
+          </a:bodyPr>
+          <a:lstStyle/>
+          <a:p>
+            <a:pPr marL="0" indent="0">
+              <a:buNone/>
+            </a:pPr>
+            <a:r>
+              <a:rPr lang="en-US" sz="1600" b="1" dirty="0">
+                <a:solidFill>
+                  <a:srgbClr val="6EE7F9"/>
+                </a:solidFill>
+                <a:latin typeface="Noto Sans CJK SC" pitchFamily="34" charset="0"/>
+                <a:ea typeface="Noto Sans CJK SC" pitchFamily="34" charset="-122"/>
+                <a:cs typeface="Noto Sans CJK SC" pitchFamily="34" charset="-120"/>
+              </a:rPr>
+              <a:t>观察点</a:t>
+            </a:r>
+            <a:endParaRPr lang="en-US" sz="1600" b="1" dirty="0">
+              <a:solidFill>
+                <a:srgbClr val="6EE7F9"/>
+              </a:solidFill>
+              <a:latin typeface="Noto Sans CJK SC" pitchFamily="34" charset="0"/>
+              <a:ea typeface="Noto Sans CJK SC" pitchFamily="34" charset="-122"/>
+              <a:cs typeface="Noto Sans CJK SC" pitchFamily="34" charset="-120"/>
+            </a:endParaRPr>
+          </a:p>
+        </p:txBody>
+      </p:sp>
+      <p:sp>
+        <p:nvSpPr>
+          <p:cNvPr id="8" name="Text 5"/>
+          <p:cNvSpPr/>
+          <p:nvPr/>
+        </p:nvSpPr>
+        <p:spPr>
+          <a:xfrm>
+            <a:off x="8229600" y="1600200"/>
+            <a:ext cx="3154680" cy="2834640"/>
+          </a:xfrm>
+          <a:prstGeom prst="rect">
+            <a:avLst/>
+          </a:prstGeom>
+          <a:noFill/>
+        </p:spPr>
+        <p:txBody>
+          <a:bodyPr wrap="square" lIns="635" tIns="635" rIns="635" bIns="635" rtlCol="0" anchor="t">
+            <a:normAutofit/>
+          </a:bodyPr>
+          <a:lstStyle/>
+          <a:p>
+            <a:pPr marL="0" indent="0">
+              <a:buNone/>
+            </a:pPr>
+            <a:r>
+              <a:rPr lang="en-US" sz="1400" dirty="0">
+                <a:solidFill>
+                  <a:srgbClr val="F5F8FF"/>
+                </a:solidFill>
+                <a:latin typeface="Noto Sans CJK SC" pitchFamily="34" charset="0"/>
+                <a:ea typeface="Noto Sans CJK SC" pitchFamily="34" charset="-122"/>
+                <a:cs typeface="Noto Sans CJK SC" pitchFamily="34" charset="-120"/>
+              </a:rPr>
+              <a:t>• 输入问题：例如“怎么调光圈”。</a:t>
+            </a:r>
+            <a:endParaRPr lang="en-US" sz="1400" dirty="0"/>
+          </a:p>
+          <a:p>
+            <a:pPr marL="0" indent="0">
+              <a:buNone/>
+            </a:pPr>
+            <a:r>
+              <a:rPr lang="en-US" sz="1400" dirty="0">
+                <a:solidFill>
+                  <a:srgbClr val="F5F8FF"/>
+                </a:solidFill>
+                <a:latin typeface="Noto Sans CJK SC" pitchFamily="34" charset="0"/>
+                <a:ea typeface="Noto Sans CJK SC" pitchFamily="34" charset="-122"/>
+                <a:cs typeface="Noto Sans CJK SC" pitchFamily="34" charset="-120"/>
+              </a:rPr>
+              <a:t>• 选择路由：可指定总 Agent，也可观察自动路由结果。</a:t>
+            </a:r>
+            <a:endParaRPr lang="en-US" sz="1400" dirty="0"/>
+          </a:p>
+          <a:p>
+            <a:pPr marL="0" indent="0">
+              <a:buNone/>
+            </a:pPr>
+            <a:r>
+              <a:rPr lang="en-US" sz="1400" dirty="0">
+                <a:solidFill>
+                  <a:srgbClr val="F5F8FF"/>
+                </a:solidFill>
+                <a:latin typeface="Noto Sans CJK SC" pitchFamily="34" charset="0"/>
+                <a:ea typeface="Noto Sans CJK SC" pitchFamily="34" charset="-122"/>
+                <a:cs typeface="Noto Sans CJK SC" pitchFamily="34" charset="-120"/>
+              </a:rPr>
+              <a:t>• 回答区：展示最终答案，支持插图辅助说明。</a:t>
+            </a:r>
+            <a:endParaRPr lang="en-US" sz="1400" dirty="0"/>
+          </a:p>
+          <a:p>
+            <a:pPr marL="0" indent="0">
+              <a:buNone/>
+            </a:pPr>
+            <a:r>
+              <a:rPr lang="en-US" sz="1400" dirty="0">
+                <a:solidFill>
+                  <a:srgbClr val="F5F8FF"/>
+                </a:solidFill>
+                <a:latin typeface="Noto Sans CJK SC" pitchFamily="34" charset="0"/>
+                <a:ea typeface="Noto Sans CJK SC" pitchFamily="34" charset="-122"/>
+                <a:cs typeface="Noto Sans CJK SC" pitchFamily="34" charset="-120"/>
+              </a:rPr>
+              <a:t>• 资源区：列出引用行号与相关图片。</a:t>
+            </a:r>
+            <a:endParaRPr lang="en-US" sz="1400" dirty="0"/>
+          </a:p>
+          <a:p>
+            <a:pPr marL="0" indent="0">
+              <a:buNone/>
+            </a:pPr>
+            <a:r>
+              <a:rPr lang="en-US" sz="1400" dirty="0">
+                <a:solidFill>
+                  <a:srgbClr val="F5F8FF"/>
+                </a:solidFill>
+                <a:latin typeface="Noto Sans CJK SC" pitchFamily="34" charset="0"/>
+                <a:ea typeface="Noto Sans CJK SC" pitchFamily="34" charset="-122"/>
+                <a:cs typeface="Noto Sans CJK SC" pitchFamily="34" charset="-120"/>
+              </a:rPr>
+              <a:t>• 右侧日志：显示 route、source_pdf、页码范围与耗时。</a:t>
+            </a:r>
+            <a:endParaRPr lang="en-US" sz="1400" dirty="0">
+              <a:solidFill>
+                <a:srgbClr val="F5F8FF"/>
+              </a:solidFill>
+              <a:latin typeface="Noto Sans CJK SC" pitchFamily="34" charset="0"/>
+              <a:ea typeface="Noto Sans CJK SC" pitchFamily="34" charset="-122"/>
+              <a:cs typeface="Noto Sans CJK SC" pitchFamily="34" charset="-120"/>
+            </a:endParaRPr>
+          </a:p>
+        </p:txBody>
+      </p:sp>
+      <p:sp>
+        <p:nvSpPr>
+          <p:cNvPr id="9" name="Text 6"/>
+          <p:cNvSpPr/>
+          <p:nvPr/>
+        </p:nvSpPr>
+        <p:spPr>
+          <a:xfrm>
+            <a:off x="8275320" y="4800600"/>
+            <a:ext cx="1051560" cy="310896"/>
+          </a:xfrm>
+          <a:prstGeom prst="rect">
+            <a:avLst/>
+          </a:prstGeom>
+          <a:solidFill>
+            <a:srgbClr val="A78BFA">
+              <a:alpha val="85000"/>
+            </a:srgbClr>
+          </a:solidFill>
+          <a:ln>
+            <a:solidFill>
+              <a:srgbClr val="A78BFA">
+                <a:alpha val="70000"/>
+              </a:srgbClr>
+            </a:solidFill>
+          </a:ln>
+        </p:spPr>
+        <p:txBody>
+          <a:bodyPr wrap="square" lIns="381" tIns="381" rIns="381" bIns="381" rtlCol="0" anchor="ctr">
+            <a:normAutofit/>
+          </a:bodyPr>
+          <a:lstStyle/>
+          <a:p>
+            <a:pPr marL="0" indent="0" algn="ctr">
+              <a:buNone/>
+            </a:pPr>
+            <a:r>
+              <a:rPr lang="en-US" sz="1050" b="1" dirty="0">
+                <a:solidFill>
+                  <a:srgbClr val="F5F8FF"/>
+                </a:solidFill>
+                <a:latin typeface="Noto Sans CJK SC" pitchFamily="34" charset="0"/>
+                <a:ea typeface="Noto Sans CJK SC" pitchFamily="34" charset="-122"/>
+                <a:cs typeface="Noto Sans CJK SC" pitchFamily="34" charset="-120"/>
+              </a:rPr>
+              <a:t>问答调试</a:t>
+            </a:r>
+            <a:endParaRPr lang="en-US" sz="1050" b="1" dirty="0">
+              <a:solidFill>
+                <a:srgbClr val="F5F8FF"/>
+              </a:solidFill>
+              <a:latin typeface="Noto Sans CJK SC" pitchFamily="34" charset="0"/>
+              <a:ea typeface="Noto Sans CJK SC" pitchFamily="34" charset="-122"/>
+              <a:cs typeface="Noto Sans CJK SC" pitchFamily="34" charset="-120"/>
+            </a:endParaRPr>
+          </a:p>
+        </p:txBody>
+      </p:sp>
+      <p:sp>
+        <p:nvSpPr>
+          <p:cNvPr id="10" name="Text 7"/>
+          <p:cNvSpPr/>
+          <p:nvPr/>
+        </p:nvSpPr>
+        <p:spPr>
+          <a:xfrm>
+            <a:off x="9473184" y="4800600"/>
+            <a:ext cx="1051560" cy="310896"/>
+          </a:xfrm>
+          <a:prstGeom prst="rect">
+            <a:avLst/>
+          </a:prstGeom>
+          <a:solidFill>
+            <a:srgbClr val="6EE7F9">
+              <a:alpha val="85000"/>
+            </a:srgbClr>
+          </a:solidFill>
+          <a:ln>
+            <a:solidFill>
+              <a:srgbClr val="6EE7F9">
+                <a:alpha val="70000"/>
+              </a:srgbClr>
+            </a:solidFill>
+          </a:ln>
+        </p:spPr>
+        <p:txBody>
+          <a:bodyPr wrap="square" lIns="381" tIns="381" rIns="381" bIns="381" rtlCol="0" anchor="ctr">
+            <a:normAutofit/>
+          </a:bodyPr>
+          <a:lstStyle/>
+          <a:p>
+            <a:pPr marL="0" indent="0" algn="ctr">
+              <a:buNone/>
+            </a:pPr>
+            <a:r>
+              <a:rPr lang="en-US" sz="1050" b="1" dirty="0">
+                <a:solidFill>
+                  <a:srgbClr val="F5F8FF"/>
+                </a:solidFill>
+                <a:latin typeface="Noto Sans CJK SC" pitchFamily="34" charset="0"/>
+                <a:ea typeface="Noto Sans CJK SC" pitchFamily="34" charset="-122"/>
+                <a:cs typeface="Noto Sans CJK SC" pitchFamily="34" charset="-120"/>
+              </a:rPr>
+              <a:t>路由追踪</a:t>
+            </a:r>
+            <a:endParaRPr lang="en-US" sz="1050" b="1" dirty="0">
+              <a:solidFill>
+                <a:srgbClr val="F5F8FF"/>
+              </a:solidFill>
+              <a:latin typeface="Noto Sans CJK SC" pitchFamily="34" charset="0"/>
+              <a:ea typeface="Noto Sans CJK SC" pitchFamily="34" charset="-122"/>
+              <a:cs typeface="Noto Sans CJK SC" pitchFamily="34" charset="-120"/>
+            </a:endParaRPr>
+          </a:p>
+        </p:txBody>
+      </p:sp>
+      <p:sp>
+        <p:nvSpPr>
+          <p:cNvPr id="11" name="Text 8"/>
+          <p:cNvSpPr/>
+          <p:nvPr/>
+        </p:nvSpPr>
+        <p:spPr>
+          <a:xfrm>
+            <a:off x="10671048" y="4800600"/>
+            <a:ext cx="1051560" cy="310896"/>
+          </a:xfrm>
+          <a:prstGeom prst="rect">
+            <a:avLst/>
+          </a:prstGeom>
+          <a:solidFill>
+            <a:srgbClr val="3DDC97">
+              <a:alpha val="85000"/>
+            </a:srgbClr>
+          </a:solidFill>
+          <a:ln>
+            <a:solidFill>
+              <a:srgbClr val="3DDC97">
+                <a:alpha val="70000"/>
+              </a:srgbClr>
+            </a:solidFill>
+          </a:ln>
+        </p:spPr>
+        <p:txBody>
+          <a:bodyPr wrap="square" lIns="381" tIns="381" rIns="381" bIns="381" rtlCol="0" anchor="ctr">
+            <a:normAutofit/>
+          </a:bodyPr>
+          <a:lstStyle/>
+          <a:p>
+            <a:pPr marL="0" indent="0" algn="ctr">
+              <a:buNone/>
+            </a:pPr>
+            <a:r>
+              <a:rPr lang="en-US" sz="1050" b="1" dirty="0">
+                <a:solidFill>
+                  <a:srgbClr val="F5F8FF"/>
+                </a:solidFill>
+                <a:latin typeface="Noto Sans CJK SC" pitchFamily="34" charset="0"/>
+                <a:ea typeface="Noto Sans CJK SC" pitchFamily="34" charset="-122"/>
+                <a:cs typeface="Noto Sans CJK SC" pitchFamily="34" charset="-120"/>
+              </a:rPr>
+              <a:t>引用验证</a:t>
+            </a:r>
+            <a:endParaRPr lang="en-US" sz="1050" b="1" dirty="0">
+              <a:solidFill>
+                <a:srgbClr val="F5F8FF"/>
+              </a:solidFill>
+              <a:latin typeface="Noto Sans CJK SC" pitchFamily="34" charset="0"/>
+              <a:ea typeface="Noto Sans CJK SC" pitchFamily="34" charset="-122"/>
+              <a:cs typeface="Noto Sans CJK SC" pitchFamily="34" charset="-120"/>
+            </a:endParaRPr>
+          </a:p>
+        </p:txBody>
+      </p:sp>
+      <p:sp>
+        <p:nvSpPr>
+          <p:cNvPr id="12" name="Text 9"/>
+          <p:cNvSpPr/>
+          <p:nvPr/>
+        </p:nvSpPr>
+        <p:spPr>
+          <a:xfrm>
+            <a:off x="530225" y="5650865"/>
+            <a:ext cx="7223760" cy="256032"/>
           </a:xfrm>
           <a:prstGeom prst="rect">
             <a:avLst/>
@@ -3439,7 +3527,7 @@
               <a:buNone/>
             </a:pPr>
             <a:r>
-              <a:rPr lang="en-US" sz="850" dirty="0">
+              <a:rPr lang="en-US" sz="1200" dirty="0">
                 <a:solidFill>
                   <a:srgbClr val="AAB6D3"/>
                 </a:solidFill>
@@ -3447,106 +3535,22 @@
                 <a:ea typeface="Noto Sans CJK SC" pitchFamily="34" charset="-122"/>
                 <a:cs typeface="Noto Sans CJK SC" pitchFamily="34" charset="-120"/>
               </a:rPr>
-              <a:t>回答区、资源引用区、文件与路由信息区</a:t>
-            </a:r>
-            <a:endParaRPr lang="en-US" sz="850" dirty="0"/>
-          </a:p>
-        </p:txBody>
-      </p:sp>
-      <p:sp>
-        <p:nvSpPr>
-          <p:cNvPr id="10" name="Text 5"/>
-          <p:cNvSpPr/>
-          <p:nvPr/>
-        </p:nvSpPr>
-        <p:spPr>
-          <a:xfrm>
-            <a:off x="868680" y="5715000"/>
-            <a:ext cx="10149840" cy="731520"/>
-          </a:xfrm>
-          <a:prstGeom prst="rect">
-            <a:avLst/>
-          </a:prstGeom>
-          <a:noFill/>
-        </p:spPr>
-        <p:txBody>
-          <a:bodyPr wrap="square" lIns="635" tIns="635" rIns="635" bIns="635" rtlCol="0" anchor="t">
-            <a:normAutofit/>
-          </a:bodyPr>
-          <a:lstStyle/>
-          <a:p>
-            <a:pPr marL="0" indent="0">
-              <a:buNone/>
-            </a:pPr>
-            <a:r>
-              <a:rPr lang="en-US" sz="1040" dirty="0">
-                <a:solidFill>
-                  <a:srgbClr val="F5F8FF"/>
-                </a:solidFill>
-                <a:latin typeface="Noto Sans CJK SC" pitchFamily="34" charset="0"/>
-                <a:ea typeface="Noto Sans CJK SC" pitchFamily="34" charset="-122"/>
-                <a:cs typeface="Noto Sans CJK SC" pitchFamily="34" charset="-120"/>
-              </a:rPr>
-              <a:t>• 答案区负责自然语言解释，不直接暴露模型内部路由提示词。</a:t>
-            </a:r>
-            <a:endParaRPr lang="en-US" sz="1040" dirty="0"/>
-          </a:p>
-          <a:p>
-            <a:pPr marL="0" indent="0">
-              <a:buNone/>
-            </a:pPr>
-            <a:r>
-              <a:rPr lang="en-US" sz="1040" dirty="0">
-                <a:solidFill>
-                  <a:srgbClr val="F5F8FF"/>
-                </a:solidFill>
-                <a:latin typeface="Noto Sans CJK SC" pitchFamily="34" charset="0"/>
-                <a:ea typeface="Noto Sans CJK SC" pitchFamily="34" charset="-122"/>
-                <a:cs typeface="Noto Sans CJK SC" pitchFamily="34" charset="-120"/>
-              </a:rPr>
-              <a:t>• 引用区显示 L129-L137 等行号，帮助定位 knowledge.md 或 PDF 页文本。</a:t>
-            </a:r>
-            <a:endParaRPr lang="en-US" sz="1040" dirty="0"/>
-          </a:p>
-          <a:p>
-            <a:pPr marL="0" indent="0">
-              <a:buNone/>
-            </a:pPr>
-            <a:r>
-              <a:rPr lang="en-US" sz="1040" dirty="0">
-                <a:solidFill>
-                  <a:srgbClr val="F5F8FF"/>
-                </a:solidFill>
-                <a:latin typeface="Noto Sans CJK SC" pitchFamily="34" charset="0"/>
-                <a:ea typeface="Noto Sans CJK SC" pitchFamily="34" charset="-122"/>
-                <a:cs typeface="Noto Sans CJK SC" pitchFamily="34" charset="-120"/>
-              </a:rPr>
-              <a:t>• 相关图片把图示与回答绑定，适合说明书、图纸、操作手册类文档。</a:t>
-            </a:r>
-            <a:endParaRPr lang="en-US" sz="1040" dirty="0"/>
-          </a:p>
-          <a:p>
-            <a:pPr marL="0" indent="0">
-              <a:buNone/>
-            </a:pPr>
-            <a:r>
-              <a:rPr lang="en-US" sz="1040" dirty="0">
-                <a:solidFill>
-                  <a:srgbClr val="F5F8FF"/>
-                </a:solidFill>
-                <a:latin typeface="Noto Sans CJK SC" pitchFamily="34" charset="0"/>
-                <a:ea typeface="Noto Sans CJK SC" pitchFamily="34" charset="-122"/>
-                <a:cs typeface="Noto Sans CJK SC" pitchFamily="34" charset="-120"/>
-              </a:rPr>
-              <a:t>• 右侧日志记录 route、source_pdf、page_start/page_end、generated_at 等调试信息。</a:t>
-            </a:r>
-            <a:endParaRPr lang="en-US" sz="1040" dirty="0"/>
-          </a:p>
-        </p:txBody>
-      </p:sp>
-      <p:sp>
-        <p:nvSpPr>
-          <p:cNvPr id="11" name="Text 6"/>
+              <a:t>单问题测试页：模型回答与右侧文件/日志面板</a:t>
+            </a:r>
+            <a:endParaRPr lang="en-US" sz="1200" dirty="0">
+              <a:solidFill>
+                <a:srgbClr val="AAB6D3"/>
+              </a:solidFill>
+              <a:latin typeface="Noto Sans CJK SC" pitchFamily="34" charset="0"/>
+              <a:ea typeface="Noto Sans CJK SC" pitchFamily="34" charset="-122"/>
+              <a:cs typeface="Noto Sans CJK SC" pitchFamily="34" charset="-120"/>
+            </a:endParaRPr>
+          </a:p>
+        </p:txBody>
+      </p:sp>
+      <p:sp>
+        <p:nvSpPr>
+          <p:cNvPr id="13" name="Text 10"/>
           <p:cNvSpPr/>
           <p:nvPr/>
         </p:nvSpPr>
@@ -3576,7 +3580,7 @@
                 <a:ea typeface="Noto Sans CJK SC" pitchFamily="34" charset="-122"/>
                 <a:cs typeface="Noto Sans CJK SC" pitchFamily="34" charset="-120"/>
               </a:rPr>
-              <a:t>11</a:t>
+              <a:t>10</a:t>
             </a:r>
             <a:endParaRPr lang="en-US" sz="800" dirty="0"/>
           </a:p>
@@ -3676,7 +3680,7 @@
                 <a:ea typeface="Noto Sans CJK SC" pitchFamily="34" charset="-122"/>
                 <a:cs typeface="Noto Sans CJK SC" pitchFamily="34" charset="-120"/>
               </a:rPr>
-              <a:t>批量测试页：用例驱动的路由与回答评估闭环</a:t>
+              <a:t>回答展示：从“说得像”走向“可核验”</a:t>
             </a:r>
             <a:endParaRPr lang="en-US" sz="2500" dirty="0"/>
           </a:p>
@@ -3716,7 +3720,7 @@
                 <a:ea typeface="Noto Sans CJK SC" pitchFamily="34" charset="-122"/>
                 <a:cs typeface="Noto Sans CJK SC" pitchFamily="34" charset="-120"/>
               </a:rPr>
-              <a:t>用于批量导入问题、运行测试、观察参考答案与模型答案差距，并统计准确率</a:t>
+              <a:t>项目把回答、引用行、相关图片和原始文件信息放在同一界面，便于检查来源</a:t>
             </a:r>
             <a:endParaRPr lang="en-US" sz="950" dirty="0"/>
           </a:p>
@@ -3762,7 +3766,7 @@
       </p:sp>
       <p:pic>
         <p:nvPicPr>
-          <p:cNvPr id="6" name="Image 0" descr="/mnt/data/ppt_assets/batch_full.jpg"/>
+          <p:cNvPr id="6" name="Image 0" descr="/mnt/data/ppt_assets/single_answer.jpg"/>
           <p:cNvPicPr>
             <a:picLocks noChangeAspect="1"/>
           </p:cNvPicPr>
@@ -3776,24 +3780,112 @@
         </p:blipFill>
         <p:spPr>
           <a:xfrm>
-            <a:off x="82550" y="1345565"/>
-            <a:ext cx="8119745" cy="3829050"/>
+            <a:off x="594360" y="1382707"/>
+            <a:ext cx="5440680" cy="3772547"/>
           </a:xfrm>
           <a:prstGeom prst="rect">
             <a:avLst/>
           </a:prstGeom>
         </p:spPr>
       </p:pic>
-      <p:sp>
-        <p:nvSpPr>
-          <p:cNvPr id="7" name="Text 4"/>
-          <p:cNvSpPr/>
-          <p:nvPr/>
-        </p:nvSpPr>
-        <p:spPr>
-          <a:xfrm>
-            <a:off x="8412480" y="1143000"/>
-            <a:ext cx="1737360" cy="292608"/>
+      <p:pic>
+        <p:nvPicPr>
+          <p:cNvPr id="7" name="Image 1" descr="/mnt/data/ppt_assets/single_resources.jpg"/>
+          <p:cNvPicPr>
+            <a:picLocks noChangeAspect="1"/>
+          </p:cNvPicPr>
+          <p:nvPr/>
+        </p:nvPicPr>
+        <p:blipFill>
+          <a:blip r:embed="rId2"/>
+          <a:stretch>
+            <a:fillRect/>
+          </a:stretch>
+        </p:blipFill>
+        <p:spPr>
+          <a:xfrm>
+            <a:off x="6540773" y="1325880"/>
+            <a:ext cx="1868894" cy="3886200"/>
+          </a:xfrm>
+          <a:prstGeom prst="rect">
+            <a:avLst/>
+          </a:prstGeom>
+        </p:spPr>
+      </p:pic>
+      <p:pic>
+        <p:nvPicPr>
+          <p:cNvPr id="8" name="Image 2" descr="/mnt/data/ppt_assets/single_sidebar.jpg"/>
+          <p:cNvPicPr>
+            <a:picLocks noChangeAspect="1"/>
+          </p:cNvPicPr>
+          <p:nvPr/>
+        </p:nvPicPr>
+        <p:blipFill>
+          <a:blip r:embed="rId3"/>
+          <a:stretch>
+            <a:fillRect/>
+          </a:stretch>
+        </p:blipFill>
+        <p:spPr>
+          <a:xfrm>
+            <a:off x="9245541" y="1325880"/>
+            <a:ext cx="1717158" cy="3886200"/>
+          </a:xfrm>
+          <a:prstGeom prst="rect">
+            <a:avLst/>
+          </a:prstGeom>
+        </p:spPr>
+      </p:pic>
+      <p:sp>
+        <p:nvSpPr>
+          <p:cNvPr id="9" name="Text 4"/>
+          <p:cNvSpPr/>
+          <p:nvPr/>
+        </p:nvSpPr>
+        <p:spPr>
+          <a:xfrm>
+            <a:off x="685800" y="5340096"/>
+            <a:ext cx="10424160" cy="256032"/>
+          </a:xfrm>
+          <a:prstGeom prst="rect">
+            <a:avLst/>
+          </a:prstGeom>
+          <a:noFill/>
+        </p:spPr>
+        <p:txBody>
+          <a:bodyPr wrap="square" lIns="0" tIns="0" rIns="0" bIns="0" rtlCol="0" anchor="ctr">
+            <a:normAutofit/>
+          </a:bodyPr>
+          <a:lstStyle/>
+          <a:p>
+            <a:pPr marL="0" indent="0" algn="ctr">
+              <a:buNone/>
+            </a:pPr>
+            <a:r>
+              <a:rPr lang="en-US" sz="850" dirty="0">
+                <a:solidFill>
+                  <a:srgbClr val="AAB6D3"/>
+                </a:solidFill>
+                <a:latin typeface="Noto Sans CJK SC" pitchFamily="34" charset="0"/>
+                <a:ea typeface="Noto Sans CJK SC" pitchFamily="34" charset="-122"/>
+                <a:cs typeface="Noto Sans CJK SC" pitchFamily="34" charset="-120"/>
+              </a:rPr>
+              <a:t>回答区、资源引用区、文件与路由信息区</a:t>
+            </a:r>
+            <a:endParaRPr lang="en-US" sz="850" dirty="0"/>
+          </a:p>
+        </p:txBody>
+      </p:sp>
+      <p:sp>
+        <p:nvSpPr>
+          <p:cNvPr id="10" name="Text 5"/>
+          <p:cNvSpPr/>
+          <p:nvPr/>
+        </p:nvSpPr>
+        <p:spPr>
+          <a:xfrm>
+            <a:off x="868680" y="5715000"/>
+            <a:ext cx="10149840" cy="731520"/>
           </a:xfrm>
           <a:prstGeom prst="rect">
             <a:avLst/>
@@ -3810,415 +3902,74 @@
               <a:buNone/>
             </a:pPr>
             <a:r>
-              <a:rPr lang="en-US" sz="1400" b="1" dirty="0">
-                <a:solidFill>
-                  <a:srgbClr val="6EE7F9"/>
-                </a:solidFill>
-                <a:latin typeface="Noto Sans CJK SC" pitchFamily="34" charset="0"/>
-                <a:ea typeface="Noto Sans CJK SC" pitchFamily="34" charset="-122"/>
-                <a:cs typeface="Noto Sans CJK SC" pitchFamily="34" charset="-120"/>
-              </a:rPr>
-              <a:t>评估方式</a:t>
-            </a:r>
-            <a:endParaRPr lang="en-US" sz="1400" dirty="0"/>
-          </a:p>
-        </p:txBody>
-      </p:sp>
-      <p:sp>
-        <p:nvSpPr>
-          <p:cNvPr id="8" name="Text 5"/>
-          <p:cNvSpPr/>
-          <p:nvPr/>
-        </p:nvSpPr>
-        <p:spPr>
-          <a:xfrm>
-            <a:off x="8412480" y="1600200"/>
-            <a:ext cx="2926080" cy="2103120"/>
-          </a:xfrm>
-          <a:prstGeom prst="rect">
-            <a:avLst/>
-          </a:prstGeom>
-          <a:noFill/>
-        </p:spPr>
-        <p:txBody>
-          <a:bodyPr wrap="square" lIns="635" tIns="635" rIns="635" bIns="635" rtlCol="0" anchor="t">
-            <a:normAutofit/>
-          </a:bodyPr>
-          <a:lstStyle/>
-          <a:p>
-            <a:pPr marL="0" indent="0">
-              <a:buNone/>
-            </a:pPr>
-            <a:r>
-              <a:rPr lang="en-US" sz="1250" dirty="0">
-                <a:solidFill>
-                  <a:srgbClr val="F5F8FF"/>
-                </a:solidFill>
-                <a:latin typeface="Noto Sans CJK SC" pitchFamily="34" charset="0"/>
-                <a:ea typeface="Noto Sans CJK SC" pitchFamily="34" charset="-122"/>
-                <a:cs typeface="Noto Sans CJK SC" pitchFamily="34" charset="-120"/>
-              </a:rPr>
-              <a:t>• 左侧用例列表显示每题得分/准确率，支持逐条运行。</a:t>
-            </a:r>
-            <a:endParaRPr lang="en-US" sz="1250" dirty="0"/>
-          </a:p>
-          <a:p>
-            <a:pPr marL="0" indent="0">
-              <a:buNone/>
-            </a:pPr>
-            <a:r>
-              <a:rPr lang="en-US" sz="1250" dirty="0">
-                <a:solidFill>
-                  <a:srgbClr val="F5F8FF"/>
-                </a:solidFill>
-                <a:latin typeface="Noto Sans CJK SC" pitchFamily="34" charset="0"/>
-                <a:ea typeface="Noto Sans CJK SC" pitchFamily="34" charset="-122"/>
-                <a:cs typeface="Noto Sans CJK SC" pitchFamily="34" charset="-120"/>
-              </a:rPr>
-              <a:t>• 中间展示模型回答，可检查是否调用正确 Agent。</a:t>
-            </a:r>
-            <a:endParaRPr lang="en-US" sz="1250" dirty="0"/>
-          </a:p>
-          <a:p>
-            <a:pPr marL="0" indent="0">
-              <a:buNone/>
-            </a:pPr>
-            <a:r>
-              <a:rPr lang="en-US" sz="1250" dirty="0">
-                <a:solidFill>
-                  <a:srgbClr val="F5F8FF"/>
-                </a:solidFill>
-                <a:latin typeface="Noto Sans CJK SC" pitchFamily="34" charset="0"/>
-                <a:ea typeface="Noto Sans CJK SC" pitchFamily="34" charset="-122"/>
-                <a:cs typeface="Noto Sans CJK SC" pitchFamily="34" charset="-120"/>
-              </a:rPr>
-              <a:t>• 右侧参考答案用于人工或模型辅助评估。</a:t>
-            </a:r>
-            <a:endParaRPr lang="en-US" sz="1250" dirty="0"/>
-          </a:p>
-          <a:p>
-            <a:pPr marL="0" indent="0">
-              <a:buNone/>
-            </a:pPr>
-            <a:r>
-              <a:rPr lang="en-US" sz="1250" dirty="0">
-                <a:solidFill>
-                  <a:srgbClr val="F5F8FF"/>
-                </a:solidFill>
-                <a:latin typeface="Noto Sans CJK SC" pitchFamily="34" charset="0"/>
-                <a:ea typeface="Noto Sans CJK SC" pitchFamily="34" charset="-122"/>
-                <a:cs typeface="Noto Sans CJK SC" pitchFamily="34" charset="-120"/>
-              </a:rPr>
-              <a:t>• 适合回归测试：改提示词、改切分范围后重新跑一遍。</a:t>
-            </a:r>
-            <a:endParaRPr lang="en-US" sz="1250" dirty="0"/>
-          </a:p>
-        </p:txBody>
-      </p:sp>
-      <p:sp>
-        <p:nvSpPr>
-          <p:cNvPr id="9" name="Text 6"/>
-          <p:cNvSpPr/>
-          <p:nvPr/>
-        </p:nvSpPr>
-        <p:spPr>
-          <a:xfrm>
-            <a:off x="8458200" y="4069080"/>
-            <a:ext cx="896112" cy="411480"/>
-          </a:xfrm>
-          <a:prstGeom prst="rect">
-            <a:avLst/>
-          </a:prstGeom>
-          <a:solidFill>
-            <a:srgbClr val="26314A"/>
-          </a:solidFill>
-          <a:ln w="12700">
-            <a:solidFill>
-              <a:srgbClr val="2B3658">
-                <a:alpha val="85000"/>
-              </a:srgbClr>
-            </a:solidFill>
-          </a:ln>
-        </p:spPr>
-        <p:txBody>
-          <a:bodyPr wrap="square" lIns="762" tIns="762" rIns="762" bIns="762" rtlCol="0" anchor="ctr">
-            <a:normAutofit/>
-          </a:bodyPr>
-          <a:lstStyle/>
-          <a:p>
-            <a:pPr marL="0" indent="0" algn="ctr">
-              <a:buNone/>
-            </a:pPr>
-            <a:r>
-              <a:rPr lang="en-US" sz="1060" b="1" dirty="0">
-                <a:solidFill>
-                  <a:srgbClr val="F5F8FF"/>
-                </a:solidFill>
-                <a:latin typeface="Noto Sans CJK SC" pitchFamily="34" charset="0"/>
-                <a:ea typeface="Noto Sans CJK SC" pitchFamily="34" charset="-122"/>
-                <a:cs typeface="Noto Sans CJK SC" pitchFamily="34" charset="-120"/>
-              </a:rPr>
-              <a:t>测试用例</a:t>
-            </a:r>
-            <a:endParaRPr lang="en-US" sz="1060" b="1" dirty="0">
-              <a:solidFill>
-                <a:srgbClr val="F5F8FF"/>
-              </a:solidFill>
-              <a:latin typeface="Noto Sans CJK SC" pitchFamily="34" charset="0"/>
-              <a:ea typeface="Noto Sans CJK SC" pitchFamily="34" charset="-122"/>
-              <a:cs typeface="Noto Sans CJK SC" pitchFamily="34" charset="-120"/>
-            </a:endParaRPr>
-          </a:p>
-        </p:txBody>
-      </p:sp>
-      <p:sp>
-        <p:nvSpPr>
-          <p:cNvPr id="10" name="Text 7"/>
-          <p:cNvSpPr/>
-          <p:nvPr/>
-        </p:nvSpPr>
-        <p:spPr>
-          <a:xfrm>
-            <a:off x="9528048" y="4069080"/>
-            <a:ext cx="896112" cy="411480"/>
-          </a:xfrm>
-          <a:prstGeom prst="rect">
-            <a:avLst/>
-          </a:prstGeom>
-          <a:solidFill>
-            <a:srgbClr val="26314A"/>
-          </a:solidFill>
-          <a:ln w="12700">
-            <a:solidFill>
-              <a:srgbClr val="2B3658">
-                <a:alpha val="85000"/>
-              </a:srgbClr>
-            </a:solidFill>
-          </a:ln>
-        </p:spPr>
-        <p:txBody>
-          <a:bodyPr wrap="square" lIns="762" tIns="762" rIns="762" bIns="762" rtlCol="0" anchor="ctr">
-            <a:normAutofit/>
-          </a:bodyPr>
-          <a:lstStyle/>
-          <a:p>
-            <a:pPr marL="0" indent="0" algn="ctr">
-              <a:buNone/>
-            </a:pPr>
-            <a:r>
-              <a:rPr lang="en-US" sz="1060" b="1" dirty="0">
-                <a:solidFill>
-                  <a:srgbClr val="F5F8FF"/>
-                </a:solidFill>
-                <a:latin typeface="Noto Sans CJK SC" pitchFamily="34" charset="0"/>
-                <a:ea typeface="Noto Sans CJK SC" pitchFamily="34" charset="-122"/>
-                <a:cs typeface="Noto Sans CJK SC" pitchFamily="34" charset="-120"/>
-              </a:rPr>
-              <a:t>运行问答</a:t>
-            </a:r>
-            <a:endParaRPr lang="en-US" sz="1060" b="1" dirty="0">
-              <a:solidFill>
-                <a:srgbClr val="F5F8FF"/>
-              </a:solidFill>
-              <a:latin typeface="Noto Sans CJK SC" pitchFamily="34" charset="0"/>
-              <a:ea typeface="Noto Sans CJK SC" pitchFamily="34" charset="-122"/>
-              <a:cs typeface="Noto Sans CJK SC" pitchFamily="34" charset="-120"/>
-            </a:endParaRPr>
-          </a:p>
-        </p:txBody>
-      </p:sp>
-      <p:sp>
-        <p:nvSpPr>
-          <p:cNvPr id="11" name="Text 8"/>
-          <p:cNvSpPr/>
-          <p:nvPr/>
-        </p:nvSpPr>
-        <p:spPr>
-          <a:xfrm>
-            <a:off x="10597896" y="4069080"/>
-            <a:ext cx="896112" cy="411480"/>
-          </a:xfrm>
-          <a:prstGeom prst="rect">
-            <a:avLst/>
-          </a:prstGeom>
-          <a:solidFill>
-            <a:srgbClr val="26314A"/>
-          </a:solidFill>
-          <a:ln w="12700">
-            <a:solidFill>
-              <a:srgbClr val="2B3658">
-                <a:alpha val="85000"/>
-              </a:srgbClr>
-            </a:solidFill>
-          </a:ln>
-        </p:spPr>
-        <p:txBody>
-          <a:bodyPr wrap="square" lIns="762" tIns="762" rIns="762" bIns="762" rtlCol="0" anchor="ctr">
-            <a:normAutofit/>
-          </a:bodyPr>
-          <a:lstStyle/>
-          <a:p>
-            <a:pPr marL="0" indent="0" algn="ctr">
-              <a:buNone/>
-            </a:pPr>
-            <a:r>
-              <a:rPr lang="en-US" sz="1060" b="1" dirty="0">
-                <a:solidFill>
-                  <a:srgbClr val="F5F8FF"/>
-                </a:solidFill>
-                <a:latin typeface="Noto Sans CJK SC" pitchFamily="34" charset="0"/>
-                <a:ea typeface="Noto Sans CJK SC" pitchFamily="34" charset="-122"/>
-                <a:cs typeface="Noto Sans CJK SC" pitchFamily="34" charset="-120"/>
-              </a:rPr>
-              <a:t>评分反馈</a:t>
-            </a:r>
-            <a:endParaRPr lang="en-US" sz="1060" b="1" dirty="0">
-              <a:solidFill>
-                <a:srgbClr val="F5F8FF"/>
-              </a:solidFill>
-              <a:latin typeface="Noto Sans CJK SC" pitchFamily="34" charset="0"/>
-              <a:ea typeface="Noto Sans CJK SC" pitchFamily="34" charset="-122"/>
-              <a:cs typeface="Noto Sans CJK SC" pitchFamily="34" charset="-120"/>
-            </a:endParaRPr>
-          </a:p>
-        </p:txBody>
-      </p:sp>
-      <p:sp>
-        <p:nvSpPr>
-          <p:cNvPr id="12" name="Shape 9"/>
-          <p:cNvSpPr/>
-          <p:nvPr/>
-        </p:nvSpPr>
-        <p:spPr>
-          <a:xfrm>
-            <a:off x="9363456" y="4279392"/>
-            <a:ext cx="137160" cy="0"/>
-          </a:xfrm>
-          <a:prstGeom prst="line">
-            <a:avLst/>
-          </a:prstGeom>
-          <a:noFill/>
-          <a:ln w="12700">
-            <a:solidFill>
-              <a:srgbClr val="6EE7F9"/>
-            </a:solidFill>
-            <a:prstDash val="solid"/>
-            <a:tailEnd type="triangle"/>
-          </a:ln>
-        </p:spPr>
-      </p:sp>
-      <p:sp>
-        <p:nvSpPr>
-          <p:cNvPr id="13" name="Shape 10"/>
-          <p:cNvSpPr/>
-          <p:nvPr/>
-        </p:nvSpPr>
-        <p:spPr>
-          <a:xfrm>
-            <a:off x="10433304" y="4279392"/>
-            <a:ext cx="137160" cy="0"/>
-          </a:xfrm>
-          <a:prstGeom prst="line">
-            <a:avLst/>
-          </a:prstGeom>
-          <a:noFill/>
-          <a:ln w="12700">
-            <a:solidFill>
-              <a:srgbClr val="6EE7F9"/>
-            </a:solidFill>
-            <a:prstDash val="solid"/>
-            <a:tailEnd type="triangle"/>
-          </a:ln>
-        </p:spPr>
-      </p:sp>
-      <p:sp>
-        <p:nvSpPr>
-          <p:cNvPr id="14" name="Text 11"/>
-          <p:cNvSpPr/>
-          <p:nvPr/>
-        </p:nvSpPr>
-        <p:spPr>
-          <a:xfrm>
-            <a:off x="548640" y="5394960"/>
-            <a:ext cx="7406640" cy="256032"/>
-          </a:xfrm>
-          <a:prstGeom prst="rect">
-            <a:avLst/>
-          </a:prstGeom>
-          <a:noFill/>
-        </p:spPr>
-        <p:txBody>
-          <a:bodyPr wrap="square" lIns="0" tIns="0" rIns="0" bIns="0" rtlCol="0" anchor="ctr">
-            <a:normAutofit/>
-          </a:bodyPr>
-          <a:lstStyle/>
-          <a:p>
-            <a:pPr marL="0" indent="0" algn="ctr">
-              <a:buNone/>
-            </a:pPr>
-            <a:r>
-              <a:rPr lang="en-US" sz="1050" dirty="0">
-                <a:solidFill>
-                  <a:srgbClr val="AAB6D3"/>
-                </a:solidFill>
-                <a:latin typeface="Noto Sans CJK SC" pitchFamily="34" charset="0"/>
-                <a:ea typeface="Noto Sans CJK SC" pitchFamily="34" charset="-122"/>
-                <a:cs typeface="Noto Sans CJK SC" pitchFamily="34" charset="-120"/>
-              </a:rPr>
-              <a:t>批量测试页：用例列表、模型回答、参考答案与文件预览</a:t>
-            </a:r>
-            <a:endParaRPr lang="en-US" sz="1050" dirty="0">
-              <a:solidFill>
-                <a:srgbClr val="AAB6D3"/>
-              </a:solidFill>
-              <a:latin typeface="Noto Sans CJK SC" pitchFamily="34" charset="0"/>
-              <a:ea typeface="Noto Sans CJK SC" pitchFamily="34" charset="-122"/>
-              <a:cs typeface="Noto Sans CJK SC" pitchFamily="34" charset="-120"/>
-            </a:endParaRPr>
-          </a:p>
-        </p:txBody>
-      </p:sp>
-      <p:sp>
-        <p:nvSpPr>
-          <p:cNvPr id="15" name="Text 12"/>
-          <p:cNvSpPr/>
-          <p:nvPr/>
-        </p:nvSpPr>
-        <p:spPr>
-          <a:xfrm>
-            <a:off x="502920" y="6199632"/>
-            <a:ext cx="10881360" cy="210312"/>
-          </a:xfrm>
-          <a:prstGeom prst="rect">
-            <a:avLst/>
-          </a:prstGeom>
-          <a:noFill/>
-        </p:spPr>
-        <p:txBody>
-          <a:bodyPr wrap="square" lIns="0" tIns="0" rIns="0" bIns="0" rtlCol="0" anchor="ctr"/>
-          <a:lstStyle/>
-          <a:p>
-            <a:pPr marL="0" indent="0">
-              <a:buNone/>
-            </a:pPr>
-            <a:r>
-              <a:rPr lang="en-US" sz="730" dirty="0">
-                <a:solidFill>
-                  <a:srgbClr val="64748B"/>
-                </a:solidFill>
-                <a:latin typeface="Noto Sans CJK SC" pitchFamily="34" charset="0"/>
-                <a:ea typeface="Noto Sans CJK SC" pitchFamily="34" charset="-122"/>
-                <a:cs typeface="Noto Sans CJK SC" pitchFamily="34" charset="-120"/>
-              </a:rPr>
-              <a:t>README 中的批量测试 API 包含测试列表、创建、导入、更新、删除、运行单条并评估准确率等接口。</a:t>
-            </a:r>
-            <a:endParaRPr lang="en-US" sz="730" dirty="0"/>
-          </a:p>
-        </p:txBody>
-      </p:sp>
-      <p:sp>
-        <p:nvSpPr>
-          <p:cNvPr id="16" name="Text 13"/>
+              <a:rPr lang="en-US" sz="1040" dirty="0">
+                <a:solidFill>
+                  <a:srgbClr val="F5F8FF"/>
+                </a:solidFill>
+                <a:latin typeface="Noto Sans CJK SC" pitchFamily="34" charset="0"/>
+                <a:ea typeface="Noto Sans CJK SC" pitchFamily="34" charset="-122"/>
+                <a:cs typeface="Noto Sans CJK SC" pitchFamily="34" charset="-120"/>
+              </a:rPr>
+              <a:t>• 答案区负责自然语言解释，不直接暴露模型内部路由提示词。</a:t>
+            </a:r>
+            <a:endParaRPr lang="en-US" sz="1040" dirty="0"/>
+          </a:p>
+          <a:p>
+            <a:pPr marL="0" indent="0">
+              <a:buNone/>
+            </a:pPr>
+            <a:r>
+              <a:rPr lang="en-US" sz="1040" dirty="0">
+                <a:solidFill>
+                  <a:srgbClr val="F5F8FF"/>
+                </a:solidFill>
+                <a:latin typeface="Noto Sans CJK SC" pitchFamily="34" charset="0"/>
+                <a:ea typeface="Noto Sans CJK SC" pitchFamily="34" charset="-122"/>
+                <a:cs typeface="Noto Sans CJK SC" pitchFamily="34" charset="-120"/>
+              </a:rPr>
+              <a:t>• 引用区显示 L129-L137 等行号，帮助定位 knowledge.md 或 PDF 页文本。</a:t>
+            </a:r>
+            <a:endParaRPr lang="en-US" sz="1040" dirty="0"/>
+          </a:p>
+          <a:p>
+            <a:pPr marL="0" indent="0">
+              <a:buNone/>
+            </a:pPr>
+            <a:r>
+              <a:rPr lang="en-US" sz="1040" dirty="0">
+                <a:solidFill>
+                  <a:srgbClr val="F5F8FF"/>
+                </a:solidFill>
+                <a:latin typeface="Noto Sans CJK SC" pitchFamily="34" charset="0"/>
+                <a:ea typeface="Noto Sans CJK SC" pitchFamily="34" charset="-122"/>
+                <a:cs typeface="Noto Sans CJK SC" pitchFamily="34" charset="-120"/>
+              </a:rPr>
+              <a:t>• 相关图片把图示与回答绑定，适合说明书、图纸、操作手册类文档。</a:t>
+            </a:r>
+            <a:endParaRPr lang="en-US" sz="1040" dirty="0"/>
+          </a:p>
+          <a:p>
+            <a:pPr marL="0" indent="0">
+              <a:buNone/>
+            </a:pPr>
+            <a:r>
+              <a:rPr lang="en-US" sz="1040" dirty="0">
+                <a:solidFill>
+                  <a:srgbClr val="F5F8FF"/>
+                </a:solidFill>
+                <a:latin typeface="Noto Sans CJK SC" pitchFamily="34" charset="0"/>
+                <a:ea typeface="Noto Sans CJK SC" pitchFamily="34" charset="-122"/>
+                <a:cs typeface="Noto Sans CJK SC" pitchFamily="34" charset="-120"/>
+              </a:rPr>
+              <a:t>• 右侧日志记录 route、source_pdf、page_start/page_end、generated_at 等调试信息。</a:t>
+            </a:r>
+            <a:endParaRPr lang="en-US" sz="1040" dirty="0"/>
+          </a:p>
+        </p:txBody>
+      </p:sp>
+      <p:sp>
+        <p:nvSpPr>
+          <p:cNvPr id="11" name="Text 6"/>
           <p:cNvSpPr/>
           <p:nvPr/>
         </p:nvSpPr>
@@ -4248,7 +3999,7 @@
                 <a:ea typeface="Noto Sans CJK SC" pitchFamily="34" charset="-122"/>
                 <a:cs typeface="Noto Sans CJK SC" pitchFamily="34" charset="-120"/>
               </a:rPr>
-              <a:t>12</a:t>
+              <a:t>11</a:t>
             </a:r>
             <a:endParaRPr lang="en-US" sz="800" dirty="0"/>
           </a:p>
@@ -4348,7 +4099,7 @@
                 <a:ea typeface="Noto Sans CJK SC" pitchFamily="34" charset="-122"/>
                 <a:cs typeface="Noto Sans CJK SC" pitchFamily="34" charset="-120"/>
               </a:rPr>
-              <a:t>使用方法：从安装启动到新增 Agent 的完整路径</a:t>
+              <a:t>批量测试页：用例驱动的路由与回答评估闭环</a:t>
             </a:r>
             <a:endParaRPr lang="en-US" sz="2500" dirty="0"/>
           </a:p>
@@ -4388,7 +4139,7 @@
                 <a:ea typeface="Noto Sans CJK SC" pitchFamily="34" charset="-122"/>
                 <a:cs typeface="Noto Sans CJK SC" pitchFamily="34" charset="-120"/>
               </a:rPr>
-              <a:t>适合本地演示，也可通过 API 集成到其他系统</a:t>
+              <a:t>用于批量导入问题、运行测试、观察参考答案与模型答案差距，并统计准确率</a:t>
             </a:r>
             <a:endParaRPr lang="en-US" sz="950" dirty="0"/>
           </a:p>
@@ -4432,16 +4183,40 @@
           </a:p>
         </p:txBody>
       </p:sp>
-      <p:sp>
-        <p:nvSpPr>
-          <p:cNvPr id="6" name="Text 4"/>
-          <p:cNvSpPr/>
-          <p:nvPr/>
-        </p:nvSpPr>
-        <p:spPr>
-          <a:xfrm>
-            <a:off x="731520" y="1234440"/>
-            <a:ext cx="2011680" cy="292608"/>
+      <p:pic>
+        <p:nvPicPr>
+          <p:cNvPr id="6" name="Image 0" descr="/mnt/data/ppt_assets/batch_full.jpg"/>
+          <p:cNvPicPr>
+            <a:picLocks noChangeAspect="1"/>
+          </p:cNvPicPr>
+          <p:nvPr/>
+        </p:nvPicPr>
+        <p:blipFill>
+          <a:blip r:embed="rId1"/>
+          <a:stretch>
+            <a:fillRect/>
+          </a:stretch>
+        </p:blipFill>
+        <p:spPr>
+          <a:xfrm>
+            <a:off x="82550" y="1345565"/>
+            <a:ext cx="8119745" cy="3829050"/>
+          </a:xfrm>
+          <a:prstGeom prst="rect">
+            <a:avLst/>
+          </a:prstGeom>
+        </p:spPr>
+      </p:pic>
+      <p:sp>
+        <p:nvSpPr>
+          <p:cNvPr id="7" name="Text 4"/>
+          <p:cNvSpPr/>
+          <p:nvPr/>
+        </p:nvSpPr>
+        <p:spPr>
+          <a:xfrm>
+            <a:off x="8412480" y="1143000"/>
+            <a:ext cx="1737360" cy="292608"/>
           </a:xfrm>
           <a:prstGeom prst="rect">
             <a:avLst/>
@@ -4458,7 +4233,7 @@
               <a:buNone/>
             </a:pPr>
             <a:r>
-              <a:rPr lang="en-US" sz="1300" b="1" dirty="0">
+              <a:rPr lang="en-US" sz="1400" b="1" dirty="0">
                 <a:solidFill>
                   <a:srgbClr val="6EE7F9"/>
                 </a:solidFill>
@@ -4466,22 +4241,22 @@
                 <a:ea typeface="Noto Sans CJK SC" pitchFamily="34" charset="-122"/>
                 <a:cs typeface="Noto Sans CJK SC" pitchFamily="34" charset="-120"/>
               </a:rPr>
-              <a:t>1. 安装依赖</a:t>
-            </a:r>
-            <a:endParaRPr lang="en-US" sz="1300" dirty="0"/>
-          </a:p>
-        </p:txBody>
-      </p:sp>
-      <p:sp>
-        <p:nvSpPr>
-          <p:cNvPr id="7" name="Text 5"/>
-          <p:cNvSpPr/>
-          <p:nvPr/>
-        </p:nvSpPr>
-        <p:spPr>
-          <a:xfrm>
-            <a:off x="777240" y="1691640"/>
-            <a:ext cx="5120640" cy="411480"/>
+              <a:t>评估方式</a:t>
+            </a:r>
+            <a:endParaRPr lang="en-US" sz="1400" dirty="0"/>
+          </a:p>
+        </p:txBody>
+      </p:sp>
+      <p:sp>
+        <p:nvSpPr>
+          <p:cNvPr id="8" name="Text 5"/>
+          <p:cNvSpPr/>
+          <p:nvPr/>
+        </p:nvSpPr>
+        <p:spPr>
+          <a:xfrm>
+            <a:off x="8412480" y="1600200"/>
+            <a:ext cx="2926080" cy="2103120"/>
           </a:xfrm>
           <a:prstGeom prst="rect">
             <a:avLst/>
@@ -4498,287 +4273,87 @@
               <a:buNone/>
             </a:pPr>
             <a:r>
-              <a:rPr lang="en-US" sz="1050" dirty="0">
-                <a:solidFill>
-                  <a:srgbClr val="E2E8F0"/>
-                </a:solidFill>
-                <a:latin typeface="Noto Sans CJK SC" pitchFamily="34" charset="0"/>
-                <a:ea typeface="Noto Sans CJK SC" pitchFamily="34" charset="-122"/>
-                <a:cs typeface="Noto Sans CJK SC" pitchFamily="34" charset="-120"/>
-              </a:rPr>
-              <a:t>pip install fastapi uvicorn python-dotenv openai pydantic pymupdf python-docx openpyxl pytest httpx</a:t>
-            </a:r>
-            <a:endParaRPr lang="en-US" sz="1050" dirty="0"/>
-          </a:p>
-        </p:txBody>
-      </p:sp>
-      <p:sp>
-        <p:nvSpPr>
-          <p:cNvPr id="8" name="Text 6"/>
-          <p:cNvSpPr/>
-          <p:nvPr/>
-        </p:nvSpPr>
-        <p:spPr>
-          <a:xfrm>
-            <a:off x="731520" y="2377440"/>
-            <a:ext cx="2011680" cy="292608"/>
-          </a:xfrm>
-          <a:prstGeom prst="rect">
-            <a:avLst/>
-          </a:prstGeom>
-          <a:noFill/>
-        </p:spPr>
-        <p:txBody>
-          <a:bodyPr wrap="square" lIns="635" tIns="635" rIns="635" bIns="635" rtlCol="0" anchor="t">
-            <a:normAutofit/>
-          </a:bodyPr>
-          <a:lstStyle/>
-          <a:p>
-            <a:pPr marL="0" indent="0">
-              <a:buNone/>
-            </a:pPr>
-            <a:r>
-              <a:rPr lang="en-US" sz="1300" b="1" dirty="0">
-                <a:solidFill>
-                  <a:srgbClr val="A78BFA"/>
-                </a:solidFill>
-                <a:latin typeface="Noto Sans CJK SC" pitchFamily="34" charset="0"/>
-                <a:ea typeface="Noto Sans CJK SC" pitchFamily="34" charset="-122"/>
-                <a:cs typeface="Noto Sans CJK SC" pitchFamily="34" charset="-120"/>
-              </a:rPr>
-              <a:t>2. 配置 .env</a:t>
-            </a:r>
-            <a:endParaRPr lang="en-US" sz="1300" dirty="0"/>
-          </a:p>
-        </p:txBody>
-      </p:sp>
-      <p:sp>
-        <p:nvSpPr>
-          <p:cNvPr id="9" name="Text 7"/>
-          <p:cNvSpPr/>
-          <p:nvPr/>
-        </p:nvSpPr>
-        <p:spPr>
-          <a:xfrm>
-            <a:off x="777240" y="2788920"/>
-            <a:ext cx="4617720" cy="960120"/>
-          </a:xfrm>
-          <a:prstGeom prst="rect">
-            <a:avLst/>
-          </a:prstGeom>
-          <a:noFill/>
-        </p:spPr>
-        <p:txBody>
-          <a:bodyPr wrap="square" lIns="635" tIns="635" rIns="635" bIns="635" rtlCol="0" anchor="t">
-            <a:normAutofit/>
-          </a:bodyPr>
-          <a:lstStyle/>
-          <a:p>
-            <a:pPr marL="0" indent="0">
-              <a:buNone/>
-            </a:pPr>
-            <a:r>
-              <a:rPr lang="en-US" sz="1080" dirty="0">
-                <a:solidFill>
-                  <a:srgbClr val="F5F8FF"/>
-                </a:solidFill>
-                <a:latin typeface="Noto Sans CJK SC" pitchFamily="34" charset="0"/>
-                <a:ea typeface="Noto Sans CJK SC" pitchFamily="34" charset="-122"/>
-                <a:cs typeface="Noto Sans CJK SC" pitchFamily="34" charset="-120"/>
-              </a:rPr>
-              <a:t>• API_BASE_URL / API_KEY</a:t>
-            </a:r>
-            <a:endParaRPr lang="en-US" sz="1080" dirty="0"/>
-          </a:p>
-          <a:p>
-            <a:pPr marL="0" indent="0">
-              <a:buNone/>
-            </a:pPr>
-            <a:r>
-              <a:rPr lang="en-US" sz="1080" dirty="0">
-                <a:solidFill>
-                  <a:srgbClr val="F5F8FF"/>
-                </a:solidFill>
-                <a:latin typeface="Noto Sans CJK SC" pitchFamily="34" charset="0"/>
-                <a:ea typeface="Noto Sans CJK SC" pitchFamily="34" charset="-122"/>
-                <a:cs typeface="Noto Sans CJK SC" pitchFamily="34" charset="-120"/>
-              </a:rPr>
-              <a:t>• ROUTER_MODEL / INIT_MODEL / ANSWER_MODEL</a:t>
-            </a:r>
-            <a:endParaRPr lang="en-US" sz="1080" dirty="0"/>
-          </a:p>
-          <a:p>
-            <a:pPr marL="0" indent="0">
-              <a:buNone/>
-            </a:pPr>
-            <a:r>
-              <a:rPr lang="en-US" sz="1080" dirty="0">
-                <a:solidFill>
-                  <a:srgbClr val="F5F8FF"/>
-                </a:solidFill>
-                <a:latin typeface="Noto Sans CJK SC" pitchFamily="34" charset="0"/>
-                <a:ea typeface="Noto Sans CJK SC" pitchFamily="34" charset="-122"/>
-                <a:cs typeface="Noto Sans CJK SC" pitchFamily="34" charset="-120"/>
-              </a:rPr>
-              <a:t>• MAX_FILE_CHARS / ANSWER_WITH_IMAGES / MOCK_LLM</a:t>
-            </a:r>
-            <a:endParaRPr lang="en-US" sz="1080" dirty="0"/>
-          </a:p>
-        </p:txBody>
-      </p:sp>
-      <p:sp>
-        <p:nvSpPr>
-          <p:cNvPr id="10" name="Text 8"/>
-          <p:cNvSpPr/>
-          <p:nvPr/>
-        </p:nvSpPr>
-        <p:spPr>
-          <a:xfrm>
-            <a:off x="731520" y="3977640"/>
-            <a:ext cx="2011680" cy="292608"/>
-          </a:xfrm>
-          <a:prstGeom prst="rect">
-            <a:avLst/>
-          </a:prstGeom>
-          <a:noFill/>
-        </p:spPr>
-        <p:txBody>
-          <a:bodyPr wrap="square" lIns="635" tIns="635" rIns="635" bIns="635" rtlCol="0" anchor="t">
-            <a:normAutofit/>
-          </a:bodyPr>
-          <a:lstStyle/>
-          <a:p>
-            <a:pPr marL="0" indent="0">
-              <a:buNone/>
-            </a:pPr>
-            <a:r>
-              <a:rPr lang="en-US" sz="1300" b="1" dirty="0">
-                <a:solidFill>
-                  <a:srgbClr val="3DDC97"/>
-                </a:solidFill>
-                <a:latin typeface="Noto Sans CJK SC" pitchFamily="34" charset="0"/>
-                <a:ea typeface="Noto Sans CJK SC" pitchFamily="34" charset="-122"/>
-                <a:cs typeface="Noto Sans CJK SC" pitchFamily="34" charset="-120"/>
-              </a:rPr>
-              <a:t>3. 启动服务</a:t>
-            </a:r>
-            <a:endParaRPr lang="en-US" sz="1300" dirty="0"/>
-          </a:p>
-        </p:txBody>
-      </p:sp>
-      <p:sp>
-        <p:nvSpPr>
-          <p:cNvPr id="11" name="Text 9"/>
-          <p:cNvSpPr/>
-          <p:nvPr/>
-        </p:nvSpPr>
-        <p:spPr>
-          <a:xfrm>
-            <a:off x="777240" y="4434840"/>
-            <a:ext cx="5074920" cy="640080"/>
-          </a:xfrm>
-          <a:prstGeom prst="rect">
-            <a:avLst/>
-          </a:prstGeom>
-          <a:noFill/>
-        </p:spPr>
-        <p:txBody>
-          <a:bodyPr wrap="square" lIns="635" tIns="635" rIns="635" bIns="635" rtlCol="0" anchor="t">
-            <a:normAutofit/>
-          </a:bodyPr>
-          <a:lstStyle/>
-          <a:p>
-            <a:pPr marL="0" indent="0">
-              <a:buNone/>
-            </a:pPr>
-            <a:r>
-              <a:rPr lang="en-US" sz="1080" dirty="0">
-                <a:solidFill>
-                  <a:srgbClr val="E2E8F0"/>
-                </a:solidFill>
-                <a:latin typeface="Noto Sans CJK SC" pitchFamily="34" charset="0"/>
-                <a:ea typeface="Noto Sans CJK SC" pitchFamily="34" charset="-122"/>
-                <a:cs typeface="Noto Sans CJK SC" pitchFamily="34" charset="-120"/>
-              </a:rPr>
-              <a:t>uvicorn app.main:app --reload --host 0.0.0.0 --port 8000</a:t>
-            </a:r>
-            <a:endParaRPr lang="en-US" sz="1080" dirty="0"/>
-          </a:p>
-          <a:p>
-            <a:pPr marL="0" indent="0">
-              <a:buNone/>
-            </a:pPr>
-            <a:r>
-              <a:rPr lang="en-US" sz="1080" dirty="0">
-                <a:solidFill>
-                  <a:srgbClr val="E2E8F0"/>
-                </a:solidFill>
-                <a:latin typeface="Noto Sans CJK SC" pitchFamily="34" charset="0"/>
-                <a:ea typeface="Noto Sans CJK SC" pitchFamily="34" charset="-122"/>
-                <a:cs typeface="Noto Sans CJK SC" pitchFamily="34" charset="-120"/>
-              </a:rPr>
-              <a:t>或运行仓库根目录 start-server.ps1</a:t>
-            </a:r>
-            <a:endParaRPr lang="en-US" sz="1080" dirty="0"/>
-          </a:p>
-        </p:txBody>
-      </p:sp>
-      <p:sp>
-        <p:nvSpPr>
-          <p:cNvPr id="12" name="Text 10"/>
-          <p:cNvSpPr/>
-          <p:nvPr/>
-        </p:nvSpPr>
-        <p:spPr>
-          <a:xfrm>
-            <a:off x="6400800" y="1234440"/>
-            <a:ext cx="2377440" cy="292608"/>
-          </a:xfrm>
-          <a:prstGeom prst="rect">
-            <a:avLst/>
-          </a:prstGeom>
-          <a:noFill/>
-        </p:spPr>
-        <p:txBody>
-          <a:bodyPr wrap="square" lIns="635" tIns="635" rIns="635" bIns="635" rtlCol="0" anchor="t">
-            <a:normAutofit/>
-          </a:bodyPr>
-          <a:lstStyle/>
-          <a:p>
-            <a:pPr marL="0" indent="0">
-              <a:buNone/>
-            </a:pPr>
-            <a:r>
-              <a:rPr lang="en-US" sz="1300" b="1" dirty="0">
-                <a:solidFill>
-                  <a:srgbClr val="6EE7F9"/>
-                </a:solidFill>
-                <a:latin typeface="Noto Sans CJK SC" pitchFamily="34" charset="0"/>
-                <a:ea typeface="Noto Sans CJK SC" pitchFamily="34" charset="-122"/>
-                <a:cs typeface="Noto Sans CJK SC" pitchFamily="34" charset="-120"/>
-              </a:rPr>
-              <a:t>4. 新增 Agent 与问答</a:t>
-            </a:r>
-            <a:endParaRPr lang="en-US" sz="1300" dirty="0"/>
-          </a:p>
-        </p:txBody>
-      </p:sp>
-      <p:sp>
-        <p:nvSpPr>
-          <p:cNvPr id="13" name="Text 11"/>
-          <p:cNvSpPr/>
-          <p:nvPr/>
-        </p:nvSpPr>
-        <p:spPr>
-          <a:xfrm>
-            <a:off x="6446520" y="1719072"/>
-            <a:ext cx="1645920" cy="420624"/>
+              <a:rPr lang="en-US" sz="1250" dirty="0">
+                <a:solidFill>
+                  <a:srgbClr val="F5F8FF"/>
+                </a:solidFill>
+                <a:latin typeface="Noto Sans CJK SC" pitchFamily="34" charset="0"/>
+                <a:ea typeface="Noto Sans CJK SC" pitchFamily="34" charset="-122"/>
+                <a:cs typeface="Noto Sans CJK SC" pitchFamily="34" charset="-120"/>
+              </a:rPr>
+              <a:t>• 左侧用例列表显示每题得分/准确率，支持逐条运行。</a:t>
+            </a:r>
+            <a:endParaRPr lang="en-US" sz="1250" dirty="0"/>
+          </a:p>
+          <a:p>
+            <a:pPr marL="0" indent="0">
+              <a:buNone/>
+            </a:pPr>
+            <a:r>
+              <a:rPr lang="en-US" sz="1250" dirty="0">
+                <a:solidFill>
+                  <a:srgbClr val="F5F8FF"/>
+                </a:solidFill>
+                <a:latin typeface="Noto Sans CJK SC" pitchFamily="34" charset="0"/>
+                <a:ea typeface="Noto Sans CJK SC" pitchFamily="34" charset="-122"/>
+                <a:cs typeface="Noto Sans CJK SC" pitchFamily="34" charset="-120"/>
+              </a:rPr>
+              <a:t>• 中间展示模型回答，可检查是否调用正确 Agent。</a:t>
+            </a:r>
+            <a:endParaRPr lang="en-US" sz="1250" dirty="0"/>
+          </a:p>
+          <a:p>
+            <a:pPr marL="0" indent="0">
+              <a:buNone/>
+            </a:pPr>
+            <a:r>
+              <a:rPr lang="en-US" sz="1250" dirty="0">
+                <a:solidFill>
+                  <a:srgbClr val="F5F8FF"/>
+                </a:solidFill>
+                <a:latin typeface="Noto Sans CJK SC" pitchFamily="34" charset="0"/>
+                <a:ea typeface="Noto Sans CJK SC" pitchFamily="34" charset="-122"/>
+                <a:cs typeface="Noto Sans CJK SC" pitchFamily="34" charset="-120"/>
+              </a:rPr>
+              <a:t>• 右侧参考答案用于人工或模型辅助评估。</a:t>
+            </a:r>
+            <a:endParaRPr lang="en-US" sz="1250" dirty="0"/>
+          </a:p>
+          <a:p>
+            <a:pPr marL="0" indent="0">
+              <a:buNone/>
+            </a:pPr>
+            <a:r>
+              <a:rPr lang="en-US" sz="1250" dirty="0">
+                <a:solidFill>
+                  <a:srgbClr val="F5F8FF"/>
+                </a:solidFill>
+                <a:latin typeface="Noto Sans CJK SC" pitchFamily="34" charset="0"/>
+                <a:ea typeface="Noto Sans CJK SC" pitchFamily="34" charset="-122"/>
+                <a:cs typeface="Noto Sans CJK SC" pitchFamily="34" charset="-120"/>
+              </a:rPr>
+              <a:t>• 适合回归测试：改提示词、改切分范围后重新跑一遍。</a:t>
+            </a:r>
+            <a:endParaRPr lang="en-US" sz="1250" dirty="0"/>
+          </a:p>
+        </p:txBody>
+      </p:sp>
+      <p:sp>
+        <p:nvSpPr>
+          <p:cNvPr id="9" name="Text 6"/>
+          <p:cNvSpPr/>
+          <p:nvPr/>
+        </p:nvSpPr>
+        <p:spPr>
+          <a:xfrm>
+            <a:off x="8458200" y="4069080"/>
+            <a:ext cx="896112" cy="411480"/>
           </a:xfrm>
           <a:prstGeom prst="rect">
             <a:avLst/>
           </a:prstGeom>
           <a:solidFill>
-            <a:srgbClr val="1E3A5F"/>
+            <a:srgbClr val="26314A"/>
           </a:solidFill>
           <a:ln w="12700">
             <a:solidFill>
@@ -4798,36 +4373,43 @@
               <a:buNone/>
             </a:pPr>
             <a:r>
-              <a:rPr lang="en-US" sz="950" b="1" dirty="0">
-                <a:solidFill>
-                  <a:srgbClr val="F5F8FF"/>
-                </a:solidFill>
-                <a:latin typeface="Noto Sans CJK SC" pitchFamily="34" charset="0"/>
-                <a:ea typeface="Noto Sans CJK SC" pitchFamily="34" charset="-122"/>
-                <a:cs typeface="Noto Sans CJK SC" pitchFamily="34" charset="-120"/>
-              </a:rPr>
-              <a:t>POST /agents</a:t>
-            </a:r>
-            <a:endParaRPr lang="en-US" sz="950" dirty="0"/>
-          </a:p>
-        </p:txBody>
-      </p:sp>
-      <p:sp>
-        <p:nvSpPr>
-          <p:cNvPr id="14" name="Text 12"/>
-          <p:cNvSpPr/>
-          <p:nvPr/>
-        </p:nvSpPr>
-        <p:spPr>
-          <a:xfrm>
-            <a:off x="8458200" y="1719072"/>
-            <a:ext cx="1645920" cy="420624"/>
+              <a:rPr lang="en-US" sz="1060" b="1" dirty="0">
+                <a:solidFill>
+                  <a:srgbClr val="F5F8FF"/>
+                </a:solidFill>
+                <a:latin typeface="Noto Sans CJK SC" pitchFamily="34" charset="0"/>
+                <a:ea typeface="Noto Sans CJK SC" pitchFamily="34" charset="-122"/>
+                <a:cs typeface="Noto Sans CJK SC" pitchFamily="34" charset="-120"/>
+              </a:rPr>
+              <a:t>测试用例</a:t>
+            </a:r>
+            <a:endParaRPr lang="en-US" sz="1060" b="1" dirty="0">
+              <a:solidFill>
+                <a:srgbClr val="F5F8FF"/>
+              </a:solidFill>
+              <a:latin typeface="Noto Sans CJK SC" pitchFamily="34" charset="0"/>
+              <a:ea typeface="Noto Sans CJK SC" pitchFamily="34" charset="-122"/>
+              <a:cs typeface="Noto Sans CJK SC" pitchFamily="34" charset="-120"/>
+            </a:endParaRPr>
+          </a:p>
+        </p:txBody>
+      </p:sp>
+      <p:sp>
+        <p:nvSpPr>
+          <p:cNvPr id="10" name="Text 7"/>
+          <p:cNvSpPr/>
+          <p:nvPr/>
+        </p:nvSpPr>
+        <p:spPr>
+          <a:xfrm>
+            <a:off x="9528048" y="4069080"/>
+            <a:ext cx="896112" cy="411480"/>
           </a:xfrm>
           <a:prstGeom prst="rect">
             <a:avLst/>
           </a:prstGeom>
           <a:solidFill>
-            <a:srgbClr val="1E3A5F"/>
+            <a:srgbClr val="26314A"/>
           </a:solidFill>
           <a:ln w="12700">
             <a:solidFill>
@@ -4847,36 +4429,43 @@
               <a:buNone/>
             </a:pPr>
             <a:r>
-              <a:rPr lang="en-US" sz="950" b="1" dirty="0">
-                <a:solidFill>
-                  <a:srgbClr val="F5F8FF"/>
-                </a:solidFill>
-                <a:latin typeface="Noto Sans CJK SC" pitchFamily="34" charset="0"/>
-                <a:ea typeface="Noto Sans CJK SC" pitchFamily="34" charset="-122"/>
-                <a:cs typeface="Noto Sans CJK SC" pitchFamily="34" charset="-120"/>
-              </a:rPr>
-              <a:t>上传或注册文件</a:t>
-            </a:r>
-            <a:endParaRPr lang="en-US" sz="950" dirty="0"/>
-          </a:p>
-        </p:txBody>
-      </p:sp>
-      <p:sp>
-        <p:nvSpPr>
-          <p:cNvPr id="15" name="Text 13"/>
-          <p:cNvSpPr/>
-          <p:nvPr/>
-        </p:nvSpPr>
-        <p:spPr>
-          <a:xfrm>
-            <a:off x="6446520" y="2487168"/>
-            <a:ext cx="1645920" cy="420624"/>
+              <a:rPr lang="en-US" sz="1060" b="1" dirty="0">
+                <a:solidFill>
+                  <a:srgbClr val="F5F8FF"/>
+                </a:solidFill>
+                <a:latin typeface="Noto Sans CJK SC" pitchFamily="34" charset="0"/>
+                <a:ea typeface="Noto Sans CJK SC" pitchFamily="34" charset="-122"/>
+                <a:cs typeface="Noto Sans CJK SC" pitchFamily="34" charset="-120"/>
+              </a:rPr>
+              <a:t>运行问答</a:t>
+            </a:r>
+            <a:endParaRPr lang="en-US" sz="1060" b="1" dirty="0">
+              <a:solidFill>
+                <a:srgbClr val="F5F8FF"/>
+              </a:solidFill>
+              <a:latin typeface="Noto Sans CJK SC" pitchFamily="34" charset="0"/>
+              <a:ea typeface="Noto Sans CJK SC" pitchFamily="34" charset="-122"/>
+              <a:cs typeface="Noto Sans CJK SC" pitchFamily="34" charset="-120"/>
+            </a:endParaRPr>
+          </a:p>
+        </p:txBody>
+      </p:sp>
+      <p:sp>
+        <p:nvSpPr>
+          <p:cNvPr id="11" name="Text 8"/>
+          <p:cNvSpPr/>
+          <p:nvPr/>
+        </p:nvSpPr>
+        <p:spPr>
+          <a:xfrm>
+            <a:off x="10597896" y="4069080"/>
+            <a:ext cx="896112" cy="411480"/>
           </a:xfrm>
           <a:prstGeom prst="rect">
             <a:avLst/>
           </a:prstGeom>
           <a:solidFill>
-            <a:srgbClr val="1E3A5F"/>
+            <a:srgbClr val="26314A"/>
           </a:solidFill>
           <a:ln w="12700">
             <a:solidFill>
@@ -4896,79 +4485,37 @@
               <a:buNone/>
             </a:pPr>
             <a:r>
-              <a:rPr lang="en-US" sz="950" b="1" dirty="0">
-                <a:solidFill>
-                  <a:srgbClr val="F5F8FF"/>
-                </a:solidFill>
-                <a:latin typeface="Noto Sans CJK SC" pitchFamily="34" charset="0"/>
-                <a:ea typeface="Noto Sans CJK SC" pitchFamily="34" charset="-122"/>
-                <a:cs typeface="Noto Sans CJK SC" pitchFamily="34" charset="-120"/>
-              </a:rPr>
-              <a:t>POST /initialize</a:t>
-            </a:r>
-            <a:endParaRPr lang="en-US" sz="950" dirty="0"/>
-          </a:p>
-        </p:txBody>
-      </p:sp>
-      <p:sp>
-        <p:nvSpPr>
-          <p:cNvPr id="16" name="Text 14"/>
-          <p:cNvSpPr/>
-          <p:nvPr/>
-        </p:nvSpPr>
-        <p:spPr>
-          <a:xfrm>
-            <a:off x="8458200" y="2487168"/>
-            <a:ext cx="2011680" cy="420624"/>
-          </a:xfrm>
-          <a:prstGeom prst="rect">
-            <a:avLst/>
-          </a:prstGeom>
-          <a:solidFill>
-            <a:srgbClr val="1E3A5F"/>
-          </a:solidFill>
-          <a:ln w="12700">
-            <a:solidFill>
-              <a:srgbClr val="2B3658">
-                <a:alpha val="85000"/>
-              </a:srgbClr>
-            </a:solidFill>
-          </a:ln>
-        </p:spPr>
-        <p:txBody>
-          <a:bodyPr wrap="square" lIns="762" tIns="762" rIns="762" bIns="762" rtlCol="0" anchor="ctr">
-            <a:normAutofit/>
-          </a:bodyPr>
-          <a:lstStyle/>
-          <a:p>
-            <a:pPr marL="0" indent="0" algn="ctr">
-              <a:buNone/>
-            </a:pPr>
-            <a:r>
-              <a:rPr lang="en-US" sz="920" b="1" dirty="0">
-                <a:solidFill>
-                  <a:srgbClr val="F5F8FF"/>
-                </a:solidFill>
-                <a:latin typeface="Noto Sans CJK SC" pitchFamily="34" charset="0"/>
-                <a:ea typeface="Noto Sans CJK SC" pitchFamily="34" charset="-122"/>
-                <a:cs typeface="Noto Sans CJK SC" pitchFamily="34" charset="-120"/>
-              </a:rPr>
-              <a:t>POST /ask 或 /ask/stream</a:t>
-            </a:r>
-            <a:endParaRPr lang="en-US" sz="920" dirty="0"/>
-          </a:p>
-        </p:txBody>
-      </p:sp>
-      <p:sp>
-        <p:nvSpPr>
-          <p:cNvPr id="17" name="Shape 15"/>
-          <p:cNvSpPr/>
-          <p:nvPr/>
-        </p:nvSpPr>
-        <p:spPr>
-          <a:xfrm>
-            <a:off x="8092440" y="1929384"/>
-            <a:ext cx="310896" cy="0"/>
+              <a:rPr lang="en-US" sz="1060" b="1" dirty="0">
+                <a:solidFill>
+                  <a:srgbClr val="F5F8FF"/>
+                </a:solidFill>
+                <a:latin typeface="Noto Sans CJK SC" pitchFamily="34" charset="0"/>
+                <a:ea typeface="Noto Sans CJK SC" pitchFamily="34" charset="-122"/>
+                <a:cs typeface="Noto Sans CJK SC" pitchFamily="34" charset="-120"/>
+              </a:rPr>
+              <a:t>评分反馈</a:t>
+            </a:r>
+            <a:endParaRPr lang="en-US" sz="1060" b="1" dirty="0">
+              <a:solidFill>
+                <a:srgbClr val="F5F8FF"/>
+              </a:solidFill>
+              <a:latin typeface="Noto Sans CJK SC" pitchFamily="34" charset="0"/>
+              <a:ea typeface="Noto Sans CJK SC" pitchFamily="34" charset="-122"/>
+              <a:cs typeface="Noto Sans CJK SC" pitchFamily="34" charset="-120"/>
+            </a:endParaRPr>
+          </a:p>
+        </p:txBody>
+      </p:sp>
+      <p:sp>
+        <p:nvSpPr>
+          <p:cNvPr id="12" name="Shape 9"/>
+          <p:cNvSpPr/>
+          <p:nvPr/>
+        </p:nvSpPr>
+        <p:spPr>
+          <a:xfrm>
+            <a:off x="9363456" y="4279392"/>
+            <a:ext cx="137160" cy="0"/>
           </a:xfrm>
           <a:prstGeom prst="line">
             <a:avLst/>
@@ -4985,14 +4532,14 @@
       </p:sp>
       <p:sp>
         <p:nvSpPr>
-          <p:cNvPr id="18" name="Shape 16"/>
-          <p:cNvSpPr/>
-          <p:nvPr/>
-        </p:nvSpPr>
-        <p:spPr>
-          <a:xfrm>
-            <a:off x="8092440" y="2697480"/>
-            <a:ext cx="310896" cy="0"/>
+          <p:cNvPr id="13" name="Shape 10"/>
+          <p:cNvSpPr/>
+          <p:nvPr/>
+        </p:nvSpPr>
+        <p:spPr>
+          <a:xfrm>
+            <a:off x="10433304" y="4279392"/>
+            <a:ext cx="137160" cy="0"/>
           </a:xfrm>
           <a:prstGeom prst="line">
             <a:avLst/>
@@ -5009,155 +4556,54 @@
       </p:sp>
       <p:sp>
         <p:nvSpPr>
-          <p:cNvPr id="19" name="Text 17"/>
-          <p:cNvSpPr/>
-          <p:nvPr/>
-        </p:nvSpPr>
-        <p:spPr>
-          <a:xfrm>
-            <a:off x="6400800" y="3657600"/>
-            <a:ext cx="2011680" cy="292608"/>
-          </a:xfrm>
-          <a:prstGeom prst="rect">
-            <a:avLst/>
-          </a:prstGeom>
-          <a:noFill/>
-        </p:spPr>
-        <p:txBody>
-          <a:bodyPr wrap="square" lIns="635" tIns="635" rIns="635" bIns="635" rtlCol="0" anchor="t">
+          <p:cNvPr id="14" name="Text 11"/>
+          <p:cNvSpPr/>
+          <p:nvPr/>
+        </p:nvSpPr>
+        <p:spPr>
+          <a:xfrm>
+            <a:off x="548640" y="5394960"/>
+            <a:ext cx="7406640" cy="256032"/>
+          </a:xfrm>
+          <a:prstGeom prst="rect">
+            <a:avLst/>
+          </a:prstGeom>
+          <a:noFill/>
+        </p:spPr>
+        <p:txBody>
+          <a:bodyPr wrap="square" lIns="0" tIns="0" rIns="0" bIns="0" rtlCol="0" anchor="ctr">
             <a:normAutofit/>
           </a:bodyPr>
           <a:lstStyle/>
           <a:p>
-            <a:pPr marL="0" indent="0">
-              <a:buNone/>
-            </a:pPr>
-            <a:r>
-              <a:rPr lang="en-US" sz="1300" b="1" dirty="0">
-                <a:solidFill>
-                  <a:srgbClr val="A78BFA"/>
-                </a:solidFill>
-                <a:latin typeface="Noto Sans CJK SC" pitchFamily="34" charset="0"/>
-                <a:ea typeface="Noto Sans CJK SC" pitchFamily="34" charset="-122"/>
-                <a:cs typeface="Noto Sans CJK SC" pitchFamily="34" charset="-120"/>
-              </a:rPr>
-              <a:t>常用入口</a:t>
-            </a:r>
-            <a:endParaRPr lang="en-US" sz="1300" dirty="0"/>
-          </a:p>
-        </p:txBody>
-      </p:sp>
-      <p:sp>
-        <p:nvSpPr>
-          <p:cNvPr id="20" name="Text 18"/>
-          <p:cNvSpPr/>
-          <p:nvPr/>
-        </p:nvSpPr>
-        <p:spPr>
-          <a:xfrm>
-            <a:off x="6446520" y="4069080"/>
-            <a:ext cx="4389120" cy="1463040"/>
-          </a:xfrm>
-          <a:prstGeom prst="rect">
-            <a:avLst/>
-          </a:prstGeom>
-          <a:noFill/>
-        </p:spPr>
-        <p:txBody>
-          <a:bodyPr wrap="square" lIns="635" tIns="635" rIns="635" bIns="635" rtlCol="0" anchor="t">
-            <a:normAutofit/>
-          </a:bodyPr>
-          <a:lstStyle/>
-          <a:p>
-            <a:pPr marL="0" indent="0">
-              <a:buNone/>
-            </a:pPr>
-            <a:r>
-              <a:rPr lang="en-US" sz="1080" dirty="0">
-                <a:solidFill>
-                  <a:srgbClr val="F5F8FF"/>
-                </a:solidFill>
-                <a:latin typeface="Noto Sans CJK SC" pitchFamily="34" charset="0"/>
-                <a:ea typeface="Noto Sans CJK SC" pitchFamily="34" charset="-122"/>
-                <a:cs typeface="Noto Sans CJK SC" pitchFamily="34" charset="-120"/>
-              </a:rPr>
-              <a:t>• GET /health：健康检查</a:t>
-            </a:r>
-            <a:endParaRPr lang="en-US" sz="1080" dirty="0"/>
-          </a:p>
-          <a:p>
-            <a:pPr marL="0" indent="0">
-              <a:buNone/>
-            </a:pPr>
-            <a:r>
-              <a:rPr lang="en-US" sz="1080" dirty="0">
-                <a:solidFill>
-                  <a:srgbClr val="F5F8FF"/>
-                </a:solidFill>
-                <a:latin typeface="Noto Sans CJK SC" pitchFamily="34" charset="0"/>
-                <a:ea typeface="Noto Sans CJK SC" pitchFamily="34" charset="-122"/>
-                <a:cs typeface="Noto Sans CJK SC" pitchFamily="34" charset="-120"/>
-              </a:rPr>
-              <a:t>• Web 控制台：http://127.0.0.1:8000/</a:t>
-            </a:r>
-            <a:endParaRPr lang="en-US" sz="1080" dirty="0"/>
-          </a:p>
-          <a:p>
-            <a:pPr marL="0" indent="0">
-              <a:buNone/>
-            </a:pPr>
-            <a:r>
-              <a:rPr lang="en-US" sz="1080" dirty="0">
-                <a:solidFill>
-                  <a:srgbClr val="F5F8FF"/>
-                </a:solidFill>
-                <a:latin typeface="Noto Sans CJK SC" pitchFamily="34" charset="0"/>
-                <a:ea typeface="Noto Sans CJK SC" pitchFamily="34" charset="-122"/>
-                <a:cs typeface="Noto Sans CJK SC" pitchFamily="34" charset="-120"/>
-              </a:rPr>
-              <a:t>• GET /agents：查看 Agent 列表</a:t>
-            </a:r>
-            <a:endParaRPr lang="en-US" sz="1080" dirty="0"/>
-          </a:p>
-          <a:p>
-            <a:pPr marL="0" indent="0">
-              <a:buNone/>
-            </a:pPr>
-            <a:r>
-              <a:rPr lang="en-US" sz="1080" dirty="0">
-                <a:solidFill>
-                  <a:srgbClr val="F5F8FF"/>
-                </a:solidFill>
-                <a:latin typeface="Noto Sans CJK SC" pitchFamily="34" charset="0"/>
-                <a:ea typeface="Noto Sans CJK SC" pitchFamily="34" charset="-122"/>
-                <a:cs typeface="Noto Sans CJK SC" pitchFamily="34" charset="-120"/>
-              </a:rPr>
-              <a:t>• GET /preview：渲染 PDF 指定页</a:t>
-            </a:r>
-            <a:endParaRPr lang="en-US" sz="1080" dirty="0"/>
-          </a:p>
-          <a:p>
-            <a:pPr marL="0" indent="0">
-              <a:buNone/>
-            </a:pPr>
-            <a:r>
-              <a:rPr lang="en-US" sz="1080" dirty="0">
-                <a:solidFill>
-                  <a:srgbClr val="F5F8FF"/>
-                </a:solidFill>
-                <a:latin typeface="Noto Sans CJK SC" pitchFamily="34" charset="0"/>
-                <a:ea typeface="Noto Sans CJK SC" pitchFamily="34" charset="-122"/>
-                <a:cs typeface="Noto Sans CJK SC" pitchFamily="34" charset="-120"/>
-              </a:rPr>
-              <a:t>• POST /batch/tests/import：批量导入用例</a:t>
-            </a:r>
-            <a:endParaRPr lang="en-US" sz="1080" dirty="0"/>
-          </a:p>
-        </p:txBody>
-      </p:sp>
-      <p:sp>
-        <p:nvSpPr>
-          <p:cNvPr id="21" name="Text 19"/>
+            <a:pPr marL="0" indent="0" algn="ctr">
+              <a:buNone/>
+            </a:pPr>
+            <a:r>
+              <a:rPr lang="en-US" sz="1050" dirty="0">
+                <a:solidFill>
+                  <a:srgbClr val="AAB6D3"/>
+                </a:solidFill>
+                <a:latin typeface="Noto Sans CJK SC" pitchFamily="34" charset="0"/>
+                <a:ea typeface="Noto Sans CJK SC" pitchFamily="34" charset="-122"/>
+                <a:cs typeface="Noto Sans CJK SC" pitchFamily="34" charset="-120"/>
+              </a:rPr>
+              <a:t>批量测试页：用例列表、模型回答、参考答案与文件预览</a:t>
+            </a:r>
+            <a:endParaRPr lang="en-US" sz="1050" dirty="0">
+              <a:solidFill>
+                <a:srgbClr val="AAB6D3"/>
+              </a:solidFill>
+              <a:latin typeface="Noto Sans CJK SC" pitchFamily="34" charset="0"/>
+              <a:ea typeface="Noto Sans CJK SC" pitchFamily="34" charset="-122"/>
+              <a:cs typeface="Noto Sans CJK SC" pitchFamily="34" charset="-120"/>
+            </a:endParaRPr>
+          </a:p>
+        </p:txBody>
+      </p:sp>
+      <p:sp>
+        <p:nvSpPr>
+          <p:cNvPr id="15" name="Text 12"/>
           <p:cNvSpPr/>
           <p:nvPr/>
         </p:nvSpPr>
@@ -5187,7 +4633,7 @@
                 <a:ea typeface="Noto Sans CJK SC" pitchFamily="34" charset="-122"/>
                 <a:cs typeface="Noto Sans CJK SC" pitchFamily="34" charset="-120"/>
               </a:rPr>
-              <a:t>README 提供了依赖安装、.env 配置、uvicorn 启动命令、Web 控制台入口，以及 /ask、/agents、/files、/batch 等 API。</a:t>
+              <a:t>README 中的批量测试 API 包含测试列表、创建、导入、更新、删除、运行单条并评估准确率等接口。</a:t>
             </a:r>
             <a:endParaRPr lang="en-US" sz="730" dirty="0"/>
           </a:p>
@@ -5195,7 +4641,7 @@
       </p:sp>
       <p:sp>
         <p:nvSpPr>
-          <p:cNvPr id="22" name="Text 20"/>
+          <p:cNvPr id="16" name="Text 13"/>
           <p:cNvSpPr/>
           <p:nvPr/>
         </p:nvSpPr>
@@ -5225,7 +4671,7 @@
                 <a:ea typeface="Noto Sans CJK SC" pitchFamily="34" charset="-122"/>
                 <a:cs typeface="Noto Sans CJK SC" pitchFamily="34" charset="-120"/>
               </a:rPr>
-              <a:t>13</a:t>
+              <a:t>12</a:t>
             </a:r>
             <a:endParaRPr lang="en-US" sz="800" dirty="0"/>
           </a:p>
@@ -5325,7 +4771,7 @@
                 <a:ea typeface="Noto Sans CJK SC" pitchFamily="34" charset="-122"/>
                 <a:cs typeface="Noto Sans CJK SC" pitchFamily="34" charset="-120"/>
               </a:rPr>
-              <a:t>实现方式：后端按职责拆模块，前端按工作台拆页面</a:t>
+              <a:t>使用方法：从安装启动到新增 Agent 的完整路径</a:t>
             </a:r>
             <a:endParaRPr lang="en-US" sz="2500" dirty="0"/>
           </a:p>
@@ -5365,7 +4811,7 @@
                 <a:ea typeface="Noto Sans CJK SC" pitchFamily="34" charset="-122"/>
                 <a:cs typeface="Noto Sans CJK SC" pitchFamily="34" charset="-120"/>
               </a:rPr>
-              <a:t>项目是轻量级全栈实现，核心复杂度集中在文件抽取、初始化、路由和引用渲染</a:t>
+              <a:t>适合本地演示，也可通过 API 集成到其他系统</a:t>
             </a:r>
             <a:endParaRPr lang="en-US" sz="950" dirty="0"/>
           </a:p>
@@ -5443,7 +4889,7 @@
                 <a:ea typeface="Noto Sans CJK SC" pitchFamily="34" charset="-122"/>
                 <a:cs typeface="Noto Sans CJK SC" pitchFamily="34" charset="-120"/>
               </a:rPr>
-              <a:t>后端模块</a:t>
+              <a:t>1. 安装依赖</a:t>
             </a:r>
             <a:endParaRPr lang="en-US" sz="1300" dirty="0"/>
           </a:p>
@@ -5458,7 +4904,7 @@
         <p:spPr>
           <a:xfrm>
             <a:off x="777240" y="1691640"/>
-            <a:ext cx="4160520" cy="2468880"/>
+            <a:ext cx="5120640" cy="411480"/>
           </a:xfrm>
           <a:prstGeom prst="rect">
             <a:avLst/>
@@ -5475,119 +4921,17 @@
               <a:buNone/>
             </a:pPr>
             <a:r>
-              <a:rPr lang="en-US" sz="1110" dirty="0">
-                <a:solidFill>
-                  <a:srgbClr val="F5F8FF"/>
-                </a:solidFill>
-                <a:latin typeface="Noto Sans CJK SC" pitchFamily="34" charset="0"/>
-                <a:ea typeface="Noto Sans CJK SC" pitchFamily="34" charset="-122"/>
-                <a:cs typeface="Noto Sans CJK SC" pitchFamily="34" charset="-120"/>
-              </a:rPr>
-              <a:t>• main.py：路由入口与 API 注册</a:t>
-            </a:r>
-            <a:endParaRPr lang="en-US" sz="1110" dirty="0"/>
-          </a:p>
-          <a:p>
-            <a:pPr marL="0" indent="0">
-              <a:buNone/>
-            </a:pPr>
-            <a:r>
-              <a:rPr lang="en-US" sz="1110" dirty="0">
-                <a:solidFill>
-                  <a:srgbClr val="F5F8FF"/>
-                </a:solidFill>
-                <a:latin typeface="Noto Sans CJK SC" pitchFamily="34" charset="0"/>
-                <a:ea typeface="Noto Sans CJK SC" pitchFamily="34" charset="-122"/>
-                <a:cs typeface="Noto Sans CJK SC" pitchFamily="34" charset="-120"/>
-              </a:rPr>
-              <a:t>• llm_client.py：OpenAI 兼容模型调用</a:t>
-            </a:r>
-            <a:endParaRPr lang="en-US" sz="1110" dirty="0"/>
-          </a:p>
-          <a:p>
-            <a:pPr marL="0" indent="0">
-              <a:buNone/>
-            </a:pPr>
-            <a:r>
-              <a:rPr lang="en-US" sz="1110" dirty="0">
-                <a:solidFill>
-                  <a:srgbClr val="F5F8FF"/>
-                </a:solidFill>
-                <a:latin typeface="Noto Sans CJK SC" pitchFamily="34" charset="0"/>
-                <a:ea typeface="Noto Sans CJK SC" pitchFamily="34" charset="-122"/>
-                <a:cs typeface="Noto Sans CJK SC" pitchFamily="34" charset="-120"/>
-              </a:rPr>
-              <a:t>• initializer.py：生成 route_questions</a:t>
-            </a:r>
-            <a:endParaRPr lang="en-US" sz="1110" dirty="0"/>
-          </a:p>
-          <a:p>
-            <a:pPr marL="0" indent="0">
-              <a:buNone/>
-            </a:pPr>
-            <a:r>
-              <a:rPr lang="en-US" sz="1110" dirty="0">
-                <a:solidFill>
-                  <a:srgbClr val="F5F8FF"/>
-                </a:solidFill>
-                <a:latin typeface="Noto Sans CJK SC" pitchFamily="34" charset="0"/>
-                <a:ea typeface="Noto Sans CJK SC" pitchFamily="34" charset="-122"/>
-                <a:cs typeface="Noto Sans CJK SC" pitchFamily="34" charset="-120"/>
-              </a:rPr>
-              <a:t>• router.py：根据问题选择 Agent</a:t>
-            </a:r>
-            <a:endParaRPr lang="en-US" sz="1110" dirty="0"/>
-          </a:p>
-          <a:p>
-            <a:pPr marL="0" indent="0">
-              <a:buNone/>
-            </a:pPr>
-            <a:r>
-              <a:rPr lang="en-US" sz="1110" dirty="0">
-                <a:solidFill>
-                  <a:srgbClr val="F5F8FF"/>
-                </a:solidFill>
-                <a:latin typeface="Noto Sans CJK SC" pitchFamily="34" charset="0"/>
-                <a:ea typeface="Noto Sans CJK SC" pitchFamily="34" charset="-122"/>
-                <a:cs typeface="Noto Sans CJK SC" pitchFamily="34" charset="-120"/>
-              </a:rPr>
-              <a:t>• agent_runner.py：回答阶段调用</a:t>
-            </a:r>
-            <a:endParaRPr lang="en-US" sz="1110" dirty="0"/>
-          </a:p>
-          <a:p>
-            <a:pPr marL="0" indent="0">
-              <a:buNone/>
-            </a:pPr>
-            <a:r>
-              <a:rPr lang="en-US" sz="1110" dirty="0">
-                <a:solidFill>
-                  <a:srgbClr val="F5F8FF"/>
-                </a:solidFill>
-                <a:latin typeface="Noto Sans CJK SC" pitchFamily="34" charset="0"/>
-                <a:ea typeface="Noto Sans CJK SC" pitchFamily="34" charset="-122"/>
-                <a:cs typeface="Noto Sans CJK SC" pitchFamily="34" charset="-120"/>
-              </a:rPr>
-              <a:t>• knowledge_loader.py / file_loader.py：知识读取</a:t>
-            </a:r>
-            <a:endParaRPr lang="en-US" sz="1110" dirty="0"/>
-          </a:p>
-          <a:p>
-            <a:pPr marL="0" indent="0">
-              <a:buNone/>
-            </a:pPr>
-            <a:r>
-              <a:rPr lang="en-US" sz="1110" dirty="0">
-                <a:solidFill>
-                  <a:srgbClr val="F5F8FF"/>
-                </a:solidFill>
-                <a:latin typeface="Noto Sans CJK SC" pitchFamily="34" charset="0"/>
-                <a:ea typeface="Noto Sans CJK SC" pitchFamily="34" charset="-122"/>
-                <a:cs typeface="Noto Sans CJK SC" pitchFamily="34" charset="-120"/>
-              </a:rPr>
-              <a:t>• batch_evaluator.py：批量评估</a:t>
-            </a:r>
-            <a:endParaRPr lang="en-US" sz="1110" dirty="0"/>
+              <a:rPr lang="en-US" sz="1050" dirty="0">
+                <a:solidFill>
+                  <a:srgbClr val="E2E8F0"/>
+                </a:solidFill>
+                <a:latin typeface="Noto Sans CJK SC" pitchFamily="34" charset="0"/>
+                <a:ea typeface="Noto Sans CJK SC" pitchFamily="34" charset="-122"/>
+                <a:cs typeface="Noto Sans CJK SC" pitchFamily="34" charset="-120"/>
+              </a:rPr>
+              <a:t>pip install fastapi uvicorn python-dotenv openai pydantic pymupdf python-docx openpyxl pytest httpx</a:t>
+            </a:r>
+            <a:endParaRPr lang="en-US" sz="1050" dirty="0"/>
           </a:p>
         </p:txBody>
       </p:sp>
@@ -5599,7 +4943,7 @@
         </p:nvSpPr>
         <p:spPr>
           <a:xfrm>
-            <a:off x="5623560" y="1234440"/>
+            <a:off x="731520" y="2377440"/>
             <a:ext cx="2011680" cy="292608"/>
           </a:xfrm>
           <a:prstGeom prst="rect">
@@ -5625,7 +4969,7 @@
                 <a:ea typeface="Noto Sans CJK SC" pitchFamily="34" charset="-122"/>
                 <a:cs typeface="Noto Sans CJK SC" pitchFamily="34" charset="-120"/>
               </a:rPr>
-              <a:t>前端模块</a:t>
+              <a:t>2. 配置 .env</a:t>
             </a:r>
             <a:endParaRPr lang="en-US" sz="1300" dirty="0"/>
           </a:p>
@@ -5639,8 +4983,8 @@
         </p:nvSpPr>
         <p:spPr>
           <a:xfrm>
-            <a:off x="5669280" y="1691640"/>
-            <a:ext cx="4160520" cy="2468880"/>
+            <a:off x="777240" y="2788920"/>
+            <a:ext cx="4617720" cy="960120"/>
           </a:xfrm>
           <a:prstGeom prst="rect">
             <a:avLst/>
@@ -5657,213 +5001,586 @@
               <a:buNone/>
             </a:pPr>
             <a:r>
-              <a:rPr lang="en-US" sz="1110" dirty="0">
-                <a:solidFill>
-                  <a:srgbClr val="F5F8FF"/>
-                </a:solidFill>
-                <a:latin typeface="Noto Sans CJK SC" pitchFamily="34" charset="0"/>
-                <a:ea typeface="Noto Sans CJK SC" pitchFamily="34" charset="-122"/>
-                <a:cs typeface="Noto Sans CJK SC" pitchFamily="34" charset="-120"/>
-              </a:rPr>
-              <a:t>• index.html：工作台入口</a:t>
-            </a:r>
-            <a:endParaRPr lang="en-US" sz="1110" dirty="0"/>
-          </a:p>
-          <a:p>
-            <a:pPr marL="0" indent="0">
-              <a:buNone/>
-            </a:pPr>
-            <a:r>
-              <a:rPr lang="en-US" sz="1110" dirty="0">
-                <a:solidFill>
-                  <a:srgbClr val="F5F8FF"/>
-                </a:solidFill>
-                <a:latin typeface="Noto Sans CJK SC" pitchFamily="34" charset="0"/>
-                <a:ea typeface="Noto Sans CJK SC" pitchFamily="34" charset="-122"/>
-                <a:cs typeface="Noto Sans CJK SC" pitchFamily="34" charset="-120"/>
-              </a:rPr>
-              <a:t>• test.js：单问题测试</a:t>
-            </a:r>
-            <a:endParaRPr lang="en-US" sz="1110" dirty="0"/>
-          </a:p>
-          <a:p>
-            <a:pPr marL="0" indent="0">
-              <a:buNone/>
-            </a:pPr>
-            <a:r>
-              <a:rPr lang="en-US" sz="1110" dirty="0">
-                <a:solidFill>
-                  <a:srgbClr val="F5F8FF"/>
-                </a:solidFill>
-                <a:latin typeface="Noto Sans CJK SC" pitchFamily="34" charset="0"/>
-                <a:ea typeface="Noto Sans CJK SC" pitchFamily="34" charset="-122"/>
-                <a:cs typeface="Noto Sans CJK SC" pitchFamily="34" charset="-120"/>
-              </a:rPr>
-              <a:t>• manage.js：Agent 与文件管理</a:t>
-            </a:r>
-            <a:endParaRPr lang="en-US" sz="1110" dirty="0"/>
-          </a:p>
-          <a:p>
-            <a:pPr marL="0" indent="0">
-              <a:buNone/>
-            </a:pPr>
-            <a:r>
-              <a:rPr lang="en-US" sz="1110" dirty="0">
-                <a:solidFill>
-                  <a:srgbClr val="F5F8FF"/>
-                </a:solidFill>
-                <a:latin typeface="Noto Sans CJK SC" pitchFamily="34" charset="0"/>
-                <a:ea typeface="Noto Sans CJK SC" pitchFamily="34" charset="-122"/>
-                <a:cs typeface="Noto Sans CJK SC" pitchFamily="34" charset="-120"/>
-              </a:rPr>
-              <a:t>• batch.js：批量测试</a:t>
-            </a:r>
-            <a:endParaRPr lang="en-US" sz="1110" dirty="0"/>
-          </a:p>
-          <a:p>
-            <a:pPr marL="0" indent="0">
-              <a:buNone/>
-            </a:pPr>
-            <a:r>
-              <a:rPr lang="en-US" sz="1110" dirty="0">
-                <a:solidFill>
-                  <a:srgbClr val="F5F8FF"/>
-                </a:solidFill>
-                <a:latin typeface="Noto Sans CJK SC" pitchFamily="34" charset="0"/>
-                <a:ea typeface="Noto Sans CJK SC" pitchFamily="34" charset="-122"/>
-                <a:cs typeface="Noto Sans CJK SC" pitchFamily="34" charset="-120"/>
-              </a:rPr>
-              <a:t>• answerRender.js：答案与图片渲染</a:t>
-            </a:r>
-            <a:endParaRPr lang="en-US" sz="1110" dirty="0"/>
-          </a:p>
-          <a:p>
-            <a:pPr marL="0" indent="0">
-              <a:buNone/>
-            </a:pPr>
-            <a:r>
-              <a:rPr lang="en-US" sz="1110" dirty="0">
-                <a:solidFill>
-                  <a:srgbClr val="F5F8FF"/>
-                </a:solidFill>
-                <a:latin typeface="Noto Sans CJK SC" pitchFamily="34" charset="0"/>
-                <a:ea typeface="Noto Sans CJK SC" pitchFamily="34" charset="-122"/>
-                <a:cs typeface="Noto Sans CJK SC" pitchFamily="34" charset="-120"/>
-              </a:rPr>
-              <a:t>• filePreview.js：PDF/图片/媒体预览</a:t>
-            </a:r>
-            <a:endParaRPr lang="en-US" sz="1110" dirty="0"/>
-          </a:p>
-          <a:p>
-            <a:pPr marL="0" indent="0">
-              <a:buNone/>
-            </a:pPr>
-            <a:r>
-              <a:rPr lang="en-US" sz="1110" dirty="0">
-                <a:solidFill>
-                  <a:srgbClr val="F5F8FF"/>
-                </a:solidFill>
-                <a:latin typeface="Noto Sans CJK SC" pitchFamily="34" charset="0"/>
-                <a:ea typeface="Noto Sans CJK SC" pitchFamily="34" charset="-122"/>
-                <a:cs typeface="Noto Sans CJK SC" pitchFamily="34" charset="-120"/>
-              </a:rPr>
-              <a:t>• styles.css：深色控制台样式</a:t>
-            </a:r>
-            <a:endParaRPr lang="en-US" sz="1110" dirty="0"/>
-          </a:p>
-        </p:txBody>
-      </p:sp>
-      <p:pic>
-        <p:nvPicPr>
-          <p:cNvPr id="10" name="Image 0" descr="/mnt/data/ppt_assets/batch_ref.jpg"/>
-          <p:cNvPicPr>
-            <a:picLocks noChangeAspect="1"/>
-          </p:cNvPicPr>
-          <p:nvPr/>
-        </p:nvPicPr>
-        <p:blipFill>
-          <a:blip r:embed="rId1"/>
-          <a:stretch>
-            <a:fillRect/>
-          </a:stretch>
-        </p:blipFill>
-        <p:spPr>
-          <a:xfrm>
-            <a:off x="2701925" y="3027680"/>
-            <a:ext cx="2199640" cy="2733040"/>
-          </a:xfrm>
-          <a:prstGeom prst="rect">
-            <a:avLst/>
-          </a:prstGeom>
-        </p:spPr>
-      </p:pic>
-      <p:pic>
-        <p:nvPicPr>
-          <p:cNvPr id="11" name="Image 1" descr="/mnt/data/ppt_assets/single_sidebar.jpg"/>
-          <p:cNvPicPr>
-            <a:picLocks noChangeAspect="1"/>
-          </p:cNvPicPr>
-          <p:nvPr/>
-        </p:nvPicPr>
-        <p:blipFill>
-          <a:blip r:embed="rId2"/>
-          <a:stretch>
-            <a:fillRect/>
-          </a:stretch>
-        </p:blipFill>
-        <p:spPr>
-          <a:xfrm>
-            <a:off x="7094855" y="2909570"/>
-            <a:ext cx="1417320" cy="3207385"/>
-          </a:xfrm>
-          <a:prstGeom prst="rect">
-            <a:avLst/>
-          </a:prstGeom>
-        </p:spPr>
-      </p:pic>
-      <p:sp>
-        <p:nvSpPr>
-          <p:cNvPr id="12" name="Text 8"/>
-          <p:cNvSpPr/>
-          <p:nvPr/>
-        </p:nvSpPr>
-        <p:spPr>
-          <a:xfrm>
-            <a:off x="914400" y="5760720"/>
-            <a:ext cx="8046720" cy="256032"/>
-          </a:xfrm>
-          <a:prstGeom prst="rect">
-            <a:avLst/>
-          </a:prstGeom>
-          <a:noFill/>
-        </p:spPr>
-        <p:txBody>
-          <a:bodyPr wrap="square" lIns="0" tIns="0" rIns="0" bIns="0" rtlCol="0" anchor="ctr">
+              <a:rPr lang="en-US" sz="1080" dirty="0">
+                <a:solidFill>
+                  <a:srgbClr val="F5F8FF"/>
+                </a:solidFill>
+                <a:latin typeface="Noto Sans CJK SC" pitchFamily="34" charset="0"/>
+                <a:ea typeface="Noto Sans CJK SC" pitchFamily="34" charset="-122"/>
+                <a:cs typeface="Noto Sans CJK SC" pitchFamily="34" charset="-120"/>
+              </a:rPr>
+              <a:t>• API_BASE_URL / API_KEY</a:t>
+            </a:r>
+            <a:endParaRPr lang="en-US" sz="1080" dirty="0"/>
+          </a:p>
+          <a:p>
+            <a:pPr marL="0" indent="0">
+              <a:buNone/>
+            </a:pPr>
+            <a:r>
+              <a:rPr lang="en-US" sz="1080" dirty="0">
+                <a:solidFill>
+                  <a:srgbClr val="F5F8FF"/>
+                </a:solidFill>
+                <a:latin typeface="Noto Sans CJK SC" pitchFamily="34" charset="0"/>
+                <a:ea typeface="Noto Sans CJK SC" pitchFamily="34" charset="-122"/>
+                <a:cs typeface="Noto Sans CJK SC" pitchFamily="34" charset="-120"/>
+              </a:rPr>
+              <a:t>• ROUTER_MODEL / INIT_MODEL / ANSWER_MODEL</a:t>
+            </a:r>
+            <a:endParaRPr lang="en-US" sz="1080" dirty="0"/>
+          </a:p>
+          <a:p>
+            <a:pPr marL="0" indent="0">
+              <a:buNone/>
+            </a:pPr>
+            <a:r>
+              <a:rPr lang="en-US" sz="1080" dirty="0">
+                <a:solidFill>
+                  <a:srgbClr val="F5F8FF"/>
+                </a:solidFill>
+                <a:latin typeface="Noto Sans CJK SC" pitchFamily="34" charset="0"/>
+                <a:ea typeface="Noto Sans CJK SC" pitchFamily="34" charset="-122"/>
+                <a:cs typeface="Noto Sans CJK SC" pitchFamily="34" charset="-120"/>
+              </a:rPr>
+              <a:t>• MAX_FILE_CHARS / ANSWER_WITH_IMAGES / MOCK_LLM</a:t>
+            </a:r>
+            <a:endParaRPr lang="en-US" sz="1080" dirty="0"/>
+          </a:p>
+        </p:txBody>
+      </p:sp>
+      <p:sp>
+        <p:nvSpPr>
+          <p:cNvPr id="10" name="Text 8"/>
+          <p:cNvSpPr/>
+          <p:nvPr/>
+        </p:nvSpPr>
+        <p:spPr>
+          <a:xfrm>
+            <a:off x="731520" y="3977640"/>
+            <a:ext cx="2011680" cy="292608"/>
+          </a:xfrm>
+          <a:prstGeom prst="rect">
+            <a:avLst/>
+          </a:prstGeom>
+          <a:noFill/>
+        </p:spPr>
+        <p:txBody>
+          <a:bodyPr wrap="square" lIns="635" tIns="635" rIns="635" bIns="635" rtlCol="0" anchor="t">
             <a:normAutofit/>
           </a:bodyPr>
           <a:lstStyle/>
           <a:p>
+            <a:pPr marL="0" indent="0">
+              <a:buNone/>
+            </a:pPr>
+            <a:r>
+              <a:rPr lang="en-US" sz="1300" b="1" dirty="0">
+                <a:solidFill>
+                  <a:srgbClr val="3DDC97"/>
+                </a:solidFill>
+                <a:latin typeface="Noto Sans CJK SC" pitchFamily="34" charset="0"/>
+                <a:ea typeface="Noto Sans CJK SC" pitchFamily="34" charset="-122"/>
+                <a:cs typeface="Noto Sans CJK SC" pitchFamily="34" charset="-120"/>
+              </a:rPr>
+              <a:t>3. 启动服务</a:t>
+            </a:r>
+            <a:endParaRPr lang="en-US" sz="1300" dirty="0"/>
+          </a:p>
+        </p:txBody>
+      </p:sp>
+      <p:sp>
+        <p:nvSpPr>
+          <p:cNvPr id="11" name="Text 9"/>
+          <p:cNvSpPr/>
+          <p:nvPr/>
+        </p:nvSpPr>
+        <p:spPr>
+          <a:xfrm>
+            <a:off x="777240" y="4434840"/>
+            <a:ext cx="5074920" cy="640080"/>
+          </a:xfrm>
+          <a:prstGeom prst="rect">
+            <a:avLst/>
+          </a:prstGeom>
+          <a:noFill/>
+        </p:spPr>
+        <p:txBody>
+          <a:bodyPr wrap="square" lIns="635" tIns="635" rIns="635" bIns="635" rtlCol="0" anchor="t">
+            <a:normAutofit/>
+          </a:bodyPr>
+          <a:lstStyle/>
+          <a:p>
+            <a:pPr marL="0" indent="0">
+              <a:buNone/>
+            </a:pPr>
+            <a:r>
+              <a:rPr lang="en-US" sz="1080" dirty="0">
+                <a:solidFill>
+                  <a:srgbClr val="E2E8F0"/>
+                </a:solidFill>
+                <a:latin typeface="Noto Sans CJK SC" pitchFamily="34" charset="0"/>
+                <a:ea typeface="Noto Sans CJK SC" pitchFamily="34" charset="-122"/>
+                <a:cs typeface="Noto Sans CJK SC" pitchFamily="34" charset="-120"/>
+              </a:rPr>
+              <a:t>uvicorn app.main:app --reload --host 0.0.0.0 --port 8000</a:t>
+            </a:r>
+            <a:endParaRPr lang="en-US" sz="1080" dirty="0"/>
+          </a:p>
+          <a:p>
+            <a:pPr marL="0" indent="0">
+              <a:buNone/>
+            </a:pPr>
+            <a:r>
+              <a:rPr lang="en-US" sz="1080" dirty="0">
+                <a:solidFill>
+                  <a:srgbClr val="E2E8F0"/>
+                </a:solidFill>
+                <a:latin typeface="Noto Sans CJK SC" pitchFamily="34" charset="0"/>
+                <a:ea typeface="Noto Sans CJK SC" pitchFamily="34" charset="-122"/>
+                <a:cs typeface="Noto Sans CJK SC" pitchFamily="34" charset="-120"/>
+              </a:rPr>
+              <a:t>或运行仓库根目录 start-server.ps1</a:t>
+            </a:r>
+            <a:endParaRPr lang="en-US" sz="1080" dirty="0"/>
+          </a:p>
+        </p:txBody>
+      </p:sp>
+      <p:sp>
+        <p:nvSpPr>
+          <p:cNvPr id="12" name="Text 10"/>
+          <p:cNvSpPr/>
+          <p:nvPr/>
+        </p:nvSpPr>
+        <p:spPr>
+          <a:xfrm>
+            <a:off x="6400800" y="1234440"/>
+            <a:ext cx="2377440" cy="292608"/>
+          </a:xfrm>
+          <a:prstGeom prst="rect">
+            <a:avLst/>
+          </a:prstGeom>
+          <a:noFill/>
+        </p:spPr>
+        <p:txBody>
+          <a:bodyPr wrap="square" lIns="635" tIns="635" rIns="635" bIns="635" rtlCol="0" anchor="t">
+            <a:normAutofit/>
+          </a:bodyPr>
+          <a:lstStyle/>
+          <a:p>
+            <a:pPr marL="0" indent="0">
+              <a:buNone/>
+            </a:pPr>
+            <a:r>
+              <a:rPr lang="en-US" sz="1300" b="1" dirty="0">
+                <a:solidFill>
+                  <a:srgbClr val="6EE7F9"/>
+                </a:solidFill>
+                <a:latin typeface="Noto Sans CJK SC" pitchFamily="34" charset="0"/>
+                <a:ea typeface="Noto Sans CJK SC" pitchFamily="34" charset="-122"/>
+                <a:cs typeface="Noto Sans CJK SC" pitchFamily="34" charset="-120"/>
+              </a:rPr>
+              <a:t>4. 新增 Agent 与问答</a:t>
+            </a:r>
+            <a:endParaRPr lang="en-US" sz="1300" dirty="0"/>
+          </a:p>
+        </p:txBody>
+      </p:sp>
+      <p:sp>
+        <p:nvSpPr>
+          <p:cNvPr id="13" name="Text 11"/>
+          <p:cNvSpPr/>
+          <p:nvPr/>
+        </p:nvSpPr>
+        <p:spPr>
+          <a:xfrm>
+            <a:off x="6446520" y="1719072"/>
+            <a:ext cx="1645920" cy="420624"/>
+          </a:xfrm>
+          <a:prstGeom prst="rect">
+            <a:avLst/>
+          </a:prstGeom>
+          <a:solidFill>
+            <a:srgbClr val="1E3A5F"/>
+          </a:solidFill>
+          <a:ln w="12700">
+            <a:solidFill>
+              <a:srgbClr val="2B3658">
+                <a:alpha val="85000"/>
+              </a:srgbClr>
+            </a:solidFill>
+          </a:ln>
+        </p:spPr>
+        <p:txBody>
+          <a:bodyPr wrap="square" lIns="762" tIns="762" rIns="762" bIns="762" rtlCol="0" anchor="ctr">
+            <a:normAutofit/>
+          </a:bodyPr>
+          <a:lstStyle/>
+          <a:p>
             <a:pPr marL="0" indent="0" algn="ctr">
               <a:buNone/>
             </a:pPr>
             <a:r>
-              <a:rPr lang="en-US" sz="850" dirty="0">
-                <a:solidFill>
-                  <a:srgbClr val="AAB6D3"/>
-                </a:solidFill>
-                <a:latin typeface="Noto Sans CJK SC" pitchFamily="34" charset="0"/>
-                <a:ea typeface="Noto Sans CJK SC" pitchFamily="34" charset="-122"/>
-                <a:cs typeface="Noto Sans CJK SC" pitchFamily="34" charset="-120"/>
-              </a:rPr>
-              <a:t>前端渲染参考答案、相关图片与文件元信息；后端返回结构化字段驱动展示</a:t>
-            </a:r>
-            <a:endParaRPr lang="en-US" sz="850" dirty="0"/>
-          </a:p>
-        </p:txBody>
-      </p:sp>
-      <p:sp>
-        <p:nvSpPr>
-          <p:cNvPr id="13" name="Text 9"/>
+              <a:rPr lang="en-US" sz="950" b="1" dirty="0">
+                <a:solidFill>
+                  <a:srgbClr val="F5F8FF"/>
+                </a:solidFill>
+                <a:latin typeface="Noto Sans CJK SC" pitchFamily="34" charset="0"/>
+                <a:ea typeface="Noto Sans CJK SC" pitchFamily="34" charset="-122"/>
+                <a:cs typeface="Noto Sans CJK SC" pitchFamily="34" charset="-120"/>
+              </a:rPr>
+              <a:t>POST /agents</a:t>
+            </a:r>
+            <a:endParaRPr lang="en-US" sz="950" dirty="0"/>
+          </a:p>
+        </p:txBody>
+      </p:sp>
+      <p:sp>
+        <p:nvSpPr>
+          <p:cNvPr id="14" name="Text 12"/>
+          <p:cNvSpPr/>
+          <p:nvPr/>
+        </p:nvSpPr>
+        <p:spPr>
+          <a:xfrm>
+            <a:off x="8458200" y="1719072"/>
+            <a:ext cx="1645920" cy="420624"/>
+          </a:xfrm>
+          <a:prstGeom prst="rect">
+            <a:avLst/>
+          </a:prstGeom>
+          <a:solidFill>
+            <a:srgbClr val="1E3A5F"/>
+          </a:solidFill>
+          <a:ln w="12700">
+            <a:solidFill>
+              <a:srgbClr val="2B3658">
+                <a:alpha val="85000"/>
+              </a:srgbClr>
+            </a:solidFill>
+          </a:ln>
+        </p:spPr>
+        <p:txBody>
+          <a:bodyPr wrap="square" lIns="762" tIns="762" rIns="762" bIns="762" rtlCol="0" anchor="ctr">
+            <a:normAutofit/>
+          </a:bodyPr>
+          <a:lstStyle/>
+          <a:p>
+            <a:pPr marL="0" indent="0" algn="ctr">
+              <a:buNone/>
+            </a:pPr>
+            <a:r>
+              <a:rPr lang="en-US" sz="950" b="1" dirty="0">
+                <a:solidFill>
+                  <a:srgbClr val="F5F8FF"/>
+                </a:solidFill>
+                <a:latin typeface="Noto Sans CJK SC" pitchFamily="34" charset="0"/>
+                <a:ea typeface="Noto Sans CJK SC" pitchFamily="34" charset="-122"/>
+                <a:cs typeface="Noto Sans CJK SC" pitchFamily="34" charset="-120"/>
+              </a:rPr>
+              <a:t>上传或注册文件</a:t>
+            </a:r>
+            <a:endParaRPr lang="en-US" sz="950" dirty="0"/>
+          </a:p>
+        </p:txBody>
+      </p:sp>
+      <p:sp>
+        <p:nvSpPr>
+          <p:cNvPr id="15" name="Text 13"/>
+          <p:cNvSpPr/>
+          <p:nvPr/>
+        </p:nvSpPr>
+        <p:spPr>
+          <a:xfrm>
+            <a:off x="6446520" y="2487168"/>
+            <a:ext cx="1645920" cy="420624"/>
+          </a:xfrm>
+          <a:prstGeom prst="rect">
+            <a:avLst/>
+          </a:prstGeom>
+          <a:solidFill>
+            <a:srgbClr val="1E3A5F"/>
+          </a:solidFill>
+          <a:ln w="12700">
+            <a:solidFill>
+              <a:srgbClr val="2B3658">
+                <a:alpha val="85000"/>
+              </a:srgbClr>
+            </a:solidFill>
+          </a:ln>
+        </p:spPr>
+        <p:txBody>
+          <a:bodyPr wrap="square" lIns="762" tIns="762" rIns="762" bIns="762" rtlCol="0" anchor="ctr">
+            <a:normAutofit/>
+          </a:bodyPr>
+          <a:lstStyle/>
+          <a:p>
+            <a:pPr marL="0" indent="0" algn="ctr">
+              <a:buNone/>
+            </a:pPr>
+            <a:r>
+              <a:rPr lang="en-US" sz="950" b="1" dirty="0">
+                <a:solidFill>
+                  <a:srgbClr val="F5F8FF"/>
+                </a:solidFill>
+                <a:latin typeface="Noto Sans CJK SC" pitchFamily="34" charset="0"/>
+                <a:ea typeface="Noto Sans CJK SC" pitchFamily="34" charset="-122"/>
+                <a:cs typeface="Noto Sans CJK SC" pitchFamily="34" charset="-120"/>
+              </a:rPr>
+              <a:t>POST /initialize</a:t>
+            </a:r>
+            <a:endParaRPr lang="en-US" sz="950" dirty="0"/>
+          </a:p>
+        </p:txBody>
+      </p:sp>
+      <p:sp>
+        <p:nvSpPr>
+          <p:cNvPr id="16" name="Text 14"/>
+          <p:cNvSpPr/>
+          <p:nvPr/>
+        </p:nvSpPr>
+        <p:spPr>
+          <a:xfrm>
+            <a:off x="8458200" y="2487168"/>
+            <a:ext cx="2011680" cy="420624"/>
+          </a:xfrm>
+          <a:prstGeom prst="rect">
+            <a:avLst/>
+          </a:prstGeom>
+          <a:solidFill>
+            <a:srgbClr val="1E3A5F"/>
+          </a:solidFill>
+          <a:ln w="12700">
+            <a:solidFill>
+              <a:srgbClr val="2B3658">
+                <a:alpha val="85000"/>
+              </a:srgbClr>
+            </a:solidFill>
+          </a:ln>
+        </p:spPr>
+        <p:txBody>
+          <a:bodyPr wrap="square" lIns="762" tIns="762" rIns="762" bIns="762" rtlCol="0" anchor="ctr">
+            <a:normAutofit/>
+          </a:bodyPr>
+          <a:lstStyle/>
+          <a:p>
+            <a:pPr marL="0" indent="0" algn="ctr">
+              <a:buNone/>
+            </a:pPr>
+            <a:r>
+              <a:rPr lang="en-US" sz="920" b="1" dirty="0">
+                <a:solidFill>
+                  <a:srgbClr val="F5F8FF"/>
+                </a:solidFill>
+                <a:latin typeface="Noto Sans CJK SC" pitchFamily="34" charset="0"/>
+                <a:ea typeface="Noto Sans CJK SC" pitchFamily="34" charset="-122"/>
+                <a:cs typeface="Noto Sans CJK SC" pitchFamily="34" charset="-120"/>
+              </a:rPr>
+              <a:t>POST /ask 或 /ask/stream</a:t>
+            </a:r>
+            <a:endParaRPr lang="en-US" sz="920" dirty="0"/>
+          </a:p>
+        </p:txBody>
+      </p:sp>
+      <p:sp>
+        <p:nvSpPr>
+          <p:cNvPr id="17" name="Shape 15"/>
+          <p:cNvSpPr/>
+          <p:nvPr/>
+        </p:nvSpPr>
+        <p:spPr>
+          <a:xfrm>
+            <a:off x="8092440" y="1929384"/>
+            <a:ext cx="310896" cy="0"/>
+          </a:xfrm>
+          <a:prstGeom prst="line">
+            <a:avLst/>
+          </a:prstGeom>
+          <a:noFill/>
+          <a:ln w="12700">
+            <a:solidFill>
+              <a:srgbClr val="6EE7F9"/>
+            </a:solidFill>
+            <a:prstDash val="solid"/>
+            <a:tailEnd type="triangle"/>
+          </a:ln>
+        </p:spPr>
+      </p:sp>
+      <p:sp>
+        <p:nvSpPr>
+          <p:cNvPr id="18" name="Shape 16"/>
+          <p:cNvSpPr/>
+          <p:nvPr/>
+        </p:nvSpPr>
+        <p:spPr>
+          <a:xfrm>
+            <a:off x="8092440" y="2697480"/>
+            <a:ext cx="310896" cy="0"/>
+          </a:xfrm>
+          <a:prstGeom prst="line">
+            <a:avLst/>
+          </a:prstGeom>
+          <a:noFill/>
+          <a:ln w="12700">
+            <a:solidFill>
+              <a:srgbClr val="6EE7F9"/>
+            </a:solidFill>
+            <a:prstDash val="solid"/>
+            <a:tailEnd type="triangle"/>
+          </a:ln>
+        </p:spPr>
+      </p:sp>
+      <p:sp>
+        <p:nvSpPr>
+          <p:cNvPr id="19" name="Text 17"/>
+          <p:cNvSpPr/>
+          <p:nvPr/>
+        </p:nvSpPr>
+        <p:spPr>
+          <a:xfrm>
+            <a:off x="6400800" y="3657600"/>
+            <a:ext cx="2011680" cy="292608"/>
+          </a:xfrm>
+          <a:prstGeom prst="rect">
+            <a:avLst/>
+          </a:prstGeom>
+          <a:noFill/>
+        </p:spPr>
+        <p:txBody>
+          <a:bodyPr wrap="square" lIns="635" tIns="635" rIns="635" bIns="635" rtlCol="0" anchor="t">
+            <a:normAutofit/>
+          </a:bodyPr>
+          <a:lstStyle/>
+          <a:p>
+            <a:pPr marL="0" indent="0">
+              <a:buNone/>
+            </a:pPr>
+            <a:r>
+              <a:rPr lang="en-US" sz="1300" b="1" dirty="0">
+                <a:solidFill>
+                  <a:srgbClr val="A78BFA"/>
+                </a:solidFill>
+                <a:latin typeface="Noto Sans CJK SC" pitchFamily="34" charset="0"/>
+                <a:ea typeface="Noto Sans CJK SC" pitchFamily="34" charset="-122"/>
+                <a:cs typeface="Noto Sans CJK SC" pitchFamily="34" charset="-120"/>
+              </a:rPr>
+              <a:t>常用入口</a:t>
+            </a:r>
+            <a:endParaRPr lang="en-US" sz="1300" dirty="0"/>
+          </a:p>
+        </p:txBody>
+      </p:sp>
+      <p:sp>
+        <p:nvSpPr>
+          <p:cNvPr id="20" name="Text 18"/>
+          <p:cNvSpPr/>
+          <p:nvPr/>
+        </p:nvSpPr>
+        <p:spPr>
+          <a:xfrm>
+            <a:off x="6446520" y="4069080"/>
+            <a:ext cx="4389120" cy="1463040"/>
+          </a:xfrm>
+          <a:prstGeom prst="rect">
+            <a:avLst/>
+          </a:prstGeom>
+          <a:noFill/>
+        </p:spPr>
+        <p:txBody>
+          <a:bodyPr wrap="square" lIns="635" tIns="635" rIns="635" bIns="635" rtlCol="0" anchor="t">
+            <a:normAutofit/>
+          </a:bodyPr>
+          <a:lstStyle/>
+          <a:p>
+            <a:pPr marL="0" indent="0">
+              <a:buNone/>
+            </a:pPr>
+            <a:r>
+              <a:rPr lang="en-US" sz="1080" dirty="0">
+                <a:solidFill>
+                  <a:srgbClr val="F5F8FF"/>
+                </a:solidFill>
+                <a:latin typeface="Noto Sans CJK SC" pitchFamily="34" charset="0"/>
+                <a:ea typeface="Noto Sans CJK SC" pitchFamily="34" charset="-122"/>
+                <a:cs typeface="Noto Sans CJK SC" pitchFamily="34" charset="-120"/>
+              </a:rPr>
+              <a:t>• GET /health：健康检查</a:t>
+            </a:r>
+            <a:endParaRPr lang="en-US" sz="1080" dirty="0"/>
+          </a:p>
+          <a:p>
+            <a:pPr marL="0" indent="0">
+              <a:buNone/>
+            </a:pPr>
+            <a:r>
+              <a:rPr lang="en-US" sz="1080" dirty="0">
+                <a:solidFill>
+                  <a:srgbClr val="F5F8FF"/>
+                </a:solidFill>
+                <a:latin typeface="Noto Sans CJK SC" pitchFamily="34" charset="0"/>
+                <a:ea typeface="Noto Sans CJK SC" pitchFamily="34" charset="-122"/>
+                <a:cs typeface="Noto Sans CJK SC" pitchFamily="34" charset="-120"/>
+              </a:rPr>
+              <a:t>• Web 控制台：http://127.0.0.1:8000/</a:t>
+            </a:r>
+            <a:endParaRPr lang="en-US" sz="1080" dirty="0"/>
+          </a:p>
+          <a:p>
+            <a:pPr marL="0" indent="0">
+              <a:buNone/>
+            </a:pPr>
+            <a:r>
+              <a:rPr lang="en-US" sz="1080" dirty="0">
+                <a:solidFill>
+                  <a:srgbClr val="F5F8FF"/>
+                </a:solidFill>
+                <a:latin typeface="Noto Sans CJK SC" pitchFamily="34" charset="0"/>
+                <a:ea typeface="Noto Sans CJK SC" pitchFamily="34" charset="-122"/>
+                <a:cs typeface="Noto Sans CJK SC" pitchFamily="34" charset="-120"/>
+              </a:rPr>
+              <a:t>• GET /agents：查看 Agent 列表</a:t>
+            </a:r>
+            <a:endParaRPr lang="en-US" sz="1080" dirty="0"/>
+          </a:p>
+          <a:p>
+            <a:pPr marL="0" indent="0">
+              <a:buNone/>
+            </a:pPr>
+            <a:r>
+              <a:rPr lang="en-US" sz="1080" dirty="0">
+                <a:solidFill>
+                  <a:srgbClr val="F5F8FF"/>
+                </a:solidFill>
+                <a:latin typeface="Noto Sans CJK SC" pitchFamily="34" charset="0"/>
+                <a:ea typeface="Noto Sans CJK SC" pitchFamily="34" charset="-122"/>
+                <a:cs typeface="Noto Sans CJK SC" pitchFamily="34" charset="-120"/>
+              </a:rPr>
+              <a:t>• GET /preview：渲染 PDF 指定页</a:t>
+            </a:r>
+            <a:endParaRPr lang="en-US" sz="1080" dirty="0"/>
+          </a:p>
+          <a:p>
+            <a:pPr marL="0" indent="0">
+              <a:buNone/>
+            </a:pPr>
+            <a:r>
+              <a:rPr lang="en-US" sz="1080" dirty="0">
+                <a:solidFill>
+                  <a:srgbClr val="F5F8FF"/>
+                </a:solidFill>
+                <a:latin typeface="Noto Sans CJK SC" pitchFamily="34" charset="0"/>
+                <a:ea typeface="Noto Sans CJK SC" pitchFamily="34" charset="-122"/>
+                <a:cs typeface="Noto Sans CJK SC" pitchFamily="34" charset="-120"/>
+              </a:rPr>
+              <a:t>• POST /batch/tests/import：批量导入用例</a:t>
+            </a:r>
+            <a:endParaRPr lang="en-US" sz="1080" dirty="0"/>
+          </a:p>
+        </p:txBody>
+      </p:sp>
+      <p:sp>
+        <p:nvSpPr>
+          <p:cNvPr id="21" name="Text 19"/>
           <p:cNvSpPr/>
           <p:nvPr/>
         </p:nvSpPr>
@@ -5893,7 +5610,7 @@
                 <a:ea typeface="Noto Sans CJK SC" pitchFamily="34" charset="-122"/>
                 <a:cs typeface="Noto Sans CJK SC" pitchFamily="34" charset="-120"/>
               </a:rPr>
-              <a:t>仓库 app 目录列出 agent_runner、initializer、router、llm_client、knowledge_loader 等后端文件；web 目录列出 test、manage、batch、answerRender 等前端文件。</a:t>
+              <a:t>README 提供了依赖安装、.env 配置、uvicorn 启动命令、Web 控制台入口，以及 /ask、/agents、/files、/batch 等 API。</a:t>
             </a:r>
             <a:endParaRPr lang="en-US" sz="730" dirty="0"/>
           </a:p>
@@ -5901,7 +5618,7 @@
       </p:sp>
       <p:sp>
         <p:nvSpPr>
-          <p:cNvPr id="14" name="Text 10"/>
+          <p:cNvPr id="22" name="Text 20"/>
           <p:cNvSpPr/>
           <p:nvPr/>
         </p:nvSpPr>
@@ -5931,7 +5648,7 @@
                 <a:ea typeface="Noto Sans CJK SC" pitchFamily="34" charset="-122"/>
                 <a:cs typeface="Noto Sans CJK SC" pitchFamily="34" charset="-120"/>
               </a:rPr>
-              <a:t>14</a:t>
+              <a:t>13</a:t>
             </a:r>
             <a:endParaRPr lang="en-US" sz="800" dirty="0"/>
           </a:p>
@@ -6031,6 +5748,712 @@
                 <a:ea typeface="Noto Sans CJK SC" pitchFamily="34" charset="-122"/>
                 <a:cs typeface="Noto Sans CJK SC" pitchFamily="34" charset="-120"/>
               </a:rPr>
+              <a:t>实现方式：后端按职责拆模块，前端按工作台拆页面</a:t>
+            </a:r>
+            <a:endParaRPr lang="en-US" sz="2500" dirty="0"/>
+          </a:p>
+        </p:txBody>
+      </p:sp>
+      <p:sp>
+        <p:nvSpPr>
+          <p:cNvPr id="4" name="Text 2"/>
+          <p:cNvSpPr/>
+          <p:nvPr/>
+        </p:nvSpPr>
+        <p:spPr>
+          <a:xfrm>
+            <a:off x="530352" y="850392"/>
+            <a:ext cx="8869680" cy="274320"/>
+          </a:xfrm>
+          <a:prstGeom prst="rect">
+            <a:avLst/>
+          </a:prstGeom>
+          <a:noFill/>
+        </p:spPr>
+        <p:txBody>
+          <a:bodyPr wrap="square" lIns="0" tIns="0" rIns="0" bIns="0" rtlCol="0" anchor="ctr">
+            <a:normAutofit/>
+          </a:bodyPr>
+          <a:lstStyle/>
+          <a:p>
+            <a:pPr marL="0" indent="0">
+              <a:buNone/>
+            </a:pPr>
+            <a:r>
+              <a:rPr lang="en-US" sz="950" dirty="0">
+                <a:solidFill>
+                  <a:srgbClr val="AAB6D3"/>
+                </a:solidFill>
+                <a:latin typeface="Noto Sans CJK SC" pitchFamily="34" charset="0"/>
+                <a:ea typeface="Noto Sans CJK SC" pitchFamily="34" charset="-122"/>
+                <a:cs typeface="Noto Sans CJK SC" pitchFamily="34" charset="-120"/>
+              </a:rPr>
+              <a:t>项目是轻量级全栈实现，核心复杂度集中在文件抽取、初始化、路由和引用渲染</a:t>
+            </a:r>
+            <a:endParaRPr lang="en-US" sz="950" dirty="0"/>
+          </a:p>
+        </p:txBody>
+      </p:sp>
+      <p:sp>
+        <p:nvSpPr>
+          <p:cNvPr id="5" name="Text 3"/>
+          <p:cNvSpPr/>
+          <p:nvPr/>
+        </p:nvSpPr>
+        <p:spPr>
+          <a:xfrm>
+            <a:off x="9189720" y="384048"/>
+            <a:ext cx="2514600" cy="228600"/>
+          </a:xfrm>
+          <a:prstGeom prst="rect">
+            <a:avLst/>
+          </a:prstGeom>
+          <a:noFill/>
+        </p:spPr>
+        <p:txBody>
+          <a:bodyPr wrap="square" lIns="0" tIns="0" rIns="0" bIns="0" rtlCol="0" anchor="ctr"/>
+          <a:lstStyle/>
+          <a:p>
+            <a:pPr marL="0" indent="0" algn="r">
+              <a:buNone/>
+            </a:pPr>
+            <a:r>
+              <a:rPr lang="en-US" sz="750" dirty="0">
+                <a:solidFill>
+                  <a:srgbClr val="7DD3FC"/>
+                </a:solidFill>
+                <a:latin typeface="Noto Sans CJK SC" pitchFamily="34" charset="0"/>
+                <a:ea typeface="Noto Sans CJK SC" pitchFamily="34" charset="-122"/>
+                <a:cs typeface="Noto Sans CJK SC" pitchFamily="34" charset="-120"/>
+              </a:rPr>
+              <a:t>multi-model-file-Q-A-routing-system</a:t>
+            </a:r>
+            <a:endParaRPr lang="en-US" sz="750" dirty="0"/>
+          </a:p>
+        </p:txBody>
+      </p:sp>
+      <p:sp>
+        <p:nvSpPr>
+          <p:cNvPr id="6" name="Text 4"/>
+          <p:cNvSpPr/>
+          <p:nvPr/>
+        </p:nvSpPr>
+        <p:spPr>
+          <a:xfrm>
+            <a:off x="731520" y="1234440"/>
+            <a:ext cx="2011680" cy="292608"/>
+          </a:xfrm>
+          <a:prstGeom prst="rect">
+            <a:avLst/>
+          </a:prstGeom>
+          <a:noFill/>
+        </p:spPr>
+        <p:txBody>
+          <a:bodyPr wrap="square" lIns="635" tIns="635" rIns="635" bIns="635" rtlCol="0" anchor="t">
+            <a:normAutofit/>
+          </a:bodyPr>
+          <a:lstStyle/>
+          <a:p>
+            <a:pPr marL="0" indent="0">
+              <a:buNone/>
+            </a:pPr>
+            <a:r>
+              <a:rPr lang="en-US" sz="1300" b="1" dirty="0">
+                <a:solidFill>
+                  <a:srgbClr val="6EE7F9"/>
+                </a:solidFill>
+                <a:latin typeface="Noto Sans CJK SC" pitchFamily="34" charset="0"/>
+                <a:ea typeface="Noto Sans CJK SC" pitchFamily="34" charset="-122"/>
+                <a:cs typeface="Noto Sans CJK SC" pitchFamily="34" charset="-120"/>
+              </a:rPr>
+              <a:t>后端模块</a:t>
+            </a:r>
+            <a:endParaRPr lang="en-US" sz="1300" dirty="0"/>
+          </a:p>
+        </p:txBody>
+      </p:sp>
+      <p:sp>
+        <p:nvSpPr>
+          <p:cNvPr id="7" name="Text 5"/>
+          <p:cNvSpPr/>
+          <p:nvPr/>
+        </p:nvSpPr>
+        <p:spPr>
+          <a:xfrm>
+            <a:off x="777240" y="1691640"/>
+            <a:ext cx="4160520" cy="2468880"/>
+          </a:xfrm>
+          <a:prstGeom prst="rect">
+            <a:avLst/>
+          </a:prstGeom>
+          <a:noFill/>
+        </p:spPr>
+        <p:txBody>
+          <a:bodyPr wrap="square" lIns="635" tIns="635" rIns="635" bIns="635" rtlCol="0" anchor="t">
+            <a:normAutofit/>
+          </a:bodyPr>
+          <a:lstStyle/>
+          <a:p>
+            <a:pPr marL="0" indent="0">
+              <a:buNone/>
+            </a:pPr>
+            <a:r>
+              <a:rPr lang="en-US" sz="1110" dirty="0">
+                <a:solidFill>
+                  <a:srgbClr val="F5F8FF"/>
+                </a:solidFill>
+                <a:latin typeface="Noto Sans CJK SC" pitchFamily="34" charset="0"/>
+                <a:ea typeface="Noto Sans CJK SC" pitchFamily="34" charset="-122"/>
+                <a:cs typeface="Noto Sans CJK SC" pitchFamily="34" charset="-120"/>
+              </a:rPr>
+              <a:t>• main.py：路由入口与 API 注册</a:t>
+            </a:r>
+            <a:endParaRPr lang="en-US" sz="1110" dirty="0"/>
+          </a:p>
+          <a:p>
+            <a:pPr marL="0" indent="0">
+              <a:buNone/>
+            </a:pPr>
+            <a:r>
+              <a:rPr lang="en-US" sz="1110" dirty="0">
+                <a:solidFill>
+                  <a:srgbClr val="F5F8FF"/>
+                </a:solidFill>
+                <a:latin typeface="Noto Sans CJK SC" pitchFamily="34" charset="0"/>
+                <a:ea typeface="Noto Sans CJK SC" pitchFamily="34" charset="-122"/>
+                <a:cs typeface="Noto Sans CJK SC" pitchFamily="34" charset="-120"/>
+              </a:rPr>
+              <a:t>• llm_client.py：OpenAI 兼容模型调用</a:t>
+            </a:r>
+            <a:endParaRPr lang="en-US" sz="1110" dirty="0"/>
+          </a:p>
+          <a:p>
+            <a:pPr marL="0" indent="0">
+              <a:buNone/>
+            </a:pPr>
+            <a:r>
+              <a:rPr lang="en-US" sz="1110" dirty="0">
+                <a:solidFill>
+                  <a:srgbClr val="F5F8FF"/>
+                </a:solidFill>
+                <a:latin typeface="Noto Sans CJK SC" pitchFamily="34" charset="0"/>
+                <a:ea typeface="Noto Sans CJK SC" pitchFamily="34" charset="-122"/>
+                <a:cs typeface="Noto Sans CJK SC" pitchFamily="34" charset="-120"/>
+              </a:rPr>
+              <a:t>• initializer.py：生成 route_questions</a:t>
+            </a:r>
+            <a:endParaRPr lang="en-US" sz="1110" dirty="0"/>
+          </a:p>
+          <a:p>
+            <a:pPr marL="0" indent="0">
+              <a:buNone/>
+            </a:pPr>
+            <a:r>
+              <a:rPr lang="en-US" sz="1110" dirty="0">
+                <a:solidFill>
+                  <a:srgbClr val="F5F8FF"/>
+                </a:solidFill>
+                <a:latin typeface="Noto Sans CJK SC" pitchFamily="34" charset="0"/>
+                <a:ea typeface="Noto Sans CJK SC" pitchFamily="34" charset="-122"/>
+                <a:cs typeface="Noto Sans CJK SC" pitchFamily="34" charset="-120"/>
+              </a:rPr>
+              <a:t>• router.py：根据问题选择 Agent</a:t>
+            </a:r>
+            <a:endParaRPr lang="en-US" sz="1110" dirty="0"/>
+          </a:p>
+          <a:p>
+            <a:pPr marL="0" indent="0">
+              <a:buNone/>
+            </a:pPr>
+            <a:r>
+              <a:rPr lang="en-US" sz="1110" dirty="0">
+                <a:solidFill>
+                  <a:srgbClr val="F5F8FF"/>
+                </a:solidFill>
+                <a:latin typeface="Noto Sans CJK SC" pitchFamily="34" charset="0"/>
+                <a:ea typeface="Noto Sans CJK SC" pitchFamily="34" charset="-122"/>
+                <a:cs typeface="Noto Sans CJK SC" pitchFamily="34" charset="-120"/>
+              </a:rPr>
+              <a:t>• agent_runner.py：回答阶段调用</a:t>
+            </a:r>
+            <a:endParaRPr lang="en-US" sz="1110" dirty="0"/>
+          </a:p>
+          <a:p>
+            <a:pPr marL="0" indent="0">
+              <a:buNone/>
+            </a:pPr>
+            <a:r>
+              <a:rPr lang="en-US" sz="1110" dirty="0">
+                <a:solidFill>
+                  <a:srgbClr val="F5F8FF"/>
+                </a:solidFill>
+                <a:latin typeface="Noto Sans CJK SC" pitchFamily="34" charset="0"/>
+                <a:ea typeface="Noto Sans CJK SC" pitchFamily="34" charset="-122"/>
+                <a:cs typeface="Noto Sans CJK SC" pitchFamily="34" charset="-120"/>
+              </a:rPr>
+              <a:t>• knowledge_loader.py / file_loader.py：知识读取</a:t>
+            </a:r>
+            <a:endParaRPr lang="en-US" sz="1110" dirty="0"/>
+          </a:p>
+          <a:p>
+            <a:pPr marL="0" indent="0">
+              <a:buNone/>
+            </a:pPr>
+            <a:r>
+              <a:rPr lang="en-US" sz="1110" dirty="0">
+                <a:solidFill>
+                  <a:srgbClr val="F5F8FF"/>
+                </a:solidFill>
+                <a:latin typeface="Noto Sans CJK SC" pitchFamily="34" charset="0"/>
+                <a:ea typeface="Noto Sans CJK SC" pitchFamily="34" charset="-122"/>
+                <a:cs typeface="Noto Sans CJK SC" pitchFamily="34" charset="-120"/>
+              </a:rPr>
+              <a:t>• batch_evaluator.py：批量评估</a:t>
+            </a:r>
+            <a:endParaRPr lang="en-US" sz="1110" dirty="0"/>
+          </a:p>
+        </p:txBody>
+      </p:sp>
+      <p:sp>
+        <p:nvSpPr>
+          <p:cNvPr id="8" name="Text 6"/>
+          <p:cNvSpPr/>
+          <p:nvPr/>
+        </p:nvSpPr>
+        <p:spPr>
+          <a:xfrm>
+            <a:off x="5623560" y="1234440"/>
+            <a:ext cx="2011680" cy="292608"/>
+          </a:xfrm>
+          <a:prstGeom prst="rect">
+            <a:avLst/>
+          </a:prstGeom>
+          <a:noFill/>
+        </p:spPr>
+        <p:txBody>
+          <a:bodyPr wrap="square" lIns="635" tIns="635" rIns="635" bIns="635" rtlCol="0" anchor="t">
+            <a:normAutofit/>
+          </a:bodyPr>
+          <a:lstStyle/>
+          <a:p>
+            <a:pPr marL="0" indent="0">
+              <a:buNone/>
+            </a:pPr>
+            <a:r>
+              <a:rPr lang="en-US" sz="1300" b="1" dirty="0">
+                <a:solidFill>
+                  <a:srgbClr val="A78BFA"/>
+                </a:solidFill>
+                <a:latin typeface="Noto Sans CJK SC" pitchFamily="34" charset="0"/>
+                <a:ea typeface="Noto Sans CJK SC" pitchFamily="34" charset="-122"/>
+                <a:cs typeface="Noto Sans CJK SC" pitchFamily="34" charset="-120"/>
+              </a:rPr>
+              <a:t>前端模块</a:t>
+            </a:r>
+            <a:endParaRPr lang="en-US" sz="1300" dirty="0"/>
+          </a:p>
+        </p:txBody>
+      </p:sp>
+      <p:sp>
+        <p:nvSpPr>
+          <p:cNvPr id="9" name="Text 7"/>
+          <p:cNvSpPr/>
+          <p:nvPr/>
+        </p:nvSpPr>
+        <p:spPr>
+          <a:xfrm>
+            <a:off x="5669280" y="1691640"/>
+            <a:ext cx="4160520" cy="2468880"/>
+          </a:xfrm>
+          <a:prstGeom prst="rect">
+            <a:avLst/>
+          </a:prstGeom>
+          <a:noFill/>
+        </p:spPr>
+        <p:txBody>
+          <a:bodyPr wrap="square" lIns="635" tIns="635" rIns="635" bIns="635" rtlCol="0" anchor="t">
+            <a:normAutofit/>
+          </a:bodyPr>
+          <a:lstStyle/>
+          <a:p>
+            <a:pPr marL="0" indent="0">
+              <a:buNone/>
+            </a:pPr>
+            <a:r>
+              <a:rPr lang="en-US" sz="1110" dirty="0">
+                <a:solidFill>
+                  <a:srgbClr val="F5F8FF"/>
+                </a:solidFill>
+                <a:latin typeface="Noto Sans CJK SC" pitchFamily="34" charset="0"/>
+                <a:ea typeface="Noto Sans CJK SC" pitchFamily="34" charset="-122"/>
+                <a:cs typeface="Noto Sans CJK SC" pitchFamily="34" charset="-120"/>
+              </a:rPr>
+              <a:t>• index.html：工作台入口</a:t>
+            </a:r>
+            <a:endParaRPr lang="en-US" sz="1110" dirty="0"/>
+          </a:p>
+          <a:p>
+            <a:pPr marL="0" indent="0">
+              <a:buNone/>
+            </a:pPr>
+            <a:r>
+              <a:rPr lang="en-US" sz="1110" dirty="0">
+                <a:solidFill>
+                  <a:srgbClr val="F5F8FF"/>
+                </a:solidFill>
+                <a:latin typeface="Noto Sans CJK SC" pitchFamily="34" charset="0"/>
+                <a:ea typeface="Noto Sans CJK SC" pitchFamily="34" charset="-122"/>
+                <a:cs typeface="Noto Sans CJK SC" pitchFamily="34" charset="-120"/>
+              </a:rPr>
+              <a:t>• test.js：单问题测试</a:t>
+            </a:r>
+            <a:endParaRPr lang="en-US" sz="1110" dirty="0"/>
+          </a:p>
+          <a:p>
+            <a:pPr marL="0" indent="0">
+              <a:buNone/>
+            </a:pPr>
+            <a:r>
+              <a:rPr lang="en-US" sz="1110" dirty="0">
+                <a:solidFill>
+                  <a:srgbClr val="F5F8FF"/>
+                </a:solidFill>
+                <a:latin typeface="Noto Sans CJK SC" pitchFamily="34" charset="0"/>
+                <a:ea typeface="Noto Sans CJK SC" pitchFamily="34" charset="-122"/>
+                <a:cs typeface="Noto Sans CJK SC" pitchFamily="34" charset="-120"/>
+              </a:rPr>
+              <a:t>• manage.js：Agent 与文件管理</a:t>
+            </a:r>
+            <a:endParaRPr lang="en-US" sz="1110" dirty="0"/>
+          </a:p>
+          <a:p>
+            <a:pPr marL="0" indent="0">
+              <a:buNone/>
+            </a:pPr>
+            <a:r>
+              <a:rPr lang="en-US" sz="1110" dirty="0">
+                <a:solidFill>
+                  <a:srgbClr val="F5F8FF"/>
+                </a:solidFill>
+                <a:latin typeface="Noto Sans CJK SC" pitchFamily="34" charset="0"/>
+                <a:ea typeface="Noto Sans CJK SC" pitchFamily="34" charset="-122"/>
+                <a:cs typeface="Noto Sans CJK SC" pitchFamily="34" charset="-120"/>
+              </a:rPr>
+              <a:t>• batch.js：批量测试</a:t>
+            </a:r>
+            <a:endParaRPr lang="en-US" sz="1110" dirty="0"/>
+          </a:p>
+          <a:p>
+            <a:pPr marL="0" indent="0">
+              <a:buNone/>
+            </a:pPr>
+            <a:r>
+              <a:rPr lang="en-US" sz="1110" dirty="0">
+                <a:solidFill>
+                  <a:srgbClr val="F5F8FF"/>
+                </a:solidFill>
+                <a:latin typeface="Noto Sans CJK SC" pitchFamily="34" charset="0"/>
+                <a:ea typeface="Noto Sans CJK SC" pitchFamily="34" charset="-122"/>
+                <a:cs typeface="Noto Sans CJK SC" pitchFamily="34" charset="-120"/>
+              </a:rPr>
+              <a:t>• answerRender.js：答案与图片渲染</a:t>
+            </a:r>
+            <a:endParaRPr lang="en-US" sz="1110" dirty="0"/>
+          </a:p>
+          <a:p>
+            <a:pPr marL="0" indent="0">
+              <a:buNone/>
+            </a:pPr>
+            <a:r>
+              <a:rPr lang="en-US" sz="1110" dirty="0">
+                <a:solidFill>
+                  <a:srgbClr val="F5F8FF"/>
+                </a:solidFill>
+                <a:latin typeface="Noto Sans CJK SC" pitchFamily="34" charset="0"/>
+                <a:ea typeface="Noto Sans CJK SC" pitchFamily="34" charset="-122"/>
+                <a:cs typeface="Noto Sans CJK SC" pitchFamily="34" charset="-120"/>
+              </a:rPr>
+              <a:t>• filePreview.js：PDF/图片/媒体预览</a:t>
+            </a:r>
+            <a:endParaRPr lang="en-US" sz="1110" dirty="0"/>
+          </a:p>
+          <a:p>
+            <a:pPr marL="0" indent="0">
+              <a:buNone/>
+            </a:pPr>
+            <a:r>
+              <a:rPr lang="en-US" sz="1110" dirty="0">
+                <a:solidFill>
+                  <a:srgbClr val="F5F8FF"/>
+                </a:solidFill>
+                <a:latin typeface="Noto Sans CJK SC" pitchFamily="34" charset="0"/>
+                <a:ea typeface="Noto Sans CJK SC" pitchFamily="34" charset="-122"/>
+                <a:cs typeface="Noto Sans CJK SC" pitchFamily="34" charset="-120"/>
+              </a:rPr>
+              <a:t>• styles.css：深色控制台样式</a:t>
+            </a:r>
+            <a:endParaRPr lang="en-US" sz="1110" dirty="0"/>
+          </a:p>
+        </p:txBody>
+      </p:sp>
+      <p:pic>
+        <p:nvPicPr>
+          <p:cNvPr id="10" name="Image 0" descr="/mnt/data/ppt_assets/batch_ref.jpg"/>
+          <p:cNvPicPr>
+            <a:picLocks noChangeAspect="1"/>
+          </p:cNvPicPr>
+          <p:nvPr/>
+        </p:nvPicPr>
+        <p:blipFill>
+          <a:blip r:embed="rId1"/>
+          <a:stretch>
+            <a:fillRect/>
+          </a:stretch>
+        </p:blipFill>
+        <p:spPr>
+          <a:xfrm>
+            <a:off x="2701925" y="3027680"/>
+            <a:ext cx="2199640" cy="2733040"/>
+          </a:xfrm>
+          <a:prstGeom prst="rect">
+            <a:avLst/>
+          </a:prstGeom>
+        </p:spPr>
+      </p:pic>
+      <p:pic>
+        <p:nvPicPr>
+          <p:cNvPr id="11" name="Image 1" descr="/mnt/data/ppt_assets/single_sidebar.jpg"/>
+          <p:cNvPicPr>
+            <a:picLocks noChangeAspect="1"/>
+          </p:cNvPicPr>
+          <p:nvPr/>
+        </p:nvPicPr>
+        <p:blipFill>
+          <a:blip r:embed="rId2"/>
+          <a:stretch>
+            <a:fillRect/>
+          </a:stretch>
+        </p:blipFill>
+        <p:spPr>
+          <a:xfrm>
+            <a:off x="7094855" y="2909570"/>
+            <a:ext cx="1417320" cy="3207385"/>
+          </a:xfrm>
+          <a:prstGeom prst="rect">
+            <a:avLst/>
+          </a:prstGeom>
+        </p:spPr>
+      </p:pic>
+      <p:sp>
+        <p:nvSpPr>
+          <p:cNvPr id="12" name="Text 8"/>
+          <p:cNvSpPr/>
+          <p:nvPr/>
+        </p:nvSpPr>
+        <p:spPr>
+          <a:xfrm>
+            <a:off x="914400" y="5760720"/>
+            <a:ext cx="8046720" cy="256032"/>
+          </a:xfrm>
+          <a:prstGeom prst="rect">
+            <a:avLst/>
+          </a:prstGeom>
+          <a:noFill/>
+        </p:spPr>
+        <p:txBody>
+          <a:bodyPr wrap="square" lIns="0" tIns="0" rIns="0" bIns="0" rtlCol="0" anchor="ctr">
+            <a:normAutofit/>
+          </a:bodyPr>
+          <a:lstStyle/>
+          <a:p>
+            <a:pPr marL="0" indent="0" algn="ctr">
+              <a:buNone/>
+            </a:pPr>
+            <a:r>
+              <a:rPr lang="en-US" sz="850" dirty="0">
+                <a:solidFill>
+                  <a:srgbClr val="AAB6D3"/>
+                </a:solidFill>
+                <a:latin typeface="Noto Sans CJK SC" pitchFamily="34" charset="0"/>
+                <a:ea typeface="Noto Sans CJK SC" pitchFamily="34" charset="-122"/>
+                <a:cs typeface="Noto Sans CJK SC" pitchFamily="34" charset="-120"/>
+              </a:rPr>
+              <a:t>前端渲染参考答案、相关图片与文件元信息；后端返回结构化字段驱动展示</a:t>
+            </a:r>
+            <a:endParaRPr lang="en-US" sz="850" dirty="0"/>
+          </a:p>
+        </p:txBody>
+      </p:sp>
+      <p:sp>
+        <p:nvSpPr>
+          <p:cNvPr id="13" name="Text 9"/>
+          <p:cNvSpPr/>
+          <p:nvPr/>
+        </p:nvSpPr>
+        <p:spPr>
+          <a:xfrm>
+            <a:off x="502920" y="6199632"/>
+            <a:ext cx="10881360" cy="210312"/>
+          </a:xfrm>
+          <a:prstGeom prst="rect">
+            <a:avLst/>
+          </a:prstGeom>
+          <a:noFill/>
+        </p:spPr>
+        <p:txBody>
+          <a:bodyPr wrap="square" lIns="0" tIns="0" rIns="0" bIns="0" rtlCol="0" anchor="ctr"/>
+          <a:lstStyle/>
+          <a:p>
+            <a:pPr marL="0" indent="0">
+              <a:buNone/>
+            </a:pPr>
+            <a:r>
+              <a:rPr lang="en-US" sz="730" dirty="0">
+                <a:solidFill>
+                  <a:srgbClr val="64748B"/>
+                </a:solidFill>
+                <a:latin typeface="Noto Sans CJK SC" pitchFamily="34" charset="0"/>
+                <a:ea typeface="Noto Sans CJK SC" pitchFamily="34" charset="-122"/>
+                <a:cs typeface="Noto Sans CJK SC" pitchFamily="34" charset="-120"/>
+              </a:rPr>
+              <a:t>仓库 app 目录列出 agent_runner、initializer、router、llm_client、knowledge_loader 等后端文件；web 目录列出 test、manage、batch、answerRender 等前端文件。</a:t>
+            </a:r>
+            <a:endParaRPr lang="en-US" sz="730" dirty="0"/>
+          </a:p>
+        </p:txBody>
+      </p:sp>
+      <p:sp>
+        <p:nvSpPr>
+          <p:cNvPr id="14" name="Text 10"/>
+          <p:cNvSpPr/>
+          <p:nvPr/>
+        </p:nvSpPr>
+        <p:spPr>
+          <a:xfrm>
+            <a:off x="11292840" y="6492240"/>
+            <a:ext cx="411480" cy="182880"/>
+          </a:xfrm>
+          <a:prstGeom prst="rect">
+            <a:avLst/>
+          </a:prstGeom>
+          <a:noFill/>
+        </p:spPr>
+        <p:txBody>
+          <a:bodyPr wrap="square" lIns="0" tIns="0" rIns="0" bIns="0" rtlCol="0" anchor="ctr"/>
+          <a:lstStyle/>
+          <a:p>
+            <a:pPr marL="0" indent="0" algn="r">
+              <a:buNone/>
+            </a:pPr>
+            <a:r>
+              <a:rPr lang="en-US" sz="800" dirty="0">
+                <a:solidFill>
+                  <a:srgbClr val="5D6B91"/>
+                </a:solidFill>
+                <a:latin typeface="Noto Sans CJK SC" pitchFamily="34" charset="0"/>
+                <a:ea typeface="Noto Sans CJK SC" pitchFamily="34" charset="-122"/>
+                <a:cs typeface="Noto Sans CJK SC" pitchFamily="34" charset="-120"/>
+              </a:rPr>
+              <a:t>14</a:t>
+            </a:r>
+            <a:endParaRPr lang="en-US" sz="800" dirty="0"/>
+          </a:p>
+        </p:txBody>
+      </p:sp>
+    </p:spTree>
+  </p:cSld>
+  <p:clrMapOvr>
+    <a:masterClrMapping/>
+  </p:clrMapOvr>
+</p:sld>
+</file>
+
+<file path=ppt/slides/slide16.xml><?xml version="1.0" encoding="utf-8"?>
+<p:sld xmlns:a="http://schemas.openxmlformats.org/drawingml/2006/main" xmlns:r="http://schemas.openxmlformats.org/officeDocument/2006/relationships" xmlns:p="http://schemas.openxmlformats.org/presentationml/2006/main">
+  <p:cSld>
+    <p:bg>
+      <p:bgPr>
+        <a:solidFill>
+          <a:srgbClr val="0B0F19"/>
+        </a:solidFill>
+        <a:effectLst/>
+      </p:bgPr>
+    </p:bg>
+    <p:spTree>
+      <p:nvGrpSpPr>
+        <p:cNvPr id="1" name=""/>
+        <p:cNvGrpSpPr/>
+        <p:nvPr/>
+      </p:nvGrpSpPr>
+      <p:grpSpPr>
+        <a:xfrm>
+          <a:off x="0" y="0"/>
+          <a:ext cx="0" cy="0"/>
+          <a:chOff x="0" y="0"/>
+          <a:chExt cx="0" cy="0"/>
+        </a:xfrm>
+      </p:grpSpPr>
+      <p:sp>
+        <p:nvSpPr>
+          <p:cNvPr id="2" name="Shape 0"/>
+          <p:cNvSpPr/>
+          <p:nvPr/>
+        </p:nvSpPr>
+        <p:spPr>
+          <a:xfrm>
+            <a:off x="0" y="0"/>
+            <a:ext cx="12191695" cy="6858000"/>
+          </a:xfrm>
+          <a:prstGeom prst="rect">
+            <a:avLst/>
+          </a:prstGeom>
+          <a:solidFill>
+            <a:srgbClr val="0B0F19"/>
+          </a:solidFill>
+          <a:ln w="12700">
+            <a:solidFill>
+              <a:srgbClr val="0B0F19">
+                <a:alpha val="0"/>
+              </a:srgbClr>
+            </a:solidFill>
+            <a:prstDash val="solid"/>
+          </a:ln>
+        </p:spPr>
+      </p:sp>
+      <p:sp>
+        <p:nvSpPr>
+          <p:cNvPr id="3" name="Text 1"/>
+          <p:cNvSpPr/>
+          <p:nvPr/>
+        </p:nvSpPr>
+        <p:spPr>
+          <a:xfrm>
+            <a:off x="502920" y="320040"/>
+            <a:ext cx="8046720" cy="502920"/>
+          </a:xfrm>
+          <a:prstGeom prst="rect">
+            <a:avLst/>
+          </a:prstGeom>
+          <a:noFill/>
+        </p:spPr>
+        <p:txBody>
+          <a:bodyPr wrap="square" lIns="0" tIns="0" rIns="0" bIns="0" rtlCol="0" anchor="ctr">
+            <a:normAutofit/>
+          </a:bodyPr>
+          <a:lstStyle/>
+          <a:p>
+            <a:pPr marL="0" indent="0">
+              <a:buNone/>
+            </a:pPr>
+            <a:r>
+              <a:rPr lang="en-US" sz="2500" b="1" dirty="0">
+                <a:solidFill>
+                  <a:srgbClr val="F5F8FF"/>
+                </a:solidFill>
+                <a:latin typeface="Noto Sans CJK SC" pitchFamily="34" charset="0"/>
+                <a:ea typeface="Noto Sans CJK SC" pitchFamily="34" charset="-122"/>
+                <a:cs typeface="Noto Sans CJK SC" pitchFamily="34" charset="-120"/>
+              </a:rPr>
               <a:t>优势、边界与优化方向</a:t>
             </a:r>
             <a:endParaRPr lang="en-US" sz="2500" dirty="0"/>
@@ -6731,7 +7154,7 @@
 </p:sld>
 </file>
 
-<file path=ppt/slides/slide16.xml><?xml version="1.0" encoding="utf-8"?>
+<file path=ppt/slides/slide17.xml><?xml version="1.0" encoding="utf-8"?>
 <p:sld xmlns:a="http://schemas.openxmlformats.org/drawingml/2006/main" xmlns:r="http://schemas.openxmlformats.org/officeDocument/2006/relationships" xmlns:p="http://schemas.openxmlformats.org/presentationml/2006/main">
   <p:cSld>
     <p:bg>
@@ -13588,7 +14011,7 @@
         </p:nvSpPr>
         <p:spPr>
           <a:xfrm>
-            <a:off x="0" y="0"/>
+            <a:off x="10795" y="0"/>
             <a:ext cx="12191695" cy="6858000"/>
           </a:xfrm>
           <a:prstGeom prst="rect">
@@ -13606,6 +14029,16 @@
             <a:prstDash val="solid"/>
           </a:ln>
         </p:spPr>
+        <p:txBody>
+          <a:bodyPr/>
+          <a:p>
+            <a:r>
+              <a:rPr lang="en-US" altLang="zh-CN"/>
+              <a:t>F</a:t>
+            </a:r>
+            <a:endParaRPr lang="en-US" altLang="zh-CN"/>
+          </a:p>
+        </p:txBody>
       </p:sp>
       <p:sp>
         <p:nvSpPr>
@@ -13633,17 +14066,79 @@
               <a:buNone/>
             </a:pPr>
             <a:r>
-              <a:rPr lang="en-US" sz="2500" b="1" dirty="0">
-                <a:solidFill>
-                  <a:srgbClr val="F5F8FF"/>
-                </a:solidFill>
-                <a:latin typeface="Noto Sans CJK SC" pitchFamily="34" charset="0"/>
-                <a:ea typeface="Noto Sans CJK SC" pitchFamily="34" charset="-122"/>
-                <a:cs typeface="Noto Sans CJK SC" pitchFamily="34" charset="-120"/>
-              </a:rPr>
-              <a:t>子模型管理：知识文本与回答约束同步维护</a:t>
-            </a:r>
-            <a:endParaRPr lang="en-US" sz="2500" dirty="0"/>
+              <a:rPr lang="zh-CN" altLang="en-US" sz="2500" b="1" dirty="0">
+                <a:solidFill>
+                  <a:srgbClr val="F5F8FF"/>
+                </a:solidFill>
+                <a:latin typeface="Noto Sans CJK SC" pitchFamily="34" charset="0"/>
+                <a:ea typeface="Noto Sans CJK SC" pitchFamily="34" charset="-122"/>
+                <a:cs typeface="Noto Sans CJK SC" pitchFamily="34" charset="-120"/>
+              </a:rPr>
+              <a:t>总</a:t>
+            </a:r>
+            <a:r>
+              <a:rPr lang="en-US" altLang="zh-CN" sz="2500" b="1" dirty="0">
+                <a:solidFill>
+                  <a:srgbClr val="F5F8FF"/>
+                </a:solidFill>
+                <a:latin typeface="Noto Sans CJK SC" pitchFamily="34" charset="0"/>
+                <a:ea typeface="Noto Sans CJK SC" pitchFamily="34" charset="-122"/>
+                <a:cs typeface="Noto Sans CJK SC" pitchFamily="34" charset="-120"/>
+              </a:rPr>
+              <a:t> Agent </a:t>
+            </a:r>
+            <a:r>
+              <a:rPr lang="zh-CN" altLang="en-US" sz="2500" b="1" dirty="0">
+                <a:solidFill>
+                  <a:srgbClr val="F5F8FF"/>
+                </a:solidFill>
+                <a:latin typeface="Noto Sans CJK SC" pitchFamily="34" charset="0"/>
+                <a:ea typeface="Noto Sans CJK SC" pitchFamily="34" charset="-122"/>
+                <a:cs typeface="Noto Sans CJK SC" pitchFamily="34" charset="-120"/>
+              </a:rPr>
+              <a:t>路由集合：</a:t>
+            </a:r>
+            <a:r>
+              <a:rPr lang="en-US" altLang="zh-CN" sz="2500" b="1" dirty="0">
+                <a:solidFill>
+                  <a:srgbClr val="F5F8FF"/>
+                </a:solidFill>
+                <a:latin typeface="Noto Sans CJK SC" pitchFamily="34" charset="0"/>
+                <a:ea typeface="Noto Sans CJK SC" pitchFamily="34" charset="-122"/>
+                <a:cs typeface="Noto Sans CJK SC" pitchFamily="34" charset="-120"/>
+              </a:rPr>
+              <a:t> route_questions </a:t>
+            </a:r>
+            <a:r>
+              <a:rPr lang="zh-CN" altLang="en-US" sz="2500" b="1" dirty="0">
+                <a:solidFill>
+                  <a:srgbClr val="F5F8FF"/>
+                </a:solidFill>
+                <a:latin typeface="Noto Sans CJK SC" pitchFamily="34" charset="0"/>
+                <a:ea typeface="Noto Sans CJK SC" pitchFamily="34" charset="-122"/>
+                <a:cs typeface="Noto Sans CJK SC" pitchFamily="34" charset="-120"/>
+              </a:rPr>
+              <a:t>统一</a:t>
+            </a:r>
+            <a:r>
+              <a:rPr lang="zh-CN" altLang="en-US" sz="2500" b="1" dirty="0">
+                <a:solidFill>
+                  <a:srgbClr val="F5F8FF"/>
+                </a:solidFill>
+                <a:latin typeface="Noto Sans CJK SC" pitchFamily="34" charset="0"/>
+                <a:ea typeface="Noto Sans CJK SC" pitchFamily="34" charset="-122"/>
+                <a:cs typeface="Noto Sans CJK SC" pitchFamily="34" charset="-120"/>
+              </a:rPr>
+              <a:t>管理</a:t>
+            </a:r>
+            <a:endParaRPr lang="zh-CN" altLang="en-US" sz="2500" b="1" dirty="0">
+              <a:solidFill>
+                <a:srgbClr val="F5F8FF"/>
+              </a:solidFill>
+              <a:latin typeface="Noto Sans CJK SC" pitchFamily="34" charset="0"/>
+              <a:ea typeface="Noto Sans CJK SC" pitchFamily="34" charset="-122"/>
+              <a:cs typeface="Noto Sans CJK SC" pitchFamily="34" charset="-120"/>
+            </a:endParaRPr>
           </a:p>
         </p:txBody>
       </p:sp>
@@ -13655,8 +14150,8 @@
         </p:nvSpPr>
         <p:spPr>
           <a:xfrm>
-            <a:off x="530352" y="850392"/>
-            <a:ext cx="8869680" cy="274320"/>
+            <a:off x="530225" y="850265"/>
+            <a:ext cx="11174730" cy="402590"/>
           </a:xfrm>
           <a:prstGeom prst="rect">
             <a:avLst/>
@@ -13665,7 +14160,7 @@
         </p:spPr>
         <p:txBody>
           <a:bodyPr wrap="square" lIns="0" tIns="0" rIns="0" bIns="0" rtlCol="0" anchor="ctr">
-            <a:normAutofit/>
+            <a:noAutofit/>
           </a:bodyPr>
           <a:lstStyle/>
           <a:p>
@@ -13673,7 +14168,7 @@
               <a:buNone/>
             </a:pPr>
             <a:r>
-              <a:rPr lang="en-US" sz="950" dirty="0">
+              <a:rPr lang="zh-CN" altLang="en-US" sz="1400" dirty="0">
                 <a:solidFill>
                   <a:srgbClr val="AAB6D3"/>
                 </a:solidFill>
@@ -13681,9 +14176,60 @@
                 <a:ea typeface="Noto Sans CJK SC" pitchFamily="34" charset="-122"/>
                 <a:cs typeface="Noto Sans CJK SC" pitchFamily="34" charset="-120"/>
               </a:rPr>
-              <a:t>子 Agent 页面可以编辑知识文件，同时维护该 Agent 的回答规则与引用规则</a:t>
-            </a:r>
-            <a:endParaRPr lang="en-US" sz="950" dirty="0"/>
+              <a:t>总</a:t>
+            </a:r>
+            <a:r>
+              <a:rPr lang="en-US" altLang="zh-CN" sz="1400" dirty="0">
+                <a:solidFill>
+                  <a:srgbClr val="AAB6D3"/>
+                </a:solidFill>
+                <a:latin typeface="Noto Sans CJK SC" pitchFamily="34" charset="0"/>
+                <a:ea typeface="Noto Sans CJK SC" pitchFamily="34" charset="-122"/>
+                <a:cs typeface="Noto Sans CJK SC" pitchFamily="34" charset="-120"/>
+              </a:rPr>
+              <a:t>Agent</a:t>
+            </a:r>
+            <a:r>
+              <a:rPr lang="zh-CN" altLang="en-US" sz="1400" dirty="0">
+                <a:solidFill>
+                  <a:srgbClr val="AAB6D3"/>
+                </a:solidFill>
+                <a:latin typeface="Noto Sans CJK SC" pitchFamily="34" charset="0"/>
+                <a:ea typeface="Noto Sans CJK SC" pitchFamily="34" charset="-122"/>
+                <a:cs typeface="Noto Sans CJK SC" pitchFamily="34" charset="-120"/>
+              </a:rPr>
+              <a:t>只负责根据用户问题匹配最接近的子</a:t>
+            </a:r>
+            <a:r>
+              <a:rPr lang="en-US" altLang="zh-CN" sz="1400" dirty="0">
+                <a:solidFill>
+                  <a:srgbClr val="AAB6D3"/>
+                </a:solidFill>
+                <a:latin typeface="Noto Sans CJK SC" pitchFamily="34" charset="0"/>
+                <a:ea typeface="Noto Sans CJK SC" pitchFamily="34" charset="-122"/>
+                <a:cs typeface="Noto Sans CJK SC" pitchFamily="34" charset="-120"/>
+              </a:rPr>
+              <a:t>Agent</a:t>
+            </a:r>
+            <a:r>
+              <a:rPr lang="zh-CN" altLang="en-US" sz="1400" dirty="0">
+                <a:solidFill>
+                  <a:srgbClr val="AAB6D3"/>
+                </a:solidFill>
+                <a:latin typeface="Noto Sans CJK SC" pitchFamily="34" charset="0"/>
+                <a:ea typeface="Noto Sans CJK SC" pitchFamily="34" charset="-122"/>
+                <a:cs typeface="Noto Sans CJK SC" pitchFamily="34" charset="-120"/>
+              </a:rPr>
+              <a:t>问题集合，不直接读取全部文档内容。路由问题每行对应一个可匹配的用户问题方向</a:t>
+            </a:r>
+            <a:endParaRPr lang="zh-CN" altLang="en-US" sz="1400" dirty="0">
+              <a:solidFill>
+                <a:srgbClr val="AAB6D3"/>
+              </a:solidFill>
+              <a:latin typeface="Noto Sans CJK SC" pitchFamily="34" charset="0"/>
+              <a:ea typeface="Noto Sans CJK SC" pitchFamily="34" charset="-122"/>
+              <a:cs typeface="Noto Sans CJK SC" pitchFamily="34" charset="-120"/>
+            </a:endParaRPr>
           </a:p>
         </p:txBody>
       </p:sp>
@@ -13725,9 +14271,47 @@
           </a:p>
         </p:txBody>
       </p:sp>
+      <p:sp>
+        <p:nvSpPr>
+          <p:cNvPr id="13" name="Text 10"/>
+          <p:cNvSpPr/>
+          <p:nvPr/>
+        </p:nvSpPr>
+        <p:spPr>
+          <a:xfrm>
+            <a:off x="11292840" y="6492240"/>
+            <a:ext cx="411480" cy="182880"/>
+          </a:xfrm>
+          <a:prstGeom prst="rect">
+            <a:avLst/>
+          </a:prstGeom>
+          <a:noFill/>
+        </p:spPr>
+        <p:txBody>
+          <a:bodyPr wrap="square" lIns="0" tIns="0" rIns="0" bIns="0" rtlCol="0" anchor="ctr"/>
+          <a:lstStyle/>
+          <a:p>
+            <a:pPr marL="0" indent="0" algn="r">
+              <a:buNone/>
+            </a:pPr>
+            <a:r>
+              <a:rPr lang="en-US" sz="800" dirty="0">
+                <a:solidFill>
+                  <a:srgbClr val="5D6B91"/>
+                </a:solidFill>
+                <a:latin typeface="Noto Sans CJK SC" pitchFamily="34" charset="0"/>
+                <a:ea typeface="Noto Sans CJK SC" pitchFamily="34" charset="-122"/>
+                <a:cs typeface="Noto Sans CJK SC" pitchFamily="34" charset="-120"/>
+              </a:rPr>
+              <a:t>08</a:t>
+            </a:r>
+            <a:endParaRPr lang="en-US" sz="800" dirty="0"/>
+          </a:p>
+        </p:txBody>
+      </p:sp>
       <p:pic>
         <p:nvPicPr>
-          <p:cNvPr id="6" name="Image 0" descr="/mnt/data/ppt_assets/agent_knowledge.jpg"/>
+          <p:cNvPr id="14" name="图片 13"/>
           <p:cNvPicPr>
             <a:picLocks noChangeAspect="1"/>
           </p:cNvPicPr>
@@ -13741,48 +14325,24 @@
         </p:blipFill>
         <p:spPr>
           <a:xfrm>
-            <a:off x="1176276" y="1143000"/>
-            <a:ext cx="3773929" cy="4251960"/>
+            <a:off x="1718310" y="1252220"/>
+            <a:ext cx="4890770" cy="5605780"/>
           </a:xfrm>
           <a:prstGeom prst="rect">
             <a:avLst/>
           </a:prstGeom>
         </p:spPr>
       </p:pic>
-      <p:pic>
-        <p:nvPicPr>
-          <p:cNvPr id="7" name="Image 1" descr="/mnt/data/ppt_assets/agent_prompt.jpg"/>
-          <p:cNvPicPr>
-            <a:picLocks noChangeAspect="1"/>
-          </p:cNvPicPr>
-          <p:nvPr/>
-        </p:nvPicPr>
-        <p:blipFill>
-          <a:blip r:embed="rId2"/>
-          <a:stretch>
-            <a:fillRect/>
-          </a:stretch>
-        </p:blipFill>
-        <p:spPr>
-          <a:xfrm>
-            <a:off x="6513369" y="1143000"/>
-            <a:ext cx="3889663" cy="4251960"/>
-          </a:xfrm>
-          <a:prstGeom prst="rect">
-            <a:avLst/>
-          </a:prstGeom>
-        </p:spPr>
-      </p:pic>
-      <p:sp>
-        <p:nvSpPr>
-          <p:cNvPr id="8" name="Text 4"/>
-          <p:cNvSpPr/>
-          <p:nvPr/>
-        </p:nvSpPr>
-        <p:spPr>
-          <a:xfrm>
-            <a:off x="640080" y="5532120"/>
-            <a:ext cx="10424160" cy="256032"/>
+      <p:sp>
+        <p:nvSpPr>
+          <p:cNvPr id="15" name="Text 2"/>
+          <p:cNvSpPr/>
+          <p:nvPr/>
+        </p:nvSpPr>
+        <p:spPr>
+          <a:xfrm>
+            <a:off x="6892925" y="3853815"/>
+            <a:ext cx="2804795" cy="402590"/>
           </a:xfrm>
           <a:prstGeom prst="rect">
             <a:avLst/>
@@ -13791,15 +14351,15 @@
         </p:spPr>
         <p:txBody>
           <a:bodyPr wrap="square" lIns="0" tIns="0" rIns="0" bIns="0" rtlCol="0" anchor="ctr">
-            <a:normAutofit/>
+            <a:noAutofit/>
           </a:bodyPr>
           <a:lstStyle/>
           <a:p>
-            <a:pPr marL="0" indent="0" algn="ctr">
-              <a:buNone/>
-            </a:pPr>
-            <a:r>
-              <a:rPr lang="en-US" sz="850" dirty="0">
+            <a:pPr marL="0" indent="0">
+              <a:buNone/>
+            </a:pPr>
+            <a:r>
+              <a:rPr lang="zh-CN" altLang="en-US" sz="1400" dirty="0">
                 <a:solidFill>
                   <a:srgbClr val="AAB6D3"/>
                 </a:solidFill>
@@ -13807,87 +14367,38 @@
                 <a:ea typeface="Noto Sans CJK SC" pitchFamily="34" charset="-122"/>
                 <a:cs typeface="Noto Sans CJK SC" pitchFamily="34" charset="-120"/>
               </a:rPr>
-              <a:t>左：knowledge.md；右：子 Agent 提示词</a:t>
-            </a:r>
-            <a:endParaRPr lang="en-US" sz="850" dirty="0"/>
-          </a:p>
-        </p:txBody>
-      </p:sp>
-      <p:sp>
-        <p:nvSpPr>
-          <p:cNvPr id="9" name="Text 5"/>
-          <p:cNvSpPr/>
-          <p:nvPr/>
-        </p:nvSpPr>
-        <p:spPr>
-          <a:xfrm>
-            <a:off x="822960" y="5870448"/>
-            <a:ext cx="10332720" cy="365760"/>
-          </a:xfrm>
-          <a:prstGeom prst="rect">
-            <a:avLst/>
-          </a:prstGeom>
-          <a:noFill/>
-        </p:spPr>
-        <p:txBody>
-          <a:bodyPr wrap="square" lIns="635" tIns="635" rIns="635" bIns="635" rtlCol="0" anchor="t">
-            <a:normAutofit/>
-          </a:bodyPr>
-          <a:lstStyle/>
-          <a:p>
-            <a:pPr marL="0" indent="0">
-              <a:buNone/>
-            </a:pPr>
-            <a:r>
-              <a:rPr lang="en-US" sz="1080" dirty="0">
-                <a:solidFill>
-                  <a:srgbClr val="F5F8FF"/>
-                </a:solidFill>
-                <a:latin typeface="Noto Sans CJK SC" pitchFamily="34" charset="0"/>
-                <a:ea typeface="Noto Sans CJK SC" pitchFamily="34" charset="-122"/>
-                <a:cs typeface="Noto Sans CJK SC" pitchFamily="34" charset="-120"/>
-              </a:rPr>
-              <a:t>实现意义：通过“知识内容 + 回答规则”绑定到同一个子 Agent，既保证模型有依据，又限制其必须按原文、行号和图片引用回答，避免凭空扩展。</a:t>
-            </a:r>
-            <a:endParaRPr lang="en-US" sz="1080" dirty="0"/>
-          </a:p>
-        </p:txBody>
-      </p:sp>
-      <p:sp>
-        <p:nvSpPr>
-          <p:cNvPr id="10" name="Text 6"/>
-          <p:cNvSpPr/>
-          <p:nvPr/>
-        </p:nvSpPr>
-        <p:spPr>
-          <a:xfrm>
-            <a:off x="11292840" y="6492240"/>
-            <a:ext cx="411480" cy="182880"/>
-          </a:xfrm>
-          <a:prstGeom prst="rect">
-            <a:avLst/>
-          </a:prstGeom>
-          <a:noFill/>
-        </p:spPr>
-        <p:txBody>
-          <a:bodyPr wrap="square" lIns="0" tIns="0" rIns="0" bIns="0" rtlCol="0" anchor="ctr"/>
-          <a:lstStyle/>
-          <a:p>
-            <a:pPr marL="0" indent="0" algn="r">
-              <a:buNone/>
-            </a:pPr>
-            <a:r>
-              <a:rPr lang="en-US" sz="800" dirty="0">
-                <a:solidFill>
-                  <a:srgbClr val="5D6B91"/>
-                </a:solidFill>
-                <a:latin typeface="Noto Sans CJK SC" pitchFamily="34" charset="0"/>
-                <a:ea typeface="Noto Sans CJK SC" pitchFamily="34" charset="-122"/>
-                <a:cs typeface="Noto Sans CJK SC" pitchFamily="34" charset="-120"/>
-              </a:rPr>
-              <a:t>09</a:t>
-            </a:r>
-            <a:endParaRPr lang="en-US" sz="800" dirty="0"/>
+              <a:t>总 </a:t>
+            </a:r>
+            <a:r>
+              <a:rPr lang="en-US" altLang="zh-CN" sz="1400" dirty="0">
+                <a:solidFill>
+                  <a:srgbClr val="AAB6D3"/>
+                </a:solidFill>
+                <a:latin typeface="Noto Sans CJK SC" pitchFamily="34" charset="0"/>
+                <a:ea typeface="Noto Sans CJK SC" pitchFamily="34" charset="-122"/>
+                <a:cs typeface="Noto Sans CJK SC" pitchFamily="34" charset="-120"/>
+              </a:rPr>
+              <a:t>Agent </a:t>
+            </a:r>
+            <a:r>
+              <a:rPr lang="zh-CN" altLang="en-US" sz="1400" dirty="0">
+                <a:solidFill>
+                  <a:srgbClr val="AAB6D3"/>
+                </a:solidFill>
+                <a:latin typeface="Noto Sans CJK SC" pitchFamily="34" charset="0"/>
+                <a:ea typeface="Noto Sans CJK SC" pitchFamily="34" charset="-122"/>
+                <a:cs typeface="Noto Sans CJK SC" pitchFamily="34" charset="-120"/>
+              </a:rPr>
+              <a:t>路由提示词</a:t>
+            </a:r>
+            <a:endParaRPr lang="zh-CN" altLang="en-US" sz="1400" dirty="0">
+              <a:solidFill>
+                <a:srgbClr val="AAB6D3"/>
+              </a:solidFill>
+              <a:latin typeface="Noto Sans CJK SC" pitchFamily="34" charset="0"/>
+              <a:ea typeface="Noto Sans CJK SC" pitchFamily="34" charset="-122"/>
+              <a:cs typeface="Noto Sans CJK SC" pitchFamily="34" charset="-120"/>
+            </a:endParaRPr>
           </a:p>
         </p:txBody>
       </p:sp>

--- a/multi_model_file_qa_routing_system_intro (1).pptx
+++ b/multi_model_file_qa_routing_system_intro (1).pptx
@@ -2264,6 +2264,28 @@
               <a:buNone/>
             </a:pPr>
             <a:r>
+              <a:rPr lang="zh-CN" altLang="en-US" sz="1500" dirty="0">
+                <a:solidFill>
+                  <a:srgbClr val="F5F8FF"/>
+                </a:solidFill>
+                <a:latin typeface="Noto Sans CJK SC" pitchFamily="34" charset="0"/>
+                <a:ea typeface="Noto Sans CJK SC" pitchFamily="34" charset="-122"/>
+                <a:cs typeface="Noto Sans CJK SC" pitchFamily="34" charset="-120"/>
+              </a:rPr>
+              <a:t>产品</a:t>
+            </a:r>
+            <a:r>
+              <a:rPr lang="zh-CN" altLang="en-US" sz="1500" dirty="0">
+                <a:solidFill>
+                  <a:srgbClr val="F5F8FF"/>
+                </a:solidFill>
+                <a:latin typeface="Noto Sans CJK SC" pitchFamily="34" charset="0"/>
+                <a:ea typeface="Noto Sans CJK SC" pitchFamily="34" charset="-122"/>
+                <a:cs typeface="Noto Sans CJK SC" pitchFamily="34" charset="-120"/>
+              </a:rPr>
+              <a:t>简要说明</a:t>
+            </a:r>
+            <a:r>
               <a:rPr lang="en-US" sz="1500" dirty="0">
                 <a:solidFill>
                   <a:srgbClr val="F5F8FF"/>
@@ -2272,7 +2294,101 @@
                 <a:ea typeface="Noto Sans CJK SC" pitchFamily="34" charset="-122"/>
                 <a:cs typeface="Noto Sans CJK SC" pitchFamily="34" charset="-120"/>
               </a:rPr>
-              <a:t>面向产品说明书、技术文档与多文件知识场景：先按主题拆分子 Agent，再由路由模型根据用户问题选择最相关的知识文件，最终基于原文、行号与图片生成可追溯回答。</a:t>
+              <a:t>：</a:t>
+            </a:r>
+            <a:endParaRPr lang="en-US" sz="1500" dirty="0">
+              <a:solidFill>
+                <a:srgbClr val="F5F8FF"/>
+              </a:solidFill>
+              <a:latin typeface="Noto Sans CJK SC" pitchFamily="34" charset="0"/>
+              <a:ea typeface="Noto Sans CJK SC" pitchFamily="34" charset="-122"/>
+              <a:cs typeface="Noto Sans CJK SC" pitchFamily="34" charset="-120"/>
+            </a:endParaRPr>
+          </a:p>
+          <a:p>
+            <a:pPr marL="0" indent="0">
+              <a:buNone/>
+            </a:pPr>
+            <a:r>
+              <a:rPr lang="en-US" sz="1500" dirty="0">
+                <a:solidFill>
+                  <a:srgbClr val="F5F8FF"/>
+                </a:solidFill>
+                <a:latin typeface="Noto Sans CJK SC" pitchFamily="34" charset="0"/>
+                <a:ea typeface="Noto Sans CJK SC" pitchFamily="34" charset="-122"/>
+                <a:cs typeface="Noto Sans CJK SC" pitchFamily="34" charset="-120"/>
+              </a:rPr>
+              <a:t>按主题拆分子 Agent</a:t>
+            </a:r>
+            <a:r>
+              <a:rPr lang="zh-CN" altLang="en-US" sz="1500" dirty="0">
+                <a:solidFill>
+                  <a:srgbClr val="F5F8FF"/>
+                </a:solidFill>
+                <a:latin typeface="Noto Sans CJK SC" pitchFamily="34" charset="0"/>
+                <a:ea typeface="Noto Sans CJK SC" pitchFamily="34" charset="-122"/>
+                <a:cs typeface="Noto Sans CJK SC" pitchFamily="34" charset="-120"/>
+              </a:rPr>
+              <a:t>，</a:t>
+            </a:r>
+            <a:endParaRPr lang="en-US" sz="1500" dirty="0">
+              <a:solidFill>
+                <a:srgbClr val="F5F8FF"/>
+              </a:solidFill>
+              <a:latin typeface="Noto Sans CJK SC" pitchFamily="34" charset="0"/>
+              <a:ea typeface="Noto Sans CJK SC" pitchFamily="34" charset="-122"/>
+              <a:cs typeface="Noto Sans CJK SC" pitchFamily="34" charset="-120"/>
+            </a:endParaRPr>
+          </a:p>
+          <a:p>
+            <a:pPr marL="0" indent="0">
+              <a:buNone/>
+            </a:pPr>
+            <a:r>
+              <a:rPr lang="en-US" sz="1500" dirty="0">
+                <a:solidFill>
+                  <a:srgbClr val="F5F8FF"/>
+                </a:solidFill>
+                <a:latin typeface="Noto Sans CJK SC" pitchFamily="34" charset="0"/>
+                <a:ea typeface="Noto Sans CJK SC" pitchFamily="34" charset="-122"/>
+                <a:cs typeface="Noto Sans CJK SC" pitchFamily="34" charset="-120"/>
+              </a:rPr>
+              <a:t>由路由模型根据用户问题选择最相关的知识文件</a:t>
+            </a:r>
+            <a:r>
+              <a:rPr lang="zh-CN" altLang="en-US" sz="1500" dirty="0">
+                <a:solidFill>
+                  <a:srgbClr val="F5F8FF"/>
+                </a:solidFill>
+                <a:latin typeface="Noto Sans CJK SC" pitchFamily="34" charset="0"/>
+                <a:ea typeface="Noto Sans CJK SC" pitchFamily="34" charset="-122"/>
+                <a:cs typeface="Noto Sans CJK SC" pitchFamily="34" charset="-120"/>
+              </a:rPr>
+              <a:t>，</a:t>
+            </a:r>
+            <a:endParaRPr lang="en-US" sz="1500" dirty="0">
+              <a:solidFill>
+                <a:srgbClr val="F5F8FF"/>
+              </a:solidFill>
+              <a:latin typeface="Noto Sans CJK SC" pitchFamily="34" charset="0"/>
+              <a:ea typeface="Noto Sans CJK SC" pitchFamily="34" charset="-122"/>
+              <a:cs typeface="Noto Sans CJK SC" pitchFamily="34" charset="-120"/>
+            </a:endParaRPr>
+          </a:p>
+          <a:p>
+            <a:pPr marL="0" indent="0">
+              <a:buNone/>
+            </a:pPr>
+            <a:r>
+              <a:rPr lang="en-US" sz="1500" dirty="0">
+                <a:solidFill>
+                  <a:srgbClr val="F5F8FF"/>
+                </a:solidFill>
+                <a:latin typeface="Noto Sans CJK SC" pitchFamily="34" charset="0"/>
+                <a:ea typeface="Noto Sans CJK SC" pitchFamily="34" charset="-122"/>
+                <a:cs typeface="Noto Sans CJK SC" pitchFamily="34" charset="-120"/>
+              </a:rPr>
+              <a:t>基于原文、行号与图片生成可追溯回答。</a:t>
             </a:r>
             <a:endParaRPr lang="en-US" sz="1500" dirty="0"/>
           </a:p>
@@ -2526,8 +2642,8 @@
         </p:blipFill>
         <p:spPr>
           <a:xfrm>
-            <a:off x="5607685" y="1729740"/>
-            <a:ext cx="6005195" cy="2861310"/>
+            <a:off x="5524500" y="1650365"/>
+            <a:ext cx="6421755" cy="3060065"/>
           </a:xfrm>
           <a:prstGeom prst="rect">
             <a:avLst/>
@@ -2745,9 +2861,11 @@
               <a:buNone/>
             </a:pPr>
             <a:r>
-              <a:rPr lang="en-US" sz="950" dirty="0">
-                <a:solidFill>
-                  <a:srgbClr val="AAB6D3"/>
+              <a:rPr lang="en-US" sz="1200" dirty="0">
+                <a:solidFill>
+                  <a:schemeClr val="bg1">
+                    <a:lumMod val="95000"/>
+                  </a:schemeClr>
                 </a:solidFill>
                 <a:latin typeface="Noto Sans CJK SC" pitchFamily="34" charset="0"/>
                 <a:ea typeface="Noto Sans CJK SC" pitchFamily="34" charset="-122"/>
@@ -2755,7 +2873,16 @@
               </a:rPr>
               <a:t>子 Agent 页面可以编辑知识文件，同时维护该 Agent 的回答规则与引用规则</a:t>
             </a:r>
-            <a:endParaRPr lang="en-US" sz="950" dirty="0"/>
+            <a:endParaRPr lang="en-US" sz="1200" dirty="0">
+              <a:solidFill>
+                <a:schemeClr val="bg1">
+                  <a:lumMod val="95000"/>
+                </a:schemeClr>
+              </a:solidFill>
+              <a:latin typeface="Noto Sans CJK SC" pitchFamily="34" charset="0"/>
+              <a:ea typeface="Noto Sans CJK SC" pitchFamily="34" charset="-122"/>
+              <a:cs typeface="Noto Sans CJK SC" pitchFamily="34" charset="-120"/>
+            </a:endParaRPr>
           </a:p>
         </p:txBody>
       </p:sp>
@@ -2813,8 +2940,8 @@
         </p:blipFill>
         <p:spPr>
           <a:xfrm>
-            <a:off x="1176276" y="1143000"/>
-            <a:ext cx="3773929" cy="4251960"/>
+            <a:off x="1176020" y="1143000"/>
+            <a:ext cx="4157980" cy="4685030"/>
           </a:xfrm>
           <a:prstGeom prst="rect">
             <a:avLst/>
@@ -2837,8 +2964,8 @@
         </p:blipFill>
         <p:spPr>
           <a:xfrm>
-            <a:off x="6513369" y="1143000"/>
-            <a:ext cx="3889663" cy="4251960"/>
+            <a:off x="6084570" y="1143000"/>
+            <a:ext cx="4318000" cy="4721225"/>
           </a:xfrm>
           <a:prstGeom prst="rect">
             <a:avLst/>
@@ -2853,7 +2980,7 @@
         </p:nvSpPr>
         <p:spPr>
           <a:xfrm>
-            <a:off x="640080" y="5532120"/>
+            <a:off x="640080" y="5894705"/>
             <a:ext cx="10424160" cy="256032"/>
           </a:xfrm>
           <a:prstGeom prst="rect">
@@ -2893,8 +3020,8 @@
         </p:nvSpPr>
         <p:spPr>
           <a:xfrm>
-            <a:off x="822960" y="5870448"/>
-            <a:ext cx="10332720" cy="365760"/>
+            <a:off x="763270" y="6308090"/>
+            <a:ext cx="10857865" cy="365760"/>
           </a:xfrm>
           <a:prstGeom prst="rect">
             <a:avLst/>
@@ -2903,7 +3030,7 @@
         </p:spPr>
         <p:txBody>
           <a:bodyPr wrap="square" lIns="635" tIns="635" rIns="635" bIns="635" rtlCol="0" anchor="t">
-            <a:normAutofit/>
+            <a:noAutofit/>
           </a:bodyPr>
           <a:lstStyle/>
           <a:p>
@@ -2911,17 +3038,24 @@
               <a:buNone/>
             </a:pPr>
             <a:r>
-              <a:rPr lang="en-US" sz="1080" dirty="0">
-                <a:solidFill>
-                  <a:srgbClr val="F5F8FF"/>
-                </a:solidFill>
-                <a:latin typeface="Noto Sans CJK SC" pitchFamily="34" charset="0"/>
-                <a:ea typeface="Noto Sans CJK SC" pitchFamily="34" charset="-122"/>
-                <a:cs typeface="Noto Sans CJK SC" pitchFamily="34" charset="-120"/>
-              </a:rPr>
-              <a:t>实现意义：通过“知识内容 + 回答规则”绑定到同一个子 Agent，既保证模型有依据，又限制其必须按原文、行号和图片引用回答，避免凭空扩展。</a:t>
-            </a:r>
-            <a:endParaRPr lang="en-US" sz="1080" dirty="0"/>
+              <a:rPr lang="en-US" sz="1400" dirty="0">
+                <a:solidFill>
+                  <a:srgbClr val="F5F8FF"/>
+                </a:solidFill>
+                <a:latin typeface="Noto Sans CJK SC" pitchFamily="34" charset="0"/>
+                <a:ea typeface="Noto Sans CJK SC" pitchFamily="34" charset="-122"/>
+                <a:cs typeface="Noto Sans CJK SC" pitchFamily="34" charset="-120"/>
+              </a:rPr>
+              <a:t>通过“知识内容 + 回答规则”绑定到同一个子 Agent，既保证模型有依据，又限制其必须按原文、行号和图片引用回答，避免凭空扩展。</a:t>
+            </a:r>
+            <a:endParaRPr lang="en-US" sz="1400" dirty="0">
+              <a:solidFill>
+                <a:srgbClr val="F5F8FF"/>
+              </a:solidFill>
+              <a:latin typeface="Noto Sans CJK SC" pitchFamily="34" charset="0"/>
+              <a:ea typeface="Noto Sans CJK SC" pitchFamily="34" charset="-122"/>
+              <a:cs typeface="Noto Sans CJK SC" pitchFamily="34" charset="-120"/>
+            </a:endParaRPr>
           </a:p>
         </p:txBody>
       </p:sp>
@@ -3057,7 +3191,7 @@
                 <a:ea typeface="Noto Sans CJK SC" pitchFamily="34" charset="-122"/>
                 <a:cs typeface="Noto Sans CJK SC" pitchFamily="34" charset="-120"/>
               </a:rPr>
-              <a:t>单问题测试页：一次问答完整观察路由、回答、引用与耗时</a:t>
+              <a:t>单问题测试页</a:t>
             </a:r>
             <a:endParaRPr lang="en-US" sz="2500" dirty="0"/>
           </a:p>
@@ -3080,26 +3214,51 @@
           <a:noFill/>
         </p:spPr>
         <p:txBody>
-          <a:bodyPr wrap="square" lIns="0" tIns="0" rIns="0" bIns="0" rtlCol="0" anchor="ctr">
-            <a:normAutofit/>
-          </a:bodyPr>
+          <a:bodyPr wrap="square" lIns="0" tIns="0" rIns="0" bIns="0" rtlCol="0" anchor="ctr"/>
           <a:lstStyle/>
           <a:p>
             <a:pPr marL="0" indent="0">
               <a:buNone/>
             </a:pPr>
             <a:r>
-              <a:rPr lang="en-US" sz="950" dirty="0">
-                <a:solidFill>
-                  <a:srgbClr val="AAB6D3"/>
-                </a:solidFill>
-                <a:latin typeface="Noto Sans CJK SC" pitchFamily="34" charset="0"/>
-                <a:ea typeface="Noto Sans CJK SC" pitchFamily="34" charset="-122"/>
-                <a:cs typeface="Noto Sans CJK SC" pitchFamily="34" charset="-120"/>
-              </a:rPr>
-              <a:t>页面用于快速验证一个问题是否命中正确 Agent，以及回答是否有原文支撑</a:t>
-            </a:r>
-            <a:endParaRPr lang="en-US" sz="950" dirty="0"/>
+              <a:rPr lang="zh-CN" altLang="en-US" sz="1400" dirty="0">
+                <a:solidFill>
+                  <a:schemeClr val="bg1">
+                    <a:lumMod val="95000"/>
+                  </a:schemeClr>
+                </a:solidFill>
+                <a:latin typeface="Noto Sans CJK SC" pitchFamily="34" charset="0"/>
+                <a:ea typeface="Noto Sans CJK SC" pitchFamily="34" charset="-122"/>
+                <a:cs typeface="Noto Sans CJK SC" pitchFamily="34" charset="-120"/>
+                <a:sym typeface="+mn-ea"/>
+              </a:rPr>
+              <a:t>一</a:t>
+            </a:r>
+            <a:r>
+              <a:rPr lang="en-US" sz="1400" dirty="0">
+                <a:solidFill>
+                  <a:schemeClr val="bg1">
+                    <a:lumMod val="95000"/>
+                  </a:schemeClr>
+                </a:solidFill>
+                <a:latin typeface="Noto Sans CJK SC" pitchFamily="34" charset="0"/>
+                <a:ea typeface="Noto Sans CJK SC" pitchFamily="34" charset="-122"/>
+                <a:cs typeface="Noto Sans CJK SC" pitchFamily="34" charset="-120"/>
+                <a:sym typeface="+mn-ea"/>
+              </a:rPr>
+              <a:t>次问答完整观察路由、回答、引用与耗时</a:t>
+            </a:r>
+            <a:endParaRPr lang="en-US" sz="1400" dirty="0">
+              <a:solidFill>
+                <a:schemeClr val="bg1">
+                  <a:lumMod val="95000"/>
+                </a:schemeClr>
+              </a:solidFill>
+              <a:latin typeface="Noto Sans CJK SC" pitchFamily="34" charset="0"/>
+              <a:ea typeface="Noto Sans CJK SC" pitchFamily="34" charset="-122"/>
+              <a:cs typeface="Noto Sans CJK SC" pitchFamily="34" charset="-120"/>
+              <a:sym typeface="+mn-ea"/>
+            </a:endParaRPr>
           </a:p>
         </p:txBody>
       </p:sp>
@@ -3183,7 +3342,7 @@
         </p:spPr>
         <p:txBody>
           <a:bodyPr wrap="square" lIns="635" tIns="635" rIns="635" bIns="635" rtlCol="0" anchor="t">
-            <a:normAutofit/>
+            <a:noAutofit/>
           </a:bodyPr>
           <a:lstStyle/>
           <a:p>
@@ -3191,7 +3350,7 @@
               <a:buNone/>
             </a:pPr>
             <a:r>
-              <a:rPr lang="en-US" sz="1600" b="1" dirty="0">
+              <a:rPr lang="en-US" sz="2000" b="1" dirty="0">
                 <a:solidFill>
                   <a:srgbClr val="6EE7F9"/>
                 </a:solidFill>
@@ -3201,7 +3360,7 @@
               </a:rPr>
               <a:t>观察点</a:t>
             </a:r>
-            <a:endParaRPr lang="en-US" sz="1600" b="1" dirty="0">
+            <a:endParaRPr lang="en-US" sz="2000" b="1" dirty="0">
               <a:solidFill>
                 <a:srgbClr val="6EE7F9"/>
               </a:solidFill>
@@ -3221,7 +3380,7 @@
         <p:spPr>
           <a:xfrm>
             <a:off x="8229600" y="1600200"/>
-            <a:ext cx="3154680" cy="2834640"/>
+            <a:ext cx="3154680" cy="3092450"/>
           </a:xfrm>
           <a:prstGeom prst="rect">
             <a:avLst/>
@@ -3230,7 +3389,7 @@
         </p:spPr>
         <p:txBody>
           <a:bodyPr wrap="square" lIns="635" tIns="635" rIns="635" bIns="635" rtlCol="0" anchor="t">
-            <a:normAutofit/>
+            <a:noAutofit/>
           </a:bodyPr>
           <a:lstStyle/>
           <a:p>
@@ -3238,7 +3397,7 @@
               <a:buNone/>
             </a:pPr>
             <a:r>
-              <a:rPr lang="en-US" sz="1400" dirty="0">
+              <a:rPr lang="en-US" dirty="0">
                 <a:solidFill>
                   <a:srgbClr val="F5F8FF"/>
                 </a:solidFill>
@@ -3248,31 +3407,53 @@
               </a:rPr>
               <a:t>• 输入问题：例如“怎么调光圈”。</a:t>
             </a:r>
-            <a:endParaRPr lang="en-US" sz="1400" dirty="0"/>
+            <a:endParaRPr lang="en-US" dirty="0"/>
           </a:p>
           <a:p>
             <a:pPr marL="0" indent="0">
               <a:buNone/>
             </a:pPr>
             <a:r>
-              <a:rPr lang="en-US" sz="1400" dirty="0">
-                <a:solidFill>
-                  <a:srgbClr val="F5F8FF"/>
-                </a:solidFill>
-                <a:latin typeface="Noto Sans CJK SC" pitchFamily="34" charset="0"/>
-                <a:ea typeface="Noto Sans CJK SC" pitchFamily="34" charset="-122"/>
-                <a:cs typeface="Noto Sans CJK SC" pitchFamily="34" charset="-120"/>
-              </a:rPr>
-              <a:t>• 选择路由：可指定总 Agent，也可观察自动路由结果。</a:t>
-            </a:r>
-            <a:endParaRPr lang="en-US" sz="1400" dirty="0"/>
+              <a:rPr lang="en-US" dirty="0">
+                <a:solidFill>
+                  <a:srgbClr val="F5F8FF"/>
+                </a:solidFill>
+                <a:latin typeface="Noto Sans CJK SC" pitchFamily="34" charset="0"/>
+                <a:ea typeface="Noto Sans CJK SC" pitchFamily="34" charset="-122"/>
+                <a:cs typeface="Noto Sans CJK SC" pitchFamily="34" charset="-120"/>
+              </a:rPr>
+              <a:t>• 选择路由：可指定</a:t>
+            </a:r>
+            <a:r>
+              <a:rPr lang="zh-CN" altLang="en-US" dirty="0">
+                <a:solidFill>
+                  <a:srgbClr val="F5F8FF"/>
+                </a:solidFill>
+                <a:latin typeface="Noto Sans CJK SC" pitchFamily="34" charset="0"/>
+                <a:ea typeface="Noto Sans CJK SC" pitchFamily="34" charset="-122"/>
+                <a:cs typeface="Noto Sans CJK SC" pitchFamily="34" charset="-120"/>
+              </a:rPr>
+              <a:t>回答的</a:t>
+            </a:r>
+            <a:r>
+              <a:rPr lang="en-US" dirty="0">
+                <a:solidFill>
+                  <a:srgbClr val="F5F8FF"/>
+                </a:solidFill>
+                <a:latin typeface="Noto Sans CJK SC" pitchFamily="34" charset="0"/>
+                <a:ea typeface="Noto Sans CJK SC" pitchFamily="34" charset="-122"/>
+                <a:cs typeface="Noto Sans CJK SC" pitchFamily="34" charset="-120"/>
+              </a:rPr>
+              <a:t>总 Agent。</a:t>
+            </a:r>
+            <a:endParaRPr lang="en-US" dirty="0"/>
           </a:p>
           <a:p>
             <a:pPr marL="0" indent="0">
               <a:buNone/>
             </a:pPr>
             <a:r>
-              <a:rPr lang="en-US" sz="1400" dirty="0">
+              <a:rPr lang="en-US" dirty="0">
                 <a:solidFill>
                   <a:srgbClr val="F5F8FF"/>
                 </a:solidFill>
@@ -3282,14 +3463,14 @@
               </a:rPr>
               <a:t>• 回答区：展示最终答案，支持插图辅助说明。</a:t>
             </a:r>
-            <a:endParaRPr lang="en-US" sz="1400" dirty="0"/>
+            <a:endParaRPr lang="en-US" dirty="0"/>
           </a:p>
           <a:p>
             <a:pPr marL="0" indent="0">
               <a:buNone/>
             </a:pPr>
             <a:r>
-              <a:rPr lang="en-US" sz="1400" dirty="0">
+              <a:rPr lang="en-US" dirty="0">
                 <a:solidFill>
                   <a:srgbClr val="F5F8FF"/>
                 </a:solidFill>
@@ -3299,14 +3480,14 @@
               </a:rPr>
               <a:t>• 资源区：列出引用行号与相关图片。</a:t>
             </a:r>
-            <a:endParaRPr lang="en-US" sz="1400" dirty="0"/>
+            <a:endParaRPr lang="en-US" dirty="0"/>
           </a:p>
           <a:p>
             <a:pPr marL="0" indent="0">
               <a:buNone/>
             </a:pPr>
             <a:r>
-              <a:rPr lang="en-US" sz="1400" dirty="0">
+              <a:rPr lang="en-US" dirty="0">
                 <a:solidFill>
                   <a:srgbClr val="F5F8FF"/>
                 </a:solidFill>
@@ -3316,181 +3497,7 @@
               </a:rPr>
               <a:t>• 右侧日志：显示 route、source_pdf、页码范围与耗时。</a:t>
             </a:r>
-            <a:endParaRPr lang="en-US" sz="1400" dirty="0">
-              <a:solidFill>
-                <a:srgbClr val="F5F8FF"/>
-              </a:solidFill>
-              <a:latin typeface="Noto Sans CJK SC" pitchFamily="34" charset="0"/>
-              <a:ea typeface="Noto Sans CJK SC" pitchFamily="34" charset="-122"/>
-              <a:cs typeface="Noto Sans CJK SC" pitchFamily="34" charset="-120"/>
-            </a:endParaRPr>
-          </a:p>
-        </p:txBody>
-      </p:sp>
-      <p:sp>
-        <p:nvSpPr>
-          <p:cNvPr id="9" name="Text 6"/>
-          <p:cNvSpPr/>
-          <p:nvPr/>
-        </p:nvSpPr>
-        <p:spPr>
-          <a:xfrm>
-            <a:off x="8275320" y="4800600"/>
-            <a:ext cx="1051560" cy="310896"/>
-          </a:xfrm>
-          <a:prstGeom prst="rect">
-            <a:avLst/>
-          </a:prstGeom>
-          <a:solidFill>
-            <a:srgbClr val="A78BFA">
-              <a:alpha val="85000"/>
-            </a:srgbClr>
-          </a:solidFill>
-          <a:ln>
-            <a:solidFill>
-              <a:srgbClr val="A78BFA">
-                <a:alpha val="70000"/>
-              </a:srgbClr>
-            </a:solidFill>
-          </a:ln>
-        </p:spPr>
-        <p:txBody>
-          <a:bodyPr wrap="square" lIns="381" tIns="381" rIns="381" bIns="381" rtlCol="0" anchor="ctr">
-            <a:normAutofit/>
-          </a:bodyPr>
-          <a:lstStyle/>
-          <a:p>
-            <a:pPr marL="0" indent="0" algn="ctr">
-              <a:buNone/>
-            </a:pPr>
-            <a:r>
-              <a:rPr lang="en-US" sz="1050" b="1" dirty="0">
-                <a:solidFill>
-                  <a:srgbClr val="F5F8FF"/>
-                </a:solidFill>
-                <a:latin typeface="Noto Sans CJK SC" pitchFamily="34" charset="0"/>
-                <a:ea typeface="Noto Sans CJK SC" pitchFamily="34" charset="-122"/>
-                <a:cs typeface="Noto Sans CJK SC" pitchFamily="34" charset="-120"/>
-              </a:rPr>
-              <a:t>问答调试</a:t>
-            </a:r>
-            <a:endParaRPr lang="en-US" sz="1050" b="1" dirty="0">
-              <a:solidFill>
-                <a:srgbClr val="F5F8FF"/>
-              </a:solidFill>
-              <a:latin typeface="Noto Sans CJK SC" pitchFamily="34" charset="0"/>
-              <a:ea typeface="Noto Sans CJK SC" pitchFamily="34" charset="-122"/>
-              <a:cs typeface="Noto Sans CJK SC" pitchFamily="34" charset="-120"/>
-            </a:endParaRPr>
-          </a:p>
-        </p:txBody>
-      </p:sp>
-      <p:sp>
-        <p:nvSpPr>
-          <p:cNvPr id="10" name="Text 7"/>
-          <p:cNvSpPr/>
-          <p:nvPr/>
-        </p:nvSpPr>
-        <p:spPr>
-          <a:xfrm>
-            <a:off x="9473184" y="4800600"/>
-            <a:ext cx="1051560" cy="310896"/>
-          </a:xfrm>
-          <a:prstGeom prst="rect">
-            <a:avLst/>
-          </a:prstGeom>
-          <a:solidFill>
-            <a:srgbClr val="6EE7F9">
-              <a:alpha val="85000"/>
-            </a:srgbClr>
-          </a:solidFill>
-          <a:ln>
-            <a:solidFill>
-              <a:srgbClr val="6EE7F9">
-                <a:alpha val="70000"/>
-              </a:srgbClr>
-            </a:solidFill>
-          </a:ln>
-        </p:spPr>
-        <p:txBody>
-          <a:bodyPr wrap="square" lIns="381" tIns="381" rIns="381" bIns="381" rtlCol="0" anchor="ctr">
-            <a:normAutofit/>
-          </a:bodyPr>
-          <a:lstStyle/>
-          <a:p>
-            <a:pPr marL="0" indent="0" algn="ctr">
-              <a:buNone/>
-            </a:pPr>
-            <a:r>
-              <a:rPr lang="en-US" sz="1050" b="1" dirty="0">
-                <a:solidFill>
-                  <a:srgbClr val="F5F8FF"/>
-                </a:solidFill>
-                <a:latin typeface="Noto Sans CJK SC" pitchFamily="34" charset="0"/>
-                <a:ea typeface="Noto Sans CJK SC" pitchFamily="34" charset="-122"/>
-                <a:cs typeface="Noto Sans CJK SC" pitchFamily="34" charset="-120"/>
-              </a:rPr>
-              <a:t>路由追踪</a:t>
-            </a:r>
-            <a:endParaRPr lang="en-US" sz="1050" b="1" dirty="0">
-              <a:solidFill>
-                <a:srgbClr val="F5F8FF"/>
-              </a:solidFill>
-              <a:latin typeface="Noto Sans CJK SC" pitchFamily="34" charset="0"/>
-              <a:ea typeface="Noto Sans CJK SC" pitchFamily="34" charset="-122"/>
-              <a:cs typeface="Noto Sans CJK SC" pitchFamily="34" charset="-120"/>
-            </a:endParaRPr>
-          </a:p>
-        </p:txBody>
-      </p:sp>
-      <p:sp>
-        <p:nvSpPr>
-          <p:cNvPr id="11" name="Text 8"/>
-          <p:cNvSpPr/>
-          <p:nvPr/>
-        </p:nvSpPr>
-        <p:spPr>
-          <a:xfrm>
-            <a:off x="10671048" y="4800600"/>
-            <a:ext cx="1051560" cy="310896"/>
-          </a:xfrm>
-          <a:prstGeom prst="rect">
-            <a:avLst/>
-          </a:prstGeom>
-          <a:solidFill>
-            <a:srgbClr val="3DDC97">
-              <a:alpha val="85000"/>
-            </a:srgbClr>
-          </a:solidFill>
-          <a:ln>
-            <a:solidFill>
-              <a:srgbClr val="3DDC97">
-                <a:alpha val="70000"/>
-              </a:srgbClr>
-            </a:solidFill>
-          </a:ln>
-        </p:spPr>
-        <p:txBody>
-          <a:bodyPr wrap="square" lIns="381" tIns="381" rIns="381" bIns="381" rtlCol="0" anchor="ctr">
-            <a:normAutofit/>
-          </a:bodyPr>
-          <a:lstStyle/>
-          <a:p>
-            <a:pPr marL="0" indent="0" algn="ctr">
-              <a:buNone/>
-            </a:pPr>
-            <a:r>
-              <a:rPr lang="en-US" sz="1050" b="1" dirty="0">
-                <a:solidFill>
-                  <a:srgbClr val="F5F8FF"/>
-                </a:solidFill>
-                <a:latin typeface="Noto Sans CJK SC" pitchFamily="34" charset="0"/>
-                <a:ea typeface="Noto Sans CJK SC" pitchFamily="34" charset="-122"/>
-                <a:cs typeface="Noto Sans CJK SC" pitchFamily="34" charset="-120"/>
-              </a:rPr>
-              <a:t>引用验证</a:t>
-            </a:r>
-            <a:endParaRPr lang="en-US" sz="1050" b="1" dirty="0">
+            <a:endParaRPr lang="en-US" dirty="0">
               <a:solidFill>
                 <a:srgbClr val="F5F8FF"/>
               </a:solidFill>
@@ -3688,46 +3695,6 @@
       </p:sp>
       <p:sp>
         <p:nvSpPr>
-          <p:cNvPr id="4" name="Text 2"/>
-          <p:cNvSpPr/>
-          <p:nvPr/>
-        </p:nvSpPr>
-        <p:spPr>
-          <a:xfrm>
-            <a:off x="530352" y="850392"/>
-            <a:ext cx="8869680" cy="274320"/>
-          </a:xfrm>
-          <a:prstGeom prst="rect">
-            <a:avLst/>
-          </a:prstGeom>
-          <a:noFill/>
-        </p:spPr>
-        <p:txBody>
-          <a:bodyPr wrap="square" lIns="0" tIns="0" rIns="0" bIns="0" rtlCol="0" anchor="ctr">
-            <a:normAutofit/>
-          </a:bodyPr>
-          <a:lstStyle/>
-          <a:p>
-            <a:pPr marL="0" indent="0">
-              <a:buNone/>
-            </a:pPr>
-            <a:r>
-              <a:rPr lang="en-US" sz="950" dirty="0">
-                <a:solidFill>
-                  <a:srgbClr val="AAB6D3"/>
-                </a:solidFill>
-                <a:latin typeface="Noto Sans CJK SC" pitchFamily="34" charset="0"/>
-                <a:ea typeface="Noto Sans CJK SC" pitchFamily="34" charset="-122"/>
-                <a:cs typeface="Noto Sans CJK SC" pitchFamily="34" charset="-120"/>
-              </a:rPr>
-              <a:t>项目把回答、引用行、相关图片和原始文件信息放在同一界面，便于检查来源</a:t>
-            </a:r>
-            <a:endParaRPr lang="en-US" sz="950" dirty="0"/>
-          </a:p>
-        </p:txBody>
-      </p:sp>
-      <p:sp>
-        <p:nvSpPr>
           <p:cNvPr id="5" name="Text 3"/>
           <p:cNvSpPr/>
           <p:nvPr/>
@@ -3780,8 +3747,8 @@
         </p:blipFill>
         <p:spPr>
           <a:xfrm>
-            <a:off x="594360" y="1382707"/>
-            <a:ext cx="5440680" cy="3772547"/>
+            <a:off x="192405" y="1103630"/>
+            <a:ext cx="5842635" cy="4051300"/>
           </a:xfrm>
           <a:prstGeom prst="rect">
             <a:avLst/>
@@ -3804,8 +3771,8 @@
         </p:blipFill>
         <p:spPr>
           <a:xfrm>
-            <a:off x="6540773" y="1325880"/>
-            <a:ext cx="1868894" cy="3886200"/>
+            <a:off x="6458585" y="1097915"/>
+            <a:ext cx="1950720" cy="4057015"/>
           </a:xfrm>
           <a:prstGeom prst="rect">
             <a:avLst/>
@@ -3828,8 +3795,8 @@
         </p:blipFill>
         <p:spPr>
           <a:xfrm>
-            <a:off x="9245541" y="1325880"/>
-            <a:ext cx="1717158" cy="3886200"/>
+            <a:off x="8760460" y="1103630"/>
+            <a:ext cx="1789430" cy="4051300"/>
           </a:xfrm>
           <a:prstGeom prst="rect">
             <a:avLst/>
@@ -3885,7 +3852,7 @@
         <p:spPr>
           <a:xfrm>
             <a:off x="868680" y="5715000"/>
-            <a:ext cx="10149840" cy="731520"/>
+            <a:ext cx="10149840" cy="960120"/>
           </a:xfrm>
           <a:prstGeom prst="rect">
             <a:avLst/>
@@ -3894,7 +3861,7 @@
         </p:spPr>
         <p:txBody>
           <a:bodyPr wrap="square" lIns="635" tIns="635" rIns="635" bIns="635" rtlCol="0" anchor="t">
-            <a:normAutofit/>
+            <a:noAutofit/>
           </a:bodyPr>
           <a:lstStyle/>
           <a:p>
@@ -3902,7 +3869,7 @@
               <a:buNone/>
             </a:pPr>
             <a:r>
-              <a:rPr lang="en-US" sz="1040" dirty="0">
+              <a:rPr lang="en-US" sz="1400" dirty="0">
                 <a:solidFill>
                   <a:srgbClr val="F5F8FF"/>
                 </a:solidFill>
@@ -3912,14 +3879,14 @@
               </a:rPr>
               <a:t>• 答案区负责自然语言解释，不直接暴露模型内部路由提示词。</a:t>
             </a:r>
-            <a:endParaRPr lang="en-US" sz="1040" dirty="0"/>
+            <a:endParaRPr lang="en-US" sz="1400" dirty="0"/>
           </a:p>
           <a:p>
             <a:pPr marL="0" indent="0">
               <a:buNone/>
             </a:pPr>
             <a:r>
-              <a:rPr lang="en-US" sz="1040" dirty="0">
+              <a:rPr lang="en-US" sz="1400" dirty="0">
                 <a:solidFill>
                   <a:srgbClr val="F5F8FF"/>
                 </a:solidFill>
@@ -3929,14 +3896,14 @@
               </a:rPr>
               <a:t>• 引用区显示 L129-L137 等行号，帮助定位 knowledge.md 或 PDF 页文本。</a:t>
             </a:r>
-            <a:endParaRPr lang="en-US" sz="1040" dirty="0"/>
+            <a:endParaRPr lang="en-US" sz="1400" dirty="0"/>
           </a:p>
           <a:p>
             <a:pPr marL="0" indent="0">
               <a:buNone/>
             </a:pPr>
             <a:r>
-              <a:rPr lang="en-US" sz="1040" dirty="0">
+              <a:rPr lang="en-US" sz="1400" dirty="0">
                 <a:solidFill>
                   <a:srgbClr val="F5F8FF"/>
                 </a:solidFill>
@@ -3946,14 +3913,14 @@
               </a:rPr>
               <a:t>• 相关图片把图示与回答绑定，适合说明书、图纸、操作手册类文档。</a:t>
             </a:r>
-            <a:endParaRPr lang="en-US" sz="1040" dirty="0"/>
+            <a:endParaRPr lang="en-US" sz="1400" dirty="0"/>
           </a:p>
           <a:p>
             <a:pPr marL="0" indent="0">
               <a:buNone/>
             </a:pPr>
             <a:r>
-              <a:rPr lang="en-US" sz="1040" dirty="0">
+              <a:rPr lang="en-US" sz="1400" dirty="0">
                 <a:solidFill>
                   <a:srgbClr val="F5F8FF"/>
                 </a:solidFill>
@@ -3963,7 +3930,14 @@
               </a:rPr>
               <a:t>• 右侧日志记录 route、source_pdf、page_start/page_end、generated_at 等调试信息。</a:t>
             </a:r>
-            <a:endParaRPr lang="en-US" sz="1040" dirty="0"/>
+            <a:endParaRPr lang="en-US" sz="1400" dirty="0">
+              <a:solidFill>
+                <a:srgbClr val="F5F8FF"/>
+              </a:solidFill>
+              <a:latin typeface="Noto Sans CJK SC" pitchFamily="34" charset="0"/>
+              <a:ea typeface="Noto Sans CJK SC" pitchFamily="34" charset="-122"/>
+              <a:cs typeface="Noto Sans CJK SC" pitchFamily="34" charset="-120"/>
+            </a:endParaRPr>
           </a:p>
         </p:txBody>
       </p:sp>
@@ -4099,7 +4073,7 @@
                 <a:ea typeface="Noto Sans CJK SC" pitchFamily="34" charset="-122"/>
                 <a:cs typeface="Noto Sans CJK SC" pitchFamily="34" charset="-120"/>
               </a:rPr>
-              <a:t>批量测试页：用例驱动的路由与回答评估闭环</a:t>
+              <a:t>批量测试页</a:t>
             </a:r>
             <a:endParaRPr lang="en-US" sz="2500" dirty="0"/>
           </a:p>
@@ -4131,9 +4105,11 @@
               <a:buNone/>
             </a:pPr>
             <a:r>
-              <a:rPr lang="en-US" sz="950" dirty="0">
-                <a:solidFill>
-                  <a:srgbClr val="AAB6D3"/>
+              <a:rPr lang="en-US" sz="1400" dirty="0">
+                <a:solidFill>
+                  <a:schemeClr val="bg1">
+                    <a:lumMod val="95000"/>
+                  </a:schemeClr>
                 </a:solidFill>
                 <a:latin typeface="Noto Sans CJK SC" pitchFamily="34" charset="0"/>
                 <a:ea typeface="Noto Sans CJK SC" pitchFamily="34" charset="-122"/>
@@ -4141,7 +4117,16 @@
               </a:rPr>
               <a:t>用于批量导入问题、运行测试、观察参考答案与模型答案差距，并统计准确率</a:t>
             </a:r>
-            <a:endParaRPr lang="en-US" sz="950" dirty="0"/>
+            <a:endParaRPr lang="en-US" sz="1400" dirty="0">
+              <a:solidFill>
+                <a:schemeClr val="bg1">
+                  <a:lumMod val="95000"/>
+                </a:schemeClr>
+              </a:solidFill>
+              <a:latin typeface="Noto Sans CJK SC" pitchFamily="34" charset="0"/>
+              <a:ea typeface="Noto Sans CJK SC" pitchFamily="34" charset="-122"/>
+              <a:cs typeface="Noto Sans CJK SC" pitchFamily="34" charset="-120"/>
+            </a:endParaRPr>
           </a:p>
         </p:txBody>
       </p:sp>
@@ -4233,7 +4218,7 @@
               <a:buNone/>
             </a:pPr>
             <a:r>
-              <a:rPr lang="en-US" sz="1400" b="1" dirty="0">
+              <a:rPr lang="en-US" b="1" dirty="0">
                 <a:solidFill>
                   <a:srgbClr val="6EE7F9"/>
                 </a:solidFill>
@@ -4243,7 +4228,14 @@
               </a:rPr>
               <a:t>评估方式</a:t>
             </a:r>
-            <a:endParaRPr lang="en-US" sz="1400" dirty="0"/>
+            <a:endParaRPr lang="en-US" b="1" dirty="0">
+              <a:solidFill>
+                <a:srgbClr val="6EE7F9"/>
+              </a:solidFill>
+              <a:latin typeface="Noto Sans CJK SC" pitchFamily="34" charset="0"/>
+              <a:ea typeface="Noto Sans CJK SC" pitchFamily="34" charset="-122"/>
+              <a:cs typeface="Noto Sans CJK SC" pitchFamily="34" charset="-120"/>
+            </a:endParaRPr>
           </a:p>
         </p:txBody>
       </p:sp>
@@ -4256,7 +4248,7 @@
         <p:spPr>
           <a:xfrm>
             <a:off x="8412480" y="1600200"/>
-            <a:ext cx="2926080" cy="2103120"/>
+            <a:ext cx="2926080" cy="2916555"/>
           </a:xfrm>
           <a:prstGeom prst="rect">
             <a:avLst/>
@@ -4273,24 +4265,24 @@
               <a:buNone/>
             </a:pPr>
             <a:r>
-              <a:rPr lang="en-US" sz="1250" dirty="0">
-                <a:solidFill>
-                  <a:srgbClr val="F5F8FF"/>
-                </a:solidFill>
-                <a:latin typeface="Noto Sans CJK SC" pitchFamily="34" charset="0"/>
-                <a:ea typeface="Noto Sans CJK SC" pitchFamily="34" charset="-122"/>
-                <a:cs typeface="Noto Sans CJK SC" pitchFamily="34" charset="-120"/>
-              </a:rPr>
-              <a:t>• 左侧用例列表显示每题得分/准确率，支持逐条运行。</a:t>
-            </a:r>
-            <a:endParaRPr lang="en-US" sz="1250" dirty="0"/>
+              <a:rPr lang="en-US" sz="1600" dirty="0">
+                <a:solidFill>
+                  <a:srgbClr val="F5F8FF"/>
+                </a:solidFill>
+                <a:latin typeface="Noto Sans CJK SC" pitchFamily="34" charset="0"/>
+                <a:ea typeface="Noto Sans CJK SC" pitchFamily="34" charset="-122"/>
+                <a:cs typeface="Noto Sans CJK SC" pitchFamily="34" charset="-120"/>
+              </a:rPr>
+              <a:t>• 左侧用例列表显示每题准确率，支持逐条运行。</a:t>
+            </a:r>
+            <a:endParaRPr lang="en-US" sz="1600" dirty="0"/>
           </a:p>
           <a:p>
             <a:pPr marL="0" indent="0">
               <a:buNone/>
             </a:pPr>
             <a:r>
-              <a:rPr lang="en-US" sz="1250" dirty="0">
+              <a:rPr lang="en-US" sz="1600" dirty="0">
                 <a:solidFill>
                   <a:srgbClr val="F5F8FF"/>
                 </a:solidFill>
@@ -4300,14 +4292,14 @@
               </a:rPr>
               <a:t>• 中间展示模型回答，可检查是否调用正确 Agent。</a:t>
             </a:r>
-            <a:endParaRPr lang="en-US" sz="1250" dirty="0"/>
+            <a:endParaRPr lang="en-US" sz="1600" dirty="0"/>
           </a:p>
           <a:p>
             <a:pPr marL="0" indent="0">
               <a:buNone/>
             </a:pPr>
             <a:r>
-              <a:rPr lang="en-US" sz="1250" dirty="0">
+              <a:rPr lang="en-US" sz="1600" dirty="0">
                 <a:solidFill>
                   <a:srgbClr val="F5F8FF"/>
                 </a:solidFill>
@@ -4317,14 +4309,14 @@
               </a:rPr>
               <a:t>• 右侧参考答案用于人工或模型辅助评估。</a:t>
             </a:r>
-            <a:endParaRPr lang="en-US" sz="1250" dirty="0"/>
+            <a:endParaRPr lang="en-US" sz="1600" dirty="0"/>
           </a:p>
           <a:p>
             <a:pPr marL="0" indent="0">
               <a:buNone/>
             </a:pPr>
             <a:r>
-              <a:rPr lang="en-US" sz="1250" dirty="0">
+              <a:rPr lang="en-US" sz="1600" dirty="0">
                 <a:solidFill>
                   <a:srgbClr val="F5F8FF"/>
                 </a:solidFill>
@@ -4334,7 +4326,14 @@
               </a:rPr>
               <a:t>• 适合回归测试：改提示词、改切分范围后重新跑一遍。</a:t>
             </a:r>
-            <a:endParaRPr lang="en-US" sz="1250" dirty="0"/>
+            <a:endParaRPr lang="en-US" sz="1600" dirty="0">
+              <a:solidFill>
+                <a:srgbClr val="F5F8FF"/>
+              </a:solidFill>
+              <a:latin typeface="Noto Sans CJK SC" pitchFamily="34" charset="0"/>
+              <a:ea typeface="Noto Sans CJK SC" pitchFamily="34" charset="-122"/>
+              <a:cs typeface="Noto Sans CJK SC" pitchFamily="34" charset="-120"/>
+            </a:endParaRPr>
           </a:p>
         </p:txBody>
       </p:sp>
@@ -4346,7 +4345,7 @@
         </p:nvSpPr>
         <p:spPr>
           <a:xfrm>
-            <a:off x="8458200" y="4069080"/>
+            <a:off x="8458200" y="4983480"/>
             <a:ext cx="896112" cy="411480"/>
           </a:xfrm>
           <a:prstGeom prst="rect">
@@ -4373,7 +4372,7 @@
               <a:buNone/>
             </a:pPr>
             <a:r>
-              <a:rPr lang="en-US" sz="1060" b="1" dirty="0">
+              <a:rPr lang="en-US" sz="1400" b="1" dirty="0">
                 <a:solidFill>
                   <a:srgbClr val="F5F8FF"/>
                 </a:solidFill>
@@ -4383,7 +4382,7 @@
               </a:rPr>
               <a:t>测试用例</a:t>
             </a:r>
-            <a:endParaRPr lang="en-US" sz="1060" b="1" dirty="0">
+            <a:endParaRPr lang="en-US" sz="1400" b="1" dirty="0">
               <a:solidFill>
                 <a:srgbClr val="F5F8FF"/>
               </a:solidFill>
@@ -4402,7 +4401,7 @@
         </p:nvSpPr>
         <p:spPr>
           <a:xfrm>
-            <a:off x="9528048" y="4069080"/>
+            <a:off x="9528048" y="4983480"/>
             <a:ext cx="896112" cy="411480"/>
           </a:xfrm>
           <a:prstGeom prst="rect">
@@ -4429,7 +4428,7 @@
               <a:buNone/>
             </a:pPr>
             <a:r>
-              <a:rPr lang="en-US" sz="1060" b="1" dirty="0">
+              <a:rPr lang="en-US" sz="1400" b="1" dirty="0">
                 <a:solidFill>
                   <a:srgbClr val="F5F8FF"/>
                 </a:solidFill>
@@ -4439,7 +4438,7 @@
               </a:rPr>
               <a:t>运行问答</a:t>
             </a:r>
-            <a:endParaRPr lang="en-US" sz="1060" b="1" dirty="0">
+            <a:endParaRPr lang="en-US" sz="1400" b="1" dirty="0">
               <a:solidFill>
                 <a:srgbClr val="F5F8FF"/>
               </a:solidFill>
@@ -4458,7 +4457,7 @@
         </p:nvSpPr>
         <p:spPr>
           <a:xfrm>
-            <a:off x="10597896" y="4069080"/>
+            <a:off x="10597896" y="4983480"/>
             <a:ext cx="896112" cy="411480"/>
           </a:xfrm>
           <a:prstGeom prst="rect">
@@ -4485,7 +4484,7 @@
               <a:buNone/>
             </a:pPr>
             <a:r>
-              <a:rPr lang="en-US" sz="1060" b="1" dirty="0">
+              <a:rPr lang="en-US" sz="1400" b="1" dirty="0">
                 <a:solidFill>
                   <a:srgbClr val="F5F8FF"/>
                 </a:solidFill>
@@ -4495,7 +4494,7 @@
               </a:rPr>
               <a:t>评分反馈</a:t>
             </a:r>
-            <a:endParaRPr lang="en-US" sz="1060" b="1" dirty="0">
+            <a:endParaRPr lang="en-US" sz="1400" b="1" dirty="0">
               <a:solidFill>
                 <a:srgbClr val="F5F8FF"/>
               </a:solidFill>
@@ -4514,7 +4513,7 @@
         </p:nvSpPr>
         <p:spPr>
           <a:xfrm>
-            <a:off x="9363456" y="4279392"/>
+            <a:off x="9363456" y="5193792"/>
             <a:ext cx="137160" cy="0"/>
           </a:xfrm>
           <a:prstGeom prst="line">
@@ -4538,7 +4537,7 @@
         </p:nvSpPr>
         <p:spPr>
           <a:xfrm>
-            <a:off x="10433304" y="4279392"/>
+            <a:off x="10433304" y="5193792"/>
             <a:ext cx="137160" cy="0"/>
           </a:xfrm>
           <a:prstGeom prst="line">
@@ -4598,44 +4597,6 @@
               <a:ea typeface="Noto Sans CJK SC" pitchFamily="34" charset="-122"/>
               <a:cs typeface="Noto Sans CJK SC" pitchFamily="34" charset="-120"/>
             </a:endParaRPr>
-          </a:p>
-        </p:txBody>
-      </p:sp>
-      <p:sp>
-        <p:nvSpPr>
-          <p:cNvPr id="15" name="Text 12"/>
-          <p:cNvSpPr/>
-          <p:nvPr/>
-        </p:nvSpPr>
-        <p:spPr>
-          <a:xfrm>
-            <a:off x="502920" y="6199632"/>
-            <a:ext cx="10881360" cy="210312"/>
-          </a:xfrm>
-          <a:prstGeom prst="rect">
-            <a:avLst/>
-          </a:prstGeom>
-          <a:noFill/>
-        </p:spPr>
-        <p:txBody>
-          <a:bodyPr wrap="square" lIns="0" tIns="0" rIns="0" bIns="0" rtlCol="0" anchor="ctr"/>
-          <a:lstStyle/>
-          <a:p>
-            <a:pPr marL="0" indent="0">
-              <a:buNone/>
-            </a:pPr>
-            <a:r>
-              <a:rPr lang="en-US" sz="730" dirty="0">
-                <a:solidFill>
-                  <a:srgbClr val="64748B"/>
-                </a:solidFill>
-                <a:latin typeface="Noto Sans CJK SC" pitchFamily="34" charset="0"/>
-                <a:ea typeface="Noto Sans CJK SC" pitchFamily="34" charset="-122"/>
-                <a:cs typeface="Noto Sans CJK SC" pitchFamily="34" charset="-120"/>
-              </a:rPr>
-              <a:t>README 中的批量测试 API 包含测试列表、创建、导入、更新、删除、运行单条并评估准确率等接口。</a:t>
-            </a:r>
-            <a:endParaRPr lang="en-US" sz="730" dirty="0"/>
           </a:p>
         </p:txBody>
       </p:sp>
@@ -4779,46 +4740,6 @@
       </p:sp>
       <p:sp>
         <p:nvSpPr>
-          <p:cNvPr id="4" name="Text 2"/>
-          <p:cNvSpPr/>
-          <p:nvPr/>
-        </p:nvSpPr>
-        <p:spPr>
-          <a:xfrm>
-            <a:off x="530352" y="850392"/>
-            <a:ext cx="8869680" cy="274320"/>
-          </a:xfrm>
-          <a:prstGeom prst="rect">
-            <a:avLst/>
-          </a:prstGeom>
-          <a:noFill/>
-        </p:spPr>
-        <p:txBody>
-          <a:bodyPr wrap="square" lIns="0" tIns="0" rIns="0" bIns="0" rtlCol="0" anchor="ctr">
-            <a:normAutofit/>
-          </a:bodyPr>
-          <a:lstStyle/>
-          <a:p>
-            <a:pPr marL="0" indent="0">
-              <a:buNone/>
-            </a:pPr>
-            <a:r>
-              <a:rPr lang="en-US" sz="950" dirty="0">
-                <a:solidFill>
-                  <a:srgbClr val="AAB6D3"/>
-                </a:solidFill>
-                <a:latin typeface="Noto Sans CJK SC" pitchFamily="34" charset="0"/>
-                <a:ea typeface="Noto Sans CJK SC" pitchFamily="34" charset="-122"/>
-                <a:cs typeface="Noto Sans CJK SC" pitchFamily="34" charset="-120"/>
-              </a:rPr>
-              <a:t>适合本地演示，也可通过 API 集成到其他系统</a:t>
-            </a:r>
-            <a:endParaRPr lang="en-US" sz="950" dirty="0"/>
-          </a:p>
-        </p:txBody>
-      </p:sp>
-      <p:sp>
-        <p:nvSpPr>
           <p:cNvPr id="5" name="Text 3"/>
           <p:cNvSpPr/>
           <p:nvPr/>
@@ -4873,7 +4794,7 @@
         </p:spPr>
         <p:txBody>
           <a:bodyPr wrap="square" lIns="635" tIns="635" rIns="635" bIns="635" rtlCol="0" anchor="t">
-            <a:normAutofit/>
+            <a:noAutofit/>
           </a:bodyPr>
           <a:lstStyle/>
           <a:p>
@@ -4881,7 +4802,7 @@
               <a:buNone/>
             </a:pPr>
             <a:r>
-              <a:rPr lang="en-US" sz="1300" b="1" dirty="0">
+              <a:rPr lang="en-US" sz="1600" b="1" dirty="0">
                 <a:solidFill>
                   <a:srgbClr val="6EE7F9"/>
                 </a:solidFill>
@@ -4891,7 +4812,14 @@
               </a:rPr>
               <a:t>1. 安装依赖</a:t>
             </a:r>
-            <a:endParaRPr lang="en-US" sz="1300" dirty="0"/>
+            <a:endParaRPr lang="en-US" sz="1600" b="1" dirty="0">
+              <a:solidFill>
+                <a:srgbClr val="6EE7F9"/>
+              </a:solidFill>
+              <a:latin typeface="Noto Sans CJK SC" pitchFamily="34" charset="0"/>
+              <a:ea typeface="Noto Sans CJK SC" pitchFamily="34" charset="-122"/>
+              <a:cs typeface="Noto Sans CJK SC" pitchFamily="34" charset="-120"/>
+            </a:endParaRPr>
           </a:p>
         </p:txBody>
       </p:sp>
@@ -4913,7 +4841,7 @@
         </p:spPr>
         <p:txBody>
           <a:bodyPr wrap="square" lIns="635" tIns="635" rIns="635" bIns="635" rtlCol="0" anchor="t">
-            <a:normAutofit/>
+            <a:noAutofit/>
           </a:bodyPr>
           <a:lstStyle/>
           <a:p>
@@ -4921,7 +4849,7 @@
               <a:buNone/>
             </a:pPr>
             <a:r>
-              <a:rPr lang="en-US" sz="1050" dirty="0">
+              <a:rPr lang="en-US" sz="1400" dirty="0">
                 <a:solidFill>
                   <a:srgbClr val="E2E8F0"/>
                 </a:solidFill>
@@ -4931,7 +4859,14 @@
               </a:rPr>
               <a:t>pip install fastapi uvicorn python-dotenv openai pydantic pymupdf python-docx openpyxl pytest httpx</a:t>
             </a:r>
-            <a:endParaRPr lang="en-US" sz="1050" dirty="0"/>
+            <a:endParaRPr lang="en-US" sz="1400" dirty="0">
+              <a:solidFill>
+                <a:srgbClr val="E2E8F0"/>
+              </a:solidFill>
+              <a:latin typeface="Noto Sans CJK SC" pitchFamily="34" charset="0"/>
+              <a:ea typeface="Noto Sans CJK SC" pitchFamily="34" charset="-122"/>
+              <a:cs typeface="Noto Sans CJK SC" pitchFamily="34" charset="-120"/>
+            </a:endParaRPr>
           </a:p>
         </p:txBody>
       </p:sp>
@@ -4953,7 +4888,7 @@
         </p:spPr>
         <p:txBody>
           <a:bodyPr wrap="square" lIns="635" tIns="635" rIns="635" bIns="635" rtlCol="0" anchor="t">
-            <a:normAutofit/>
+            <a:noAutofit/>
           </a:bodyPr>
           <a:lstStyle/>
           <a:p>
@@ -4961,7 +4896,7 @@
               <a:buNone/>
             </a:pPr>
             <a:r>
-              <a:rPr lang="en-US" sz="1300" b="1" dirty="0">
+              <a:rPr lang="en-US" sz="1600" b="1" dirty="0">
                 <a:solidFill>
                   <a:srgbClr val="A78BFA"/>
                 </a:solidFill>
@@ -4971,7 +4906,14 @@
               </a:rPr>
               <a:t>2. 配置 .env</a:t>
             </a:r>
-            <a:endParaRPr lang="en-US" sz="1300" dirty="0"/>
+            <a:endParaRPr lang="en-US" sz="1600" b="1" dirty="0">
+              <a:solidFill>
+                <a:srgbClr val="A78BFA"/>
+              </a:solidFill>
+              <a:latin typeface="Noto Sans CJK SC" pitchFamily="34" charset="0"/>
+              <a:ea typeface="Noto Sans CJK SC" pitchFamily="34" charset="-122"/>
+              <a:cs typeface="Noto Sans CJK SC" pitchFamily="34" charset="-120"/>
+            </a:endParaRPr>
           </a:p>
         </p:txBody>
       </p:sp>
@@ -4993,7 +4935,7 @@
         </p:spPr>
         <p:txBody>
           <a:bodyPr wrap="square" lIns="635" tIns="635" rIns="635" bIns="635" rtlCol="0" anchor="t">
-            <a:normAutofit/>
+            <a:noAutofit/>
           </a:bodyPr>
           <a:lstStyle/>
           <a:p>
@@ -5001,7 +4943,7 @@
               <a:buNone/>
             </a:pPr>
             <a:r>
-              <a:rPr lang="en-US" sz="1080" dirty="0">
+              <a:rPr lang="en-US" sz="1400" dirty="0">
                 <a:solidFill>
                   <a:srgbClr val="F5F8FF"/>
                 </a:solidFill>
@@ -5011,14 +4953,14 @@
               </a:rPr>
               <a:t>• API_BASE_URL / API_KEY</a:t>
             </a:r>
-            <a:endParaRPr lang="en-US" sz="1080" dirty="0"/>
+            <a:endParaRPr lang="en-US" sz="1400" dirty="0"/>
           </a:p>
           <a:p>
             <a:pPr marL="0" indent="0">
               <a:buNone/>
             </a:pPr>
             <a:r>
-              <a:rPr lang="en-US" sz="1080" dirty="0">
+              <a:rPr lang="en-US" sz="1400" dirty="0">
                 <a:solidFill>
                   <a:srgbClr val="F5F8FF"/>
                 </a:solidFill>
@@ -5028,14 +4970,14 @@
               </a:rPr>
               <a:t>• ROUTER_MODEL / INIT_MODEL / ANSWER_MODEL</a:t>
             </a:r>
-            <a:endParaRPr lang="en-US" sz="1080" dirty="0"/>
+            <a:endParaRPr lang="en-US" sz="1400" dirty="0"/>
           </a:p>
           <a:p>
             <a:pPr marL="0" indent="0">
               <a:buNone/>
             </a:pPr>
             <a:r>
-              <a:rPr lang="en-US" sz="1080" dirty="0">
+              <a:rPr lang="en-US" sz="1400" dirty="0">
                 <a:solidFill>
                   <a:srgbClr val="F5F8FF"/>
                 </a:solidFill>
@@ -5045,7 +4987,14 @@
               </a:rPr>
               <a:t>• MAX_FILE_CHARS / ANSWER_WITH_IMAGES / MOCK_LLM</a:t>
             </a:r>
-            <a:endParaRPr lang="en-US" sz="1080" dirty="0"/>
+            <a:endParaRPr lang="en-US" sz="1400" dirty="0">
+              <a:solidFill>
+                <a:srgbClr val="F5F8FF"/>
+              </a:solidFill>
+              <a:latin typeface="Noto Sans CJK SC" pitchFamily="34" charset="0"/>
+              <a:ea typeface="Noto Sans CJK SC" pitchFamily="34" charset="-122"/>
+              <a:cs typeface="Noto Sans CJK SC" pitchFamily="34" charset="-120"/>
+            </a:endParaRPr>
           </a:p>
         </p:txBody>
       </p:sp>
@@ -5067,7 +5016,7 @@
         </p:spPr>
         <p:txBody>
           <a:bodyPr wrap="square" lIns="635" tIns="635" rIns="635" bIns="635" rtlCol="0" anchor="t">
-            <a:normAutofit/>
+            <a:noAutofit/>
           </a:bodyPr>
           <a:lstStyle/>
           <a:p>
@@ -5075,7 +5024,7 @@
               <a:buNone/>
             </a:pPr>
             <a:r>
-              <a:rPr lang="en-US" sz="1300" b="1" dirty="0">
+              <a:rPr lang="en-US" sz="1600" b="1" dirty="0">
                 <a:solidFill>
                   <a:srgbClr val="3DDC97"/>
                 </a:solidFill>
@@ -5085,7 +5034,14 @@
               </a:rPr>
               <a:t>3. 启动服务</a:t>
             </a:r>
-            <a:endParaRPr lang="en-US" sz="1300" dirty="0"/>
+            <a:endParaRPr lang="en-US" sz="1600" b="1" dirty="0">
+              <a:solidFill>
+                <a:srgbClr val="3DDC97"/>
+              </a:solidFill>
+              <a:latin typeface="Noto Sans CJK SC" pitchFamily="34" charset="0"/>
+              <a:ea typeface="Noto Sans CJK SC" pitchFamily="34" charset="-122"/>
+              <a:cs typeface="Noto Sans CJK SC" pitchFamily="34" charset="-120"/>
+            </a:endParaRPr>
           </a:p>
         </p:txBody>
       </p:sp>
@@ -5107,7 +5063,7 @@
         </p:spPr>
         <p:txBody>
           <a:bodyPr wrap="square" lIns="635" tIns="635" rIns="635" bIns="635" rtlCol="0" anchor="t">
-            <a:normAutofit/>
+            <a:noAutofit/>
           </a:bodyPr>
           <a:lstStyle/>
           <a:p>
@@ -5115,7 +5071,7 @@
               <a:buNone/>
             </a:pPr>
             <a:r>
-              <a:rPr lang="en-US" sz="1080" dirty="0">
+              <a:rPr lang="en-US" sz="1400" dirty="0">
                 <a:solidFill>
                   <a:srgbClr val="E2E8F0"/>
                 </a:solidFill>
@@ -5125,14 +5081,14 @@
               </a:rPr>
               <a:t>uvicorn app.main:app --reload --host 0.0.0.0 --port 8000</a:t>
             </a:r>
-            <a:endParaRPr lang="en-US" sz="1080" dirty="0"/>
+            <a:endParaRPr lang="en-US" sz="1400" dirty="0"/>
           </a:p>
           <a:p>
             <a:pPr marL="0" indent="0">
               <a:buNone/>
             </a:pPr>
             <a:r>
-              <a:rPr lang="en-US" sz="1080" dirty="0">
+              <a:rPr lang="en-US" sz="1400" dirty="0">
                 <a:solidFill>
                   <a:srgbClr val="E2E8F0"/>
                 </a:solidFill>
@@ -5142,7 +5098,14 @@
               </a:rPr>
               <a:t>或运行仓库根目录 start-server.ps1</a:t>
             </a:r>
-            <a:endParaRPr lang="en-US" sz="1080" dirty="0"/>
+            <a:endParaRPr lang="en-US" sz="1400" dirty="0">
+              <a:solidFill>
+                <a:srgbClr val="E2E8F0"/>
+              </a:solidFill>
+              <a:latin typeface="Noto Sans CJK SC" pitchFamily="34" charset="0"/>
+              <a:ea typeface="Noto Sans CJK SC" pitchFamily="34" charset="-122"/>
+              <a:cs typeface="Noto Sans CJK SC" pitchFamily="34" charset="-120"/>
+            </a:endParaRPr>
           </a:p>
         </p:txBody>
       </p:sp>
@@ -5164,7 +5127,7 @@
         </p:spPr>
         <p:txBody>
           <a:bodyPr wrap="square" lIns="635" tIns="635" rIns="635" bIns="635" rtlCol="0" anchor="t">
-            <a:normAutofit/>
+            <a:noAutofit/>
           </a:bodyPr>
           <a:lstStyle/>
           <a:p>
@@ -5172,7 +5135,7 @@
               <a:buNone/>
             </a:pPr>
             <a:r>
-              <a:rPr lang="en-US" sz="1300" b="1" dirty="0">
+              <a:rPr lang="en-US" sz="1600" b="1" dirty="0">
                 <a:solidFill>
                   <a:srgbClr val="6EE7F9"/>
                 </a:solidFill>
@@ -5182,7 +5145,14 @@
               </a:rPr>
               <a:t>4. 新增 Agent 与问答</a:t>
             </a:r>
-            <a:endParaRPr lang="en-US" sz="1300" dirty="0"/>
+            <a:endParaRPr lang="en-US" sz="1600" b="1" dirty="0">
+              <a:solidFill>
+                <a:srgbClr val="6EE7F9"/>
+              </a:solidFill>
+              <a:latin typeface="Noto Sans CJK SC" pitchFamily="34" charset="0"/>
+              <a:ea typeface="Noto Sans CJK SC" pitchFamily="34" charset="-122"/>
+              <a:cs typeface="Noto Sans CJK SC" pitchFamily="34" charset="-120"/>
+            </a:endParaRPr>
           </a:p>
         </p:txBody>
       </p:sp>
@@ -5221,7 +5191,7 @@
               <a:buNone/>
             </a:pPr>
             <a:r>
-              <a:rPr lang="en-US" sz="950" b="1" dirty="0">
+              <a:rPr lang="en-US" sz="1200" b="1" dirty="0">
                 <a:solidFill>
                   <a:srgbClr val="F5F8FF"/>
                 </a:solidFill>
@@ -5231,7 +5201,14 @@
               </a:rPr>
               <a:t>POST /agents</a:t>
             </a:r>
-            <a:endParaRPr lang="en-US" sz="950" dirty="0"/>
+            <a:endParaRPr lang="en-US" sz="1200" b="1" dirty="0">
+              <a:solidFill>
+                <a:srgbClr val="F5F8FF"/>
+              </a:solidFill>
+              <a:latin typeface="Noto Sans CJK SC" pitchFamily="34" charset="0"/>
+              <a:ea typeface="Noto Sans CJK SC" pitchFamily="34" charset="-122"/>
+              <a:cs typeface="Noto Sans CJK SC" pitchFamily="34" charset="-120"/>
+            </a:endParaRPr>
           </a:p>
         </p:txBody>
       </p:sp>
@@ -5270,7 +5247,7 @@
               <a:buNone/>
             </a:pPr>
             <a:r>
-              <a:rPr lang="en-US" sz="950" b="1" dirty="0">
+              <a:rPr lang="en-US" sz="1200" b="1" dirty="0">
                 <a:solidFill>
                   <a:srgbClr val="F5F8FF"/>
                 </a:solidFill>
@@ -5280,7 +5257,14 @@
               </a:rPr>
               <a:t>上传或注册文件</a:t>
             </a:r>
-            <a:endParaRPr lang="en-US" sz="950" dirty="0"/>
+            <a:endParaRPr lang="en-US" sz="1200" b="1" dirty="0">
+              <a:solidFill>
+                <a:srgbClr val="F5F8FF"/>
+              </a:solidFill>
+              <a:latin typeface="Noto Sans CJK SC" pitchFamily="34" charset="0"/>
+              <a:ea typeface="Noto Sans CJK SC" pitchFamily="34" charset="-122"/>
+              <a:cs typeface="Noto Sans CJK SC" pitchFamily="34" charset="-120"/>
+            </a:endParaRPr>
           </a:p>
         </p:txBody>
       </p:sp>
@@ -5319,7 +5303,7 @@
               <a:buNone/>
             </a:pPr>
             <a:r>
-              <a:rPr lang="en-US" sz="950" b="1" dirty="0">
+              <a:rPr lang="en-US" sz="1200" b="1" dirty="0">
                 <a:solidFill>
                   <a:srgbClr val="F5F8FF"/>
                 </a:solidFill>
@@ -5329,7 +5313,14 @@
               </a:rPr>
               <a:t>POST /initialize</a:t>
             </a:r>
-            <a:endParaRPr lang="en-US" sz="950" dirty="0"/>
+            <a:endParaRPr lang="en-US" sz="1200" b="1" dirty="0">
+              <a:solidFill>
+                <a:srgbClr val="F5F8FF"/>
+              </a:solidFill>
+              <a:latin typeface="Noto Sans CJK SC" pitchFamily="34" charset="0"/>
+              <a:ea typeface="Noto Sans CJK SC" pitchFamily="34" charset="-122"/>
+              <a:cs typeface="Noto Sans CJK SC" pitchFamily="34" charset="-120"/>
+            </a:endParaRPr>
           </a:p>
         </p:txBody>
       </p:sp>
@@ -5368,7 +5359,7 @@
               <a:buNone/>
             </a:pPr>
             <a:r>
-              <a:rPr lang="en-US" sz="920" b="1" dirty="0">
+              <a:rPr lang="en-US" sz="1200" b="1" dirty="0">
                 <a:solidFill>
                   <a:srgbClr val="F5F8FF"/>
                 </a:solidFill>
@@ -5378,7 +5369,14 @@
               </a:rPr>
               <a:t>POST /ask 或 /ask/stream</a:t>
             </a:r>
-            <a:endParaRPr lang="en-US" sz="920" dirty="0"/>
+            <a:endParaRPr lang="en-US" sz="1200" b="1" dirty="0">
+              <a:solidFill>
+                <a:srgbClr val="F5F8FF"/>
+              </a:solidFill>
+              <a:latin typeface="Noto Sans CJK SC" pitchFamily="34" charset="0"/>
+              <a:ea typeface="Noto Sans CJK SC" pitchFamily="34" charset="-122"/>
+              <a:cs typeface="Noto Sans CJK SC" pitchFamily="34" charset="-120"/>
+            </a:endParaRPr>
           </a:p>
         </p:txBody>
       </p:sp>
@@ -5456,7 +5454,7 @@
               <a:buNone/>
             </a:pPr>
             <a:r>
-              <a:rPr lang="en-US" sz="1300" b="1" dirty="0">
+              <a:rPr lang="en-US" sz="1600" b="1" dirty="0">
                 <a:solidFill>
                   <a:srgbClr val="A78BFA"/>
                 </a:solidFill>
@@ -5466,7 +5464,14 @@
               </a:rPr>
               <a:t>常用入口</a:t>
             </a:r>
-            <a:endParaRPr lang="en-US" sz="1300" dirty="0"/>
+            <a:endParaRPr lang="en-US" sz="1600" b="1" dirty="0">
+              <a:solidFill>
+                <a:srgbClr val="A78BFA"/>
+              </a:solidFill>
+              <a:latin typeface="Noto Sans CJK SC" pitchFamily="34" charset="0"/>
+              <a:ea typeface="Noto Sans CJK SC" pitchFamily="34" charset="-122"/>
+              <a:cs typeface="Noto Sans CJK SC" pitchFamily="34" charset="-120"/>
+            </a:endParaRPr>
           </a:p>
         </p:txBody>
       </p:sp>
@@ -5496,7 +5501,7 @@
               <a:buNone/>
             </a:pPr>
             <a:r>
-              <a:rPr lang="en-US" sz="1080" dirty="0">
+              <a:rPr lang="en-US" sz="1400" dirty="0">
                 <a:solidFill>
                   <a:srgbClr val="F5F8FF"/>
                 </a:solidFill>
@@ -5506,14 +5511,14 @@
               </a:rPr>
               <a:t>• GET /health：健康检查</a:t>
             </a:r>
-            <a:endParaRPr lang="en-US" sz="1080" dirty="0"/>
+            <a:endParaRPr lang="en-US" sz="1400" dirty="0"/>
           </a:p>
           <a:p>
             <a:pPr marL="0" indent="0">
               <a:buNone/>
             </a:pPr>
             <a:r>
-              <a:rPr lang="en-US" sz="1080" dirty="0">
+              <a:rPr lang="en-US" sz="1400" dirty="0">
                 <a:solidFill>
                   <a:srgbClr val="F5F8FF"/>
                 </a:solidFill>
@@ -5523,14 +5528,14 @@
               </a:rPr>
               <a:t>• Web 控制台：http://127.0.0.1:8000/</a:t>
             </a:r>
-            <a:endParaRPr lang="en-US" sz="1080" dirty="0"/>
+            <a:endParaRPr lang="en-US" sz="1400" dirty="0"/>
           </a:p>
           <a:p>
             <a:pPr marL="0" indent="0">
               <a:buNone/>
             </a:pPr>
             <a:r>
-              <a:rPr lang="en-US" sz="1080" dirty="0">
+              <a:rPr lang="en-US" sz="1400" dirty="0">
                 <a:solidFill>
                   <a:srgbClr val="F5F8FF"/>
                 </a:solidFill>
@@ -5540,14 +5545,14 @@
               </a:rPr>
               <a:t>• GET /agents：查看 Agent 列表</a:t>
             </a:r>
-            <a:endParaRPr lang="en-US" sz="1080" dirty="0"/>
+            <a:endParaRPr lang="en-US" sz="1400" dirty="0"/>
           </a:p>
           <a:p>
             <a:pPr marL="0" indent="0">
               <a:buNone/>
             </a:pPr>
             <a:r>
-              <a:rPr lang="en-US" sz="1080" dirty="0">
+              <a:rPr lang="en-US" sz="1400" dirty="0">
                 <a:solidFill>
                   <a:srgbClr val="F5F8FF"/>
                 </a:solidFill>
@@ -5557,14 +5562,14 @@
               </a:rPr>
               <a:t>• GET /preview：渲染 PDF 指定页</a:t>
             </a:r>
-            <a:endParaRPr lang="en-US" sz="1080" dirty="0"/>
+            <a:endParaRPr lang="en-US" sz="1400" dirty="0"/>
           </a:p>
           <a:p>
             <a:pPr marL="0" indent="0">
               <a:buNone/>
             </a:pPr>
             <a:r>
-              <a:rPr lang="en-US" sz="1080" dirty="0">
+              <a:rPr lang="en-US" sz="1400" dirty="0">
                 <a:solidFill>
                   <a:srgbClr val="F5F8FF"/>
                 </a:solidFill>
@@ -5574,45 +5579,14 @@
               </a:rPr>
               <a:t>• POST /batch/tests/import：批量导入用例</a:t>
             </a:r>
-            <a:endParaRPr lang="en-US" sz="1080" dirty="0"/>
-          </a:p>
-        </p:txBody>
-      </p:sp>
-      <p:sp>
-        <p:nvSpPr>
-          <p:cNvPr id="21" name="Text 19"/>
-          <p:cNvSpPr/>
-          <p:nvPr/>
-        </p:nvSpPr>
-        <p:spPr>
-          <a:xfrm>
-            <a:off x="502920" y="6199632"/>
-            <a:ext cx="10881360" cy="210312"/>
-          </a:xfrm>
-          <a:prstGeom prst="rect">
-            <a:avLst/>
-          </a:prstGeom>
-          <a:noFill/>
-        </p:spPr>
-        <p:txBody>
-          <a:bodyPr wrap="square" lIns="0" tIns="0" rIns="0" bIns="0" rtlCol="0" anchor="ctr"/>
-          <a:lstStyle/>
-          <a:p>
-            <a:pPr marL="0" indent="0">
-              <a:buNone/>
-            </a:pPr>
-            <a:r>
-              <a:rPr lang="en-US" sz="730" dirty="0">
-                <a:solidFill>
-                  <a:srgbClr val="64748B"/>
-                </a:solidFill>
-                <a:latin typeface="Noto Sans CJK SC" pitchFamily="34" charset="0"/>
-                <a:ea typeface="Noto Sans CJK SC" pitchFamily="34" charset="-122"/>
-                <a:cs typeface="Noto Sans CJK SC" pitchFamily="34" charset="-120"/>
-              </a:rPr>
-              <a:t>README 提供了依赖安装、.env 配置、uvicorn 启动命令、Web 控制台入口，以及 /ask、/agents、/files、/batch 等 API。</a:t>
-            </a:r>
-            <a:endParaRPr lang="en-US" sz="730" dirty="0"/>
+            <a:endParaRPr lang="en-US" sz="1400" dirty="0">
+              <a:solidFill>
+                <a:srgbClr val="F5F8FF"/>
+              </a:solidFill>
+              <a:latin typeface="Noto Sans CJK SC" pitchFamily="34" charset="0"/>
+              <a:ea typeface="Noto Sans CJK SC" pitchFamily="34" charset="-122"/>
+              <a:cs typeface="Noto Sans CJK SC" pitchFamily="34" charset="-120"/>
+            </a:endParaRPr>
           </a:p>
         </p:txBody>
       </p:sp>
@@ -5756,46 +5730,6 @@
       </p:sp>
       <p:sp>
         <p:nvSpPr>
-          <p:cNvPr id="4" name="Text 2"/>
-          <p:cNvSpPr/>
-          <p:nvPr/>
-        </p:nvSpPr>
-        <p:spPr>
-          <a:xfrm>
-            <a:off x="530352" y="850392"/>
-            <a:ext cx="8869680" cy="274320"/>
-          </a:xfrm>
-          <a:prstGeom prst="rect">
-            <a:avLst/>
-          </a:prstGeom>
-          <a:noFill/>
-        </p:spPr>
-        <p:txBody>
-          <a:bodyPr wrap="square" lIns="0" tIns="0" rIns="0" bIns="0" rtlCol="0" anchor="ctr">
-            <a:normAutofit/>
-          </a:bodyPr>
-          <a:lstStyle/>
-          <a:p>
-            <a:pPr marL="0" indent="0">
-              <a:buNone/>
-            </a:pPr>
-            <a:r>
-              <a:rPr lang="en-US" sz="950" dirty="0">
-                <a:solidFill>
-                  <a:srgbClr val="AAB6D3"/>
-                </a:solidFill>
-                <a:latin typeface="Noto Sans CJK SC" pitchFamily="34" charset="0"/>
-                <a:ea typeface="Noto Sans CJK SC" pitchFamily="34" charset="-122"/>
-                <a:cs typeface="Noto Sans CJK SC" pitchFamily="34" charset="-120"/>
-              </a:rPr>
-              <a:t>项目是轻量级全栈实现，核心复杂度集中在文件抽取、初始化、路由和引用渲染</a:t>
-            </a:r>
-            <a:endParaRPr lang="en-US" sz="950" dirty="0"/>
-          </a:p>
-        </p:txBody>
-      </p:sp>
-      <p:sp>
-        <p:nvSpPr>
           <p:cNvPr id="5" name="Text 3"/>
           <p:cNvSpPr/>
           <p:nvPr/>
@@ -5858,7 +5792,7 @@
               <a:buNone/>
             </a:pPr>
             <a:r>
-              <a:rPr lang="en-US" sz="1300" b="1" dirty="0">
+              <a:rPr lang="en-US" sz="1600" b="1" dirty="0">
                 <a:solidFill>
                   <a:srgbClr val="6EE7F9"/>
                 </a:solidFill>
@@ -5868,7 +5802,14 @@
               </a:rPr>
               <a:t>后端模块</a:t>
             </a:r>
-            <a:endParaRPr lang="en-US" sz="1300" dirty="0"/>
+            <a:endParaRPr lang="en-US" sz="1600" b="1" dirty="0">
+              <a:solidFill>
+                <a:srgbClr val="6EE7F9"/>
+              </a:solidFill>
+              <a:latin typeface="Noto Sans CJK SC" pitchFamily="34" charset="0"/>
+              <a:ea typeface="Noto Sans CJK SC" pitchFamily="34" charset="-122"/>
+              <a:cs typeface="Noto Sans CJK SC" pitchFamily="34" charset="-120"/>
+            </a:endParaRPr>
           </a:p>
         </p:txBody>
       </p:sp>
@@ -5898,7 +5839,7 @@
               <a:buNone/>
             </a:pPr>
             <a:r>
-              <a:rPr lang="en-US" sz="1110" dirty="0">
+              <a:rPr lang="en-US" sz="1400" dirty="0">
                 <a:solidFill>
                   <a:srgbClr val="F5F8FF"/>
                 </a:solidFill>
@@ -5908,14 +5849,14 @@
               </a:rPr>
               <a:t>• main.py：路由入口与 API 注册</a:t>
             </a:r>
-            <a:endParaRPr lang="en-US" sz="1110" dirty="0"/>
+            <a:endParaRPr lang="en-US" sz="1400" dirty="0"/>
           </a:p>
           <a:p>
             <a:pPr marL="0" indent="0">
               <a:buNone/>
             </a:pPr>
             <a:r>
-              <a:rPr lang="en-US" sz="1110" dirty="0">
+              <a:rPr lang="en-US" sz="1400" dirty="0">
                 <a:solidFill>
                   <a:srgbClr val="F5F8FF"/>
                 </a:solidFill>
@@ -5925,14 +5866,14 @@
               </a:rPr>
               <a:t>• llm_client.py：OpenAI 兼容模型调用</a:t>
             </a:r>
-            <a:endParaRPr lang="en-US" sz="1110" dirty="0"/>
+            <a:endParaRPr lang="en-US" sz="1400" dirty="0"/>
           </a:p>
           <a:p>
             <a:pPr marL="0" indent="0">
               <a:buNone/>
             </a:pPr>
             <a:r>
-              <a:rPr lang="en-US" sz="1110" dirty="0">
+              <a:rPr lang="en-US" sz="1400" dirty="0">
                 <a:solidFill>
                   <a:srgbClr val="F5F8FF"/>
                 </a:solidFill>
@@ -5942,14 +5883,14 @@
               </a:rPr>
               <a:t>• initializer.py：生成 route_questions</a:t>
             </a:r>
-            <a:endParaRPr lang="en-US" sz="1110" dirty="0"/>
+            <a:endParaRPr lang="en-US" sz="1400" dirty="0"/>
           </a:p>
           <a:p>
             <a:pPr marL="0" indent="0">
               <a:buNone/>
             </a:pPr>
             <a:r>
-              <a:rPr lang="en-US" sz="1110" dirty="0">
+              <a:rPr lang="en-US" sz="1400" dirty="0">
                 <a:solidFill>
                   <a:srgbClr val="F5F8FF"/>
                 </a:solidFill>
@@ -5959,14 +5900,14 @@
               </a:rPr>
               <a:t>• router.py：根据问题选择 Agent</a:t>
             </a:r>
-            <a:endParaRPr lang="en-US" sz="1110" dirty="0"/>
+            <a:endParaRPr lang="en-US" sz="1400" dirty="0"/>
           </a:p>
           <a:p>
             <a:pPr marL="0" indent="0">
               <a:buNone/>
             </a:pPr>
             <a:r>
-              <a:rPr lang="en-US" sz="1110" dirty="0">
+              <a:rPr lang="en-US" sz="1400" dirty="0">
                 <a:solidFill>
                   <a:srgbClr val="F5F8FF"/>
                 </a:solidFill>
@@ -5976,14 +5917,14 @@
               </a:rPr>
               <a:t>• agent_runner.py：回答阶段调用</a:t>
             </a:r>
-            <a:endParaRPr lang="en-US" sz="1110" dirty="0"/>
+            <a:endParaRPr lang="en-US" sz="1400" dirty="0"/>
           </a:p>
           <a:p>
             <a:pPr marL="0" indent="0">
               <a:buNone/>
             </a:pPr>
             <a:r>
-              <a:rPr lang="en-US" sz="1110" dirty="0">
+              <a:rPr lang="en-US" sz="1400" dirty="0">
                 <a:solidFill>
                   <a:srgbClr val="F5F8FF"/>
                 </a:solidFill>
@@ -5993,14 +5934,14 @@
               </a:rPr>
               <a:t>• knowledge_loader.py / file_loader.py：知识读取</a:t>
             </a:r>
-            <a:endParaRPr lang="en-US" sz="1110" dirty="0"/>
+            <a:endParaRPr lang="en-US" sz="1400" dirty="0"/>
           </a:p>
           <a:p>
             <a:pPr marL="0" indent="0">
               <a:buNone/>
             </a:pPr>
             <a:r>
-              <a:rPr lang="en-US" sz="1110" dirty="0">
+              <a:rPr lang="en-US" sz="1400" dirty="0">
                 <a:solidFill>
                   <a:srgbClr val="F5F8FF"/>
                 </a:solidFill>
@@ -6010,7 +5951,14 @@
               </a:rPr>
               <a:t>• batch_evaluator.py：批量评估</a:t>
             </a:r>
-            <a:endParaRPr lang="en-US" sz="1110" dirty="0"/>
+            <a:endParaRPr lang="en-US" sz="1400" dirty="0">
+              <a:solidFill>
+                <a:srgbClr val="F5F8FF"/>
+              </a:solidFill>
+              <a:latin typeface="Noto Sans CJK SC" pitchFamily="34" charset="0"/>
+              <a:ea typeface="Noto Sans CJK SC" pitchFamily="34" charset="-122"/>
+              <a:cs typeface="Noto Sans CJK SC" pitchFamily="34" charset="-120"/>
+            </a:endParaRPr>
           </a:p>
         </p:txBody>
       </p:sp>
@@ -6022,7 +5970,7 @@
         </p:nvSpPr>
         <p:spPr>
           <a:xfrm>
-            <a:off x="5623560" y="1234440"/>
+            <a:off x="731520" y="3503295"/>
             <a:ext cx="2011680" cy="292608"/>
           </a:xfrm>
           <a:prstGeom prst="rect">
@@ -6040,7 +5988,7 @@
               <a:buNone/>
             </a:pPr>
             <a:r>
-              <a:rPr lang="en-US" sz="1300" b="1" dirty="0">
+              <a:rPr lang="en-US" sz="1600" b="1" dirty="0">
                 <a:solidFill>
                   <a:srgbClr val="A78BFA"/>
                 </a:solidFill>
@@ -6050,7 +5998,14 @@
               </a:rPr>
               <a:t>前端模块</a:t>
             </a:r>
-            <a:endParaRPr lang="en-US" sz="1300" dirty="0"/>
+            <a:endParaRPr lang="en-US" sz="1600" b="1" dirty="0">
+              <a:solidFill>
+                <a:srgbClr val="A78BFA"/>
+              </a:solidFill>
+              <a:latin typeface="Noto Sans CJK SC" pitchFamily="34" charset="0"/>
+              <a:ea typeface="Noto Sans CJK SC" pitchFamily="34" charset="-122"/>
+              <a:cs typeface="Noto Sans CJK SC" pitchFamily="34" charset="-120"/>
+            </a:endParaRPr>
           </a:p>
         </p:txBody>
       </p:sp>
@@ -6062,7 +6017,7 @@
         </p:nvSpPr>
         <p:spPr>
           <a:xfrm>
-            <a:off x="5669280" y="1691640"/>
+            <a:off x="777240" y="3960495"/>
             <a:ext cx="4160520" cy="2468880"/>
           </a:xfrm>
           <a:prstGeom prst="rect">
@@ -6080,7 +6035,7 @@
               <a:buNone/>
             </a:pPr>
             <a:r>
-              <a:rPr lang="en-US" sz="1110" dirty="0">
+              <a:rPr lang="en-US" sz="1400" dirty="0">
                 <a:solidFill>
                   <a:srgbClr val="F5F8FF"/>
                 </a:solidFill>
@@ -6090,14 +6045,14 @@
               </a:rPr>
               <a:t>• index.html：工作台入口</a:t>
             </a:r>
-            <a:endParaRPr lang="en-US" sz="1110" dirty="0"/>
+            <a:endParaRPr lang="en-US" sz="1400" dirty="0"/>
           </a:p>
           <a:p>
             <a:pPr marL="0" indent="0">
               <a:buNone/>
             </a:pPr>
             <a:r>
-              <a:rPr lang="en-US" sz="1110" dirty="0">
+              <a:rPr lang="en-US" sz="1400" dirty="0">
                 <a:solidFill>
                   <a:srgbClr val="F5F8FF"/>
                 </a:solidFill>
@@ -6107,14 +6062,14 @@
               </a:rPr>
               <a:t>• test.js：单问题测试</a:t>
             </a:r>
-            <a:endParaRPr lang="en-US" sz="1110" dirty="0"/>
+            <a:endParaRPr lang="en-US" sz="1400" dirty="0"/>
           </a:p>
           <a:p>
             <a:pPr marL="0" indent="0">
               <a:buNone/>
             </a:pPr>
             <a:r>
-              <a:rPr lang="en-US" sz="1110" dirty="0">
+              <a:rPr lang="en-US" sz="1400" dirty="0">
                 <a:solidFill>
                   <a:srgbClr val="F5F8FF"/>
                 </a:solidFill>
@@ -6124,14 +6079,14 @@
               </a:rPr>
               <a:t>• manage.js：Agent 与文件管理</a:t>
             </a:r>
-            <a:endParaRPr lang="en-US" sz="1110" dirty="0"/>
+            <a:endParaRPr lang="en-US" sz="1400" dirty="0"/>
           </a:p>
           <a:p>
             <a:pPr marL="0" indent="0">
               <a:buNone/>
             </a:pPr>
             <a:r>
-              <a:rPr lang="en-US" sz="1110" dirty="0">
+              <a:rPr lang="en-US" sz="1400" dirty="0">
                 <a:solidFill>
                   <a:srgbClr val="F5F8FF"/>
                 </a:solidFill>
@@ -6141,14 +6096,14 @@
               </a:rPr>
               <a:t>• batch.js：批量测试</a:t>
             </a:r>
-            <a:endParaRPr lang="en-US" sz="1110" dirty="0"/>
+            <a:endParaRPr lang="en-US" sz="1400" dirty="0"/>
           </a:p>
           <a:p>
             <a:pPr marL="0" indent="0">
               <a:buNone/>
             </a:pPr>
             <a:r>
-              <a:rPr lang="en-US" sz="1110" dirty="0">
+              <a:rPr lang="en-US" sz="1400" dirty="0">
                 <a:solidFill>
                   <a:srgbClr val="F5F8FF"/>
                 </a:solidFill>
@@ -6158,14 +6113,14 @@
               </a:rPr>
               <a:t>• answerRender.js：答案与图片渲染</a:t>
             </a:r>
-            <a:endParaRPr lang="en-US" sz="1110" dirty="0"/>
+            <a:endParaRPr lang="en-US" sz="1400" dirty="0"/>
           </a:p>
           <a:p>
             <a:pPr marL="0" indent="0">
               <a:buNone/>
             </a:pPr>
             <a:r>
-              <a:rPr lang="en-US" sz="1110" dirty="0">
+              <a:rPr lang="en-US" sz="1400" dirty="0">
                 <a:solidFill>
                   <a:srgbClr val="F5F8FF"/>
                 </a:solidFill>
@@ -6175,14 +6130,14 @@
               </a:rPr>
               <a:t>• filePreview.js：PDF/图片/媒体预览</a:t>
             </a:r>
-            <a:endParaRPr lang="en-US" sz="1110" dirty="0"/>
+            <a:endParaRPr lang="en-US" sz="1400" dirty="0"/>
           </a:p>
           <a:p>
             <a:pPr marL="0" indent="0">
               <a:buNone/>
             </a:pPr>
             <a:r>
-              <a:rPr lang="en-US" sz="1110" dirty="0">
+              <a:rPr lang="en-US" sz="1400" dirty="0">
                 <a:solidFill>
                   <a:srgbClr val="F5F8FF"/>
                 </a:solidFill>
@@ -6192,7 +6147,14 @@
               </a:rPr>
               <a:t>• styles.css：深色控制台样式</a:t>
             </a:r>
-            <a:endParaRPr lang="en-US" sz="1110" dirty="0"/>
+            <a:endParaRPr lang="en-US" sz="1400" dirty="0">
+              <a:solidFill>
+                <a:srgbClr val="F5F8FF"/>
+              </a:solidFill>
+              <a:latin typeface="Noto Sans CJK SC" pitchFamily="34" charset="0"/>
+              <a:ea typeface="Noto Sans CJK SC" pitchFamily="34" charset="-122"/>
+              <a:cs typeface="Noto Sans CJK SC" pitchFamily="34" charset="-120"/>
+            </a:endParaRPr>
           </a:p>
         </p:txBody>
       </p:sp>
@@ -6212,8 +6174,8 @@
         </p:blipFill>
         <p:spPr>
           <a:xfrm>
-            <a:off x="2701925" y="3027680"/>
-            <a:ext cx="2199640" cy="2733040"/>
+            <a:off x="5822950" y="1454150"/>
+            <a:ext cx="2917190" cy="3625215"/>
           </a:xfrm>
           <a:prstGeom prst="rect">
             <a:avLst/>
@@ -6236,8 +6198,8 @@
         </p:blipFill>
         <p:spPr>
           <a:xfrm>
-            <a:off x="7094855" y="2909570"/>
-            <a:ext cx="1417320" cy="3207385"/>
+            <a:off x="8740140" y="1234440"/>
+            <a:ext cx="1866900" cy="4225290"/>
           </a:xfrm>
           <a:prstGeom prst="rect">
             <a:avLst/>
@@ -6252,7 +6214,7 @@
         </p:nvSpPr>
         <p:spPr>
           <a:xfrm>
-            <a:off x="914400" y="5760720"/>
+            <a:off x="4055745" y="5847715"/>
             <a:ext cx="8046720" cy="256032"/>
           </a:xfrm>
           <a:prstGeom prst="rect">
@@ -6270,7 +6232,7 @@
               <a:buNone/>
             </a:pPr>
             <a:r>
-              <a:rPr lang="en-US" sz="850" dirty="0">
+              <a:rPr lang="en-US" sz="1050" dirty="0">
                 <a:solidFill>
                   <a:srgbClr val="AAB6D3"/>
                 </a:solidFill>
@@ -6280,45 +6242,14 @@
               </a:rPr>
               <a:t>前端渲染参考答案、相关图片与文件元信息；后端返回结构化字段驱动展示</a:t>
             </a:r>
-            <a:endParaRPr lang="en-US" sz="850" dirty="0"/>
-          </a:p>
-        </p:txBody>
-      </p:sp>
-      <p:sp>
-        <p:nvSpPr>
-          <p:cNvPr id="13" name="Text 9"/>
-          <p:cNvSpPr/>
-          <p:nvPr/>
-        </p:nvSpPr>
-        <p:spPr>
-          <a:xfrm>
-            <a:off x="502920" y="6199632"/>
-            <a:ext cx="10881360" cy="210312"/>
-          </a:xfrm>
-          <a:prstGeom prst="rect">
-            <a:avLst/>
-          </a:prstGeom>
-          <a:noFill/>
-        </p:spPr>
-        <p:txBody>
-          <a:bodyPr wrap="square" lIns="0" tIns="0" rIns="0" bIns="0" rtlCol="0" anchor="ctr"/>
-          <a:lstStyle/>
-          <a:p>
-            <a:pPr marL="0" indent="0">
-              <a:buNone/>
-            </a:pPr>
-            <a:r>
-              <a:rPr lang="en-US" sz="730" dirty="0">
-                <a:solidFill>
-                  <a:srgbClr val="64748B"/>
-                </a:solidFill>
-                <a:latin typeface="Noto Sans CJK SC" pitchFamily="34" charset="0"/>
-                <a:ea typeface="Noto Sans CJK SC" pitchFamily="34" charset="-122"/>
-                <a:cs typeface="Noto Sans CJK SC" pitchFamily="34" charset="-120"/>
-              </a:rPr>
-              <a:t>仓库 app 目录列出 agent_runner、initializer、router、llm_client、knowledge_loader 等后端文件；web 目录列出 test、manage、batch、answerRender 等前端文件。</a:t>
-            </a:r>
-            <a:endParaRPr lang="en-US" sz="730" dirty="0"/>
+            <a:endParaRPr lang="en-US" sz="1050" dirty="0">
+              <a:solidFill>
+                <a:srgbClr val="AAB6D3"/>
+              </a:solidFill>
+              <a:latin typeface="Noto Sans CJK SC" pitchFamily="34" charset="0"/>
+              <a:ea typeface="Noto Sans CJK SC" pitchFamily="34" charset="-122"/>
+              <a:cs typeface="Noto Sans CJK SC" pitchFamily="34" charset="-120"/>
+            </a:endParaRPr>
           </a:p>
         </p:txBody>
       </p:sp>
@@ -6462,46 +6393,6 @@
       </p:sp>
       <p:sp>
         <p:nvSpPr>
-          <p:cNvPr id="4" name="Text 2"/>
-          <p:cNvSpPr/>
-          <p:nvPr/>
-        </p:nvSpPr>
-        <p:spPr>
-          <a:xfrm>
-            <a:off x="530352" y="850392"/>
-            <a:ext cx="8869680" cy="274320"/>
-          </a:xfrm>
-          <a:prstGeom prst="rect">
-            <a:avLst/>
-          </a:prstGeom>
-          <a:noFill/>
-        </p:spPr>
-        <p:txBody>
-          <a:bodyPr wrap="square" lIns="0" tIns="0" rIns="0" bIns="0" rtlCol="0" anchor="ctr">
-            <a:normAutofit/>
-          </a:bodyPr>
-          <a:lstStyle/>
-          <a:p>
-            <a:pPr marL="0" indent="0">
-              <a:buNone/>
-            </a:pPr>
-            <a:r>
-              <a:rPr lang="en-US" sz="950" dirty="0">
-                <a:solidFill>
-                  <a:srgbClr val="AAB6D3"/>
-                </a:solidFill>
-                <a:latin typeface="Noto Sans CJK SC" pitchFamily="34" charset="0"/>
-                <a:ea typeface="Noto Sans CJK SC" pitchFamily="34" charset="-122"/>
-                <a:cs typeface="Noto Sans CJK SC" pitchFamily="34" charset="-120"/>
-              </a:rPr>
-              <a:t>该项目适合“文档已结构化、问题范围明确、需要引用验证”的场景</a:t>
-            </a:r>
-            <a:endParaRPr lang="en-US" sz="950" dirty="0"/>
-          </a:p>
-        </p:txBody>
-      </p:sp>
-      <p:sp>
-        <p:nvSpPr>
           <p:cNvPr id="5" name="Text 3"/>
           <p:cNvSpPr/>
           <p:nvPr/>
@@ -6546,7 +6437,7 @@
         </p:nvSpPr>
         <p:spPr>
           <a:xfrm>
-            <a:off x="822960" y="1234440"/>
+            <a:off x="822960" y="855980"/>
             <a:ext cx="1143000" cy="457200"/>
           </a:xfrm>
           <a:prstGeom prst="rect">
@@ -6573,7 +6464,7 @@
               <a:buNone/>
             </a:pPr>
             <a:r>
-              <a:rPr lang="en-US" sz="1200" b="1" dirty="0">
+              <a:rPr lang="en-US" sz="1600" b="1" dirty="0">
                 <a:solidFill>
                   <a:srgbClr val="F5F8FF"/>
                 </a:solidFill>
@@ -6583,7 +6474,14 @@
               </a:rPr>
               <a:t>优势</a:t>
             </a:r>
-            <a:endParaRPr lang="en-US" sz="1200" dirty="0"/>
+            <a:endParaRPr lang="en-US" sz="1600" b="1" dirty="0">
+              <a:solidFill>
+                <a:srgbClr val="F5F8FF"/>
+              </a:solidFill>
+              <a:latin typeface="Noto Sans CJK SC" pitchFamily="34" charset="0"/>
+              <a:ea typeface="Noto Sans CJK SC" pitchFamily="34" charset="-122"/>
+              <a:cs typeface="Noto Sans CJK SC" pitchFamily="34" charset="-120"/>
+            </a:endParaRPr>
           </a:p>
         </p:txBody>
       </p:sp>
@@ -6595,7 +6493,7 @@
         </p:nvSpPr>
         <p:spPr>
           <a:xfrm>
-            <a:off x="822960" y="1874520"/>
+            <a:off x="822960" y="1496060"/>
             <a:ext cx="3383280" cy="1828800"/>
           </a:xfrm>
           <a:prstGeom prst="rect">
@@ -6613,7 +6511,7 @@
               <a:buNone/>
             </a:pPr>
             <a:r>
-              <a:rPr lang="en-US" sz="1150" dirty="0">
+              <a:rPr lang="en-US" sz="1400" dirty="0">
                 <a:solidFill>
                   <a:srgbClr val="F5F8FF"/>
                 </a:solidFill>
@@ -6623,14 +6521,14 @@
               </a:rPr>
               <a:t>• 结构清晰：总 Agent 只路由，子 Agent 只回答</a:t>
             </a:r>
-            <a:endParaRPr lang="en-US" sz="1150" dirty="0"/>
+            <a:endParaRPr lang="en-US" sz="1400" dirty="0"/>
           </a:p>
           <a:p>
             <a:pPr marL="0" indent="0">
               <a:buNone/>
             </a:pPr>
             <a:r>
-              <a:rPr lang="en-US" sz="1150" dirty="0">
+              <a:rPr lang="en-US" sz="1400" dirty="0">
                 <a:solidFill>
                   <a:srgbClr val="F5F8FF"/>
                 </a:solidFill>
@@ -6640,14 +6538,14 @@
               </a:rPr>
               <a:t>• 可解释性强：回答可定位到行号、页码、图片</a:t>
             </a:r>
-            <a:endParaRPr lang="en-US" sz="1150" dirty="0"/>
+            <a:endParaRPr lang="en-US" sz="1400" dirty="0"/>
           </a:p>
           <a:p>
             <a:pPr marL="0" indent="0">
               <a:buNone/>
             </a:pPr>
             <a:r>
-              <a:rPr lang="en-US" sz="1150" dirty="0">
+              <a:rPr lang="en-US" sz="1400" dirty="0">
                 <a:solidFill>
                   <a:srgbClr val="F5F8FF"/>
                 </a:solidFill>
@@ -6657,14 +6555,14 @@
               </a:rPr>
               <a:t>• 部署轻量：无需向量库、数据库和复杂检索服务</a:t>
             </a:r>
-            <a:endParaRPr lang="en-US" sz="1150" dirty="0"/>
+            <a:endParaRPr lang="en-US" sz="1400" dirty="0"/>
           </a:p>
           <a:p>
             <a:pPr marL="0" indent="0">
               <a:buNone/>
             </a:pPr>
             <a:r>
-              <a:rPr lang="en-US" sz="1150" dirty="0">
+              <a:rPr lang="en-US" sz="1400" dirty="0">
                 <a:solidFill>
                   <a:srgbClr val="F5F8FF"/>
                 </a:solidFill>
@@ -6674,7 +6572,14 @@
               </a:rPr>
               <a:t>• 调试友好：管理页、单测页、批测页闭环完整</a:t>
             </a:r>
-            <a:endParaRPr lang="en-US" sz="1150" dirty="0"/>
+            <a:endParaRPr lang="en-US" sz="1400" dirty="0">
+              <a:solidFill>
+                <a:srgbClr val="F5F8FF"/>
+              </a:solidFill>
+              <a:latin typeface="Noto Sans CJK SC" pitchFamily="34" charset="0"/>
+              <a:ea typeface="Noto Sans CJK SC" pitchFamily="34" charset="-122"/>
+              <a:cs typeface="Noto Sans CJK SC" pitchFamily="34" charset="-120"/>
+            </a:endParaRPr>
           </a:p>
         </p:txBody>
       </p:sp>
@@ -6686,7 +6591,7 @@
         </p:nvSpPr>
         <p:spPr>
           <a:xfrm>
-            <a:off x="4526280" y="1234440"/>
+            <a:off x="4526280" y="855980"/>
             <a:ext cx="1143000" cy="457200"/>
           </a:xfrm>
           <a:prstGeom prst="rect">
@@ -6713,7 +6618,7 @@
               <a:buNone/>
             </a:pPr>
             <a:r>
-              <a:rPr lang="en-US" sz="1200" b="1" dirty="0">
+              <a:rPr lang="en-US" sz="1600" b="1" dirty="0">
                 <a:solidFill>
                   <a:srgbClr val="F5F8FF"/>
                 </a:solidFill>
@@ -6723,7 +6628,14 @@
               </a:rPr>
               <a:t>边界</a:t>
             </a:r>
-            <a:endParaRPr lang="en-US" sz="1200" dirty="0"/>
+            <a:endParaRPr lang="en-US" sz="1600" b="1" dirty="0">
+              <a:solidFill>
+                <a:srgbClr val="F5F8FF"/>
+              </a:solidFill>
+              <a:latin typeface="Noto Sans CJK SC" pitchFamily="34" charset="0"/>
+              <a:ea typeface="Noto Sans CJK SC" pitchFamily="34" charset="-122"/>
+              <a:cs typeface="Noto Sans CJK SC" pitchFamily="34" charset="-120"/>
+            </a:endParaRPr>
           </a:p>
         </p:txBody>
       </p:sp>
@@ -6735,7 +6647,7 @@
         </p:nvSpPr>
         <p:spPr>
           <a:xfrm>
-            <a:off x="4526280" y="1874520"/>
+            <a:off x="4526280" y="1496060"/>
             <a:ext cx="3383280" cy="1828800"/>
           </a:xfrm>
           <a:prstGeom prst="rect">
@@ -6753,7 +6665,7 @@
               <a:buNone/>
             </a:pPr>
             <a:r>
-              <a:rPr lang="en-US" sz="1150" dirty="0">
+              <a:rPr lang="en-US" sz="1400" dirty="0">
                 <a:solidFill>
                   <a:srgbClr val="F5F8FF"/>
                 </a:solidFill>
@@ -6763,14 +6675,14 @@
               </a:rPr>
               <a:t>• 实时读取大文件会增加 token 成本与响应时延</a:t>
             </a:r>
-            <a:endParaRPr lang="en-US" sz="1150" dirty="0"/>
+            <a:endParaRPr lang="en-US" sz="1400" dirty="0"/>
           </a:p>
           <a:p>
             <a:pPr marL="0" indent="0">
               <a:buNone/>
             </a:pPr>
             <a:r>
-              <a:rPr lang="en-US" sz="1150" dirty="0">
+              <a:rPr lang="en-US" sz="1400" dirty="0">
                 <a:solidFill>
                   <a:srgbClr val="F5F8FF"/>
                 </a:solidFill>
@@ -6780,14 +6692,14 @@
               </a:rPr>
               <a:t>• route_questions 覆盖不足时可能误路由或无法匹配</a:t>
             </a:r>
-            <a:endParaRPr lang="en-US" sz="1150" dirty="0"/>
+            <a:endParaRPr lang="en-US" sz="1400" dirty="0"/>
           </a:p>
           <a:p>
             <a:pPr marL="0" indent="0">
               <a:buNone/>
             </a:pPr>
             <a:r>
-              <a:rPr lang="en-US" sz="1150" dirty="0">
+              <a:rPr lang="en-US" sz="1400" dirty="0">
                 <a:solidFill>
                   <a:srgbClr val="F5F8FF"/>
                 </a:solidFill>
@@ -6797,14 +6709,14 @@
               </a:rPr>
               <a:t>• 单 Agent 调度适合单主题问题，多主题问题需要合并策略</a:t>
             </a:r>
-            <a:endParaRPr lang="en-US" sz="1150" dirty="0"/>
+            <a:endParaRPr lang="en-US" sz="1400" dirty="0"/>
           </a:p>
           <a:p>
             <a:pPr marL="0" indent="0">
               <a:buNone/>
             </a:pPr>
             <a:r>
-              <a:rPr lang="en-US" sz="1150" dirty="0">
+              <a:rPr lang="en-US" sz="1400" dirty="0">
                 <a:solidFill>
                   <a:srgbClr val="F5F8FF"/>
                 </a:solidFill>
@@ -6814,7 +6726,14 @@
               </a:rPr>
               <a:t>• 图片理解依赖视觉模型能力与图片抽取质量</a:t>
             </a:r>
-            <a:endParaRPr lang="en-US" sz="1150" dirty="0"/>
+            <a:endParaRPr lang="en-US" sz="1400" dirty="0">
+              <a:solidFill>
+                <a:srgbClr val="F5F8FF"/>
+              </a:solidFill>
+              <a:latin typeface="Noto Sans CJK SC" pitchFamily="34" charset="0"/>
+              <a:ea typeface="Noto Sans CJK SC" pitchFamily="34" charset="-122"/>
+              <a:cs typeface="Noto Sans CJK SC" pitchFamily="34" charset="-120"/>
+            </a:endParaRPr>
           </a:p>
         </p:txBody>
       </p:sp>
@@ -6826,7 +6745,7 @@
         </p:nvSpPr>
         <p:spPr>
           <a:xfrm>
-            <a:off x="8229600" y="1234440"/>
+            <a:off x="8229600" y="855980"/>
             <a:ext cx="1417320" cy="457200"/>
           </a:xfrm>
           <a:prstGeom prst="rect">
@@ -6853,7 +6772,7 @@
               <a:buNone/>
             </a:pPr>
             <a:r>
-              <a:rPr lang="en-US" sz="1200" b="1" dirty="0">
+              <a:rPr lang="en-US" sz="1600" b="1" dirty="0">
                 <a:solidFill>
                   <a:srgbClr val="F5F8FF"/>
                 </a:solidFill>
@@ -6863,7 +6782,14 @@
               </a:rPr>
               <a:t>优化方向</a:t>
             </a:r>
-            <a:endParaRPr lang="en-US" sz="1200" dirty="0"/>
+            <a:endParaRPr lang="en-US" sz="1600" b="1" dirty="0">
+              <a:solidFill>
+                <a:srgbClr val="F5F8FF"/>
+              </a:solidFill>
+              <a:latin typeface="Noto Sans CJK SC" pitchFamily="34" charset="0"/>
+              <a:ea typeface="Noto Sans CJK SC" pitchFamily="34" charset="-122"/>
+              <a:cs typeface="Noto Sans CJK SC" pitchFamily="34" charset="-120"/>
+            </a:endParaRPr>
           </a:p>
         </p:txBody>
       </p:sp>
@@ -6875,7 +6801,7 @@
         </p:nvSpPr>
         <p:spPr>
           <a:xfrm>
-            <a:off x="8229600" y="1874520"/>
+            <a:off x="8229600" y="1496060"/>
             <a:ext cx="3200400" cy="1828800"/>
           </a:xfrm>
           <a:prstGeom prst="rect">
@@ -6893,7 +6819,7 @@
               <a:buNone/>
             </a:pPr>
             <a:r>
-              <a:rPr lang="en-US" sz="1150" dirty="0">
+              <a:rPr lang="en-US" sz="1400" dirty="0">
                 <a:solidFill>
                   <a:srgbClr val="F5F8FF"/>
                 </a:solidFill>
@@ -6903,14 +6829,14 @@
               </a:rPr>
               <a:t>• 增加多 Agent 答案聚合与冲突消解</a:t>
             </a:r>
-            <a:endParaRPr lang="en-US" sz="1150" dirty="0"/>
+            <a:endParaRPr lang="en-US" sz="1400" dirty="0"/>
           </a:p>
           <a:p>
             <a:pPr marL="0" indent="0">
               <a:buNone/>
             </a:pPr>
             <a:r>
-              <a:rPr lang="en-US" sz="1150" dirty="0">
+              <a:rPr lang="en-US" sz="1400" dirty="0">
                 <a:solidFill>
                   <a:srgbClr val="F5F8FF"/>
                 </a:solidFill>
@@ -6920,14 +6846,14 @@
               </a:rPr>
               <a:t>• 缓存摘要、页级索引和图片缩略图，降低响应成本</a:t>
             </a:r>
-            <a:endParaRPr lang="en-US" sz="1150" dirty="0"/>
+            <a:endParaRPr lang="en-US" sz="1400" dirty="0"/>
           </a:p>
           <a:p>
             <a:pPr marL="0" indent="0">
               <a:buNone/>
             </a:pPr>
             <a:r>
-              <a:rPr lang="en-US" sz="1150" dirty="0">
+              <a:rPr lang="en-US" sz="1400" dirty="0">
                 <a:solidFill>
                   <a:srgbClr val="F5F8FF"/>
                 </a:solidFill>
@@ -6937,14 +6863,14 @@
               </a:rPr>
               <a:t>• 批测结果反向修正 route_questions 与提示词</a:t>
             </a:r>
-            <a:endParaRPr lang="en-US" sz="1150" dirty="0"/>
+            <a:endParaRPr lang="en-US" sz="1400" dirty="0"/>
           </a:p>
           <a:p>
             <a:pPr marL="0" indent="0">
               <a:buNone/>
             </a:pPr>
             <a:r>
-              <a:rPr lang="en-US" sz="1150" dirty="0">
+              <a:rPr lang="en-US" sz="1400" dirty="0">
                 <a:solidFill>
                   <a:srgbClr val="F5F8FF"/>
                 </a:solidFill>
@@ -6954,157 +6880,14 @@
               </a:rPr>
               <a:t>• 接入语音助手：ASR → 路由问答 → TTS</a:t>
             </a:r>
-            <a:endParaRPr lang="en-US" sz="1150" dirty="0"/>
-          </a:p>
-        </p:txBody>
-      </p:sp>
-      <p:pic>
-        <p:nvPicPr>
-          <p:cNvPr id="12" name="Image 0" descr="/mnt/data/ppt_assets/batch_cases.jpg"/>
-          <p:cNvPicPr>
-            <a:picLocks noChangeAspect="1"/>
-          </p:cNvPicPr>
-          <p:nvPr/>
-        </p:nvPicPr>
-        <p:blipFill>
-          <a:blip r:embed="rId1"/>
-          <a:stretch>
-            <a:fillRect/>
-          </a:stretch>
-        </p:blipFill>
-        <p:spPr>
-          <a:xfrm>
-            <a:off x="2808605" y="2611120"/>
-            <a:ext cx="1060450" cy="3588385"/>
-          </a:xfrm>
-          <a:prstGeom prst="rect">
-            <a:avLst/>
-          </a:prstGeom>
-        </p:spPr>
-      </p:pic>
-      <p:pic>
-        <p:nvPicPr>
-          <p:cNvPr id="13" name="Image 1" descr="/mnt/data/ppt_assets/manage_router_prompt.jpg"/>
-          <p:cNvPicPr>
-            <a:picLocks noChangeAspect="1"/>
-          </p:cNvPicPr>
-          <p:nvPr/>
-        </p:nvPicPr>
-        <p:blipFill>
-          <a:blip r:embed="rId2"/>
-          <a:stretch>
-            <a:fillRect/>
-          </a:stretch>
-        </p:blipFill>
-        <p:spPr>
-          <a:xfrm>
-            <a:off x="4304030" y="2982595"/>
-            <a:ext cx="2517140" cy="2923540"/>
-          </a:xfrm>
-          <a:prstGeom prst="rect">
-            <a:avLst/>
-          </a:prstGeom>
-        </p:spPr>
-      </p:pic>
-      <p:pic>
-        <p:nvPicPr>
-          <p:cNvPr id="14" name="Image 2" descr="/mnt/data/ppt_assets/single_resources.jpg"/>
-          <p:cNvPicPr>
-            <a:picLocks noChangeAspect="1"/>
-          </p:cNvPicPr>
-          <p:nvPr/>
-        </p:nvPicPr>
-        <p:blipFill>
-          <a:blip r:embed="rId3"/>
-          <a:stretch>
-            <a:fillRect/>
-          </a:stretch>
-        </p:blipFill>
-        <p:spPr>
-          <a:xfrm>
-            <a:off x="7532370" y="2891790"/>
-            <a:ext cx="1601470" cy="3330575"/>
-          </a:xfrm>
-          <a:prstGeom prst="rect">
-            <a:avLst/>
-          </a:prstGeom>
-        </p:spPr>
-      </p:pic>
-      <p:sp>
-        <p:nvSpPr>
-          <p:cNvPr id="15" name="Text 10"/>
-          <p:cNvSpPr/>
-          <p:nvPr/>
-        </p:nvSpPr>
-        <p:spPr>
-          <a:xfrm>
-            <a:off x="868680" y="5897880"/>
-            <a:ext cx="9281160" cy="256032"/>
-          </a:xfrm>
-          <a:prstGeom prst="rect">
-            <a:avLst/>
-          </a:prstGeom>
-          <a:noFill/>
-        </p:spPr>
-        <p:txBody>
-          <a:bodyPr wrap="square" lIns="0" tIns="0" rIns="0" bIns="0" rtlCol="0" anchor="ctr">
-            <a:normAutofit/>
-          </a:bodyPr>
-          <a:lstStyle/>
-          <a:p>
-            <a:pPr marL="0" indent="0" algn="ctr">
-              <a:buNone/>
-            </a:pPr>
-            <a:r>
-              <a:rPr lang="en-US" sz="850" dirty="0">
-                <a:solidFill>
-                  <a:srgbClr val="AAB6D3"/>
-                </a:solidFill>
-                <a:latin typeface="Noto Sans CJK SC" pitchFamily="34" charset="0"/>
-                <a:ea typeface="Noto Sans CJK SC" pitchFamily="34" charset="-122"/>
-                <a:cs typeface="Noto Sans CJK SC" pitchFamily="34" charset="-120"/>
-              </a:rPr>
-              <a:t>批测结果、路由提示词和引用资源是持续优化的三个抓手</a:t>
-            </a:r>
-            <a:endParaRPr lang="en-US" sz="850" dirty="0"/>
-          </a:p>
-        </p:txBody>
-      </p:sp>
-      <p:sp>
-        <p:nvSpPr>
-          <p:cNvPr id="16" name="Text 11"/>
-          <p:cNvSpPr/>
-          <p:nvPr/>
-        </p:nvSpPr>
-        <p:spPr>
-          <a:xfrm>
-            <a:off x="502920" y="6199632"/>
-            <a:ext cx="10881360" cy="210312"/>
-          </a:xfrm>
-          <a:prstGeom prst="rect">
-            <a:avLst/>
-          </a:prstGeom>
-          <a:noFill/>
-        </p:spPr>
-        <p:txBody>
-          <a:bodyPr wrap="square" lIns="0" tIns="0" rIns="0" bIns="0" rtlCol="0" anchor="ctr"/>
-          <a:lstStyle/>
-          <a:p>
-            <a:pPr marL="0" indent="0">
-              <a:buNone/>
-            </a:pPr>
-            <a:r>
-              <a:rPr lang="en-US" sz="730" dirty="0">
-                <a:solidFill>
-                  <a:srgbClr val="64748B"/>
-                </a:solidFill>
-                <a:latin typeface="Noto Sans CJK SC" pitchFamily="34" charset="0"/>
-                <a:ea typeface="Noto Sans CJK SC" pitchFamily="34" charset="-122"/>
-                <a:cs typeface="Noto Sans CJK SC" pitchFamily="34" charset="-120"/>
-              </a:rPr>
-              <a:t>README 提醒每次问答都会读取知识并发送给模型，文件越大 token 消耗越多、响应越慢，并建议按主题拆分 Agent。</a:t>
-            </a:r>
-            <a:endParaRPr lang="en-US" sz="730" dirty="0"/>
+            <a:endParaRPr lang="en-US" sz="1400" dirty="0">
+              <a:solidFill>
+                <a:srgbClr val="F5F8FF"/>
+              </a:solidFill>
+              <a:latin typeface="Noto Sans CJK SC" pitchFamily="34" charset="0"/>
+              <a:ea typeface="Noto Sans CJK SC" pitchFamily="34" charset="-122"/>
+              <a:cs typeface="Noto Sans CJK SC" pitchFamily="34" charset="-120"/>
+            </a:endParaRPr>
           </a:p>
         </p:txBody>
       </p:sp>
@@ -7248,46 +7031,6 @@
       </p:sp>
       <p:sp>
         <p:nvSpPr>
-          <p:cNvPr id="4" name="Text 2"/>
-          <p:cNvSpPr/>
-          <p:nvPr/>
-        </p:nvSpPr>
-        <p:spPr>
-          <a:xfrm>
-            <a:off x="530352" y="850392"/>
-            <a:ext cx="8869680" cy="274320"/>
-          </a:xfrm>
-          <a:prstGeom prst="rect">
-            <a:avLst/>
-          </a:prstGeom>
-          <a:noFill/>
-        </p:spPr>
-        <p:txBody>
-          <a:bodyPr wrap="square" lIns="0" tIns="0" rIns="0" bIns="0" rtlCol="0" anchor="ctr">
-            <a:normAutofit/>
-          </a:bodyPr>
-          <a:lstStyle/>
-          <a:p>
-            <a:pPr marL="0" indent="0">
-              <a:buNone/>
-            </a:pPr>
-            <a:r>
-              <a:rPr lang="en-US" sz="950" dirty="0">
-                <a:solidFill>
-                  <a:srgbClr val="AAB6D3"/>
-                </a:solidFill>
-                <a:latin typeface="Noto Sans CJK SC" pitchFamily="34" charset="0"/>
-                <a:ea typeface="Noto Sans CJK SC" pitchFamily="34" charset="-122"/>
-                <a:cs typeface="Noto Sans CJK SC" pitchFamily="34" charset="-120"/>
-              </a:rPr>
-              <a:t>从项目验收角度，可重点展示三条主线：架构、界面、效果</a:t>
-            </a:r>
-            <a:endParaRPr lang="en-US" sz="950" dirty="0"/>
-          </a:p>
-        </p:txBody>
-      </p:sp>
-      <p:sp>
-        <p:nvSpPr>
           <p:cNvPr id="5" name="Text 3"/>
           <p:cNvSpPr/>
           <p:nvPr/>
@@ -7579,7 +7322,7 @@
         <p:spPr>
           <a:xfrm>
             <a:off x="1188720" y="3154680"/>
-            <a:ext cx="5623560" cy="1600200"/>
+            <a:ext cx="5623560" cy="2390140"/>
           </a:xfrm>
           <a:prstGeom prst="rect">
             <a:avLst/>
@@ -7588,7 +7331,7 @@
         </p:spPr>
         <p:txBody>
           <a:bodyPr wrap="square" lIns="635" tIns="635" rIns="635" bIns="635" rtlCol="0" anchor="t">
-            <a:normAutofit/>
+            <a:noAutofit/>
           </a:bodyPr>
           <a:lstStyle/>
           <a:p>
@@ -7596,7 +7339,7 @@
               <a:buNone/>
             </a:pPr>
             <a:r>
-              <a:rPr lang="en-US" sz="1300" dirty="0">
+              <a:rPr lang="en-US" sz="1600" dirty="0">
                 <a:solidFill>
                   <a:srgbClr val="F5F8FF"/>
                 </a:solidFill>
@@ -7606,14 +7349,14 @@
               </a:rPr>
               <a:t>• 项目把大文档拆为多个可管理知识单元，减少无关上下文进入回答阶段。</a:t>
             </a:r>
-            <a:endParaRPr lang="en-US" sz="1300" dirty="0"/>
+            <a:endParaRPr lang="en-US" sz="1600" dirty="0"/>
           </a:p>
           <a:p>
             <a:pPr marL="0" indent="0">
               <a:buNone/>
             </a:pPr>
             <a:r>
-              <a:rPr lang="en-US" sz="1300" dirty="0">
+              <a:rPr lang="en-US" sz="1600" dirty="0">
                 <a:solidFill>
                   <a:srgbClr val="F5F8FF"/>
                 </a:solidFill>
@@ -7623,14 +7366,14 @@
               </a:rPr>
               <a:t>• 路由模型只做选择，回答模型只做依据原文回答，职责边界清楚。</a:t>
             </a:r>
-            <a:endParaRPr lang="en-US" sz="1300" dirty="0"/>
+            <a:endParaRPr lang="en-US" sz="1600" dirty="0"/>
           </a:p>
           <a:p>
             <a:pPr marL="0" indent="0">
               <a:buNone/>
             </a:pPr>
             <a:r>
-              <a:rPr lang="en-US" sz="1300" dirty="0">
+              <a:rPr lang="en-US" sz="1600" dirty="0">
                 <a:solidFill>
                   <a:srgbClr val="F5F8FF"/>
                 </a:solidFill>
@@ -7640,14 +7383,14 @@
               </a:rPr>
               <a:t>• 前端截图体现了可操作性：创建/切分/初始化、提问/引用/日志、批量评估。</a:t>
             </a:r>
-            <a:endParaRPr lang="en-US" sz="1300" dirty="0"/>
+            <a:endParaRPr lang="en-US" sz="1600" dirty="0"/>
           </a:p>
           <a:p>
             <a:pPr marL="0" indent="0">
               <a:buNone/>
             </a:pPr>
             <a:r>
-              <a:rPr lang="en-US" sz="1300" dirty="0">
+              <a:rPr lang="en-US" sz="1600" dirty="0">
                 <a:solidFill>
                   <a:srgbClr val="F5F8FF"/>
                 </a:solidFill>
@@ -7657,7 +7400,14 @@
               </a:rPr>
               <a:t>• 后续可以围绕多 Agent 聚合、缓存优化和语音客服集成继续增强。</a:t>
             </a:r>
-            <a:endParaRPr lang="en-US" sz="1300" dirty="0"/>
+            <a:endParaRPr lang="en-US" sz="1600" dirty="0">
+              <a:solidFill>
+                <a:srgbClr val="F5F8FF"/>
+              </a:solidFill>
+              <a:latin typeface="Noto Sans CJK SC" pitchFamily="34" charset="0"/>
+              <a:ea typeface="Noto Sans CJK SC" pitchFamily="34" charset="-122"/>
+              <a:cs typeface="Noto Sans CJK SC" pitchFamily="34" charset="-120"/>
+            </a:endParaRPr>
           </a:p>
         </p:txBody>
       </p:sp>
@@ -7863,9 +7613,11 @@
               <a:buNone/>
             </a:pPr>
             <a:r>
-              <a:rPr lang="en-US" sz="950" dirty="0">
-                <a:solidFill>
-                  <a:srgbClr val="AAB6D3"/>
+              <a:rPr lang="en-US" sz="1050" dirty="0">
+                <a:solidFill>
+                  <a:schemeClr val="bg1">
+                    <a:lumMod val="95000"/>
+                  </a:schemeClr>
                 </a:solidFill>
                 <a:latin typeface="Noto Sans CJK SC" pitchFamily="34" charset="0"/>
                 <a:ea typeface="Noto Sans CJK SC" pitchFamily="34" charset="-122"/>
@@ -7873,7 +7625,16 @@
               </a:rPr>
               <a:t>解决单模型直接塞大文件时的上下文过长、定位困难、引用不清晰等问题</a:t>
             </a:r>
-            <a:endParaRPr lang="en-US" sz="950" dirty="0"/>
+            <a:endParaRPr lang="en-US" sz="1050" dirty="0">
+              <a:solidFill>
+                <a:schemeClr val="bg1">
+                  <a:lumMod val="95000"/>
+                </a:schemeClr>
+              </a:solidFill>
+              <a:latin typeface="Noto Sans CJK SC" pitchFamily="34" charset="0"/>
+              <a:ea typeface="Noto Sans CJK SC" pitchFamily="34" charset="-122"/>
+              <a:cs typeface="Noto Sans CJK SC" pitchFamily="34" charset="-120"/>
+            </a:endParaRPr>
           </a:p>
         </p:txBody>
       </p:sp>
@@ -8426,7 +8187,7 @@
         </p:nvSpPr>
         <p:spPr>
           <a:xfrm>
-            <a:off x="0" y="0"/>
+            <a:off x="-35560" y="0"/>
             <a:ext cx="12191695" cy="6858000"/>
           </a:xfrm>
           <a:prstGeom prst="rect">
@@ -8487,46 +8248,6 @@
       </p:sp>
       <p:sp>
         <p:nvSpPr>
-          <p:cNvPr id="4" name="Text 2"/>
-          <p:cNvSpPr/>
-          <p:nvPr/>
-        </p:nvSpPr>
-        <p:spPr>
-          <a:xfrm>
-            <a:off x="530352" y="850392"/>
-            <a:ext cx="8869680" cy="274320"/>
-          </a:xfrm>
-          <a:prstGeom prst="rect">
-            <a:avLst/>
-          </a:prstGeom>
-          <a:noFill/>
-        </p:spPr>
-        <p:txBody>
-          <a:bodyPr wrap="square" lIns="0" tIns="0" rIns="0" bIns="0" rtlCol="0" anchor="ctr">
-            <a:normAutofit/>
-          </a:bodyPr>
-          <a:lstStyle/>
-          <a:p>
-            <a:pPr marL="0" indent="0">
-              <a:buNone/>
-            </a:pPr>
-            <a:r>
-              <a:rPr lang="en-US" sz="950" dirty="0">
-                <a:solidFill>
-                  <a:srgbClr val="AAB6D3"/>
-                </a:solidFill>
-                <a:latin typeface="Noto Sans CJK SC" pitchFamily="34" charset="0"/>
-                <a:ea typeface="Noto Sans CJK SC" pitchFamily="34" charset="-122"/>
-                <a:cs typeface="Noto Sans CJK SC" pitchFamily="34" charset="-120"/>
-              </a:rPr>
-              <a:t>项目强调无规则路由、实时读取本地知识文件、回答附带引用与插图</a:t>
-            </a:r>
-            <a:endParaRPr lang="en-US" sz="950" dirty="0"/>
-          </a:p>
-        </p:txBody>
-      </p:sp>
-      <p:sp>
-        <p:nvSpPr>
           <p:cNvPr id="5" name="Text 3"/>
           <p:cNvSpPr/>
           <p:nvPr/>
@@ -8567,7 +8288,11 @@
         <p:nvSpPr>
           <p:cNvPr id="6" name="Text 4"/>
           <p:cNvSpPr/>
-          <p:nvPr/>
+          <p:nvPr>
+            <p:custDataLst>
+              <p:tags r:id="rId1"/>
+            </p:custDataLst>
+          </p:nvPr>
         </p:nvSpPr>
         <p:spPr>
           <a:xfrm>
@@ -8616,12 +8341,16 @@
         <p:nvSpPr>
           <p:cNvPr id="7" name="Text 5"/>
           <p:cNvSpPr/>
-          <p:nvPr/>
-        </p:nvSpPr>
-        <p:spPr>
-          <a:xfrm>
-            <a:off x="521208" y="2212848"/>
-            <a:ext cx="1627632" cy="914400"/>
+          <p:nvPr>
+            <p:custDataLst>
+              <p:tags r:id="rId2"/>
+            </p:custDataLst>
+          </p:nvPr>
+        </p:nvSpPr>
+        <p:spPr>
+          <a:xfrm>
+            <a:off x="521335" y="2212975"/>
+            <a:ext cx="1759585" cy="914400"/>
           </a:xfrm>
           <a:prstGeom prst="rect">
             <a:avLst/>
@@ -8638,9 +8367,11 @@
               <a:buNone/>
             </a:pPr>
             <a:r>
-              <a:rPr lang="en-US" sz="1050" dirty="0">
-                <a:solidFill>
-                  <a:srgbClr val="AAB6D3"/>
+              <a:rPr lang="en-US" sz="1200" dirty="0">
+                <a:solidFill>
+                  <a:schemeClr val="bg1">
+                    <a:lumMod val="95000"/>
+                  </a:schemeClr>
                 </a:solidFill>
                 <a:latin typeface="Noto Sans CJK SC" pitchFamily="34" charset="0"/>
                 <a:ea typeface="Noto Sans CJK SC" pitchFamily="34" charset="-122"/>
@@ -8648,16 +8379,24 @@
               </a:rPr>
               <a:t>按页码/章节切分 PDF</a:t>
             </a:r>
-            <a:endParaRPr lang="en-US" sz="1050" dirty="0"/>
+            <a:endParaRPr lang="en-US" sz="1200" dirty="0">
+              <a:solidFill>
+                <a:schemeClr val="bg1">
+                  <a:lumMod val="95000"/>
+                </a:schemeClr>
+              </a:solidFill>
+            </a:endParaRPr>
           </a:p>
           <a:p>
             <a:pPr marL="0" indent="0">
               <a:buNone/>
             </a:pPr>
             <a:r>
-              <a:rPr lang="en-US" sz="1050" dirty="0">
-                <a:solidFill>
-                  <a:srgbClr val="AAB6D3"/>
+              <a:rPr lang="en-US" sz="1200" dirty="0">
+                <a:solidFill>
+                  <a:schemeClr val="bg1">
+                    <a:lumMod val="95000"/>
+                  </a:schemeClr>
                 </a:solidFill>
                 <a:latin typeface="Noto Sans CJK SC" pitchFamily="34" charset="0"/>
                 <a:ea typeface="Noto Sans CJK SC" pitchFamily="34" charset="-122"/>
@@ -8665,7 +8404,16 @@
               </a:rPr>
               <a:t>形成多个 knowledge.md</a:t>
             </a:r>
-            <a:endParaRPr lang="en-US" sz="1050" dirty="0"/>
+            <a:endParaRPr lang="en-US" sz="1200" dirty="0">
+              <a:solidFill>
+                <a:schemeClr val="bg1">
+                  <a:lumMod val="95000"/>
+                </a:schemeClr>
+              </a:solidFill>
+              <a:latin typeface="Noto Sans CJK SC" pitchFamily="34" charset="0"/>
+              <a:ea typeface="Noto Sans CJK SC" pitchFamily="34" charset="-122"/>
+              <a:cs typeface="Noto Sans CJK SC" pitchFamily="34" charset="-120"/>
+            </a:endParaRPr>
           </a:p>
         </p:txBody>
       </p:sp>
@@ -8673,7 +8421,11 @@
         <p:nvSpPr>
           <p:cNvPr id="8" name="Shape 6"/>
           <p:cNvSpPr/>
-          <p:nvPr/>
+          <p:nvPr>
+            <p:custDataLst>
+              <p:tags r:id="rId3"/>
+            </p:custDataLst>
+          </p:nvPr>
         </p:nvSpPr>
         <p:spPr>
           <a:xfrm>
@@ -8697,7 +8449,11 @@
         <p:nvSpPr>
           <p:cNvPr id="9" name="Text 7"/>
           <p:cNvSpPr/>
-          <p:nvPr/>
+          <p:nvPr>
+            <p:custDataLst>
+              <p:tags r:id="rId4"/>
+            </p:custDataLst>
+          </p:nvPr>
         </p:nvSpPr>
         <p:spPr>
           <a:xfrm>
@@ -8746,12 +8502,16 @@
         <p:nvSpPr>
           <p:cNvPr id="10" name="Text 8"/>
           <p:cNvSpPr/>
-          <p:nvPr/>
-        </p:nvSpPr>
-        <p:spPr>
-          <a:xfrm>
-            <a:off x="2990088" y="2212848"/>
-            <a:ext cx="1627632" cy="914400"/>
+          <p:nvPr>
+            <p:custDataLst>
+              <p:tags r:id="rId5"/>
+            </p:custDataLst>
+          </p:nvPr>
+        </p:nvSpPr>
+        <p:spPr>
+          <a:xfrm>
+            <a:off x="2990215" y="2212975"/>
+            <a:ext cx="1759585" cy="914400"/>
           </a:xfrm>
           <a:prstGeom prst="rect">
             <a:avLst/>
@@ -8768,9 +8528,11 @@
               <a:buNone/>
             </a:pPr>
             <a:r>
-              <a:rPr lang="en-US" sz="1050" dirty="0">
-                <a:solidFill>
-                  <a:srgbClr val="AAB6D3"/>
+              <a:rPr lang="en-US" sz="1200" dirty="0">
+                <a:solidFill>
+                  <a:schemeClr val="bg1">
+                    <a:lumMod val="95000"/>
+                  </a:schemeClr>
                 </a:solidFill>
                 <a:latin typeface="Noto Sans CJK SC" pitchFamily="34" charset="0"/>
                 <a:ea typeface="Noto Sans CJK SC" pitchFamily="34" charset="-122"/>
@@ -8778,16 +8540,24 @@
               </a:rPr>
               <a:t>INIT_MODEL 生成</a:t>
             </a:r>
-            <a:endParaRPr lang="en-US" sz="1050" dirty="0"/>
+            <a:endParaRPr lang="en-US" sz="1200" dirty="0">
+              <a:solidFill>
+                <a:schemeClr val="bg1">
+                  <a:lumMod val="95000"/>
+                </a:schemeClr>
+              </a:solidFill>
+            </a:endParaRPr>
           </a:p>
           <a:p>
             <a:pPr marL="0" indent="0">
               <a:buNone/>
             </a:pPr>
             <a:r>
-              <a:rPr lang="en-US" sz="1050" dirty="0">
-                <a:solidFill>
-                  <a:srgbClr val="AAB6D3"/>
+              <a:rPr lang="en-US" sz="1200" dirty="0">
+                <a:solidFill>
+                  <a:schemeClr val="bg1">
+                    <a:lumMod val="95000"/>
+                  </a:schemeClr>
                 </a:solidFill>
                 <a:latin typeface="Noto Sans CJK SC" pitchFamily="34" charset="0"/>
                 <a:ea typeface="Noto Sans CJK SC" pitchFamily="34" charset="-122"/>
@@ -8795,7 +8565,16 @@
               </a:rPr>
               <a:t>route_questions 与摘要</a:t>
             </a:r>
-            <a:endParaRPr lang="en-US" sz="1050" dirty="0"/>
+            <a:endParaRPr lang="en-US" sz="1200" dirty="0">
+              <a:solidFill>
+                <a:schemeClr val="bg1">
+                  <a:lumMod val="95000"/>
+                </a:schemeClr>
+              </a:solidFill>
+              <a:latin typeface="Noto Sans CJK SC" pitchFamily="34" charset="0"/>
+              <a:ea typeface="Noto Sans CJK SC" pitchFamily="34" charset="-122"/>
+              <a:cs typeface="Noto Sans CJK SC" pitchFamily="34" charset="-120"/>
+            </a:endParaRPr>
           </a:p>
         </p:txBody>
       </p:sp>
@@ -8803,7 +8582,11 @@
         <p:nvSpPr>
           <p:cNvPr id="11" name="Shape 9"/>
           <p:cNvSpPr/>
-          <p:nvPr/>
+          <p:nvPr>
+            <p:custDataLst>
+              <p:tags r:id="rId6"/>
+            </p:custDataLst>
+          </p:nvPr>
         </p:nvSpPr>
         <p:spPr>
           <a:xfrm>
@@ -8827,7 +8610,11 @@
         <p:nvSpPr>
           <p:cNvPr id="12" name="Text 10"/>
           <p:cNvSpPr/>
-          <p:nvPr/>
+          <p:nvPr>
+            <p:custDataLst>
+              <p:tags r:id="rId7"/>
+            </p:custDataLst>
+          </p:nvPr>
         </p:nvSpPr>
         <p:spPr>
           <a:xfrm>
@@ -8876,12 +8663,16 @@
         <p:nvSpPr>
           <p:cNvPr id="13" name="Text 11"/>
           <p:cNvSpPr/>
-          <p:nvPr/>
-        </p:nvSpPr>
-        <p:spPr>
-          <a:xfrm>
-            <a:off x="5458968" y="2212848"/>
-            <a:ext cx="1627632" cy="914400"/>
+          <p:nvPr>
+            <p:custDataLst>
+              <p:tags r:id="rId8"/>
+            </p:custDataLst>
+          </p:nvPr>
+        </p:nvSpPr>
+        <p:spPr>
+          <a:xfrm>
+            <a:off x="5459095" y="2212975"/>
+            <a:ext cx="1759585" cy="914400"/>
           </a:xfrm>
           <a:prstGeom prst="rect">
             <a:avLst/>
@@ -8898,9 +8689,11 @@
               <a:buNone/>
             </a:pPr>
             <a:r>
-              <a:rPr lang="en-US" sz="1050" dirty="0">
-                <a:solidFill>
-                  <a:srgbClr val="AAB6D3"/>
+              <a:rPr lang="en-US" sz="1200" dirty="0">
+                <a:solidFill>
+                  <a:schemeClr val="bg1">
+                    <a:lumMod val="95000"/>
+                  </a:schemeClr>
                 </a:solidFill>
                 <a:latin typeface="Noto Sans CJK SC" pitchFamily="34" charset="0"/>
                 <a:ea typeface="Noto Sans CJK SC" pitchFamily="34" charset="-122"/>
@@ -8908,16 +8701,24 @@
               </a:rPr>
               <a:t>ROUTER_MODEL 在候选</a:t>
             </a:r>
-            <a:endParaRPr lang="en-US" sz="1050" dirty="0"/>
+            <a:endParaRPr lang="en-US" sz="1200" dirty="0">
+              <a:solidFill>
+                <a:schemeClr val="bg1">
+                  <a:lumMod val="95000"/>
+                </a:schemeClr>
+              </a:solidFill>
+            </a:endParaRPr>
           </a:p>
           <a:p>
             <a:pPr marL="0" indent="0">
               <a:buNone/>
             </a:pPr>
             <a:r>
-              <a:rPr lang="en-US" sz="1050" dirty="0">
-                <a:solidFill>
-                  <a:srgbClr val="AAB6D3"/>
+              <a:rPr lang="en-US" sz="1200" dirty="0">
+                <a:solidFill>
+                  <a:schemeClr val="bg1">
+                    <a:lumMod val="95000"/>
+                  </a:schemeClr>
                 </a:solidFill>
                 <a:latin typeface="Noto Sans CJK SC" pitchFamily="34" charset="0"/>
                 <a:ea typeface="Noto Sans CJK SC" pitchFamily="34" charset="-122"/>
@@ -8925,7 +8726,16 @@
               </a:rPr>
               <a:t>Agent 中选择最匹配项</a:t>
             </a:r>
-            <a:endParaRPr lang="en-US" sz="1050" dirty="0"/>
+            <a:endParaRPr lang="en-US" sz="1200" dirty="0">
+              <a:solidFill>
+                <a:schemeClr val="bg1">
+                  <a:lumMod val="95000"/>
+                </a:schemeClr>
+              </a:solidFill>
+              <a:latin typeface="Noto Sans CJK SC" pitchFamily="34" charset="0"/>
+              <a:ea typeface="Noto Sans CJK SC" pitchFamily="34" charset="-122"/>
+              <a:cs typeface="Noto Sans CJK SC" pitchFamily="34" charset="-120"/>
+            </a:endParaRPr>
           </a:p>
         </p:txBody>
       </p:sp>
@@ -8933,7 +8743,11 @@
         <p:nvSpPr>
           <p:cNvPr id="14" name="Shape 12"/>
           <p:cNvSpPr/>
-          <p:nvPr/>
+          <p:nvPr>
+            <p:custDataLst>
+              <p:tags r:id="rId9"/>
+            </p:custDataLst>
+          </p:nvPr>
         </p:nvSpPr>
         <p:spPr>
           <a:xfrm>
@@ -8957,7 +8771,11 @@
         <p:nvSpPr>
           <p:cNvPr id="15" name="Text 13"/>
           <p:cNvSpPr/>
-          <p:nvPr/>
+          <p:nvPr>
+            <p:custDataLst>
+              <p:tags r:id="rId10"/>
+            </p:custDataLst>
+          </p:nvPr>
         </p:nvSpPr>
         <p:spPr>
           <a:xfrm>
@@ -9006,12 +8824,16 @@
         <p:nvSpPr>
           <p:cNvPr id="16" name="Text 14"/>
           <p:cNvSpPr/>
-          <p:nvPr/>
-        </p:nvSpPr>
-        <p:spPr>
-          <a:xfrm>
-            <a:off x="7927848" y="2212848"/>
-            <a:ext cx="1627632" cy="914400"/>
+          <p:nvPr>
+            <p:custDataLst>
+              <p:tags r:id="rId11"/>
+            </p:custDataLst>
+          </p:nvPr>
+        </p:nvSpPr>
+        <p:spPr>
+          <a:xfrm>
+            <a:off x="7927975" y="2212975"/>
+            <a:ext cx="1759585" cy="914400"/>
           </a:xfrm>
           <a:prstGeom prst="rect">
             <a:avLst/>
@@ -9028,9 +8850,11 @@
               <a:buNone/>
             </a:pPr>
             <a:r>
-              <a:rPr lang="en-US" sz="1050" dirty="0">
-                <a:solidFill>
-                  <a:srgbClr val="AAB6D3"/>
+              <a:rPr lang="en-US" sz="1200" dirty="0">
+                <a:solidFill>
+                  <a:schemeClr val="bg1">
+                    <a:lumMod val="95000"/>
+                  </a:schemeClr>
                 </a:solidFill>
                 <a:latin typeface="Noto Sans CJK SC" pitchFamily="34" charset="0"/>
                 <a:ea typeface="Noto Sans CJK SC" pitchFamily="34" charset="-122"/>
@@ -9038,16 +8862,24 @@
               </a:rPr>
               <a:t>ANSWER_MODEL 读取</a:t>
             </a:r>
-            <a:endParaRPr lang="en-US" sz="1050" dirty="0"/>
+            <a:endParaRPr lang="en-US" sz="1200" dirty="0">
+              <a:solidFill>
+                <a:schemeClr val="bg1">
+                  <a:lumMod val="95000"/>
+                </a:schemeClr>
+              </a:solidFill>
+            </a:endParaRPr>
           </a:p>
           <a:p>
             <a:pPr marL="0" indent="0">
               <a:buNone/>
             </a:pPr>
             <a:r>
-              <a:rPr lang="en-US" sz="1050" dirty="0">
-                <a:solidFill>
-                  <a:srgbClr val="AAB6D3"/>
+              <a:rPr lang="en-US" sz="1200" dirty="0">
+                <a:solidFill>
+                  <a:schemeClr val="bg1">
+                    <a:lumMod val="95000"/>
+                  </a:schemeClr>
                 </a:solidFill>
                 <a:latin typeface="Noto Sans CJK SC" pitchFamily="34" charset="0"/>
                 <a:ea typeface="Noto Sans CJK SC" pitchFamily="34" charset="-122"/>
@@ -9055,7 +8887,16 @@
               </a:rPr>
               <a:t>带行号原文与图片</a:t>
             </a:r>
-            <a:endParaRPr lang="en-US" sz="1050" dirty="0"/>
+            <a:endParaRPr lang="en-US" sz="1200" dirty="0">
+              <a:solidFill>
+                <a:schemeClr val="bg1">
+                  <a:lumMod val="95000"/>
+                </a:schemeClr>
+              </a:solidFill>
+              <a:latin typeface="Noto Sans CJK SC" pitchFamily="34" charset="0"/>
+              <a:ea typeface="Noto Sans CJK SC" pitchFamily="34" charset="-122"/>
+              <a:cs typeface="Noto Sans CJK SC" pitchFamily="34" charset="-120"/>
+            </a:endParaRPr>
           </a:p>
         </p:txBody>
       </p:sp>
@@ -9063,7 +8904,11 @@
         <p:nvSpPr>
           <p:cNvPr id="17" name="Shape 15"/>
           <p:cNvSpPr/>
-          <p:nvPr/>
+          <p:nvPr>
+            <p:custDataLst>
+              <p:tags r:id="rId12"/>
+            </p:custDataLst>
+          </p:nvPr>
         </p:nvSpPr>
         <p:spPr>
           <a:xfrm>
@@ -9087,7 +8932,11 @@
         <p:nvSpPr>
           <p:cNvPr id="18" name="Text 16"/>
           <p:cNvSpPr/>
-          <p:nvPr/>
+          <p:nvPr>
+            <p:custDataLst>
+              <p:tags r:id="rId13"/>
+            </p:custDataLst>
+          </p:nvPr>
         </p:nvSpPr>
         <p:spPr>
           <a:xfrm>
@@ -9136,12 +8985,16 @@
         <p:nvSpPr>
           <p:cNvPr id="19" name="Text 17"/>
           <p:cNvSpPr/>
-          <p:nvPr/>
-        </p:nvSpPr>
-        <p:spPr>
-          <a:xfrm>
-            <a:off x="10396728" y="2212848"/>
-            <a:ext cx="1627632" cy="914400"/>
+          <p:nvPr>
+            <p:custDataLst>
+              <p:tags r:id="rId14"/>
+            </p:custDataLst>
+          </p:nvPr>
+        </p:nvSpPr>
+        <p:spPr>
+          <a:xfrm>
+            <a:off x="10396855" y="2212975"/>
+            <a:ext cx="1759585" cy="914400"/>
           </a:xfrm>
           <a:prstGeom prst="rect">
             <a:avLst/>
@@ -9158,9 +9011,11 @@
               <a:buNone/>
             </a:pPr>
             <a:r>
-              <a:rPr lang="en-US" sz="1050" dirty="0">
-                <a:solidFill>
-                  <a:srgbClr val="AAB6D3"/>
+              <a:rPr lang="en-US" sz="1200" dirty="0">
+                <a:solidFill>
+                  <a:schemeClr val="bg1">
+                    <a:lumMod val="95000"/>
+                  </a:schemeClr>
                 </a:solidFill>
                 <a:latin typeface="Noto Sans CJK SC" pitchFamily="34" charset="0"/>
                 <a:ea typeface="Noto Sans CJK SC" pitchFamily="34" charset="-122"/>
@@ -9168,16 +9023,24 @@
               </a:rPr>
               <a:t>前端展示答案、行号</a:t>
             </a:r>
-            <a:endParaRPr lang="en-US" sz="1050" dirty="0"/>
+            <a:endParaRPr lang="en-US" sz="1200" dirty="0">
+              <a:solidFill>
+                <a:schemeClr val="bg1">
+                  <a:lumMod val="95000"/>
+                </a:schemeClr>
+              </a:solidFill>
+            </a:endParaRPr>
           </a:p>
           <a:p>
             <a:pPr marL="0" indent="0">
               <a:buNone/>
             </a:pPr>
             <a:r>
-              <a:rPr lang="en-US" sz="1050" dirty="0">
-                <a:solidFill>
-                  <a:srgbClr val="AAB6D3"/>
+              <a:rPr lang="en-US" sz="1200" dirty="0">
+                <a:solidFill>
+                  <a:schemeClr val="bg1">
+                    <a:lumMod val="95000"/>
+                  </a:schemeClr>
                 </a:solidFill>
                 <a:latin typeface="Noto Sans CJK SC" pitchFamily="34" charset="0"/>
                 <a:ea typeface="Noto Sans CJK SC" pitchFamily="34" charset="-122"/>
@@ -9185,7 +9048,16 @@
               </a:rPr>
               <a:t>PDF页图/Markdown图</a:t>
             </a:r>
-            <a:endParaRPr lang="en-US" sz="1050" dirty="0"/>
+            <a:endParaRPr lang="en-US" sz="1200" dirty="0">
+              <a:solidFill>
+                <a:schemeClr val="bg1">
+                  <a:lumMod val="95000"/>
+                </a:schemeClr>
+              </a:solidFill>
+              <a:latin typeface="Noto Sans CJK SC" pitchFamily="34" charset="0"/>
+              <a:ea typeface="Noto Sans CJK SC" pitchFamily="34" charset="-122"/>
+              <a:cs typeface="Noto Sans CJK SC" pitchFamily="34" charset="-120"/>
+            </a:endParaRPr>
           </a:p>
         </p:txBody>
       </p:sp>
@@ -9215,7 +9087,7 @@
               <a:buNone/>
             </a:pPr>
             <a:r>
-              <a:rPr lang="en-US" sz="1320" dirty="0">
+              <a:rPr lang="en-US" sz="1600" dirty="0">
                 <a:solidFill>
                   <a:srgbClr val="F5F8FF"/>
                 </a:solidFill>
@@ -9225,14 +9097,14 @@
               </a:rPr>
               <a:t>• 路由依据不是关键词匹配，而是把用户问题与各 Agent 的 route_questions 做语义对照。</a:t>
             </a:r>
-            <a:endParaRPr lang="en-US" sz="1320" dirty="0"/>
+            <a:endParaRPr lang="en-US" sz="1600" dirty="0"/>
           </a:p>
           <a:p>
             <a:pPr marL="0" indent="0">
               <a:buNone/>
             </a:pPr>
             <a:r>
-              <a:rPr lang="en-US" sz="1320" dirty="0">
+              <a:rPr lang="en-US" sz="1600" dirty="0">
                 <a:solidFill>
                   <a:srgbClr val="F5F8FF"/>
                 </a:solidFill>
@@ -9242,14 +9114,14 @@
               </a:rPr>
               <a:t>• 回答阶段将知识内容附加行号，便于模型输出引用并让前端定位来源。</a:t>
             </a:r>
-            <a:endParaRPr lang="en-US" sz="1320" dirty="0"/>
+            <a:endParaRPr lang="en-US" sz="1600" dirty="0"/>
           </a:p>
           <a:p>
             <a:pPr marL="0" indent="0">
               <a:buNone/>
             </a:pPr>
             <a:r>
-              <a:rPr lang="en-US" sz="1320" dirty="0">
+              <a:rPr lang="en-US" sz="1600" dirty="0">
                 <a:solidFill>
                   <a:srgbClr val="F5F8FF"/>
                 </a:solidFill>
@@ -9259,7 +9131,14 @@
               </a:rPr>
               <a:t>• 测试时可开启 MOCK_LLM，不依赖真实上游模型，便于自动化验证。</a:t>
             </a:r>
-            <a:endParaRPr lang="en-US" sz="1320" dirty="0"/>
+            <a:endParaRPr lang="en-US" sz="1600" dirty="0">
+              <a:solidFill>
+                <a:srgbClr val="F5F8FF"/>
+              </a:solidFill>
+              <a:latin typeface="Noto Sans CJK SC" pitchFamily="34" charset="0"/>
+              <a:ea typeface="Noto Sans CJK SC" pitchFamily="34" charset="-122"/>
+              <a:cs typeface="Noto Sans CJK SC" pitchFamily="34" charset="-120"/>
+            </a:endParaRPr>
           </a:p>
         </p:txBody>
       </p:sp>
@@ -9272,15 +9151,15 @@
           <p:nvPr/>
         </p:nvPicPr>
         <p:blipFill>
-          <a:blip r:embed="rId1"/>
+          <a:blip r:embed="rId15"/>
           <a:stretch>
             <a:fillRect/>
           </a:stretch>
         </p:blipFill>
         <p:spPr>
           <a:xfrm>
-            <a:off x="6221730" y="2759710"/>
-            <a:ext cx="1867535" cy="3881755"/>
+            <a:off x="8410575" y="2629535"/>
+            <a:ext cx="1887220" cy="3922395"/>
           </a:xfrm>
           <a:prstGeom prst="rect">
             <a:avLst/>
@@ -9295,7 +9174,7 @@
         </p:nvSpPr>
         <p:spPr>
           <a:xfrm>
-            <a:off x="7528560" y="3915410"/>
+            <a:off x="6359525" y="5920105"/>
             <a:ext cx="2667000" cy="631825"/>
           </a:xfrm>
           <a:prstGeom prst="rect">
@@ -9331,44 +9210,6 @@
               <a:ea typeface="Noto Sans CJK SC" pitchFamily="34" charset="-122"/>
               <a:cs typeface="Noto Sans CJK SC" pitchFamily="34" charset="-120"/>
             </a:endParaRPr>
-          </a:p>
-        </p:txBody>
-      </p:sp>
-      <p:sp>
-        <p:nvSpPr>
-          <p:cNvPr id="24" name="Text 20"/>
-          <p:cNvSpPr/>
-          <p:nvPr/>
-        </p:nvSpPr>
-        <p:spPr>
-          <a:xfrm>
-            <a:off x="530225" y="6199632"/>
-            <a:ext cx="10881360" cy="210312"/>
-          </a:xfrm>
-          <a:prstGeom prst="rect">
-            <a:avLst/>
-          </a:prstGeom>
-          <a:noFill/>
-        </p:spPr>
-        <p:txBody>
-          <a:bodyPr wrap="square" lIns="0" tIns="0" rIns="0" bIns="0" rtlCol="0" anchor="ctr"/>
-          <a:lstStyle/>
-          <a:p>
-            <a:pPr marL="0" indent="0">
-              <a:buNone/>
-            </a:pPr>
-            <a:r>
-              <a:rPr lang="en-US" sz="730" dirty="0">
-                <a:solidFill>
-                  <a:srgbClr val="64748B"/>
-                </a:solidFill>
-                <a:latin typeface="Noto Sans CJK SC" pitchFamily="34" charset="0"/>
-                <a:ea typeface="Noto Sans CJK SC" pitchFamily="34" charset="-122"/>
-                <a:cs typeface="Noto Sans CJK SC" pitchFamily="34" charset="-120"/>
-              </a:rPr>
-              <a:t>README 明确说明系统不使用向量库/RAG、每次问答实时读取本地知识文件，并通过三类模型分工完成初始化、路由与回答。</a:t>
-            </a:r>
-            <a:endParaRPr lang="en-US" sz="730" dirty="0"/>
           </a:p>
         </p:txBody>
       </p:sp>
@@ -9512,46 +9353,6 @@
       </p:sp>
       <p:sp>
         <p:nvSpPr>
-          <p:cNvPr id="4" name="Text 2"/>
-          <p:cNvSpPr/>
-          <p:nvPr/>
-        </p:nvSpPr>
-        <p:spPr>
-          <a:xfrm>
-            <a:off x="530352" y="850392"/>
-            <a:ext cx="8869680" cy="274320"/>
-          </a:xfrm>
-          <a:prstGeom prst="rect">
-            <a:avLst/>
-          </a:prstGeom>
-          <a:noFill/>
-        </p:spPr>
-        <p:txBody>
-          <a:bodyPr wrap="square" lIns="0" tIns="0" rIns="0" bIns="0" rtlCol="0" anchor="ctr">
-            <a:normAutofit/>
-          </a:bodyPr>
-          <a:lstStyle/>
-          <a:p>
-            <a:pPr marL="0" indent="0">
-              <a:buNone/>
-            </a:pPr>
-            <a:r>
-              <a:rPr lang="en-US" sz="950" dirty="0">
-                <a:solidFill>
-                  <a:srgbClr val="AAB6D3"/>
-                </a:solidFill>
-                <a:latin typeface="Noto Sans CJK SC" pitchFamily="34" charset="0"/>
-                <a:ea typeface="Noto Sans CJK SC" pitchFamily="34" charset="-122"/>
-                <a:cs typeface="Noto Sans CJK SC" pitchFamily="34" charset="-120"/>
-              </a:rPr>
-              <a:t>从用户界面到模型调用，核心链路围绕 agent 配置、知识文件、路由与回答展开</a:t>
-            </a:r>
-            <a:endParaRPr lang="en-US" sz="950" dirty="0"/>
-          </a:p>
-        </p:txBody>
-      </p:sp>
-      <p:sp>
-        <p:nvSpPr>
           <p:cNvPr id="5" name="Text 3"/>
           <p:cNvSpPr/>
           <p:nvPr/>
@@ -10154,7 +9955,7 @@
               <a:buNone/>
             </a:pPr>
             <a:r>
-              <a:rPr lang="en-US" sz="1300" b="1" dirty="0">
+              <a:rPr lang="en-US" sz="1600" b="1" dirty="0">
                 <a:solidFill>
                   <a:srgbClr val="6EE7F9"/>
                 </a:solidFill>
@@ -10164,7 +9965,14 @@
               </a:rPr>
               <a:t>后端模块拆分</a:t>
             </a:r>
-            <a:endParaRPr lang="en-US" sz="1300" dirty="0"/>
+            <a:endParaRPr lang="en-US" sz="1600" b="1" dirty="0">
+              <a:solidFill>
+                <a:srgbClr val="6EE7F9"/>
+              </a:solidFill>
+              <a:latin typeface="Noto Sans CJK SC" pitchFamily="34" charset="0"/>
+              <a:ea typeface="Noto Sans CJK SC" pitchFamily="34" charset="-122"/>
+              <a:cs typeface="Noto Sans CJK SC" pitchFamily="34" charset="-120"/>
+            </a:endParaRPr>
           </a:p>
         </p:txBody>
       </p:sp>
@@ -10194,7 +10002,7 @@
               <a:buNone/>
             </a:pPr>
             <a:r>
-              <a:rPr lang="en-US" sz="1120" dirty="0">
+              <a:rPr lang="en-US" sz="1400" dirty="0">
                 <a:solidFill>
                   <a:srgbClr val="F5F8FF"/>
                 </a:solidFill>
@@ -10204,14 +10012,14 @@
               </a:rPr>
               <a:t>• agent_runner：回答阶段执行</a:t>
             </a:r>
-            <a:endParaRPr lang="en-US" sz="1120" dirty="0"/>
+            <a:endParaRPr lang="en-US" sz="1400" dirty="0"/>
           </a:p>
           <a:p>
             <a:pPr marL="0" indent="0">
               <a:buNone/>
             </a:pPr>
             <a:r>
-              <a:rPr lang="en-US" sz="1120" dirty="0">
+              <a:rPr lang="en-US" sz="1400" dirty="0">
                 <a:solidFill>
                   <a:srgbClr val="F5F8FF"/>
                 </a:solidFill>
@@ -10221,14 +10029,14 @@
               </a:rPr>
               <a:t>• router：路由选择</a:t>
             </a:r>
-            <a:endParaRPr lang="en-US" sz="1120" dirty="0"/>
+            <a:endParaRPr lang="en-US" sz="1400" dirty="0"/>
           </a:p>
           <a:p>
             <a:pPr marL="0" indent="0">
               <a:buNone/>
             </a:pPr>
             <a:r>
-              <a:rPr lang="en-US" sz="1120" dirty="0">
+              <a:rPr lang="en-US" sz="1400" dirty="0">
                 <a:solidFill>
                   <a:srgbClr val="F5F8FF"/>
                 </a:solidFill>
@@ -10238,14 +10046,14 @@
               </a:rPr>
               <a:t>• initializer：生成路由问题</a:t>
             </a:r>
-            <a:endParaRPr lang="en-US" sz="1120" dirty="0"/>
+            <a:endParaRPr lang="en-US" sz="1400" dirty="0"/>
           </a:p>
           <a:p>
             <a:pPr marL="0" indent="0">
               <a:buNone/>
             </a:pPr>
             <a:r>
-              <a:rPr lang="en-US" sz="1120" dirty="0">
+              <a:rPr lang="en-US" sz="1400" dirty="0">
                 <a:solidFill>
                   <a:srgbClr val="F5F8FF"/>
                 </a:solidFill>
@@ -10255,14 +10063,14 @@
               </a:rPr>
               <a:t>• knowledge_loader：读取知识</a:t>
             </a:r>
-            <a:endParaRPr lang="en-US" sz="1120" dirty="0"/>
+            <a:endParaRPr lang="en-US" sz="1400" dirty="0"/>
           </a:p>
           <a:p>
             <a:pPr marL="0" indent="0">
               <a:buNone/>
             </a:pPr>
             <a:r>
-              <a:rPr lang="en-US" sz="1120" dirty="0">
+              <a:rPr lang="en-US" sz="1400" dirty="0">
                 <a:solidFill>
                   <a:srgbClr val="F5F8FF"/>
                 </a:solidFill>
@@ -10272,7 +10080,14 @@
               </a:rPr>
               <a:t>• batch_evaluator：批测评分</a:t>
             </a:r>
-            <a:endParaRPr lang="en-US" sz="1120" dirty="0"/>
+            <a:endParaRPr lang="en-US" sz="1400" dirty="0">
+              <a:solidFill>
+                <a:srgbClr val="F5F8FF"/>
+              </a:solidFill>
+              <a:latin typeface="Noto Sans CJK SC" pitchFamily="34" charset="0"/>
+              <a:ea typeface="Noto Sans CJK SC" pitchFamily="34" charset="-122"/>
+              <a:cs typeface="Noto Sans CJK SC" pitchFamily="34" charset="-120"/>
+            </a:endParaRPr>
           </a:p>
         </p:txBody>
       </p:sp>
@@ -10302,7 +10117,7 @@
               <a:buNone/>
             </a:pPr>
             <a:r>
-              <a:rPr lang="en-US" sz="1300" b="1" dirty="0">
+              <a:rPr lang="en-US" sz="1600" b="1" dirty="0">
                 <a:solidFill>
                   <a:srgbClr val="A78BFA"/>
                 </a:solidFill>
@@ -10312,7 +10127,14 @@
               </a:rPr>
               <a:t>数据持久化</a:t>
             </a:r>
-            <a:endParaRPr lang="en-US" sz="1300" dirty="0"/>
+            <a:endParaRPr lang="en-US" sz="1600" b="1" dirty="0">
+              <a:solidFill>
+                <a:srgbClr val="A78BFA"/>
+              </a:solidFill>
+              <a:latin typeface="Noto Sans CJK SC" pitchFamily="34" charset="0"/>
+              <a:ea typeface="Noto Sans CJK SC" pitchFamily="34" charset="-122"/>
+              <a:cs typeface="Noto Sans CJK SC" pitchFamily="34" charset="-120"/>
+            </a:endParaRPr>
           </a:p>
         </p:txBody>
       </p:sp>
@@ -10342,7 +10164,7 @@
               <a:buNone/>
             </a:pPr>
             <a:r>
-              <a:rPr lang="en-US" sz="1120" dirty="0">
+              <a:rPr lang="en-US" sz="1400" dirty="0">
                 <a:solidFill>
                   <a:srgbClr val="F5F8FF"/>
                 </a:solidFill>
@@ -10352,14 +10174,14 @@
               </a:rPr>
               <a:t>• config/agents.json 保存 Agent 状态、问题集与摘要</a:t>
             </a:r>
-            <a:endParaRPr lang="en-US" sz="1120" dirty="0"/>
+            <a:endParaRPr lang="en-US" sz="1400" dirty="0"/>
           </a:p>
           <a:p>
             <a:pPr marL="0" indent="0">
               <a:buNone/>
             </a:pPr>
             <a:r>
-              <a:rPr lang="en-US" sz="1120" dirty="0">
+              <a:rPr lang="en-US" sz="1400" dirty="0">
                 <a:solidFill>
                   <a:srgbClr val="F5F8FF"/>
                 </a:solidFill>
@@ -10369,14 +10191,14 @@
               </a:rPr>
               <a:t>• files/agent_x/ 保存 knowledge.md 与 assets 图片</a:t>
             </a:r>
-            <a:endParaRPr lang="en-US" sz="1120" dirty="0"/>
+            <a:endParaRPr lang="en-US" sz="1400" dirty="0"/>
           </a:p>
           <a:p>
             <a:pPr marL="0" indent="0">
               <a:buNone/>
             </a:pPr>
             <a:r>
-              <a:rPr lang="en-US" sz="1120" dirty="0">
+              <a:rPr lang="en-US" sz="1400" dirty="0">
                 <a:solidFill>
                   <a:srgbClr val="F5F8FF"/>
                 </a:solidFill>
@@ -10386,7 +10208,14 @@
               </a:rPr>
               <a:t>• config/batch_tests.json 保存测试用例与评估结果</a:t>
             </a:r>
-            <a:endParaRPr lang="en-US" sz="1120" dirty="0"/>
+            <a:endParaRPr lang="en-US" sz="1400" dirty="0">
+              <a:solidFill>
+                <a:srgbClr val="F5F8FF"/>
+              </a:solidFill>
+              <a:latin typeface="Noto Sans CJK SC" pitchFamily="34" charset="0"/>
+              <a:ea typeface="Noto Sans CJK SC" pitchFamily="34" charset="-122"/>
+              <a:cs typeface="Noto Sans CJK SC" pitchFamily="34" charset="-120"/>
+            </a:endParaRPr>
           </a:p>
         </p:txBody>
       </p:sp>
@@ -10416,7 +10245,7 @@
               <a:buNone/>
             </a:pPr>
             <a:r>
-              <a:rPr lang="en-US" sz="1300" b="1" dirty="0">
+              <a:rPr lang="en-US" sz="1600" b="1" dirty="0">
                 <a:solidFill>
                   <a:srgbClr val="3DDC97"/>
                 </a:solidFill>
@@ -10426,7 +10255,14 @@
               </a:rPr>
               <a:t>模型接入</a:t>
             </a:r>
-            <a:endParaRPr lang="en-US" sz="1300" dirty="0"/>
+            <a:endParaRPr lang="en-US" sz="1600" b="1" dirty="0">
+              <a:solidFill>
+                <a:srgbClr val="3DDC97"/>
+              </a:solidFill>
+              <a:latin typeface="Noto Sans CJK SC" pitchFamily="34" charset="0"/>
+              <a:ea typeface="Noto Sans CJK SC" pitchFamily="34" charset="-122"/>
+              <a:cs typeface="Noto Sans CJK SC" pitchFamily="34" charset="-120"/>
+            </a:endParaRPr>
           </a:p>
         </p:txBody>
       </p:sp>
@@ -10456,7 +10292,7 @@
               <a:buNone/>
             </a:pPr>
             <a:r>
-              <a:rPr lang="en-US" sz="1120" dirty="0">
+              <a:rPr lang="en-US" sz="1400" dirty="0">
                 <a:solidFill>
                   <a:srgbClr val="F5F8FF"/>
                 </a:solidFill>
@@ -10466,14 +10302,14 @@
               </a:rPr>
               <a:t>• OpenAI SDK chat.completions.create</a:t>
             </a:r>
-            <a:endParaRPr lang="en-US" sz="1120" dirty="0"/>
+            <a:endParaRPr lang="en-US" sz="1400" dirty="0"/>
           </a:p>
           <a:p>
             <a:pPr marL="0" indent="0">
               <a:buNone/>
             </a:pPr>
             <a:r>
-              <a:rPr lang="en-US" sz="1120" dirty="0">
+              <a:rPr lang="en-US" sz="1400" dirty="0">
                 <a:solidFill>
                   <a:srgbClr val="F5F8FF"/>
                 </a:solidFill>
@@ -10483,14 +10319,14 @@
               </a:rPr>
               <a:t>• 支持 API_BASE_URL / API_KEY / 模型名配置</a:t>
             </a:r>
-            <a:endParaRPr lang="en-US" sz="1120" dirty="0"/>
+            <a:endParaRPr lang="en-US" sz="1400" dirty="0"/>
           </a:p>
           <a:p>
             <a:pPr marL="0" indent="0">
               <a:buNone/>
             </a:pPr>
             <a:r>
-              <a:rPr lang="en-US" sz="1120" dirty="0">
+              <a:rPr lang="en-US" sz="1400" dirty="0">
                 <a:solidFill>
                   <a:srgbClr val="F5F8FF"/>
                 </a:solidFill>
@@ -10500,45 +10336,14 @@
               </a:rPr>
               <a:t>• 支持 content parts、max_completion_tokens 等网关差异</a:t>
             </a:r>
-            <a:endParaRPr lang="en-US" sz="1120" dirty="0"/>
-          </a:p>
-        </p:txBody>
-      </p:sp>
-      <p:sp>
-        <p:nvSpPr>
-          <p:cNvPr id="24" name="Text 22"/>
-          <p:cNvSpPr/>
-          <p:nvPr/>
-        </p:nvSpPr>
-        <p:spPr>
-          <a:xfrm>
-            <a:off x="502920" y="6199632"/>
-            <a:ext cx="10881360" cy="210312"/>
-          </a:xfrm>
-          <a:prstGeom prst="rect">
-            <a:avLst/>
-          </a:prstGeom>
-          <a:noFill/>
-        </p:spPr>
-        <p:txBody>
-          <a:bodyPr wrap="square" lIns="0" tIns="0" rIns="0" bIns="0" rtlCol="0" anchor="ctr"/>
-          <a:lstStyle/>
-          <a:p>
-            <a:pPr marL="0" indent="0">
-              <a:buNone/>
-            </a:pPr>
-            <a:r>
-              <a:rPr lang="en-US" sz="730" dirty="0">
-                <a:solidFill>
-                  <a:srgbClr val="64748B"/>
-                </a:solidFill>
-                <a:latin typeface="Noto Sans CJK SC" pitchFamily="34" charset="0"/>
-                <a:ea typeface="Noto Sans CJK SC" pitchFamily="34" charset="-122"/>
-                <a:cs typeface="Noto Sans CJK SC" pitchFamily="34" charset="-120"/>
-              </a:rPr>
-              <a:t>仓库目录包含 app、config、files、scripts、tests、web 等模块；README 列出了 FastAPI、OpenAI SDK、PyMuPDF、python-docx、openpyxl 等依赖。</a:t>
-            </a:r>
-            <a:endParaRPr lang="en-US" sz="730" dirty="0"/>
+            <a:endParaRPr lang="en-US" sz="1400" dirty="0">
+              <a:solidFill>
+                <a:srgbClr val="F5F8FF"/>
+              </a:solidFill>
+              <a:latin typeface="Noto Sans CJK SC" pitchFamily="34" charset="0"/>
+              <a:ea typeface="Noto Sans CJK SC" pitchFamily="34" charset="-122"/>
+              <a:cs typeface="Noto Sans CJK SC" pitchFamily="34" charset="-120"/>
+            </a:endParaRPr>
           </a:p>
         </p:txBody>
       </p:sp>
@@ -10566,7 +10371,7 @@
               <a:buNone/>
             </a:pPr>
             <a:r>
-              <a:rPr lang="en-US" sz="800" dirty="0">
+              <a:rPr lang="en-US" sz="1000" dirty="0">
                 <a:solidFill>
                   <a:srgbClr val="5D6B91"/>
                 </a:solidFill>
@@ -10576,7 +10381,14 @@
               </a:rPr>
               <a:t>04</a:t>
             </a:r>
-            <a:endParaRPr lang="en-US" sz="800" dirty="0"/>
+            <a:endParaRPr lang="en-US" sz="1000" dirty="0">
+              <a:solidFill>
+                <a:srgbClr val="5D6B91"/>
+              </a:solidFill>
+              <a:latin typeface="Noto Sans CJK SC" pitchFamily="34" charset="0"/>
+              <a:ea typeface="Noto Sans CJK SC" pitchFamily="34" charset="-122"/>
+              <a:cs typeface="Noto Sans CJK SC" pitchFamily="34" charset="-120"/>
+            </a:endParaRPr>
           </a:p>
         </p:txBody>
       </p:sp>
@@ -10706,9 +10518,11 @@
               <a:buNone/>
             </a:pPr>
             <a:r>
-              <a:rPr lang="en-US" sz="950" dirty="0">
-                <a:solidFill>
-                  <a:srgbClr val="AAB6D3"/>
+              <a:rPr lang="en-US" sz="1200" dirty="0">
+                <a:solidFill>
+                  <a:schemeClr val="bg1">
+                    <a:lumMod val="95000"/>
+                  </a:schemeClr>
                 </a:solidFill>
                 <a:latin typeface="Noto Sans CJK SC" pitchFamily="34" charset="0"/>
                 <a:ea typeface="Noto Sans CJK SC" pitchFamily="34" charset="-122"/>
@@ -10716,7 +10530,16 @@
               </a:rPr>
               <a:t>先让子 Agent 形成可路由的问题集合，再在用户提问时按语义选择最相关知识源</a:t>
             </a:r>
-            <a:endParaRPr lang="en-US" sz="950" dirty="0"/>
+            <a:endParaRPr lang="en-US" sz="1200" dirty="0">
+              <a:solidFill>
+                <a:schemeClr val="bg1">
+                  <a:lumMod val="95000"/>
+                </a:schemeClr>
+              </a:solidFill>
+              <a:latin typeface="Noto Sans CJK SC" pitchFamily="34" charset="0"/>
+              <a:ea typeface="Noto Sans CJK SC" pitchFamily="34" charset="-122"/>
+              <a:cs typeface="Noto Sans CJK SC" pitchFamily="34" charset="-120"/>
+            </a:endParaRPr>
           </a:p>
         </p:txBody>
       </p:sp>
@@ -10784,7 +10607,7 @@
               <a:buNone/>
             </a:pPr>
             <a:r>
-              <a:rPr lang="en-US" sz="1400" b="1" dirty="0">
+              <a:rPr lang="en-US" b="1" dirty="0">
                 <a:solidFill>
                   <a:srgbClr val="6EE7F9"/>
                 </a:solidFill>
@@ -10794,7 +10617,14 @@
               </a:rPr>
               <a:t>初始化阶段</a:t>
             </a:r>
-            <a:endParaRPr lang="en-US" sz="1400" dirty="0"/>
+            <a:endParaRPr lang="en-US" b="1" dirty="0">
+              <a:solidFill>
+                <a:srgbClr val="6EE7F9"/>
+              </a:solidFill>
+              <a:latin typeface="Noto Sans CJK SC" pitchFamily="34" charset="0"/>
+              <a:ea typeface="Noto Sans CJK SC" pitchFamily="34" charset="-122"/>
+              <a:cs typeface="Noto Sans CJK SC" pitchFamily="34" charset="-120"/>
+            </a:endParaRPr>
           </a:p>
         </p:txBody>
       </p:sp>
@@ -10833,7 +10663,7 @@
               <a:buNone/>
             </a:pPr>
             <a:r>
-              <a:rPr lang="en-US" sz="1000" b="1" dirty="0">
+              <a:rPr lang="en-US" sz="1400" b="1" dirty="0">
                 <a:solidFill>
                   <a:srgbClr val="F5F8FF"/>
                 </a:solidFill>
@@ -10843,7 +10673,14 @@
               </a:rPr>
               <a:t>创建 Agent</a:t>
             </a:r>
-            <a:endParaRPr lang="en-US" sz="1000" dirty="0"/>
+            <a:endParaRPr lang="en-US" sz="1400" b="1" dirty="0">
+              <a:solidFill>
+                <a:srgbClr val="F5F8FF"/>
+              </a:solidFill>
+              <a:latin typeface="Noto Sans CJK SC" pitchFamily="34" charset="0"/>
+              <a:ea typeface="Noto Sans CJK SC" pitchFamily="34" charset="-122"/>
+              <a:cs typeface="Noto Sans CJK SC" pitchFamily="34" charset="-120"/>
+            </a:endParaRPr>
           </a:p>
         </p:txBody>
       </p:sp>
@@ -10882,7 +10719,7 @@
               <a:buNone/>
             </a:pPr>
             <a:r>
-              <a:rPr lang="en-US" sz="1000" b="1" dirty="0">
+              <a:rPr lang="en-US" sz="1400" b="1" dirty="0">
                 <a:solidFill>
                   <a:srgbClr val="F5F8FF"/>
                 </a:solidFill>
@@ -10892,7 +10729,14 @@
               </a:rPr>
               <a:t>上传/注册文件</a:t>
             </a:r>
-            <a:endParaRPr lang="en-US" sz="1000" dirty="0"/>
+            <a:endParaRPr lang="en-US" sz="1400" b="1" dirty="0">
+              <a:solidFill>
+                <a:srgbClr val="F5F8FF"/>
+              </a:solidFill>
+              <a:latin typeface="Noto Sans CJK SC" pitchFamily="34" charset="0"/>
+              <a:ea typeface="Noto Sans CJK SC" pitchFamily="34" charset="-122"/>
+              <a:cs typeface="Noto Sans CJK SC" pitchFamily="34" charset="-120"/>
+            </a:endParaRPr>
           </a:p>
         </p:txBody>
       </p:sp>
@@ -10923,7 +10767,7 @@
         </p:spPr>
         <p:txBody>
           <a:bodyPr wrap="square" lIns="762" tIns="762" rIns="762" bIns="762" rtlCol="0" anchor="ctr">
-            <a:normAutofit/>
+            <a:noAutofit/>
           </a:bodyPr>
           <a:lstStyle/>
           <a:p>
@@ -10931,7 +10775,7 @@
               <a:buNone/>
             </a:pPr>
             <a:r>
-              <a:rPr lang="en-US" sz="1000" b="1" dirty="0">
+              <a:rPr lang="en-US" sz="1400" b="1" dirty="0">
                 <a:solidFill>
                   <a:srgbClr val="F5F8FF"/>
                 </a:solidFill>
@@ -10941,7 +10785,14 @@
               </a:rPr>
               <a:t>生成 knowledge.md</a:t>
             </a:r>
-            <a:endParaRPr lang="en-US" sz="1000" dirty="0"/>
+            <a:endParaRPr lang="en-US" sz="1400" b="1" dirty="0">
+              <a:solidFill>
+                <a:srgbClr val="F5F8FF"/>
+              </a:solidFill>
+              <a:latin typeface="Noto Sans CJK SC" pitchFamily="34" charset="0"/>
+              <a:ea typeface="Noto Sans CJK SC" pitchFamily="34" charset="-122"/>
+              <a:cs typeface="Noto Sans CJK SC" pitchFamily="34" charset="-120"/>
+            </a:endParaRPr>
           </a:p>
         </p:txBody>
       </p:sp>
@@ -10980,7 +10831,7 @@
               <a:buNone/>
             </a:pPr>
             <a:r>
-              <a:rPr lang="en-US" sz="960" b="1" dirty="0">
+              <a:rPr lang="en-US" sz="1200" b="1" dirty="0">
                 <a:solidFill>
                   <a:srgbClr val="F5F8FF"/>
                 </a:solidFill>
@@ -10990,14 +10841,14 @@
               </a:rPr>
               <a:t>INIT_MODEL</a:t>
             </a:r>
-            <a:endParaRPr lang="en-US" sz="960" dirty="0"/>
+            <a:endParaRPr lang="en-US" sz="1200" dirty="0"/>
           </a:p>
           <a:p>
             <a:pPr marL="0" indent="0" algn="ctr">
               <a:buNone/>
             </a:pPr>
             <a:r>
-              <a:rPr lang="en-US" sz="960" b="1" dirty="0">
+              <a:rPr lang="en-US" sz="1200" b="1" dirty="0">
                 <a:solidFill>
                   <a:srgbClr val="F5F8FF"/>
                 </a:solidFill>
@@ -11007,7 +10858,14 @@
               </a:rPr>
               <a:t>route_questions</a:t>
             </a:r>
-            <a:endParaRPr lang="en-US" sz="960" dirty="0"/>
+            <a:endParaRPr lang="en-US" sz="1200" b="1" dirty="0">
+              <a:solidFill>
+                <a:srgbClr val="F5F8FF"/>
+              </a:solidFill>
+              <a:latin typeface="Noto Sans CJK SC" pitchFamily="34" charset="0"/>
+              <a:ea typeface="Noto Sans CJK SC" pitchFamily="34" charset="-122"/>
+              <a:cs typeface="Noto Sans CJK SC" pitchFamily="34" charset="-120"/>
+            </a:endParaRPr>
           </a:p>
         </p:txBody>
       </p:sp>
@@ -11046,7 +10904,7 @@
               <a:buNone/>
             </a:pPr>
             <a:r>
-              <a:rPr lang="en-US" sz="960" b="1" dirty="0">
+              <a:rPr lang="en-US" sz="1200" b="1" dirty="0">
                 <a:solidFill>
                   <a:srgbClr val="F5F8FF"/>
                 </a:solidFill>
@@ -11056,14 +10914,14 @@
               </a:rPr>
               <a:t>写入 agents.json</a:t>
             </a:r>
-            <a:endParaRPr lang="en-US" sz="960" dirty="0"/>
+            <a:endParaRPr lang="en-US" sz="1200" dirty="0"/>
           </a:p>
           <a:p>
             <a:pPr marL="0" indent="0" algn="ctr">
               <a:buNone/>
             </a:pPr>
             <a:r>
-              <a:rPr lang="en-US" sz="960" b="1" dirty="0">
+              <a:rPr lang="en-US" sz="1200" b="1" dirty="0">
                 <a:solidFill>
                   <a:srgbClr val="F5F8FF"/>
                 </a:solidFill>
@@ -11073,7 +10931,14 @@
               </a:rPr>
               <a:t>initialized</a:t>
             </a:r>
-            <a:endParaRPr lang="en-US" sz="960" dirty="0"/>
+            <a:endParaRPr lang="en-US" sz="1200" b="1" dirty="0">
+              <a:solidFill>
+                <a:srgbClr val="F5F8FF"/>
+              </a:solidFill>
+              <a:latin typeface="Noto Sans CJK SC" pitchFamily="34" charset="0"/>
+              <a:ea typeface="Noto Sans CJK SC" pitchFamily="34" charset="-122"/>
+              <a:cs typeface="Noto Sans CJK SC" pitchFamily="34" charset="-120"/>
+            </a:endParaRPr>
           </a:p>
         </p:txBody>
       </p:sp>
@@ -11199,7 +11064,7 @@
               <a:buNone/>
             </a:pPr>
             <a:r>
-              <a:rPr lang="en-US" sz="1400" b="1" dirty="0">
+              <a:rPr lang="en-US" b="1" dirty="0">
                 <a:solidFill>
                   <a:srgbClr val="A78BFA"/>
                 </a:solidFill>
@@ -11209,7 +11074,14 @@
               </a:rPr>
               <a:t>问答阶段</a:t>
             </a:r>
-            <a:endParaRPr lang="en-US" sz="1400" dirty="0"/>
+            <a:endParaRPr lang="en-US" b="1" dirty="0">
+              <a:solidFill>
+                <a:srgbClr val="A78BFA"/>
+              </a:solidFill>
+              <a:latin typeface="Noto Sans CJK SC" pitchFamily="34" charset="0"/>
+              <a:ea typeface="Noto Sans CJK SC" pitchFamily="34" charset="-122"/>
+              <a:cs typeface="Noto Sans CJK SC" pitchFamily="34" charset="-120"/>
+            </a:endParaRPr>
           </a:p>
         </p:txBody>
       </p:sp>
@@ -11248,7 +11120,7 @@
               <a:buNone/>
             </a:pPr>
             <a:r>
-              <a:rPr lang="en-US" sz="1000" b="1" dirty="0">
+              <a:rPr lang="en-US" sz="1400" b="1" dirty="0">
                 <a:solidFill>
                   <a:srgbClr val="F5F8FF"/>
                 </a:solidFill>
@@ -11258,7 +11130,14 @@
               </a:rPr>
               <a:t>用户问题</a:t>
             </a:r>
-            <a:endParaRPr lang="en-US" sz="1000" dirty="0"/>
+            <a:endParaRPr lang="en-US" sz="1400" b="1" dirty="0">
+              <a:solidFill>
+                <a:srgbClr val="F5F8FF"/>
+              </a:solidFill>
+              <a:latin typeface="Noto Sans CJK SC" pitchFamily="34" charset="0"/>
+              <a:ea typeface="Noto Sans CJK SC" pitchFamily="34" charset="-122"/>
+              <a:cs typeface="Noto Sans CJK SC" pitchFamily="34" charset="-120"/>
+            </a:endParaRPr>
           </a:p>
         </p:txBody>
       </p:sp>
@@ -11297,7 +11176,7 @@
               <a:buNone/>
             </a:pPr>
             <a:r>
-              <a:rPr lang="en-US" sz="960" b="1" dirty="0">
+              <a:rPr lang="en-US" sz="1200" b="1" dirty="0">
                 <a:solidFill>
                   <a:srgbClr val="F5F8FF"/>
                 </a:solidFill>
@@ -11307,14 +11186,14 @@
               </a:rPr>
               <a:t>ROUTER_MODEL</a:t>
             </a:r>
-            <a:endParaRPr lang="en-US" sz="960" dirty="0"/>
+            <a:endParaRPr lang="en-US" sz="1200" dirty="0"/>
           </a:p>
           <a:p>
             <a:pPr marL="0" indent="0" algn="ctr">
               <a:buNone/>
             </a:pPr>
             <a:r>
-              <a:rPr lang="en-US" sz="960" b="1" dirty="0">
+              <a:rPr lang="en-US" sz="1200" b="1" dirty="0">
                 <a:solidFill>
                   <a:srgbClr val="F5F8FF"/>
                 </a:solidFill>
@@ -11324,7 +11203,14 @@
               </a:rPr>
               <a:t>选 0/1 个 Agent</a:t>
             </a:r>
-            <a:endParaRPr lang="en-US" sz="960" dirty="0"/>
+            <a:endParaRPr lang="en-US" sz="1200" b="1" dirty="0">
+              <a:solidFill>
+                <a:srgbClr val="F5F8FF"/>
+              </a:solidFill>
+              <a:latin typeface="Noto Sans CJK SC" pitchFamily="34" charset="0"/>
+              <a:ea typeface="Noto Sans CJK SC" pitchFamily="34" charset="-122"/>
+              <a:cs typeface="Noto Sans CJK SC" pitchFamily="34" charset="-120"/>
+            </a:endParaRPr>
           </a:p>
         </p:txBody>
       </p:sp>
@@ -11363,7 +11249,7 @@
               <a:buNone/>
             </a:pPr>
             <a:r>
-              <a:rPr lang="en-US" sz="960" b="1" dirty="0">
+              <a:rPr lang="en-US" sz="1200" b="1" dirty="0">
                 <a:solidFill>
                   <a:srgbClr val="F5F8FF"/>
                 </a:solidFill>
@@ -11373,14 +11259,14 @@
               </a:rPr>
               <a:t>实时读取知识</a:t>
             </a:r>
-            <a:endParaRPr lang="en-US" sz="960" dirty="0"/>
+            <a:endParaRPr lang="en-US" sz="1200" dirty="0"/>
           </a:p>
           <a:p>
             <a:pPr marL="0" indent="0" algn="ctr">
               <a:buNone/>
             </a:pPr>
             <a:r>
-              <a:rPr lang="en-US" sz="960" b="1" dirty="0">
+              <a:rPr lang="en-US" sz="1200" b="1" dirty="0">
                 <a:solidFill>
                   <a:srgbClr val="F5F8FF"/>
                 </a:solidFill>
@@ -11390,7 +11276,14 @@
               </a:rPr>
               <a:t>行号 + 图片</a:t>
             </a:r>
-            <a:endParaRPr lang="en-US" sz="960" dirty="0"/>
+            <a:endParaRPr lang="en-US" sz="1200" b="1" dirty="0">
+              <a:solidFill>
+                <a:srgbClr val="F5F8FF"/>
+              </a:solidFill>
+              <a:latin typeface="Noto Sans CJK SC" pitchFamily="34" charset="0"/>
+              <a:ea typeface="Noto Sans CJK SC" pitchFamily="34" charset="-122"/>
+              <a:cs typeface="Noto Sans CJK SC" pitchFamily="34" charset="-120"/>
+            </a:endParaRPr>
           </a:p>
         </p:txBody>
       </p:sp>
@@ -11429,7 +11322,7 @@
               <a:buNone/>
             </a:pPr>
             <a:r>
-              <a:rPr lang="en-US" sz="960" b="1" dirty="0">
+              <a:rPr lang="en-US" sz="1200" b="1" dirty="0">
                 <a:solidFill>
                   <a:srgbClr val="F5F8FF"/>
                 </a:solidFill>
@@ -11439,14 +11332,14 @@
               </a:rPr>
               <a:t>ANSWER_MODEL</a:t>
             </a:r>
-            <a:endParaRPr lang="en-US" sz="960" dirty="0"/>
+            <a:endParaRPr lang="en-US" sz="1200" dirty="0"/>
           </a:p>
           <a:p>
             <a:pPr marL="0" indent="0" algn="ctr">
               <a:buNone/>
             </a:pPr>
             <a:r>
-              <a:rPr lang="en-US" sz="960" b="1" dirty="0">
+              <a:rPr lang="en-US" sz="1200" b="1" dirty="0">
                 <a:solidFill>
                   <a:srgbClr val="F5F8FF"/>
                 </a:solidFill>
@@ -11456,7 +11349,14 @@
               </a:rPr>
               <a:t>生成答案</a:t>
             </a:r>
-            <a:endParaRPr lang="en-US" sz="960" dirty="0"/>
+            <a:endParaRPr lang="en-US" sz="1200" b="1" dirty="0">
+              <a:solidFill>
+                <a:srgbClr val="F5F8FF"/>
+              </a:solidFill>
+              <a:latin typeface="Noto Sans CJK SC" pitchFamily="34" charset="0"/>
+              <a:ea typeface="Noto Sans CJK SC" pitchFamily="34" charset="-122"/>
+              <a:cs typeface="Noto Sans CJK SC" pitchFamily="34" charset="-120"/>
+            </a:endParaRPr>
           </a:p>
         </p:txBody>
       </p:sp>
@@ -11495,7 +11395,7 @@
               <a:buNone/>
             </a:pPr>
             <a:r>
-              <a:rPr lang="en-US" sz="960" b="1" dirty="0">
+              <a:rPr lang="en-US" sz="1200" b="1" dirty="0">
                 <a:solidFill>
                   <a:srgbClr val="F5F8FF"/>
                 </a:solidFill>
@@ -11505,14 +11405,14 @@
               </a:rPr>
               <a:t>前端展示</a:t>
             </a:r>
-            <a:endParaRPr lang="en-US" sz="960" dirty="0"/>
+            <a:endParaRPr lang="en-US" sz="1200" dirty="0"/>
           </a:p>
           <a:p>
             <a:pPr marL="0" indent="0" algn="ctr">
               <a:buNone/>
             </a:pPr>
             <a:r>
-              <a:rPr lang="en-US" sz="960" b="1" dirty="0">
+              <a:rPr lang="en-US" sz="1200" b="1" dirty="0">
                 <a:solidFill>
                   <a:srgbClr val="F5F8FF"/>
                 </a:solidFill>
@@ -11522,7 +11422,14 @@
               </a:rPr>
               <a:t>答案/引用/日志</a:t>
             </a:r>
-            <a:endParaRPr lang="en-US" sz="960" dirty="0"/>
+            <a:endParaRPr lang="en-US" sz="1200" b="1" dirty="0">
+              <a:solidFill>
+                <a:srgbClr val="F5F8FF"/>
+              </a:solidFill>
+              <a:latin typeface="Noto Sans CJK SC" pitchFamily="34" charset="0"/>
+              <a:ea typeface="Noto Sans CJK SC" pitchFamily="34" charset="-122"/>
+              <a:cs typeface="Noto Sans CJK SC" pitchFamily="34" charset="-120"/>
+            </a:endParaRPr>
           </a:p>
         </p:txBody>
       </p:sp>
@@ -11561,7 +11468,7 @@
               <a:buNone/>
             </a:pPr>
             <a:r>
-              <a:rPr lang="en-US" sz="960" b="1" dirty="0">
+              <a:rPr lang="en-US" sz="1200" b="1" dirty="0">
                 <a:solidFill>
                   <a:srgbClr val="F5F8FF"/>
                 </a:solidFill>
@@ -11571,14 +11478,14 @@
               </a:rPr>
               <a:t>无法匹配</a:t>
             </a:r>
-            <a:endParaRPr lang="en-US" sz="960" dirty="0"/>
+            <a:endParaRPr lang="en-US" sz="1200" dirty="0"/>
           </a:p>
           <a:p>
             <a:pPr marL="0" indent="0" algn="ctr">
               <a:buNone/>
             </a:pPr>
             <a:r>
-              <a:rPr lang="en-US" sz="960" b="1" dirty="0">
+              <a:rPr lang="en-US" sz="1200" b="1" dirty="0">
                 <a:solidFill>
                   <a:srgbClr val="F5F8FF"/>
                 </a:solidFill>
@@ -11588,7 +11495,14 @@
               </a:rPr>
               <a:t>need_clarification</a:t>
             </a:r>
-            <a:endParaRPr lang="en-US" sz="960" dirty="0"/>
+            <a:endParaRPr lang="en-US" sz="1200" b="1" dirty="0">
+              <a:solidFill>
+                <a:srgbClr val="F5F8FF"/>
+              </a:solidFill>
+              <a:latin typeface="Noto Sans CJK SC" pitchFamily="34" charset="0"/>
+              <a:ea typeface="Noto Sans CJK SC" pitchFamily="34" charset="-122"/>
+              <a:cs typeface="Noto Sans CJK SC" pitchFamily="34" charset="-120"/>
+            </a:endParaRPr>
           </a:p>
         </p:txBody>
       </p:sp>
@@ -11720,8 +11634,8 @@
         </p:nvSpPr>
         <p:spPr>
           <a:xfrm>
-            <a:off x="332740" y="5501005"/>
-            <a:ext cx="4232275" cy="901700"/>
+            <a:off x="412115" y="3796665"/>
+            <a:ext cx="4232275" cy="1875790"/>
           </a:xfrm>
           <a:prstGeom prst="rect">
             <a:avLst/>
@@ -11738,7 +11652,7 @@
               <a:buNone/>
             </a:pPr>
             <a:r>
-              <a:rPr lang="en-US" sz="1250" dirty="0">
+              <a:rPr lang="en-US" sz="1600" dirty="0">
                 <a:solidFill>
                   <a:srgbClr val="F5F8FF"/>
                 </a:solidFill>
@@ -11748,14 +11662,14 @@
               </a:rPr>
               <a:t>• 初始化只在知识更新、Agent 新增或刷新时执行。</a:t>
             </a:r>
-            <a:endParaRPr lang="en-US" sz="1250" dirty="0"/>
+            <a:endParaRPr lang="en-US" sz="1600" dirty="0"/>
           </a:p>
           <a:p>
             <a:pPr marL="0" indent="0">
               <a:buNone/>
             </a:pPr>
             <a:r>
-              <a:rPr lang="en-US" sz="1250" dirty="0">
+              <a:rPr lang="en-US" sz="1600" dirty="0">
                 <a:solidFill>
                   <a:srgbClr val="F5F8FF"/>
                 </a:solidFill>
@@ -11765,14 +11679,14 @@
               </a:rPr>
               <a:t>• 问答阶段不长期缓存大文本，按当前文件重新构造上下文。</a:t>
             </a:r>
-            <a:endParaRPr lang="en-US" sz="1250" dirty="0"/>
+            <a:endParaRPr lang="en-US" sz="1600" dirty="0"/>
           </a:p>
           <a:p>
             <a:pPr marL="0" indent="0">
               <a:buNone/>
             </a:pPr>
             <a:r>
-              <a:rPr lang="en-US" sz="1250" dirty="0">
+              <a:rPr lang="en-US" sz="1600" dirty="0">
                 <a:solidFill>
                   <a:srgbClr val="F5F8FF"/>
                 </a:solidFill>
@@ -11782,7 +11696,14 @@
               </a:rPr>
               <a:t>• 如果 route_questions 没有可匹配项，直接返回澄清问题，避免错误调用。</a:t>
             </a:r>
-            <a:endParaRPr lang="en-US" sz="1250" dirty="0"/>
+            <a:endParaRPr lang="en-US" sz="1600" dirty="0">
+              <a:solidFill>
+                <a:srgbClr val="F5F8FF"/>
+              </a:solidFill>
+              <a:latin typeface="Noto Sans CJK SC" pitchFamily="34" charset="0"/>
+              <a:ea typeface="Noto Sans CJK SC" pitchFamily="34" charset="-122"/>
+              <a:cs typeface="Noto Sans CJK SC" pitchFamily="34" charset="-120"/>
+            </a:endParaRPr>
           </a:p>
         </p:txBody>
       </p:sp>
@@ -11802,8 +11723,8 @@
         </p:blipFill>
         <p:spPr>
           <a:xfrm>
-            <a:off x="4993005" y="3571875"/>
-            <a:ext cx="2834005" cy="3204845"/>
+            <a:off x="4993005" y="3601085"/>
+            <a:ext cx="2807970" cy="3175635"/>
           </a:xfrm>
           <a:prstGeom prst="rect">
             <a:avLst/>
@@ -11997,46 +11918,6 @@
       </p:sp>
       <p:sp>
         <p:nvSpPr>
-          <p:cNvPr id="4" name="Text 2"/>
-          <p:cNvSpPr/>
-          <p:nvPr/>
-        </p:nvSpPr>
-        <p:spPr>
-          <a:xfrm>
-            <a:off x="530352" y="850392"/>
-            <a:ext cx="8869680" cy="274320"/>
-          </a:xfrm>
-          <a:prstGeom prst="rect">
-            <a:avLst/>
-          </a:prstGeom>
-          <a:noFill/>
-        </p:spPr>
-        <p:txBody>
-          <a:bodyPr wrap="square" lIns="0" tIns="0" rIns="0" bIns="0" rtlCol="0" anchor="ctr">
-            <a:normAutofit/>
-          </a:bodyPr>
-          <a:lstStyle/>
-          <a:p>
-            <a:pPr marL="0" indent="0">
-              <a:buNone/>
-            </a:pPr>
-            <a:r>
-              <a:rPr lang="en-US" sz="950" dirty="0">
-                <a:solidFill>
-                  <a:srgbClr val="AAB6D3"/>
-                </a:solidFill>
-                <a:latin typeface="Noto Sans CJK SC" pitchFamily="34" charset="0"/>
-                <a:ea typeface="Noto Sans CJK SC" pitchFamily="34" charset="-122"/>
-                <a:cs typeface="Noto Sans CJK SC" pitchFamily="34" charset="-120"/>
-              </a:rPr>
-              <a:t>项目通过 ROUTER_MODEL、INIT_MODEL、ANSWER_MODEL 降低单一提示词的职责复杂度</a:t>
-            </a:r>
-            <a:endParaRPr lang="en-US" sz="950" dirty="0"/>
-          </a:p>
-        </p:txBody>
-      </p:sp>
-      <p:sp>
-        <p:nvSpPr>
           <p:cNvPr id="5" name="Text 3"/>
           <p:cNvSpPr/>
           <p:nvPr/>
@@ -12147,7 +12028,7 @@
         </p:nvSpPr>
         <p:spPr>
           <a:xfrm>
-            <a:off x="777240" y="2030095"/>
+            <a:off x="434340" y="1778000"/>
             <a:ext cx="2606040" cy="1508760"/>
           </a:xfrm>
           <a:prstGeom prst="rect">
@@ -12157,7 +12038,7 @@
         </p:spPr>
         <p:txBody>
           <a:bodyPr wrap="square" lIns="635" tIns="635" rIns="635" bIns="635" rtlCol="0" anchor="t">
-            <a:normAutofit/>
+            <a:noAutofit/>
           </a:bodyPr>
           <a:lstStyle/>
           <a:p>
@@ -12165,7 +12046,7 @@
               <a:buNone/>
             </a:pPr>
             <a:r>
-              <a:rPr lang="en-US" sz="1200" dirty="0">
+              <a:rPr lang="en-US" sz="1400" dirty="0">
                 <a:solidFill>
                   <a:srgbClr val="F5F8FF"/>
                 </a:solidFill>
@@ -12175,14 +12056,14 @@
               </a:rPr>
               <a:t>输入：knowledge.md / 原始文件内容</a:t>
             </a:r>
-            <a:endParaRPr lang="en-US" sz="1200" dirty="0"/>
+            <a:endParaRPr lang="en-US" sz="1400" dirty="0"/>
           </a:p>
           <a:p>
             <a:pPr marL="0" indent="0">
               <a:buNone/>
             </a:pPr>
             <a:r>
-              <a:rPr lang="en-US" sz="1200" dirty="0">
+              <a:rPr lang="en-US" sz="1400" dirty="0">
                 <a:solidFill>
                   <a:srgbClr val="F5F8FF"/>
                 </a:solidFill>
@@ -12192,24 +12073,42 @@
               </a:rPr>
               <a:t>输出：route_questions、file_summaries</a:t>
             </a:r>
-            <a:endParaRPr lang="en-US" sz="1200" dirty="0"/>
+            <a:endParaRPr lang="en-US" sz="1400" dirty="0"/>
           </a:p>
           <a:p>
             <a:pPr marL="0" indent="0">
               <a:buNone/>
             </a:pPr>
             <a:r>
-              <a:rPr lang="en-US" sz="1200" dirty="0">
-                <a:solidFill>
-                  <a:srgbClr val="F5F8FF"/>
-                </a:solidFill>
-                <a:latin typeface="Noto Sans CJK SC" pitchFamily="34" charset="0"/>
-                <a:ea typeface="Noto Sans CJK SC" pitchFamily="34" charset="-122"/>
-                <a:cs typeface="Noto Sans CJK SC" pitchFamily="34" charset="-120"/>
-              </a:rPr>
-              <a:t>价值：让每个 Agent 变成可被路由的知识单元。</a:t>
-            </a:r>
-            <a:endParaRPr lang="en-US" sz="1200" dirty="0"/>
+              <a:rPr lang="zh-CN" altLang="en-US" sz="1400" dirty="0">
+                <a:solidFill>
+                  <a:srgbClr val="F5F8FF"/>
+                </a:solidFill>
+                <a:latin typeface="Noto Sans CJK SC" pitchFamily="34" charset="0"/>
+                <a:ea typeface="Noto Sans CJK SC" pitchFamily="34" charset="-122"/>
+                <a:cs typeface="Noto Sans CJK SC" pitchFamily="34" charset="-120"/>
+              </a:rPr>
+              <a:t>职责</a:t>
+            </a:r>
+            <a:r>
+              <a:rPr lang="en-US" sz="1400" dirty="0">
+                <a:solidFill>
+                  <a:srgbClr val="F5F8FF"/>
+                </a:solidFill>
+                <a:latin typeface="Noto Sans CJK SC" pitchFamily="34" charset="0"/>
+                <a:ea typeface="Noto Sans CJK SC" pitchFamily="34" charset="-122"/>
+                <a:cs typeface="Noto Sans CJK SC" pitchFamily="34" charset="-120"/>
+              </a:rPr>
+              <a:t>：让每个 Agent 变成可被路由的知识单元。</a:t>
+            </a:r>
+            <a:endParaRPr lang="en-US" sz="1400" dirty="0">
+              <a:solidFill>
+                <a:srgbClr val="F5F8FF"/>
+              </a:solidFill>
+              <a:latin typeface="Noto Sans CJK SC" pitchFamily="34" charset="0"/>
+              <a:ea typeface="Noto Sans CJK SC" pitchFamily="34" charset="-122"/>
+              <a:cs typeface="Noto Sans CJK SC" pitchFamily="34" charset="-120"/>
+            </a:endParaRPr>
           </a:p>
         </p:txBody>
       </p:sp>
@@ -12287,7 +12186,7 @@
         </p:nvSpPr>
         <p:spPr>
           <a:xfrm>
-            <a:off x="5120640" y="2030095"/>
+            <a:off x="4812030" y="1778000"/>
             <a:ext cx="2606040" cy="1508760"/>
           </a:xfrm>
           <a:prstGeom prst="rect">
@@ -12305,7 +12204,7 @@
               <a:buNone/>
             </a:pPr>
             <a:r>
-              <a:rPr lang="en-US" sz="1200" dirty="0">
+              <a:rPr lang="en-US" sz="1400" dirty="0">
                 <a:solidFill>
                   <a:srgbClr val="F5F8FF"/>
                 </a:solidFill>
@@ -12315,14 +12214,14 @@
               </a:rPr>
               <a:t>输入：用户问题 + 候选 Agent 列表 + route_questions</a:t>
             </a:r>
-            <a:endParaRPr lang="en-US" sz="1200" dirty="0"/>
+            <a:endParaRPr lang="en-US" sz="1400" dirty="0"/>
           </a:p>
           <a:p>
             <a:pPr marL="0" indent="0">
               <a:buNone/>
             </a:pPr>
             <a:r>
-              <a:rPr lang="en-US" sz="1200" dirty="0">
+              <a:rPr lang="en-US" sz="1400" dirty="0">
                 <a:solidFill>
                   <a:srgbClr val="F5F8FF"/>
                 </a:solidFill>
@@ -12332,24 +12231,42 @@
               </a:rPr>
               <a:t>输出：target_agents 或 need_clarification</a:t>
             </a:r>
-            <a:endParaRPr lang="en-US" sz="1200" dirty="0"/>
+            <a:endParaRPr lang="en-US" sz="1400" dirty="0"/>
           </a:p>
           <a:p>
             <a:pPr marL="0" indent="0">
               <a:buNone/>
             </a:pPr>
             <a:r>
-              <a:rPr lang="en-US" sz="1200" dirty="0">
-                <a:solidFill>
-                  <a:srgbClr val="F5F8FF"/>
-                </a:solidFill>
-                <a:latin typeface="Noto Sans CJK SC" pitchFamily="34" charset="0"/>
-                <a:ea typeface="Noto Sans CJK SC" pitchFamily="34" charset="-122"/>
-                <a:cs typeface="Noto Sans CJK SC" pitchFamily="34" charset="-120"/>
-              </a:rPr>
-              <a:t>价值：只决定“问谁”，不负责答题。</a:t>
-            </a:r>
-            <a:endParaRPr lang="en-US" sz="1200" dirty="0"/>
+              <a:rPr lang="zh-CN" altLang="en-US" sz="1400" dirty="0">
+                <a:solidFill>
+                  <a:srgbClr val="F5F8FF"/>
+                </a:solidFill>
+                <a:latin typeface="Noto Sans CJK SC" pitchFamily="34" charset="0"/>
+                <a:ea typeface="Noto Sans CJK SC" pitchFamily="34" charset="-122"/>
+                <a:cs typeface="Noto Sans CJK SC" pitchFamily="34" charset="-120"/>
+              </a:rPr>
+              <a:t>职责</a:t>
+            </a:r>
+            <a:r>
+              <a:rPr lang="en-US" sz="1400" dirty="0">
+                <a:solidFill>
+                  <a:srgbClr val="F5F8FF"/>
+                </a:solidFill>
+                <a:latin typeface="Noto Sans CJK SC" pitchFamily="34" charset="0"/>
+                <a:ea typeface="Noto Sans CJK SC" pitchFamily="34" charset="-122"/>
+                <a:cs typeface="Noto Sans CJK SC" pitchFamily="34" charset="-120"/>
+              </a:rPr>
+              <a:t>：只决定“问谁”，不负责答题。</a:t>
+            </a:r>
+            <a:endParaRPr lang="en-US" sz="1400" dirty="0">
+              <a:solidFill>
+                <a:srgbClr val="F5F8FF"/>
+              </a:solidFill>
+              <a:latin typeface="Noto Sans CJK SC" pitchFamily="34" charset="0"/>
+              <a:ea typeface="Noto Sans CJK SC" pitchFamily="34" charset="-122"/>
+              <a:cs typeface="Noto Sans CJK SC" pitchFamily="34" charset="-120"/>
+            </a:endParaRPr>
           </a:p>
         </p:txBody>
       </p:sp>
@@ -12427,7 +12344,7 @@
         </p:nvSpPr>
         <p:spPr>
           <a:xfrm>
-            <a:off x="9189720" y="2030095"/>
+            <a:off x="9050655" y="1778000"/>
             <a:ext cx="2423160" cy="1508760"/>
           </a:xfrm>
           <a:prstGeom prst="rect">
@@ -12445,7 +12362,7 @@
               <a:buNone/>
             </a:pPr>
             <a:r>
-              <a:rPr lang="en-US" sz="1200" dirty="0">
+              <a:rPr lang="en-US" sz="1400" dirty="0">
                 <a:solidFill>
                   <a:srgbClr val="F5F8FF"/>
                 </a:solidFill>
@@ -12455,14 +12372,14 @@
               </a:rPr>
               <a:t>输入：被选 Agent 的原文、行号与图片</a:t>
             </a:r>
-            <a:endParaRPr lang="en-US" sz="1200" dirty="0"/>
+            <a:endParaRPr lang="en-US" sz="1400" dirty="0"/>
           </a:p>
           <a:p>
             <a:pPr marL="0" indent="0">
               <a:buNone/>
             </a:pPr>
             <a:r>
-              <a:rPr lang="en-US" sz="1200" dirty="0">
+              <a:rPr lang="en-US" sz="1400" dirty="0">
                 <a:solidFill>
                   <a:srgbClr val="F5F8FF"/>
                 </a:solidFill>
@@ -12472,24 +12389,43 @@
               </a:rPr>
               <a:t>输出：回答正文、引用、相关图片</a:t>
             </a:r>
-            <a:endParaRPr lang="en-US" sz="1200" dirty="0"/>
+            <a:endParaRPr lang="en-US" sz="1400" dirty="0"/>
           </a:p>
           <a:p>
             <a:pPr marL="0" indent="0">
               <a:buNone/>
             </a:pPr>
             <a:r>
-              <a:rPr lang="en-US" sz="1200" dirty="0">
-                <a:solidFill>
-                  <a:srgbClr val="F5F8FF"/>
-                </a:solidFill>
-                <a:latin typeface="Noto Sans CJK SC" pitchFamily="34" charset="0"/>
-                <a:ea typeface="Noto Sans CJK SC" pitchFamily="34" charset="-122"/>
-                <a:cs typeface="Noto Sans CJK SC" pitchFamily="34" charset="-120"/>
-              </a:rPr>
-              <a:t>价值：聚焦“依据原文准确回答”。</a:t>
-            </a:r>
-            <a:endParaRPr lang="en-US" sz="1200" dirty="0"/>
+              <a:rPr lang="zh-CN" altLang="en-US" sz="1400" dirty="0">
+                <a:solidFill>
+                  <a:srgbClr val="F5F8FF"/>
+                </a:solidFill>
+                <a:latin typeface="Noto Sans CJK SC" pitchFamily="34" charset="0"/>
+                <a:ea typeface="Noto Sans CJK SC" pitchFamily="34" charset="-122"/>
+                <a:cs typeface="Noto Sans CJK SC" pitchFamily="34" charset="-120"/>
+                <a:sym typeface="+mn-ea"/>
+              </a:rPr>
+              <a:t>职责</a:t>
+            </a:r>
+            <a:r>
+              <a:rPr lang="en-US" sz="1400" dirty="0">
+                <a:solidFill>
+                  <a:srgbClr val="F5F8FF"/>
+                </a:solidFill>
+                <a:latin typeface="Noto Sans CJK SC" pitchFamily="34" charset="0"/>
+                <a:ea typeface="Noto Sans CJK SC" pitchFamily="34" charset="-122"/>
+                <a:cs typeface="Noto Sans CJK SC" pitchFamily="34" charset="-120"/>
+              </a:rPr>
+              <a:t>：聚焦“依据原文准确回答”。</a:t>
+            </a:r>
+            <a:endParaRPr lang="en-US" sz="1400" dirty="0">
+              <a:solidFill>
+                <a:srgbClr val="F5F8FF"/>
+              </a:solidFill>
+              <a:latin typeface="Noto Sans CJK SC" pitchFamily="34" charset="0"/>
+              <a:ea typeface="Noto Sans CJK SC" pitchFamily="34" charset="-122"/>
+              <a:cs typeface="Noto Sans CJK SC" pitchFamily="34" charset="-120"/>
+            </a:endParaRPr>
           </a:p>
         </p:txBody>
       </p:sp>
@@ -12558,8 +12494,8 @@
         </p:blipFill>
         <p:spPr>
           <a:xfrm>
-            <a:off x="605790" y="3144520"/>
-            <a:ext cx="3731260" cy="3298825"/>
+            <a:off x="168275" y="3144520"/>
+            <a:ext cx="4168775" cy="3685540"/>
           </a:xfrm>
           <a:prstGeom prst="rect">
             <a:avLst/>
@@ -12583,8 +12519,8 @@
         </p:blipFill>
         <p:spPr>
           <a:xfrm>
-            <a:off x="7498080" y="3559175"/>
-            <a:ext cx="4553585" cy="2469515"/>
+            <a:off x="6924675" y="3559175"/>
+            <a:ext cx="5126990" cy="2780665"/>
           </a:xfrm>
           <a:prstGeom prst="rect">
             <a:avLst/>
@@ -12599,7 +12535,7 @@
         </p:nvSpPr>
         <p:spPr>
           <a:xfrm>
-            <a:off x="868680" y="5742432"/>
+            <a:off x="777240" y="6492367"/>
             <a:ext cx="10195560" cy="256032"/>
           </a:xfrm>
           <a:prstGeom prst="rect">
@@ -12628,44 +12564,6 @@
               <a:t>左：总 Agent 路由提示词；右：子 Agent 回答约束提示词</a:t>
             </a:r>
             <a:endParaRPr lang="en-US" sz="850" dirty="0"/>
-          </a:p>
-        </p:txBody>
-      </p:sp>
-      <p:sp>
-        <p:nvSpPr>
-          <p:cNvPr id="17" name="Text 13"/>
-          <p:cNvSpPr/>
-          <p:nvPr/>
-        </p:nvSpPr>
-        <p:spPr>
-          <a:xfrm>
-            <a:off x="502920" y="6492367"/>
-            <a:ext cx="10881360" cy="210312"/>
-          </a:xfrm>
-          <a:prstGeom prst="rect">
-            <a:avLst/>
-          </a:prstGeom>
-          <a:noFill/>
-        </p:spPr>
-        <p:txBody>
-          <a:bodyPr wrap="square" lIns="0" tIns="0" rIns="0" bIns="0" rtlCol="0" anchor="ctr"/>
-          <a:lstStyle/>
-          <a:p>
-            <a:pPr marL="0" indent="0">
-              <a:buNone/>
-            </a:pPr>
-            <a:r>
-              <a:rPr lang="en-US" sz="730" dirty="0">
-                <a:solidFill>
-                  <a:srgbClr val="64748B"/>
-                </a:solidFill>
-                <a:latin typeface="Noto Sans CJK SC" pitchFamily="34" charset="0"/>
-                <a:ea typeface="Noto Sans CJK SC" pitchFamily="34" charset="-122"/>
-                <a:cs typeface="Noto Sans CJK SC" pitchFamily="34" charset="-120"/>
-              </a:rPr>
-              <a:t>README 中列明三模型分工：ROUTER_MODEL 用于语义路由，INIT_MODEL 用于初始化生成路由问题与摘要，ANSWER_MODEL 用于基于知识内容回答。</a:t>
-            </a:r>
-            <a:endParaRPr lang="en-US" sz="730" dirty="0"/>
           </a:p>
         </p:txBody>
       </p:sp>
@@ -12748,7 +12646,7 @@
         </p:nvSpPr>
         <p:spPr>
           <a:xfrm>
-            <a:off x="0" y="0"/>
+            <a:off x="40005" y="0"/>
             <a:ext cx="12191695" cy="6858000"/>
           </a:xfrm>
           <a:prstGeom prst="rect">
@@ -12809,46 +12707,6 @@
       </p:sp>
       <p:sp>
         <p:nvSpPr>
-          <p:cNvPr id="4" name="Text 2"/>
-          <p:cNvSpPr/>
-          <p:nvPr/>
-        </p:nvSpPr>
-        <p:spPr>
-          <a:xfrm>
-            <a:off x="530352" y="850392"/>
-            <a:ext cx="8869680" cy="274320"/>
-          </a:xfrm>
-          <a:prstGeom prst="rect">
-            <a:avLst/>
-          </a:prstGeom>
-          <a:noFill/>
-        </p:spPr>
-        <p:txBody>
-          <a:bodyPr wrap="square" lIns="0" tIns="0" rIns="0" bIns="0" rtlCol="0" anchor="ctr">
-            <a:normAutofit/>
-          </a:bodyPr>
-          <a:lstStyle/>
-          <a:p>
-            <a:pPr marL="0" indent="0">
-              <a:buNone/>
-            </a:pPr>
-            <a:r>
-              <a:rPr lang="en-US" sz="950" dirty="0">
-                <a:solidFill>
-                  <a:srgbClr val="AAB6D3"/>
-                </a:solidFill>
-                <a:latin typeface="Noto Sans CJK SC" pitchFamily="34" charset="0"/>
-                <a:ea typeface="Noto Sans CJK SC" pitchFamily="34" charset="-122"/>
-                <a:cs typeface="Noto Sans CJK SC" pitchFamily="34" charset="-120"/>
-              </a:rPr>
-              <a:t>本地文件既是知识来源，也是前端预览与引用定位的基础</a:t>
-            </a:r>
-            <a:endParaRPr lang="en-US" sz="950" dirty="0"/>
-          </a:p>
-        </p:txBody>
-      </p:sp>
-      <p:sp>
-        <p:nvSpPr>
           <p:cNvPr id="5" name="Text 3"/>
           <p:cNvSpPr/>
           <p:nvPr/>
@@ -12893,7 +12751,7 @@
         </p:nvSpPr>
         <p:spPr>
           <a:xfrm>
-            <a:off x="822960" y="1188720"/>
+            <a:off x="799465" y="4170680"/>
             <a:ext cx="1965960" cy="530352"/>
           </a:xfrm>
           <a:prstGeom prst="rect">
@@ -12942,7 +12800,7 @@
         </p:nvSpPr>
         <p:spPr>
           <a:xfrm>
-            <a:off x="822960" y="2029968"/>
+            <a:off x="799465" y="5011928"/>
             <a:ext cx="1965960" cy="530352"/>
           </a:xfrm>
           <a:prstGeom prst="rect">
@@ -12991,7 +12849,7 @@
         </p:nvSpPr>
         <p:spPr>
           <a:xfrm>
-            <a:off x="3337560" y="2029968"/>
+            <a:off x="3314065" y="4291838"/>
             <a:ext cx="1783080" cy="530352"/>
           </a:xfrm>
           <a:prstGeom prst="rect">
@@ -13040,7 +12898,7 @@
         </p:nvSpPr>
         <p:spPr>
           <a:xfrm>
-            <a:off x="3337560" y="2788920"/>
+            <a:off x="3314065" y="5050790"/>
             <a:ext cx="1783080" cy="530352"/>
           </a:xfrm>
           <a:prstGeom prst="rect">
@@ -13089,7 +12947,7 @@
         </p:nvSpPr>
         <p:spPr>
           <a:xfrm>
-            <a:off x="822960" y="3703320"/>
+            <a:off x="799465" y="5812790"/>
             <a:ext cx="1965960" cy="530352"/>
           </a:xfrm>
           <a:prstGeom prst="rect">
@@ -13137,9 +12995,9 @@
           <p:nvPr/>
         </p:nvSpPr>
         <p:spPr>
-          <a:xfrm>
-            <a:off x="2788920" y="2295144"/>
-            <a:ext cx="475488" cy="0"/>
+          <a:xfrm flipV="1">
+            <a:off x="2741930" y="4576445"/>
+            <a:ext cx="580390" cy="739775"/>
           </a:xfrm>
           <a:prstGeom prst="line">
             <a:avLst/>
@@ -13161,9 +13019,9 @@
           <p:nvPr/>
         </p:nvSpPr>
         <p:spPr>
-          <a:xfrm>
-            <a:off x="2788920" y="2295144"/>
-            <a:ext cx="475488" cy="758952"/>
+          <a:xfrm flipV="1">
+            <a:off x="2765425" y="5315585"/>
+            <a:ext cx="549910" cy="635"/>
           </a:xfrm>
           <a:prstGeom prst="line">
             <a:avLst/>
@@ -13186,7 +13044,7 @@
         </p:nvSpPr>
         <p:spPr>
           <a:xfrm>
-            <a:off x="5715000" y="822960"/>
+            <a:off x="640080" y="1174750"/>
             <a:ext cx="5303520" cy="1645920"/>
           </a:xfrm>
           <a:prstGeom prst="rect">
@@ -13204,7 +13062,7 @@
               <a:buNone/>
             </a:pPr>
             <a:r>
-              <a:rPr lang="en-US" sz="1250" dirty="0">
+              <a:rPr lang="en-US" sz="1600" dirty="0">
                 <a:solidFill>
                   <a:srgbClr val="F5F8FF"/>
                 </a:solidFill>
@@ -13214,31 +13072,53 @@
               </a:rPr>
               <a:t>• Agent 配置：id、名称、状态、route_questions、file_summaries、补充提示词。</a:t>
             </a:r>
-            <a:endParaRPr lang="en-US" sz="1250" dirty="0"/>
+            <a:endParaRPr lang="en-US" sz="1600" dirty="0"/>
           </a:p>
           <a:p>
             <a:pPr marL="0" indent="0">
               <a:buNone/>
             </a:pPr>
             <a:r>
-              <a:rPr lang="en-US" sz="1250" dirty="0">
-                <a:solidFill>
-                  <a:srgbClr val="F5F8FF"/>
-                </a:solidFill>
-                <a:latin typeface="Noto Sans CJK SC" pitchFamily="34" charset="0"/>
-                <a:ea typeface="Noto Sans CJK SC" pitchFamily="34" charset="-122"/>
-                <a:cs typeface="Noto Sans CJK SC" pitchFamily="34" charset="-120"/>
-              </a:rPr>
-              <a:t>• 知识文件：优先使用 Markdown，可引用 assets 中的图片；也可上传 PDF、DOCX、XLSX 等。</a:t>
-            </a:r>
-            <a:endParaRPr lang="en-US" sz="1250" dirty="0"/>
+              <a:rPr lang="en-US" sz="1600" dirty="0">
+                <a:solidFill>
+                  <a:srgbClr val="F5F8FF"/>
+                </a:solidFill>
+                <a:latin typeface="Noto Sans CJK SC" pitchFamily="34" charset="0"/>
+                <a:ea typeface="Noto Sans CJK SC" pitchFamily="34" charset="-122"/>
+                <a:cs typeface="Noto Sans CJK SC" pitchFamily="34" charset="-120"/>
+              </a:rPr>
+              <a:t>• 知识文件：优先使用 Markdown，可引用 assets </a:t>
+            </a:r>
+            <a:r>
+              <a:rPr lang="zh-CN" altLang="en-US" sz="1600" dirty="0">
+                <a:solidFill>
+                  <a:srgbClr val="F5F8FF"/>
+                </a:solidFill>
+                <a:latin typeface="Noto Sans CJK SC" pitchFamily="34" charset="0"/>
+                <a:ea typeface="Noto Sans CJK SC" pitchFamily="34" charset="-122"/>
+                <a:cs typeface="Noto Sans CJK SC" pitchFamily="34" charset="-120"/>
+              </a:rPr>
+              <a:t>文件夹</a:t>
+            </a:r>
+            <a:r>
+              <a:rPr lang="en-US" sz="1600" dirty="0">
+                <a:solidFill>
+                  <a:srgbClr val="F5F8FF"/>
+                </a:solidFill>
+                <a:latin typeface="Noto Sans CJK SC" pitchFamily="34" charset="0"/>
+                <a:ea typeface="Noto Sans CJK SC" pitchFamily="34" charset="-122"/>
+                <a:cs typeface="Noto Sans CJK SC" pitchFamily="34" charset="-120"/>
+              </a:rPr>
+              <a:t>中的图片；也可上传 PDF、DOCX、XLSX 等。</a:t>
+            </a:r>
+            <a:endParaRPr lang="en-US" sz="1600" dirty="0"/>
           </a:p>
           <a:p>
             <a:pPr marL="0" indent="0">
               <a:buNone/>
             </a:pPr>
             <a:r>
-              <a:rPr lang="en-US" sz="1250" dirty="0">
+              <a:rPr lang="en-US" sz="1600" dirty="0">
                 <a:solidFill>
                   <a:srgbClr val="F5F8FF"/>
                 </a:solidFill>
@@ -13248,7 +13128,14 @@
               </a:rPr>
               <a:t>• 测试文件：批量用例独立保存，便于反复运行、统计准确率、定位回归问题。</a:t>
             </a:r>
-            <a:endParaRPr lang="en-US" sz="1250" dirty="0"/>
+            <a:endParaRPr lang="en-US" sz="1600" dirty="0">
+              <a:solidFill>
+                <a:srgbClr val="F5F8FF"/>
+              </a:solidFill>
+              <a:latin typeface="Noto Sans CJK SC" pitchFamily="34" charset="0"/>
+              <a:ea typeface="Noto Sans CJK SC" pitchFamily="34" charset="-122"/>
+              <a:cs typeface="Noto Sans CJK SC" pitchFamily="34" charset="-120"/>
+            </a:endParaRPr>
           </a:p>
         </p:txBody>
       </p:sp>
@@ -13268,8 +13155,8 @@
         </p:blipFill>
         <p:spPr>
           <a:xfrm>
-            <a:off x="7045960" y="1951355"/>
-            <a:ext cx="3580130" cy="4034155"/>
+            <a:off x="6483985" y="1073150"/>
+            <a:ext cx="4447540" cy="5011420"/>
           </a:xfrm>
           <a:prstGeom prst="rect">
             <a:avLst/>
@@ -13284,7 +13171,7 @@
         </p:nvSpPr>
         <p:spPr>
           <a:xfrm>
-            <a:off x="6217920" y="6110478"/>
+            <a:off x="6217920" y="6236208"/>
             <a:ext cx="5074920" cy="256032"/>
           </a:xfrm>
           <a:prstGeom prst="rect">
@@ -13320,44 +13207,6 @@
               <a:ea typeface="Noto Sans CJK SC" pitchFamily="34" charset="-122"/>
               <a:cs typeface="Noto Sans CJK SC" pitchFamily="34" charset="-120"/>
             </a:endParaRPr>
-          </a:p>
-        </p:txBody>
-      </p:sp>
-      <p:sp>
-        <p:nvSpPr>
-          <p:cNvPr id="16" name="Text 13"/>
-          <p:cNvSpPr/>
-          <p:nvPr/>
-        </p:nvSpPr>
-        <p:spPr>
-          <a:xfrm>
-            <a:off x="502920" y="6199632"/>
-            <a:ext cx="10881360" cy="210312"/>
-          </a:xfrm>
-          <a:prstGeom prst="rect">
-            <a:avLst/>
-          </a:prstGeom>
-          <a:noFill/>
-        </p:spPr>
-        <p:txBody>
-          <a:bodyPr wrap="square" lIns="0" tIns="0" rIns="0" bIns="0" rtlCol="0" anchor="ctr"/>
-          <a:lstStyle/>
-          <a:p>
-            <a:pPr marL="0" indent="0">
-              <a:buNone/>
-            </a:pPr>
-            <a:r>
-              <a:rPr lang="en-US" sz="730" dirty="0">
-                <a:solidFill>
-                  <a:srgbClr val="64748B"/>
-                </a:solidFill>
-                <a:latin typeface="Noto Sans CJK SC" pitchFamily="34" charset="0"/>
-                <a:ea typeface="Noto Sans CJK SC" pitchFamily="34" charset="-122"/>
-                <a:cs typeface="Noto Sans CJK SC" pitchFamily="34" charset="-120"/>
-              </a:rPr>
-              <a:t>README 建议每个 Agent 目录放置 knowledge.md 和 assets 插图，并支持 .txt、.md、.json、.csv、.pdf、.docx、.xlsx 等文件类型。</a:t>
-            </a:r>
-            <a:endParaRPr lang="en-US" sz="730" dirty="0"/>
           </a:p>
         </p:txBody>
       </p:sp>
@@ -13501,46 +13350,6 @@
       </p:sp>
       <p:sp>
         <p:nvSpPr>
-          <p:cNvPr id="4" name="Text 2"/>
-          <p:cNvSpPr/>
-          <p:nvPr/>
-        </p:nvSpPr>
-        <p:spPr>
-          <a:xfrm>
-            <a:off x="530352" y="850392"/>
-            <a:ext cx="8869680" cy="274320"/>
-          </a:xfrm>
-          <a:prstGeom prst="rect">
-            <a:avLst/>
-          </a:prstGeom>
-          <a:noFill/>
-        </p:spPr>
-        <p:txBody>
-          <a:bodyPr wrap="square" lIns="0" tIns="0" rIns="0" bIns="0" rtlCol="0" anchor="ctr">
-            <a:normAutofit/>
-          </a:bodyPr>
-          <a:lstStyle/>
-          <a:p>
-            <a:pPr marL="0" indent="0">
-              <a:buNone/>
-            </a:pPr>
-            <a:r>
-              <a:rPr lang="en-US" sz="950" dirty="0">
-                <a:solidFill>
-                  <a:srgbClr val="AAB6D3"/>
-                </a:solidFill>
-                <a:latin typeface="Noto Sans CJK SC" pitchFamily="34" charset="0"/>
-                <a:ea typeface="Noto Sans CJK SC" pitchFamily="34" charset="-122"/>
-                <a:cs typeface="Noto Sans CJK SC" pitchFamily="34" charset="-120"/>
-              </a:rPr>
-              <a:t>上传截图中的管理页展示了总 Agent、子 Agent 列表、切分页码与路由提示词</a:t>
-            </a:r>
-            <a:endParaRPr lang="en-US" sz="950" dirty="0"/>
-          </a:p>
-        </p:txBody>
-      </p:sp>
-      <p:sp>
-        <p:nvSpPr>
           <p:cNvPr id="5" name="Text 3"/>
           <p:cNvSpPr/>
           <p:nvPr/>
@@ -13593,7 +13402,7 @@
         </p:blipFill>
         <p:spPr>
           <a:xfrm>
-            <a:off x="184785" y="1387475"/>
+            <a:off x="93345" y="1471930"/>
             <a:ext cx="8349615" cy="4026535"/>
           </a:xfrm>
           <a:prstGeom prst="rect">
@@ -13627,7 +13436,7 @@
               <a:buNone/>
             </a:pPr>
             <a:r>
-              <a:rPr lang="en-US" sz="1400" b="1" dirty="0">
+              <a:rPr lang="en-US" b="1" dirty="0">
                 <a:solidFill>
                   <a:srgbClr val="6EE7F9"/>
                 </a:solidFill>
@@ -13637,7 +13446,14 @@
               </a:rPr>
               <a:t>界面职责</a:t>
             </a:r>
-            <a:endParaRPr lang="en-US" sz="1400" dirty="0"/>
+            <a:endParaRPr lang="en-US" b="1" dirty="0">
+              <a:solidFill>
+                <a:srgbClr val="6EE7F9"/>
+              </a:solidFill>
+              <a:latin typeface="Noto Sans CJK SC" pitchFamily="34" charset="0"/>
+              <a:ea typeface="Noto Sans CJK SC" pitchFamily="34" charset="-122"/>
+              <a:cs typeface="Noto Sans CJK SC" pitchFamily="34" charset="-120"/>
+            </a:endParaRPr>
           </a:p>
         </p:txBody>
       </p:sp>
@@ -13650,7 +13466,7 @@
         <p:spPr>
           <a:xfrm>
             <a:off x="8651875" y="1691640"/>
-            <a:ext cx="3063240" cy="2240280"/>
+            <a:ext cx="3063240" cy="3095625"/>
           </a:xfrm>
           <a:prstGeom prst="rect">
             <a:avLst/>
@@ -13659,7 +13475,7 @@
         </p:spPr>
         <p:txBody>
           <a:bodyPr wrap="square" lIns="635" tIns="635" rIns="635" bIns="635" rtlCol="0" anchor="t">
-            <a:normAutofit/>
+            <a:normAutofit lnSpcReduction="10000"/>
           </a:bodyPr>
           <a:lstStyle/>
           <a:p>
@@ -13667,24 +13483,46 @@
               <a:buNone/>
             </a:pPr>
             <a:r>
-              <a:rPr lang="en-US" sz="1250" dirty="0">
-                <a:solidFill>
-                  <a:srgbClr val="F5F8FF"/>
-                </a:solidFill>
-                <a:latin typeface="Noto Sans CJK SC" pitchFamily="34" charset="0"/>
-                <a:ea typeface="Noto Sans CJK SC" pitchFamily="34" charset="-122"/>
-                <a:cs typeface="Noto Sans CJK SC" pitchFamily="34" charset="-120"/>
-              </a:rPr>
-              <a:t>• 左侧：总 Agent 与子 Agent 列表，状态显示 initialized。</a:t>
-            </a:r>
-            <a:endParaRPr lang="en-US" sz="1250" dirty="0"/>
+              <a:rPr lang="en-US" sz="1600" dirty="0">
+                <a:solidFill>
+                  <a:srgbClr val="F5F8FF"/>
+                </a:solidFill>
+                <a:latin typeface="Noto Sans CJK SC" pitchFamily="34" charset="0"/>
+                <a:ea typeface="Noto Sans CJK SC" pitchFamily="34" charset="-122"/>
+                <a:cs typeface="Noto Sans CJK SC" pitchFamily="34" charset="-120"/>
+              </a:rPr>
+              <a:t>• 左侧：总 Agent 与子 Agent 列表，状态 initialized </a:t>
+            </a:r>
+            <a:r>
+              <a:rPr lang="zh-CN" altLang="en-US" sz="1600" dirty="0">
+                <a:solidFill>
+                  <a:srgbClr val="F5F8FF"/>
+                </a:solidFill>
+                <a:latin typeface="Noto Sans CJK SC" pitchFamily="34" charset="0"/>
+                <a:ea typeface="Noto Sans CJK SC" pitchFamily="34" charset="-122"/>
+                <a:cs typeface="Noto Sans CJK SC" pitchFamily="34" charset="-120"/>
+              </a:rPr>
+              <a:t>表示已初始化</a:t>
+            </a:r>
+            <a:r>
+              <a:rPr lang="en-US" sz="1600" dirty="0">
+                <a:solidFill>
+                  <a:srgbClr val="F5F8FF"/>
+                </a:solidFill>
+                <a:latin typeface="Noto Sans CJK SC" pitchFamily="34" charset="0"/>
+                <a:ea typeface="Noto Sans CJK SC" pitchFamily="34" charset="-122"/>
+                <a:cs typeface="Noto Sans CJK SC" pitchFamily="34" charset="-120"/>
+              </a:rPr>
+              <a:t>。</a:t>
+            </a:r>
+            <a:endParaRPr lang="en-US" sz="1600" dirty="0"/>
           </a:p>
           <a:p>
             <a:pPr marL="0" indent="0">
               <a:buNone/>
             </a:pPr>
             <a:r>
-              <a:rPr lang="en-US" sz="1250" dirty="0">
+              <a:rPr lang="en-US" sz="1600" dirty="0">
                 <a:solidFill>
                   <a:srgbClr val="F5F8FF"/>
                 </a:solidFill>
@@ -13694,14 +13532,14 @@
               </a:rPr>
               <a:t>• 中间：对源 PDF 设置页码区间，并执行切分、上传与初始化。</a:t>
             </a:r>
-            <a:endParaRPr lang="en-US" sz="1250" dirty="0"/>
+            <a:endParaRPr lang="en-US" sz="1600" dirty="0"/>
           </a:p>
           <a:p>
             <a:pPr marL="0" indent="0">
               <a:buNone/>
             </a:pPr>
             <a:r>
-              <a:rPr lang="en-US" sz="1250" dirty="0">
+              <a:rPr lang="en-US" sz="1600" dirty="0">
                 <a:solidFill>
                   <a:srgbClr val="F5F8FF"/>
                 </a:solidFill>
@@ -13711,14 +13549,14 @@
               </a:rPr>
               <a:t>• 右侧：总 Agent 路由提示词，控制 route_questions 匹配逻辑。</a:t>
             </a:r>
-            <a:endParaRPr lang="en-US" sz="1250" dirty="0"/>
+            <a:endParaRPr lang="en-US" sz="1600" dirty="0"/>
           </a:p>
           <a:p>
             <a:pPr marL="0" indent="0">
               <a:buNone/>
             </a:pPr>
             <a:r>
-              <a:rPr lang="en-US" sz="1250" dirty="0">
+              <a:rPr lang="en-US" sz="1600" dirty="0">
                 <a:solidFill>
                   <a:srgbClr val="F5F8FF"/>
                 </a:solidFill>
@@ -13728,160 +13566,14 @@
               </a:rPr>
               <a:t>• 适合在项目调试阶段快速构建多个主题子模型。</a:t>
             </a:r>
-            <a:endParaRPr lang="en-US" sz="1250" dirty="0"/>
-          </a:p>
-        </p:txBody>
-      </p:sp>
-      <p:sp>
-        <p:nvSpPr>
-          <p:cNvPr id="9" name="Text 6"/>
-          <p:cNvSpPr/>
-          <p:nvPr/>
-        </p:nvSpPr>
-        <p:spPr>
-          <a:xfrm>
-            <a:off x="8697595" y="4370832"/>
-            <a:ext cx="914400" cy="310896"/>
-          </a:xfrm>
-          <a:prstGeom prst="rect">
-            <a:avLst/>
-          </a:prstGeom>
-          <a:solidFill>
-            <a:srgbClr val="A78BFA">
-              <a:alpha val="85000"/>
-            </a:srgbClr>
-          </a:solidFill>
-          <a:ln>
-            <a:solidFill>
-              <a:srgbClr val="A78BFA">
-                <a:alpha val="70000"/>
-              </a:srgbClr>
-            </a:solidFill>
-          </a:ln>
-        </p:spPr>
-        <p:txBody>
-          <a:bodyPr wrap="square" lIns="381" tIns="381" rIns="381" bIns="381" rtlCol="0" anchor="ctr">
-            <a:normAutofit/>
-          </a:bodyPr>
-          <a:lstStyle/>
-          <a:p>
-            <a:pPr marL="0" indent="0" algn="ctr">
-              <a:buNone/>
-            </a:pPr>
-            <a:r>
-              <a:rPr lang="en-US" sz="850" b="1" dirty="0">
-                <a:solidFill>
-                  <a:srgbClr val="F5F8FF"/>
-                </a:solidFill>
-                <a:latin typeface="Noto Sans CJK SC" pitchFamily="34" charset="0"/>
-                <a:ea typeface="Noto Sans CJK SC" pitchFamily="34" charset="-122"/>
-                <a:cs typeface="Noto Sans CJK SC" pitchFamily="34" charset="-120"/>
-              </a:rPr>
-              <a:t>总 Agent</a:t>
-            </a:r>
-            <a:endParaRPr lang="en-US" sz="850" dirty="0"/>
-          </a:p>
-        </p:txBody>
-      </p:sp>
-      <p:sp>
-        <p:nvSpPr>
-          <p:cNvPr id="10" name="Text 7"/>
-          <p:cNvSpPr/>
-          <p:nvPr/>
-        </p:nvSpPr>
-        <p:spPr>
-          <a:xfrm>
-            <a:off x="9767443" y="4370832"/>
-            <a:ext cx="914400" cy="310896"/>
-          </a:xfrm>
-          <a:prstGeom prst="rect">
-            <a:avLst/>
-          </a:prstGeom>
-          <a:solidFill>
-            <a:srgbClr val="6EE7F9">
-              <a:alpha val="85000"/>
-            </a:srgbClr>
-          </a:solidFill>
-          <a:ln>
-            <a:solidFill>
-              <a:srgbClr val="6EE7F9">
-                <a:alpha val="70000"/>
-              </a:srgbClr>
-            </a:solidFill>
-          </a:ln>
-        </p:spPr>
-        <p:txBody>
-          <a:bodyPr wrap="square" lIns="381" tIns="381" rIns="381" bIns="381" rtlCol="0" anchor="ctr">
-            <a:normAutofit/>
-          </a:bodyPr>
-          <a:lstStyle/>
-          <a:p>
-            <a:pPr marL="0" indent="0" algn="ctr">
-              <a:buNone/>
-            </a:pPr>
-            <a:r>
-              <a:rPr lang="en-US" sz="850" b="1" dirty="0">
-                <a:solidFill>
-                  <a:srgbClr val="F5F8FF"/>
-                </a:solidFill>
-                <a:latin typeface="Noto Sans CJK SC" pitchFamily="34" charset="0"/>
-                <a:ea typeface="Noto Sans CJK SC" pitchFamily="34" charset="-122"/>
-                <a:cs typeface="Noto Sans CJK SC" pitchFamily="34" charset="-120"/>
-              </a:rPr>
-              <a:t>子 Agent</a:t>
-            </a:r>
-            <a:endParaRPr lang="en-US" sz="850" dirty="0"/>
-          </a:p>
-        </p:txBody>
-      </p:sp>
-      <p:sp>
-        <p:nvSpPr>
-          <p:cNvPr id="11" name="Text 8"/>
-          <p:cNvSpPr/>
-          <p:nvPr/>
-        </p:nvSpPr>
-        <p:spPr>
-          <a:xfrm>
-            <a:off x="10846435" y="4370832"/>
-            <a:ext cx="1005840" cy="310896"/>
-          </a:xfrm>
-          <a:prstGeom prst="rect">
-            <a:avLst/>
-          </a:prstGeom>
-          <a:solidFill>
-            <a:srgbClr val="3DDC97">
-              <a:alpha val="85000"/>
-            </a:srgbClr>
-          </a:solidFill>
-          <a:ln>
-            <a:solidFill>
-              <a:srgbClr val="3DDC97">
-                <a:alpha val="70000"/>
-              </a:srgbClr>
-            </a:solidFill>
-          </a:ln>
-        </p:spPr>
-        <p:txBody>
-          <a:bodyPr wrap="square" lIns="381" tIns="381" rIns="381" bIns="381" rtlCol="0" anchor="ctr">
-            <a:normAutofit/>
-          </a:bodyPr>
-          <a:lstStyle/>
-          <a:p>
-            <a:pPr marL="0" indent="0" algn="ctr">
-              <a:buNone/>
-            </a:pPr>
-            <a:r>
-              <a:rPr lang="en-US" sz="850" b="1" dirty="0">
-                <a:solidFill>
-                  <a:srgbClr val="F5F8FF"/>
-                </a:solidFill>
-                <a:latin typeface="Noto Sans CJK SC" pitchFamily="34" charset="0"/>
-                <a:ea typeface="Noto Sans CJK SC" pitchFamily="34" charset="-122"/>
-                <a:cs typeface="Noto Sans CJK SC" pitchFamily="34" charset="-120"/>
-              </a:rPr>
-              <a:t>页码切分</a:t>
-            </a:r>
-            <a:endParaRPr lang="en-US" sz="850" dirty="0"/>
+            <a:endParaRPr lang="en-US" sz="1600" dirty="0">
+              <a:solidFill>
+                <a:srgbClr val="F5F8FF"/>
+              </a:solidFill>
+              <a:latin typeface="Noto Sans CJK SC" pitchFamily="34" charset="0"/>
+              <a:ea typeface="Noto Sans CJK SC" pitchFamily="34" charset="-122"/>
+              <a:cs typeface="Noto Sans CJK SC" pitchFamily="34" charset="-120"/>
+            </a:endParaRPr>
           </a:p>
         </p:txBody>
       </p:sp>
@@ -13893,7 +13585,7 @@
         </p:nvSpPr>
         <p:spPr>
           <a:xfrm>
-            <a:off x="530225" y="5815838"/>
+            <a:off x="502920" y="5702808"/>
             <a:ext cx="7223760" cy="256032"/>
           </a:xfrm>
           <a:prstGeom prst="rect">
@@ -14030,13 +13722,24 @@
           </a:ln>
         </p:spPr>
         <p:txBody>
-          <a:bodyPr/>
-          <a:p>
-            <a:r>
-              <a:rPr lang="en-US" altLang="zh-CN"/>
+          <a:bodyPr>
+            <a:noAutofit/>
+          </a:bodyPr>
+          <a:p>
+            <a:pPr lvl="0" algn="l">
+              <a:buClrTx/>
+              <a:buSzTx/>
+              <a:buFontTx/>
+            </a:pPr>
+            <a:r>
+              <a:rPr lang="en-US" altLang="zh-CN">
+                <a:sym typeface="+mn-ea"/>
+              </a:rPr>
               <a:t>F</a:t>
             </a:r>
-            <a:endParaRPr lang="en-US" altLang="zh-CN"/>
+            <a:endParaRPr lang="en-US" altLang="zh-CN">
+              <a:sym typeface="+mn-ea"/>
+            </a:endParaRPr>
           </a:p>
         </p:txBody>
       </p:sp>
@@ -14151,7 +13854,7 @@
         <p:spPr>
           <a:xfrm>
             <a:off x="530225" y="850265"/>
-            <a:ext cx="11174730" cy="402590"/>
+            <a:ext cx="5324475" cy="1887855"/>
           </a:xfrm>
           <a:prstGeom prst="rect">
             <a:avLst/>
@@ -14164,19 +13867,250 @@
           </a:bodyPr>
           <a:lstStyle/>
           <a:p>
+            <a:pPr marL="0" indent="0" algn="just">
+              <a:buNone/>
+            </a:pPr>
+            <a:r>
+              <a:rPr lang="zh-CN" altLang="en-US" sz="1400" dirty="0">
+                <a:solidFill>
+                  <a:schemeClr val="bg1">
+                    <a:lumMod val="95000"/>
+                  </a:schemeClr>
+                </a:solidFill>
+                <a:latin typeface="Noto Sans CJK SC" pitchFamily="34" charset="0"/>
+                <a:ea typeface="Noto Sans CJK SC" pitchFamily="34" charset="-122"/>
+                <a:cs typeface="Noto Sans CJK SC" pitchFamily="34" charset="-120"/>
+              </a:rPr>
+              <a:t>总</a:t>
+            </a:r>
+            <a:r>
+              <a:rPr lang="en-US" altLang="zh-CN" sz="1400" dirty="0">
+                <a:solidFill>
+                  <a:schemeClr val="bg1">
+                    <a:lumMod val="95000"/>
+                  </a:schemeClr>
+                </a:solidFill>
+                <a:latin typeface="Noto Sans CJK SC" pitchFamily="34" charset="0"/>
+                <a:ea typeface="Noto Sans CJK SC" pitchFamily="34" charset="-122"/>
+                <a:cs typeface="Noto Sans CJK SC" pitchFamily="34" charset="-120"/>
+              </a:rPr>
+              <a:t>Agent</a:t>
+            </a:r>
+            <a:r>
+              <a:rPr lang="zh-CN" altLang="en-US" sz="1400" dirty="0">
+                <a:solidFill>
+                  <a:schemeClr val="bg1">
+                    <a:lumMod val="95000"/>
+                  </a:schemeClr>
+                </a:solidFill>
+                <a:latin typeface="Noto Sans CJK SC" pitchFamily="34" charset="0"/>
+                <a:ea typeface="Noto Sans CJK SC" pitchFamily="34" charset="-122"/>
+                <a:cs typeface="Noto Sans CJK SC" pitchFamily="34" charset="-120"/>
+              </a:rPr>
+              <a:t>只负责根据用户问题匹配最接近的子</a:t>
+            </a:r>
+            <a:r>
+              <a:rPr lang="en-US" altLang="zh-CN" sz="1400" dirty="0">
+                <a:solidFill>
+                  <a:schemeClr val="bg1">
+                    <a:lumMod val="95000"/>
+                  </a:schemeClr>
+                </a:solidFill>
+                <a:latin typeface="Noto Sans CJK SC" pitchFamily="34" charset="0"/>
+                <a:ea typeface="Noto Sans CJK SC" pitchFamily="34" charset="-122"/>
+                <a:cs typeface="Noto Sans CJK SC" pitchFamily="34" charset="-120"/>
+              </a:rPr>
+              <a:t>Agent</a:t>
+            </a:r>
+            <a:r>
+              <a:rPr lang="zh-CN" altLang="en-US" sz="1400" dirty="0">
+                <a:solidFill>
+                  <a:schemeClr val="bg1">
+                    <a:lumMod val="95000"/>
+                  </a:schemeClr>
+                </a:solidFill>
+                <a:latin typeface="Noto Sans CJK SC" pitchFamily="34" charset="0"/>
+                <a:ea typeface="Noto Sans CJK SC" pitchFamily="34" charset="-122"/>
+                <a:cs typeface="Noto Sans CJK SC" pitchFamily="34" charset="-120"/>
+              </a:rPr>
+              <a:t>问题集合</a:t>
+            </a:r>
+            <a:endParaRPr lang="zh-CN" altLang="en-US" sz="1400" dirty="0">
+              <a:solidFill>
+                <a:schemeClr val="bg1">
+                  <a:lumMod val="95000"/>
+                </a:schemeClr>
+              </a:solidFill>
+              <a:latin typeface="Noto Sans CJK SC" pitchFamily="34" charset="0"/>
+              <a:ea typeface="Noto Sans CJK SC" pitchFamily="34" charset="-122"/>
+              <a:cs typeface="Noto Sans CJK SC" pitchFamily="34" charset="-120"/>
+            </a:endParaRPr>
+          </a:p>
+          <a:p>
             <a:pPr marL="0" indent="0">
               <a:buNone/>
             </a:pPr>
             <a:r>
               <a:rPr lang="zh-CN" altLang="en-US" sz="1400" dirty="0">
                 <a:solidFill>
+                  <a:schemeClr val="bg1">
+                    <a:lumMod val="95000"/>
+                  </a:schemeClr>
+                </a:solidFill>
+                <a:latin typeface="Noto Sans CJK SC" pitchFamily="34" charset="0"/>
+                <a:ea typeface="Noto Sans CJK SC" pitchFamily="34" charset="-122"/>
+                <a:cs typeface="Noto Sans CJK SC" pitchFamily="34" charset="-120"/>
+              </a:rPr>
+              <a:t>不直接读取全部文档内容。路由问题每行对应一个可匹配的用户问题方向</a:t>
+            </a:r>
+            <a:endParaRPr lang="zh-CN" altLang="en-US" sz="1400" dirty="0">
+              <a:solidFill>
+                <a:schemeClr val="bg1">
+                  <a:lumMod val="95000"/>
+                </a:schemeClr>
+              </a:solidFill>
+              <a:latin typeface="Noto Sans CJK SC" pitchFamily="34" charset="0"/>
+              <a:ea typeface="Noto Sans CJK SC" pitchFamily="34" charset="-122"/>
+              <a:cs typeface="Noto Sans CJK SC" pitchFamily="34" charset="-120"/>
+            </a:endParaRPr>
+          </a:p>
+        </p:txBody>
+      </p:sp>
+      <p:sp>
+        <p:nvSpPr>
+          <p:cNvPr id="5" name="Text 3"/>
+          <p:cNvSpPr/>
+          <p:nvPr/>
+        </p:nvSpPr>
+        <p:spPr>
+          <a:xfrm>
+            <a:off x="9189720" y="384048"/>
+            <a:ext cx="2514600" cy="228600"/>
+          </a:xfrm>
+          <a:prstGeom prst="rect">
+            <a:avLst/>
+          </a:prstGeom>
+          <a:noFill/>
+        </p:spPr>
+        <p:txBody>
+          <a:bodyPr wrap="square" lIns="0" tIns="0" rIns="0" bIns="0" rtlCol="0" anchor="ctr"/>
+          <a:lstStyle/>
+          <a:p>
+            <a:pPr marL="0" indent="0" algn="r">
+              <a:buNone/>
+            </a:pPr>
+            <a:r>
+              <a:rPr lang="en-US" sz="750" dirty="0">
+                <a:solidFill>
+                  <a:srgbClr val="7DD3FC"/>
+                </a:solidFill>
+                <a:latin typeface="Noto Sans CJK SC" pitchFamily="34" charset="0"/>
+                <a:ea typeface="Noto Sans CJK SC" pitchFamily="34" charset="-122"/>
+                <a:cs typeface="Noto Sans CJK SC" pitchFamily="34" charset="-120"/>
+              </a:rPr>
+              <a:t>multi-model-file-Q-A-routing-system</a:t>
+            </a:r>
+            <a:endParaRPr lang="en-US" sz="750" dirty="0"/>
+          </a:p>
+        </p:txBody>
+      </p:sp>
+      <p:sp>
+        <p:nvSpPr>
+          <p:cNvPr id="13" name="Text 10"/>
+          <p:cNvSpPr/>
+          <p:nvPr/>
+        </p:nvSpPr>
+        <p:spPr>
+          <a:xfrm>
+            <a:off x="11292840" y="6492240"/>
+            <a:ext cx="411480" cy="182880"/>
+          </a:xfrm>
+          <a:prstGeom prst="rect">
+            <a:avLst/>
+          </a:prstGeom>
+          <a:noFill/>
+        </p:spPr>
+        <p:txBody>
+          <a:bodyPr wrap="square" lIns="0" tIns="0" rIns="0" bIns="0" rtlCol="0" anchor="ctr"/>
+          <a:lstStyle/>
+          <a:p>
+            <a:pPr marL="0" indent="0" algn="r">
+              <a:buNone/>
+            </a:pPr>
+            <a:r>
+              <a:rPr lang="en-US" sz="800" dirty="0">
+                <a:solidFill>
+                  <a:srgbClr val="5D6B91"/>
+                </a:solidFill>
+                <a:latin typeface="Noto Sans CJK SC" pitchFamily="34" charset="0"/>
+                <a:ea typeface="Noto Sans CJK SC" pitchFamily="34" charset="-122"/>
+                <a:cs typeface="Noto Sans CJK SC" pitchFamily="34" charset="-120"/>
+              </a:rPr>
+              <a:t>08</a:t>
+            </a:r>
+            <a:endParaRPr lang="en-US" sz="800" dirty="0"/>
+          </a:p>
+        </p:txBody>
+      </p:sp>
+      <p:pic>
+        <p:nvPicPr>
+          <p:cNvPr id="14" name="图片 13"/>
+          <p:cNvPicPr>
+            <a:picLocks noChangeAspect="1"/>
+          </p:cNvPicPr>
+          <p:nvPr/>
+        </p:nvPicPr>
+        <p:blipFill>
+          <a:blip r:embed="rId1"/>
+          <a:stretch>
+            <a:fillRect/>
+          </a:stretch>
+        </p:blipFill>
+        <p:spPr>
+          <a:xfrm>
+            <a:off x="6366510" y="822960"/>
+            <a:ext cx="4784725" cy="5484495"/>
+          </a:xfrm>
+          <a:prstGeom prst="rect">
+            <a:avLst/>
+          </a:prstGeom>
+        </p:spPr>
+      </p:pic>
+      <p:sp>
+        <p:nvSpPr>
+          <p:cNvPr id="15" name="Text 2"/>
+          <p:cNvSpPr/>
+          <p:nvPr/>
+        </p:nvSpPr>
+        <p:spPr>
+          <a:xfrm>
+            <a:off x="7198360" y="6382385"/>
+            <a:ext cx="2804795" cy="402590"/>
+          </a:xfrm>
+          <a:prstGeom prst="rect">
+            <a:avLst/>
+          </a:prstGeom>
+          <a:noFill/>
+        </p:spPr>
+        <p:txBody>
+          <a:bodyPr wrap="square" lIns="0" tIns="0" rIns="0" bIns="0" rtlCol="0" anchor="ctr">
+            <a:noAutofit/>
+          </a:bodyPr>
+          <a:lstStyle/>
+          <a:p>
+            <a:pPr marL="0" indent="0">
+              <a:buNone/>
+            </a:pPr>
+            <a:r>
+              <a:rPr lang="zh-CN" altLang="en-US" sz="1400" dirty="0">
+                <a:solidFill>
                   <a:srgbClr val="AAB6D3"/>
                 </a:solidFill>
                 <a:latin typeface="Noto Sans CJK SC" pitchFamily="34" charset="0"/>
                 <a:ea typeface="Noto Sans CJK SC" pitchFamily="34" charset="-122"/>
                 <a:cs typeface="Noto Sans CJK SC" pitchFamily="34" charset="-120"/>
               </a:rPr>
-              <a:t>总</a:t>
+              <a:t>总 </a:t>
             </a:r>
             <a:r>
               <a:rPr lang="en-US" altLang="zh-CN" sz="1400" dirty="0">
@@ -14187,7 +14121,7 @@
                 <a:ea typeface="Noto Sans CJK SC" pitchFamily="34" charset="-122"/>
                 <a:cs typeface="Noto Sans CJK SC" pitchFamily="34" charset="-120"/>
               </a:rPr>
-              <a:t>Agent</a:t>
+              <a:t>Agent </a:t>
             </a:r>
             <a:r>
               <a:rPr lang="zh-CN" altLang="en-US" sz="1400" dirty="0">
@@ -14198,29 +14132,19 @@
                 <a:ea typeface="Noto Sans CJK SC" pitchFamily="34" charset="-122"/>
                 <a:cs typeface="Noto Sans CJK SC" pitchFamily="34" charset="-120"/>
               </a:rPr>
-              <a:t>只负责根据用户问题匹配最接近的子</a:t>
-            </a:r>
-            <a:r>
-              <a:rPr lang="en-US" altLang="zh-CN" sz="1400" dirty="0">
+              <a:t>路由</a:t>
+            </a:r>
+            <a:r>
+              <a:rPr lang="zh-CN" altLang="en-US" sz="1400" dirty="0">
                 <a:solidFill>
                   <a:srgbClr val="AAB6D3"/>
                 </a:solidFill>
                 <a:latin typeface="Noto Sans CJK SC" pitchFamily="34" charset="0"/>
                 <a:ea typeface="Noto Sans CJK SC" pitchFamily="34" charset="-122"/>
                 <a:cs typeface="Noto Sans CJK SC" pitchFamily="34" charset="-120"/>
-              </a:rPr>
-              <a:t>Agent</a:t>
-            </a:r>
-            <a:r>
-              <a:rPr lang="zh-CN" altLang="en-US" sz="1400" dirty="0">
-                <a:solidFill>
-                  <a:srgbClr val="AAB6D3"/>
-                </a:solidFill>
-                <a:latin typeface="Noto Sans CJK SC" pitchFamily="34" charset="0"/>
-                <a:ea typeface="Noto Sans CJK SC" pitchFamily="34" charset="-122"/>
-                <a:cs typeface="Noto Sans CJK SC" pitchFamily="34" charset="-120"/>
-              </a:rPr>
-              <a:t>问题集合，不直接读取全部文档内容。路由问题每行对应一个可匹配的用户问题方向</a:t>
+                <a:sym typeface="+mn-ea"/>
+              </a:rPr>
+              <a:t>route_questions</a:t>
             </a:r>
             <a:endParaRPr lang="zh-CN" altLang="en-US" sz="1400" dirty="0">
               <a:solidFill>
@@ -14233,181 +14157,96 @@
           </a:p>
         </p:txBody>
       </p:sp>
-      <p:sp>
-        <p:nvSpPr>
-          <p:cNvPr id="5" name="Text 3"/>
-          <p:cNvSpPr/>
-          <p:nvPr/>
-        </p:nvSpPr>
-        <p:spPr>
-          <a:xfrm>
-            <a:off x="9189720" y="384048"/>
-            <a:ext cx="2514600" cy="228600"/>
-          </a:xfrm>
-          <a:prstGeom prst="rect">
-            <a:avLst/>
-          </a:prstGeom>
-          <a:noFill/>
-        </p:spPr>
-        <p:txBody>
-          <a:bodyPr wrap="square" lIns="0" tIns="0" rIns="0" bIns="0" rtlCol="0" anchor="ctr"/>
-          <a:lstStyle/>
-          <a:p>
-            <a:pPr marL="0" indent="0" algn="r">
-              <a:buNone/>
-            </a:pPr>
-            <a:r>
-              <a:rPr lang="en-US" sz="750" dirty="0">
-                <a:solidFill>
-                  <a:srgbClr val="7DD3FC"/>
-                </a:solidFill>
-                <a:latin typeface="Noto Sans CJK SC" pitchFamily="34" charset="0"/>
-                <a:ea typeface="Noto Sans CJK SC" pitchFamily="34" charset="-122"/>
-                <a:cs typeface="Noto Sans CJK SC" pitchFamily="34" charset="-120"/>
-              </a:rPr>
-              <a:t>multi-model-file-Q-A-routing-system</a:t>
-            </a:r>
-            <a:endParaRPr lang="en-US" sz="750" dirty="0"/>
-          </a:p>
-        </p:txBody>
-      </p:sp>
-      <p:sp>
-        <p:nvSpPr>
-          <p:cNvPr id="13" name="Text 10"/>
-          <p:cNvSpPr/>
-          <p:nvPr/>
-        </p:nvSpPr>
-        <p:spPr>
-          <a:xfrm>
-            <a:off x="11292840" y="6492240"/>
-            <a:ext cx="411480" cy="182880"/>
-          </a:xfrm>
-          <a:prstGeom prst="rect">
-            <a:avLst/>
-          </a:prstGeom>
-          <a:noFill/>
-        </p:spPr>
-        <p:txBody>
-          <a:bodyPr wrap="square" lIns="0" tIns="0" rIns="0" bIns="0" rtlCol="0" anchor="ctr"/>
-          <a:lstStyle/>
-          <a:p>
-            <a:pPr marL="0" indent="0" algn="r">
-              <a:buNone/>
-            </a:pPr>
-            <a:r>
-              <a:rPr lang="en-US" sz="800" dirty="0">
-                <a:solidFill>
-                  <a:srgbClr val="5D6B91"/>
-                </a:solidFill>
-                <a:latin typeface="Noto Sans CJK SC" pitchFamily="34" charset="0"/>
-                <a:ea typeface="Noto Sans CJK SC" pitchFamily="34" charset="-122"/>
-                <a:cs typeface="Noto Sans CJK SC" pitchFamily="34" charset="-120"/>
-              </a:rPr>
-              <a:t>08</a:t>
-            </a:r>
-            <a:endParaRPr lang="en-US" sz="800" dirty="0"/>
-          </a:p>
-        </p:txBody>
-      </p:sp>
-      <p:pic>
-        <p:nvPicPr>
-          <p:cNvPr id="14" name="图片 13"/>
-          <p:cNvPicPr>
-            <a:picLocks noChangeAspect="1"/>
-          </p:cNvPicPr>
-          <p:nvPr/>
-        </p:nvPicPr>
-        <p:blipFill>
-          <a:blip r:embed="rId1"/>
-          <a:stretch>
-            <a:fillRect/>
-          </a:stretch>
-        </p:blipFill>
-        <p:spPr>
-          <a:xfrm>
-            <a:off x="1718310" y="1252220"/>
-            <a:ext cx="4890770" cy="5605780"/>
-          </a:xfrm>
-          <a:prstGeom prst="rect">
-            <a:avLst/>
-          </a:prstGeom>
-        </p:spPr>
-      </p:pic>
-      <p:sp>
-        <p:nvSpPr>
-          <p:cNvPr id="15" name="Text 2"/>
-          <p:cNvSpPr/>
-          <p:nvPr/>
-        </p:nvSpPr>
-        <p:spPr>
-          <a:xfrm>
-            <a:off x="6892925" y="3853815"/>
-            <a:ext cx="2804795" cy="402590"/>
-          </a:xfrm>
-          <a:prstGeom prst="rect">
-            <a:avLst/>
-          </a:prstGeom>
-          <a:noFill/>
-        </p:spPr>
-        <p:txBody>
-          <a:bodyPr wrap="square" lIns="0" tIns="0" rIns="0" bIns="0" rtlCol="0" anchor="ctr">
-            <a:noAutofit/>
-          </a:bodyPr>
-          <a:lstStyle/>
-          <a:p>
-            <a:pPr marL="0" indent="0">
-              <a:buNone/>
-            </a:pPr>
-            <a:r>
-              <a:rPr lang="zh-CN" altLang="en-US" sz="1400" dirty="0">
-                <a:solidFill>
-                  <a:srgbClr val="AAB6D3"/>
-                </a:solidFill>
-                <a:latin typeface="Noto Sans CJK SC" pitchFamily="34" charset="0"/>
-                <a:ea typeface="Noto Sans CJK SC" pitchFamily="34" charset="-122"/>
-                <a:cs typeface="Noto Sans CJK SC" pitchFamily="34" charset="-120"/>
-              </a:rPr>
-              <a:t>总 </a:t>
-            </a:r>
-            <a:r>
-              <a:rPr lang="en-US" altLang="zh-CN" sz="1400" dirty="0">
-                <a:solidFill>
-                  <a:srgbClr val="AAB6D3"/>
-                </a:solidFill>
-                <a:latin typeface="Noto Sans CJK SC" pitchFamily="34" charset="0"/>
-                <a:ea typeface="Noto Sans CJK SC" pitchFamily="34" charset="-122"/>
-                <a:cs typeface="Noto Sans CJK SC" pitchFamily="34" charset="-120"/>
-              </a:rPr>
-              <a:t>Agent </a:t>
-            </a:r>
-            <a:r>
-              <a:rPr lang="zh-CN" altLang="en-US" sz="1400" dirty="0">
-                <a:solidFill>
-                  <a:srgbClr val="AAB6D3"/>
-                </a:solidFill>
-                <a:latin typeface="Noto Sans CJK SC" pitchFamily="34" charset="0"/>
-                <a:ea typeface="Noto Sans CJK SC" pitchFamily="34" charset="-122"/>
-                <a:cs typeface="Noto Sans CJK SC" pitchFamily="34" charset="-120"/>
-              </a:rPr>
-              <a:t>路由提示词</a:t>
-            </a:r>
-            <a:endParaRPr lang="zh-CN" altLang="en-US" sz="1400" dirty="0">
-              <a:solidFill>
-                <a:srgbClr val="AAB6D3"/>
-              </a:solidFill>
-              <a:latin typeface="Noto Sans CJK SC" pitchFamily="34" charset="0"/>
-              <a:ea typeface="Noto Sans CJK SC" pitchFamily="34" charset="-122"/>
-              <a:cs typeface="Noto Sans CJK SC" pitchFamily="34" charset="-120"/>
-            </a:endParaRPr>
-          </a:p>
-        </p:txBody>
-      </p:sp>
     </p:spTree>
   </p:cSld>
   <p:clrMapOvr>
     <a:masterClrMapping/>
   </p:clrMapOvr>
 </p:sld>
+</file>
+
+<file path=ppt/tags/tag1.xml><?xml version="1.0" encoding="utf-8"?>
+<p:tagLst xmlns:p="http://schemas.openxmlformats.org/presentationml/2006/main">
+  <p:tag name="KSO_WM_DIAGRAM_VIRTUALLY_FRAME" val="{&quot;height&quot;:127.45,&quot;left&quot;:41.04,&quot;top&quot;:118.8,&quot;width&quot;:916.1600000000001}"/>
+</p:tagLst>
+</file>
+
+<file path=ppt/tags/tag10.xml><?xml version="1.0" encoding="utf-8"?>
+<p:tagLst xmlns:p="http://schemas.openxmlformats.org/presentationml/2006/main">
+  <p:tag name="KSO_WM_DIAGRAM_VIRTUALLY_FRAME" val="{&quot;height&quot;:127.45,&quot;left&quot;:41.04,&quot;top&quot;:118.8,&quot;width&quot;:916.1600000000001}"/>
+</p:tagLst>
+</file>
+
+<file path=ppt/tags/tag11.xml><?xml version="1.0" encoding="utf-8"?>
+<p:tagLst xmlns:p="http://schemas.openxmlformats.org/presentationml/2006/main">
+  <p:tag name="KSO_WM_DIAGRAM_VIRTUALLY_FRAME" val="{&quot;height&quot;:127.45,&quot;left&quot;:41.04,&quot;top&quot;:118.8,&quot;width&quot;:916.1600000000001}"/>
+</p:tagLst>
+</file>
+
+<file path=ppt/tags/tag12.xml><?xml version="1.0" encoding="utf-8"?>
+<p:tagLst xmlns:p="http://schemas.openxmlformats.org/presentationml/2006/main">
+  <p:tag name="KSO_WM_DIAGRAM_VIRTUALLY_FRAME" val="{&quot;height&quot;:127.45,&quot;left&quot;:41.04,&quot;top&quot;:118.8,&quot;width&quot;:916.1600000000001}"/>
+</p:tagLst>
+</file>
+
+<file path=ppt/tags/tag13.xml><?xml version="1.0" encoding="utf-8"?>
+<p:tagLst xmlns:p="http://schemas.openxmlformats.org/presentationml/2006/main">
+  <p:tag name="KSO_WM_DIAGRAM_VIRTUALLY_FRAME" val="{&quot;height&quot;:127.45,&quot;left&quot;:41.04,&quot;top&quot;:118.8,&quot;width&quot;:916.1600000000001}"/>
+</p:tagLst>
+</file>
+
+<file path=ppt/tags/tag14.xml><?xml version="1.0" encoding="utf-8"?>
+<p:tagLst xmlns:p="http://schemas.openxmlformats.org/presentationml/2006/main">
+  <p:tag name="KSO_WM_DIAGRAM_VIRTUALLY_FRAME" val="{&quot;height&quot;:127.45,&quot;left&quot;:41.04,&quot;top&quot;:118.8,&quot;width&quot;:916.1600000000001}"/>
+</p:tagLst>
+</file>
+
+<file path=ppt/tags/tag2.xml><?xml version="1.0" encoding="utf-8"?>
+<p:tagLst xmlns:p="http://schemas.openxmlformats.org/presentationml/2006/main">
+  <p:tag name="KSO_WM_DIAGRAM_VIRTUALLY_FRAME" val="{&quot;height&quot;:127.45,&quot;left&quot;:41.04,&quot;top&quot;:118.8,&quot;width&quot;:916.1600000000001}"/>
+</p:tagLst>
+</file>
+
+<file path=ppt/tags/tag3.xml><?xml version="1.0" encoding="utf-8"?>
+<p:tagLst xmlns:p="http://schemas.openxmlformats.org/presentationml/2006/main">
+  <p:tag name="KSO_WM_DIAGRAM_VIRTUALLY_FRAME" val="{&quot;height&quot;:127.45,&quot;left&quot;:41.04,&quot;top&quot;:118.8,&quot;width&quot;:916.1600000000001}"/>
+</p:tagLst>
+</file>
+
+<file path=ppt/tags/tag4.xml><?xml version="1.0" encoding="utf-8"?>
+<p:tagLst xmlns:p="http://schemas.openxmlformats.org/presentationml/2006/main">
+  <p:tag name="KSO_WM_DIAGRAM_VIRTUALLY_FRAME" val="{&quot;height&quot;:127.45,&quot;left&quot;:41.04,&quot;top&quot;:118.8,&quot;width&quot;:916.1600000000001}"/>
+</p:tagLst>
+</file>
+
+<file path=ppt/tags/tag5.xml><?xml version="1.0" encoding="utf-8"?>
+<p:tagLst xmlns:p="http://schemas.openxmlformats.org/presentationml/2006/main">
+  <p:tag name="KSO_WM_DIAGRAM_VIRTUALLY_FRAME" val="{&quot;height&quot;:127.45,&quot;left&quot;:41.04,&quot;top&quot;:118.8,&quot;width&quot;:916.1600000000001}"/>
+</p:tagLst>
+</file>
+
+<file path=ppt/tags/tag6.xml><?xml version="1.0" encoding="utf-8"?>
+<p:tagLst xmlns:p="http://schemas.openxmlformats.org/presentationml/2006/main">
+  <p:tag name="KSO_WM_DIAGRAM_VIRTUALLY_FRAME" val="{&quot;height&quot;:127.45,&quot;left&quot;:41.04,&quot;top&quot;:118.8,&quot;width&quot;:916.1600000000001}"/>
+</p:tagLst>
+</file>
+
+<file path=ppt/tags/tag7.xml><?xml version="1.0" encoding="utf-8"?>
+<p:tagLst xmlns:p="http://schemas.openxmlformats.org/presentationml/2006/main">
+  <p:tag name="KSO_WM_DIAGRAM_VIRTUALLY_FRAME" val="{&quot;height&quot;:127.45,&quot;left&quot;:41.04,&quot;top&quot;:118.8,&quot;width&quot;:916.1600000000001}"/>
+</p:tagLst>
+</file>
+
+<file path=ppt/tags/tag8.xml><?xml version="1.0" encoding="utf-8"?>
+<p:tagLst xmlns:p="http://schemas.openxmlformats.org/presentationml/2006/main">
+  <p:tag name="KSO_WM_DIAGRAM_VIRTUALLY_FRAME" val="{&quot;height&quot;:127.45,&quot;left&quot;:41.04,&quot;top&quot;:118.8,&quot;width&quot;:916.1600000000001}"/>
+</p:tagLst>
+</file>
+
+<file path=ppt/tags/tag9.xml><?xml version="1.0" encoding="utf-8"?>
+<p:tagLst xmlns:p="http://schemas.openxmlformats.org/presentationml/2006/main">
+  <p:tag name="KSO_WM_DIAGRAM_VIRTUALLY_FRAME" val="{&quot;height&quot;:127.45,&quot;left&quot;:41.04,&quot;top&quot;:118.8,&quot;width&quot;:916.1600000000001}"/>
+</p:tagLst>
 </file>
 
 <file path=ppt/theme/theme1.xml><?xml version="1.0" encoding="utf-8"?>
